--- a/cover-proposals/v13_1007_case3_v2plus/台割案3_v2改_P02-11_編集用.pptx
+++ b/cover-proposals/v13_1007_case3_v2plus/台割案3_v2改_P02-11_編集用.pptx
@@ -12255,7 +12255,7 @@
         </p:nvSpPr>
         <p:spPr>
           <a:xfrm>
-            <a:off x="1168911" y="3054891"/>
+            <a:off x="1168911" y="3258179"/>
             <a:ext cx="483208" cy="114350"/>
           </a:xfrm>
           <a:prstGeom prst="rect">
@@ -12297,7 +12297,7 @@
         </p:nvSpPr>
         <p:spPr>
           <a:xfrm>
-            <a:off x="1168911" y="3191666"/>
+            <a:off x="1168911" y="3394955"/>
             <a:ext cx="373364" cy="145733"/>
           </a:xfrm>
           <a:prstGeom prst="rect">
@@ -12339,7 +12339,7 @@
         </p:nvSpPr>
         <p:spPr>
           <a:xfrm>
-            <a:off x="508222" y="3608090"/>
+            <a:off x="508222" y="3811379"/>
             <a:ext cx="1197081" cy="126039"/>
           </a:xfrm>
           <a:prstGeom prst="rect">
@@ -12381,7 +12381,7 @@
         </p:nvSpPr>
         <p:spPr>
           <a:xfrm>
-            <a:off x="3379676" y="3054891"/>
+            <a:off x="3379676" y="3258179"/>
             <a:ext cx="386249" cy="114350"/>
           </a:xfrm>
           <a:prstGeom prst="rect">
@@ -12423,7 +12423,7 @@
         </p:nvSpPr>
         <p:spPr>
           <a:xfrm>
-            <a:off x="3379676" y="3191666"/>
+            <a:off x="3379676" y="3394955"/>
             <a:ext cx="480806" cy="145733"/>
           </a:xfrm>
           <a:prstGeom prst="rect">
@@ -12465,7 +12465,7 @@
         </p:nvSpPr>
         <p:spPr>
           <a:xfrm>
-            <a:off x="2718988" y="3608090"/>
+            <a:off x="2718988" y="3811379"/>
             <a:ext cx="1690176" cy="126039"/>
           </a:xfrm>
           <a:prstGeom prst="rect">
@@ -12507,7 +12507,7 @@
         </p:nvSpPr>
         <p:spPr>
           <a:xfrm>
-            <a:off x="5590442" y="3054891"/>
+            <a:off x="5590442" y="3258179"/>
             <a:ext cx="448923" cy="114350"/>
           </a:xfrm>
           <a:prstGeom prst="rect">
@@ -12549,7 +12549,7 @@
         </p:nvSpPr>
         <p:spPr>
           <a:xfrm>
-            <a:off x="5590442" y="3191666"/>
+            <a:off x="5590442" y="3394955"/>
             <a:ext cx="480806" cy="145733"/>
           </a:xfrm>
           <a:prstGeom prst="rect">
@@ -12591,7 +12591,7 @@
         </p:nvSpPr>
         <p:spPr>
           <a:xfrm>
-            <a:off x="4929753" y="3608090"/>
+            <a:off x="4929753" y="3811379"/>
             <a:ext cx="973027" cy="126039"/>
           </a:xfrm>
           <a:prstGeom prst="rect">
@@ -12633,7 +12633,7 @@
         </p:nvSpPr>
         <p:spPr>
           <a:xfrm>
-            <a:off x="1168911" y="4223801"/>
+            <a:off x="1168911" y="4579557"/>
             <a:ext cx="1120431" cy="114350"/>
           </a:xfrm>
           <a:prstGeom prst="rect">
@@ -12675,7 +12675,7 @@
         </p:nvSpPr>
         <p:spPr>
           <a:xfrm>
-            <a:off x="1168911" y="4360576"/>
+            <a:off x="1168911" y="4716332"/>
             <a:ext cx="1447122" cy="145733"/>
           </a:xfrm>
           <a:prstGeom prst="rect">
@@ -12717,7 +12717,7 @@
         </p:nvSpPr>
         <p:spPr>
           <a:xfrm>
-            <a:off x="508222" y="4777001"/>
+            <a:off x="508222" y="5132756"/>
             <a:ext cx="1385103" cy="126039"/>
           </a:xfrm>
           <a:prstGeom prst="rect">
@@ -12759,7 +12759,7 @@
         </p:nvSpPr>
         <p:spPr>
           <a:xfrm>
-            <a:off x="3379676" y="4223801"/>
+            <a:off x="3379676" y="4579557"/>
             <a:ext cx="530377" cy="114350"/>
           </a:xfrm>
           <a:prstGeom prst="rect">
@@ -12801,7 +12801,7 @@
         </p:nvSpPr>
         <p:spPr>
           <a:xfrm>
-            <a:off x="3379676" y="4360576"/>
+            <a:off x="3379676" y="4716332"/>
             <a:ext cx="480806" cy="145733"/>
           </a:xfrm>
           <a:prstGeom prst="rect">
@@ -12843,7 +12843,7 @@
         </p:nvSpPr>
         <p:spPr>
           <a:xfrm>
-            <a:off x="2718988" y="4777001"/>
+            <a:off x="2718988" y="5132756"/>
             <a:ext cx="860563" cy="126039"/>
           </a:xfrm>
           <a:prstGeom prst="rect">
@@ -12885,7 +12885,7 @@
         </p:nvSpPr>
         <p:spPr>
           <a:xfrm>
-            <a:off x="5590442" y="4223801"/>
+            <a:off x="5590442" y="4579557"/>
             <a:ext cx="541514" cy="114350"/>
           </a:xfrm>
           <a:prstGeom prst="rect">
@@ -12927,7 +12927,7 @@
         </p:nvSpPr>
         <p:spPr>
           <a:xfrm>
-            <a:off x="5590442" y="4360576"/>
+            <a:off x="5590442" y="4716332"/>
             <a:ext cx="480806" cy="145733"/>
           </a:xfrm>
           <a:prstGeom prst="rect">
@@ -12969,7 +12969,7 @@
         </p:nvSpPr>
         <p:spPr>
           <a:xfrm>
-            <a:off x="4929753" y="4777001"/>
+            <a:off x="4929753" y="5132756"/>
             <a:ext cx="1084399" cy="126039"/>
           </a:xfrm>
           <a:prstGeom prst="rect">
@@ -13011,7 +13011,7 @@
         </p:nvSpPr>
         <p:spPr>
           <a:xfrm>
-            <a:off x="508222" y="5519767"/>
+            <a:off x="508222" y="6002578"/>
             <a:ext cx="3200468" cy="101644"/>
           </a:xfrm>
           <a:prstGeom prst="rect">
@@ -13053,7 +13053,7 @@
         </p:nvSpPr>
         <p:spPr>
           <a:xfrm>
-            <a:off x="508222" y="5659528"/>
+            <a:off x="508222" y="6142339"/>
             <a:ext cx="3368837" cy="127055"/>
           </a:xfrm>
           <a:prstGeom prst="rect">
@@ -13095,7 +13095,7 @@
         </p:nvSpPr>
         <p:spPr>
           <a:xfrm>
-            <a:off x="609866" y="6040695"/>
+            <a:off x="609866" y="6523506"/>
             <a:ext cx="307415" cy="114350"/>
           </a:xfrm>
           <a:prstGeom prst="rect">
@@ -13137,7 +13137,7 @@
         </p:nvSpPr>
         <p:spPr>
           <a:xfrm>
-            <a:off x="609866" y="6174611"/>
+            <a:off x="609866" y="6657422"/>
             <a:ext cx="223776" cy="126039"/>
           </a:xfrm>
           <a:prstGeom prst="rect">
@@ -13179,7 +13179,7 @@
         </p:nvSpPr>
         <p:spPr>
           <a:xfrm>
-            <a:off x="609866" y="6310370"/>
+            <a:off x="609866" y="6793181"/>
             <a:ext cx="445210" cy="108632"/>
           </a:xfrm>
           <a:prstGeom prst="rect">
@@ -13221,7 +13221,7 @@
         </p:nvSpPr>
         <p:spPr>
           <a:xfrm>
-            <a:off x="1931244" y="6040695"/>
+            <a:off x="1931244" y="6523506"/>
             <a:ext cx="698964" cy="114350"/>
           </a:xfrm>
           <a:prstGeom prst="rect">
@@ -13263,7 +13263,7 @@
         </p:nvSpPr>
         <p:spPr>
           <a:xfrm>
-            <a:off x="1931244" y="6174611"/>
+            <a:off x="1931244" y="6657422"/>
             <a:ext cx="483208" cy="126039"/>
           </a:xfrm>
           <a:prstGeom prst="rect">
@@ -13305,7 +13305,7 @@
         </p:nvSpPr>
         <p:spPr>
           <a:xfrm>
-            <a:off x="1931244" y="6310370"/>
+            <a:off x="1931244" y="6793181"/>
             <a:ext cx="677782" cy="108632"/>
           </a:xfrm>
           <a:prstGeom prst="rect">
@@ -13347,7 +13347,7 @@
         </p:nvSpPr>
         <p:spPr>
           <a:xfrm>
-            <a:off x="3252621" y="6040695"/>
+            <a:off x="3252621" y="6523506"/>
             <a:ext cx="492380" cy="114350"/>
           </a:xfrm>
           <a:prstGeom prst="rect">
@@ -13389,7 +13389,7 @@
         </p:nvSpPr>
         <p:spPr>
           <a:xfrm>
-            <a:off x="3252621" y="6174611"/>
+            <a:off x="3252621" y="6657422"/>
             <a:ext cx="483208" cy="126039"/>
           </a:xfrm>
           <a:prstGeom prst="rect">
@@ -13431,7 +13431,7 @@
         </p:nvSpPr>
         <p:spPr>
           <a:xfrm>
-            <a:off x="3252621" y="6310370"/>
+            <a:off x="3252621" y="6793181"/>
             <a:ext cx="642623" cy="108632"/>
           </a:xfrm>
           <a:prstGeom prst="rect">
@@ -13473,7 +13473,7 @@
         </p:nvSpPr>
         <p:spPr>
           <a:xfrm>
-            <a:off x="4573998" y="6040695"/>
+            <a:off x="4573998" y="6523506"/>
             <a:ext cx="466611" cy="114350"/>
           </a:xfrm>
           <a:prstGeom prst="rect">
@@ -13515,7 +13515,7 @@
         </p:nvSpPr>
         <p:spPr>
           <a:xfrm>
-            <a:off x="4573998" y="6174611"/>
+            <a:off x="4573998" y="6657422"/>
             <a:ext cx="396731" cy="126039"/>
           </a:xfrm>
           <a:prstGeom prst="rect">
@@ -13557,7 +13557,7 @@
         </p:nvSpPr>
         <p:spPr>
           <a:xfrm>
-            <a:off x="4573998" y="6310370"/>
+            <a:off x="4573998" y="6793181"/>
             <a:ext cx="916904" cy="108632"/>
           </a:xfrm>
           <a:prstGeom prst="rect">
@@ -13599,7 +13599,7 @@
         </p:nvSpPr>
         <p:spPr>
           <a:xfrm>
-            <a:off x="5895375" y="6040695"/>
+            <a:off x="5895375" y="6523506"/>
             <a:ext cx="462025" cy="114350"/>
           </a:xfrm>
           <a:prstGeom prst="rect">
@@ -13641,7 +13641,7 @@
         </p:nvSpPr>
         <p:spPr>
           <a:xfrm>
-            <a:off x="5895375" y="6174611"/>
+            <a:off x="5895375" y="6657422"/>
             <a:ext cx="223776" cy="126039"/>
           </a:xfrm>
           <a:prstGeom prst="rect">
@@ -13683,7 +13683,7 @@
         </p:nvSpPr>
         <p:spPr>
           <a:xfrm>
-            <a:off x="5895375" y="6310370"/>
+            <a:off x="5895375" y="6793181"/>
             <a:ext cx="666863" cy="108632"/>
           </a:xfrm>
           <a:prstGeom prst="rect">
@@ -13725,7 +13725,7 @@
         </p:nvSpPr>
         <p:spPr>
           <a:xfrm>
-            <a:off x="622572" y="7044433"/>
+            <a:off x="622572" y="7527244"/>
             <a:ext cx="792429" cy="76233"/>
           </a:xfrm>
           <a:prstGeom prst="rect">
@@ -13767,7 +13767,7 @@
         </p:nvSpPr>
         <p:spPr>
           <a:xfrm>
-            <a:off x="622572" y="7158783"/>
+            <a:off x="622572" y="7641594"/>
             <a:ext cx="444337" cy="127055"/>
           </a:xfrm>
           <a:prstGeom prst="rect">
@@ -13809,7 +13809,7 @@
         </p:nvSpPr>
         <p:spPr>
           <a:xfrm>
-            <a:off x="622572" y="7305405"/>
+            <a:off x="622572" y="7788216"/>
             <a:ext cx="1431181" cy="252078"/>
           </a:xfrm>
           <a:prstGeom prst="rect">
@@ -13871,7 +13871,7 @@
         </p:nvSpPr>
         <p:spPr>
           <a:xfrm>
-            <a:off x="2274293" y="7044433"/>
+            <a:off x="2274293" y="7527244"/>
             <a:ext cx="792429" cy="76233"/>
           </a:xfrm>
           <a:prstGeom prst="rect">
@@ -13913,7 +13913,7 @@
         </p:nvSpPr>
         <p:spPr>
           <a:xfrm>
-            <a:off x="2274293" y="7158783"/>
+            <a:off x="2274293" y="7641594"/>
             <a:ext cx="327942" cy="127055"/>
           </a:xfrm>
           <a:prstGeom prst="rect">
@@ -13955,7 +13955,7 @@
         </p:nvSpPr>
         <p:spPr>
           <a:xfrm>
-            <a:off x="2274293" y="7305405"/>
+            <a:off x="2274293" y="7788216"/>
             <a:ext cx="1431181" cy="252078"/>
           </a:xfrm>
           <a:prstGeom prst="rect">
@@ -14017,7 +14017,7 @@
         </p:nvSpPr>
         <p:spPr>
           <a:xfrm>
-            <a:off x="3926015" y="7044433"/>
+            <a:off x="3926015" y="7527244"/>
             <a:ext cx="1151877" cy="76233"/>
           </a:xfrm>
           <a:prstGeom prst="rect">
@@ -14059,7 +14059,7 @@
         </p:nvSpPr>
         <p:spPr>
           <a:xfrm>
-            <a:off x="3926015" y="7158783"/>
+            <a:off x="3926015" y="7641594"/>
             <a:ext cx="932190" cy="127055"/>
           </a:xfrm>
           <a:prstGeom prst="rect">
@@ -14101,7 +14101,7 @@
         </p:nvSpPr>
         <p:spPr>
           <a:xfrm>
-            <a:off x="3926015" y="7305405"/>
+            <a:off x="3926015" y="7788216"/>
             <a:ext cx="1433146" cy="252078"/>
           </a:xfrm>
           <a:prstGeom prst="rect">
@@ -14163,7 +14163,7 @@
         </p:nvSpPr>
         <p:spPr>
           <a:xfrm>
-            <a:off x="5577736" y="7044433"/>
+            <a:off x="5577736" y="7527244"/>
             <a:ext cx="910353" cy="76233"/>
           </a:xfrm>
           <a:prstGeom prst="rect">
@@ -14205,7 +14205,7 @@
         </p:nvSpPr>
         <p:spPr>
           <a:xfrm>
-            <a:off x="5577736" y="7158783"/>
+            <a:off x="5577736" y="7641594"/>
             <a:ext cx="651795" cy="127055"/>
           </a:xfrm>
           <a:prstGeom prst="rect">
@@ -14247,7 +14247,7 @@
         </p:nvSpPr>
         <p:spPr>
           <a:xfrm>
-            <a:off x="5577736" y="7305405"/>
+            <a:off x="5577736" y="7788216"/>
             <a:ext cx="1434457" cy="252078"/>
           </a:xfrm>
           <a:prstGeom prst="rect">
@@ -14309,7 +14309,7 @@
         </p:nvSpPr>
         <p:spPr>
           <a:xfrm>
-            <a:off x="508222" y="7924261"/>
+            <a:off x="508222" y="8483305"/>
             <a:ext cx="3544848" cy="686354"/>
           </a:xfrm>
           <a:prstGeom prst="rect">
@@ -14411,7 +14411,7 @@
         </p:nvSpPr>
         <p:spPr>
           <a:xfrm>
-            <a:off x="4065776" y="8899443"/>
+            <a:off x="4065776" y="9661776"/>
             <a:ext cx="820818" cy="88939"/>
           </a:xfrm>
           <a:prstGeom prst="rect">
@@ -14453,7 +14453,7 @@
         </p:nvSpPr>
         <p:spPr>
           <a:xfrm>
-            <a:off x="4065776" y="9013793"/>
+            <a:off x="4065776" y="9776126"/>
             <a:ext cx="300427" cy="88939"/>
           </a:xfrm>
           <a:prstGeom prst="rect">
@@ -14745,7 +14745,7 @@
         </p:nvSpPr>
         <p:spPr>
           <a:xfrm>
-            <a:off x="8068024" y="2607417"/>
+            <a:off x="8068024" y="2810706"/>
             <a:ext cx="317678" cy="241405"/>
           </a:xfrm>
           <a:prstGeom prst="rect">
@@ -14787,7 +14787,7 @@
         </p:nvSpPr>
         <p:spPr>
           <a:xfrm>
-            <a:off x="8474602" y="2626475"/>
+            <a:off x="8474602" y="2829764"/>
             <a:ext cx="894848" cy="114350"/>
           </a:xfrm>
           <a:prstGeom prst="rect">
@@ -14829,7 +14829,7 @@
         </p:nvSpPr>
         <p:spPr>
           <a:xfrm>
-            <a:off x="8474602" y="2761281"/>
+            <a:off x="8474602" y="2964570"/>
             <a:ext cx="1809628" cy="149671"/>
           </a:xfrm>
           <a:prstGeom prst="rect">
@@ -14871,7 +14871,7 @@
         </p:nvSpPr>
         <p:spPr>
           <a:xfrm>
-            <a:off x="8474602" y="2938270"/>
+            <a:off x="8474602" y="3141558"/>
             <a:ext cx="2378935" cy="126039"/>
           </a:xfrm>
           <a:prstGeom prst="rect">
@@ -14913,7 +14913,7 @@
         </p:nvSpPr>
         <p:spPr>
           <a:xfrm>
-            <a:off x="11396878" y="2607417"/>
+            <a:off x="11396878" y="2810706"/>
             <a:ext cx="373583" cy="241405"/>
           </a:xfrm>
           <a:prstGeom prst="rect">
@@ -14955,7 +14955,7 @@
         </p:nvSpPr>
         <p:spPr>
           <a:xfrm>
-            <a:off x="11803456" y="2626475"/>
+            <a:off x="11803456" y="2829764"/>
             <a:ext cx="920835" cy="114350"/>
           </a:xfrm>
           <a:prstGeom prst="rect">
@@ -14997,7 +14997,7 @@
         </p:nvSpPr>
         <p:spPr>
           <a:xfrm>
-            <a:off x="11803456" y="2761281"/>
+            <a:off x="11803456" y="2964570"/>
             <a:ext cx="1945676" cy="149671"/>
           </a:xfrm>
           <a:prstGeom prst="rect">
@@ -15039,7 +15039,7 @@
         </p:nvSpPr>
         <p:spPr>
           <a:xfrm>
-            <a:off x="11803456" y="2938270"/>
+            <a:off x="11803456" y="3141558"/>
             <a:ext cx="1517658" cy="126039"/>
           </a:xfrm>
           <a:prstGeom prst="rect">
@@ -15081,7 +15081,7 @@
         </p:nvSpPr>
         <p:spPr>
           <a:xfrm>
-            <a:off x="8068024" y="3395161"/>
+            <a:off x="8068024" y="3750916"/>
             <a:ext cx="381881" cy="241405"/>
           </a:xfrm>
           <a:prstGeom prst="rect">
@@ -15123,7 +15123,7 @@
         </p:nvSpPr>
         <p:spPr>
           <a:xfrm>
-            <a:off x="8474602" y="3414219"/>
+            <a:off x="8474602" y="3769975"/>
             <a:ext cx="1020196" cy="114350"/>
           </a:xfrm>
           <a:prstGeom prst="rect">
@@ -15165,7 +15165,7 @@
         </p:nvSpPr>
         <p:spPr>
           <a:xfrm>
-            <a:off x="8474602" y="3549025"/>
+            <a:off x="8474602" y="3904781"/>
             <a:ext cx="2367798" cy="149671"/>
           </a:xfrm>
           <a:prstGeom prst="rect">
@@ -15207,7 +15207,7 @@
         </p:nvSpPr>
         <p:spPr>
           <a:xfrm>
-            <a:off x="8474602" y="3726014"/>
+            <a:off x="8474602" y="4081769"/>
             <a:ext cx="2205981" cy="126039"/>
           </a:xfrm>
           <a:prstGeom prst="rect">
@@ -15249,7 +15249,7 @@
         </p:nvSpPr>
         <p:spPr>
           <a:xfrm>
-            <a:off x="11396878" y="3395161"/>
+            <a:off x="11396878" y="3750916"/>
             <a:ext cx="385812" cy="241405"/>
           </a:xfrm>
           <a:prstGeom prst="rect">
@@ -15291,7 +15291,7 @@
         </p:nvSpPr>
         <p:spPr>
           <a:xfrm>
-            <a:off x="11803456" y="3414219"/>
+            <a:off x="11803456" y="3769975"/>
             <a:ext cx="726698" cy="114350"/>
           </a:xfrm>
           <a:prstGeom prst="rect">
@@ -15333,7 +15333,7 @@
         </p:nvSpPr>
         <p:spPr>
           <a:xfrm>
-            <a:off x="11803456" y="3549025"/>
+            <a:off x="11803456" y="3904781"/>
             <a:ext cx="2252059" cy="149671"/>
           </a:xfrm>
           <a:prstGeom prst="rect">
@@ -15375,7 +15375,7 @@
         </p:nvSpPr>
         <p:spPr>
           <a:xfrm>
-            <a:off x="11803456" y="3726014"/>
+            <a:off x="11803456" y="4081769"/>
             <a:ext cx="1866842" cy="126039"/>
           </a:xfrm>
           <a:prstGeom prst="rect">
@@ -15417,7 +15417,7 @@
         </p:nvSpPr>
         <p:spPr>
           <a:xfrm>
-            <a:off x="8068024" y="4341725"/>
+            <a:off x="8068024" y="4900769"/>
             <a:ext cx="1366323" cy="101644"/>
           </a:xfrm>
           <a:prstGeom prst="rect">
@@ -15459,7 +15459,7 @@
         </p:nvSpPr>
         <p:spPr>
           <a:xfrm>
-            <a:off x="9440223" y="4341725"/>
+            <a:off x="9440223" y="4900769"/>
             <a:ext cx="2137629" cy="127055"/>
           </a:xfrm>
           <a:prstGeom prst="rect">
@@ -15501,7 +15501,7 @@
         </p:nvSpPr>
         <p:spPr>
           <a:xfrm>
-            <a:off x="8068024" y="6196052"/>
+            <a:off x="8068024" y="6949848"/>
             <a:ext cx="3805808" cy="126039"/>
           </a:xfrm>
           <a:prstGeom prst="rect">
@@ -15543,7 +15543,7 @@
         </p:nvSpPr>
         <p:spPr>
           <a:xfrm>
-            <a:off x="12514966" y="4609812"/>
+            <a:off x="13023188" y="5219678"/>
             <a:ext cx="359170" cy="289687"/>
           </a:xfrm>
           <a:prstGeom prst="rect">
@@ -15585,7 +15585,7 @@
         </p:nvSpPr>
         <p:spPr>
           <a:xfrm>
-            <a:off x="12946955" y="4748302"/>
+            <a:off x="13023188" y="5574163"/>
             <a:ext cx="830864" cy="88939"/>
           </a:xfrm>
           <a:prstGeom prst="rect">
@@ -15627,7 +15627,7 @@
         </p:nvSpPr>
         <p:spPr>
           <a:xfrm>
-            <a:off x="12514966" y="5118034"/>
+            <a:off x="13023188" y="5829544"/>
             <a:ext cx="441498" cy="289687"/>
           </a:xfrm>
           <a:prstGeom prst="rect">
@@ -15669,7 +15669,7 @@
         </p:nvSpPr>
         <p:spPr>
           <a:xfrm>
-            <a:off x="12946955" y="5256524"/>
+            <a:off x="13023188" y="6184029"/>
             <a:ext cx="817543" cy="88939"/>
           </a:xfrm>
           <a:prstGeom prst="rect">
@@ -15711,7 +15711,7 @@
         </p:nvSpPr>
         <p:spPr>
           <a:xfrm>
-            <a:off x="12514966" y="5626256"/>
+            <a:off x="13023188" y="6439411"/>
             <a:ext cx="1056665" cy="289687"/>
           </a:xfrm>
           <a:prstGeom prst="rect">
@@ -15753,7 +15753,7 @@
         </p:nvSpPr>
         <p:spPr>
           <a:xfrm>
-            <a:off x="13556821" y="5764746"/>
+            <a:off x="13023188" y="6793896"/>
             <a:ext cx="1113225" cy="88939"/>
           </a:xfrm>
           <a:prstGeom prst="rect">
@@ -15795,7 +15795,7 @@
         </p:nvSpPr>
         <p:spPr>
           <a:xfrm>
-            <a:off x="8068024" y="6659296"/>
+            <a:off x="8068024" y="7540148"/>
             <a:ext cx="1223723" cy="101644"/>
           </a:xfrm>
           <a:prstGeom prst="rect">
@@ -15837,7 +15837,7 @@
         </p:nvSpPr>
         <p:spPr>
           <a:xfrm>
-            <a:off x="9236935" y="6659296"/>
+            <a:off x="9236935" y="7540148"/>
             <a:ext cx="1073917" cy="127055"/>
           </a:xfrm>
           <a:prstGeom prst="rect">
@@ -15879,7 +15879,7 @@
         </p:nvSpPr>
         <p:spPr>
           <a:xfrm>
-            <a:off x="8068024" y="6861632"/>
+            <a:off x="8068024" y="7742484"/>
             <a:ext cx="488667" cy="205195"/>
           </a:xfrm>
           <a:prstGeom prst="rect">
@@ -15921,7 +15921,7 @@
         </p:nvSpPr>
         <p:spPr>
           <a:xfrm>
-            <a:off x="9592690" y="6861632"/>
+            <a:off x="9592690" y="7742484"/>
             <a:ext cx="923892" cy="205195"/>
           </a:xfrm>
           <a:prstGeom prst="rect">
@@ -15963,7 +15963,7 @@
         </p:nvSpPr>
         <p:spPr>
           <a:xfrm>
-            <a:off x="11117356" y="6861632"/>
+            <a:off x="11117356" y="7742484"/>
             <a:ext cx="1659384" cy="205195"/>
           </a:xfrm>
           <a:prstGeom prst="rect">
@@ -16005,7 +16005,7 @@
         </p:nvSpPr>
         <p:spPr>
           <a:xfrm>
-            <a:off x="12794488" y="6856740"/>
+            <a:off x="12794488" y="7737592"/>
             <a:ext cx="829117" cy="252078"/>
           </a:xfrm>
           <a:prstGeom prst="rect">
@@ -16067,7 +16067,7 @@
         </p:nvSpPr>
         <p:spPr>
           <a:xfrm>
-            <a:off x="8068024" y="7294574"/>
+            <a:off x="8068024" y="8302481"/>
             <a:ext cx="1823167" cy="101644"/>
           </a:xfrm>
           <a:prstGeom prst="rect">
@@ -16109,7 +16109,7 @@
         </p:nvSpPr>
         <p:spPr>
           <a:xfrm>
-            <a:off x="9846801" y="7294574"/>
+            <a:off x="9846801" y="8302481"/>
             <a:ext cx="1358025" cy="127055"/>
           </a:xfrm>
           <a:prstGeom prst="rect">
@@ -16151,7 +16151,7 @@
         </p:nvSpPr>
         <p:spPr>
           <a:xfrm>
-            <a:off x="8195079" y="7599507"/>
+            <a:off x="8220491" y="8632825"/>
             <a:ext cx="983509" cy="76233"/>
           </a:xfrm>
           <a:prstGeom prst="rect">
@@ -16193,7 +16193,7 @@
         </p:nvSpPr>
         <p:spPr>
           <a:xfrm>
-            <a:off x="8195079" y="7692702"/>
+            <a:off x="8220491" y="8726021"/>
             <a:ext cx="921053" cy="169365"/>
           </a:xfrm>
           <a:prstGeom prst="rect">
@@ -16235,8 +16235,8 @@
         </p:nvSpPr>
         <p:spPr>
           <a:xfrm>
-            <a:off x="8195079" y="7902566"/>
-            <a:ext cx="2035647" cy="252078"/>
+            <a:off x="8220491" y="8935884"/>
+            <a:ext cx="1949170" cy="252078"/>
           </a:xfrm>
           <a:prstGeom prst="rect">
             <a:avLst/>
@@ -16263,7 +16263,7 @@
                 <a:ea typeface="Noto Sans JP" pitchFamily="34" charset="-122"/>
                 <a:cs typeface="Noto Sans JP" pitchFamily="34" charset="-120"/>
               </a:rPr>
-              <a:t>資源事業は長期にわたる。短期的リターンを求める</a:t>
+              <a:t>資源事業は長期にわたる。短期的リターンを求め</a:t>
             </a:r>
             <a:endParaRPr lang="en-US" sz="620" dirty="0"/>
           </a:p>
@@ -16283,7 +16283,7 @@
                 <a:ea typeface="Noto Sans JP" pitchFamily="34" charset="-122"/>
                 <a:cs typeface="Noto Sans JP" pitchFamily="34" charset="-120"/>
               </a:rPr>
-              <a:t>投資家とは一線を画す。</a:t>
+              <a:t>る投資家とは一線を画す。</a:t>
             </a:r>
             <a:endParaRPr lang="en-US" sz="620" dirty="0"/>
           </a:p>
@@ -16297,7 +16297,7 @@
         </p:nvSpPr>
         <p:spPr>
           <a:xfrm>
-            <a:off x="10431256" y="7599507"/>
+            <a:off x="10456667" y="8632825"/>
             <a:ext cx="806842" cy="76233"/>
           </a:xfrm>
           <a:prstGeom prst="rect">
@@ -16339,7 +16339,7 @@
         </p:nvSpPr>
         <p:spPr>
           <a:xfrm>
-            <a:off x="10431256" y="7692702"/>
+            <a:off x="10456667" y="8726021"/>
             <a:ext cx="1169566" cy="169365"/>
           </a:xfrm>
           <a:prstGeom prst="rect">
@@ -16381,8 +16381,8 @@
         </p:nvSpPr>
         <p:spPr>
           <a:xfrm>
-            <a:off x="10431256" y="7902566"/>
-            <a:ext cx="2035647" cy="126039"/>
+            <a:off x="10456667" y="8935884"/>
+            <a:ext cx="1862693" cy="252078"/>
           </a:xfrm>
           <a:prstGeom prst="rect">
             <a:avLst/>
@@ -16409,10 +16409,30 @@
                 <a:ea typeface="Noto Sans JP" pitchFamily="34" charset="-122"/>
                 <a:cs typeface="Noto Sans JP" pitchFamily="34" charset="-120"/>
               </a:rPr>
-              <a:t>リスクの高い案件ほど、資金面の分担を担保する。</a:t>
+              <a:t>リスクの高い案件ほど、資金面の分担を担保す</a:t>
             </a:r>
             <a:endParaRPr lang="en-US" sz="620" dirty="0"/>
           </a:p>
+          <a:p>
+            <a:pPr algn="l" indent="0" marL="0">
+              <a:lnSpc>
+                <a:spcPts val="992"/>
+              </a:lnSpc>
+              <a:buNone/>
+            </a:pPr>
+            <a:r>
+              <a:rPr lang="en-US" sz="620" dirty="0">
+                <a:solidFill>
+                  <a:srgbClr val="7D838A"/>
+                </a:solidFill>
+                <a:latin typeface="Noto Sans JP" pitchFamily="34" charset="0"/>
+                <a:ea typeface="Noto Sans JP" pitchFamily="34" charset="-122"/>
+                <a:cs typeface="Noto Sans JP" pitchFamily="34" charset="-120"/>
+              </a:rPr>
+              <a:t>る。</a:t>
+            </a:r>
+            <a:endParaRPr lang="en-US" sz="620" dirty="0"/>
+          </a:p>
         </p:txBody>
       </p:sp>
       <p:sp>
@@ -16423,7 +16443,7 @@
         </p:nvSpPr>
         <p:spPr>
           <a:xfrm>
-            <a:off x="12667433" y="7599507"/>
+            <a:off x="12692844" y="8632825"/>
             <a:ext cx="1309982" cy="76233"/>
           </a:xfrm>
           <a:prstGeom prst="rect">
@@ -16465,7 +16485,7 @@
         </p:nvSpPr>
         <p:spPr>
           <a:xfrm>
-            <a:off x="12667433" y="7692702"/>
+            <a:off x="12692844" y="8726021"/>
             <a:ext cx="423809" cy="169365"/>
           </a:xfrm>
           <a:prstGeom prst="rect">
@@ -16507,8 +16527,8 @@
         </p:nvSpPr>
         <p:spPr>
           <a:xfrm>
-            <a:off x="12667433" y="7902566"/>
-            <a:ext cx="2035647" cy="252078"/>
+            <a:off x="12692844" y="8935884"/>
+            <a:ext cx="1949170" cy="252078"/>
           </a:xfrm>
           <a:prstGeom prst="rect">
             <a:avLst/>
@@ -16535,7 +16555,7 @@
                 <a:ea typeface="Noto Sans JP" pitchFamily="34" charset="-122"/>
                 <a:cs typeface="Noto Sans JP" pitchFamily="34" charset="-120"/>
               </a:rPr>
-              <a:t>幅広い産業接点を通じ、多様なバリューチェーンに</a:t>
+              <a:t>幅広い産業接点を通じ、多様なバリューチェーン</a:t>
             </a:r>
             <a:endParaRPr lang="en-US" sz="620" dirty="0"/>
           </a:p>
@@ -16555,7 +16575,7 @@
                 <a:ea typeface="Noto Sans JP" pitchFamily="34" charset="-122"/>
                 <a:cs typeface="Noto Sans JP" pitchFamily="34" charset="-120"/>
               </a:rPr>
-              <a:t>知見を提供する。</a:t>
+              <a:t>に知見を提供する。</a:t>
             </a:r>
             <a:endParaRPr lang="en-US" sz="620" dirty="0"/>
           </a:p>

--- a/cover-proposals/v13_1007_case3_v2plus/台割案3_v2改_P02-11_編集用.pptx
+++ b/cover-proposals/v13_1007_case3_v2plus/台割案3_v2改_P02-11_編集用.pptx
@@ -4047,27 +4047,27 @@
         </p:nvSpPr>
         <p:spPr>
           <a:xfrm>
-            <a:off x="3811665" y="101644"/>
-            <a:ext cx="2821585" cy="2337821"/>
-          </a:xfrm>
-          <a:prstGeom prst="rect">
-            <a:avLst/>
-          </a:prstGeom>
-          <a:noFill/>
-          <a:ln/>
-        </p:spPr>
-        <p:txBody>
-          <a:bodyPr wrap="none" lIns="0" tIns="0" rIns="0" bIns="0" rtlCol="0" anchor="t"/>
-          <a:lstStyle/>
-          <a:p>
-            <a:pPr algn="l" indent="0" marL="0">
-              <a:lnSpc>
-                <a:spcPts val="18400"/>
-              </a:lnSpc>
-              <a:buNone/>
-            </a:pPr>
-            <a:r>
-              <a:rPr lang="en-US" sz="23000" spc="-920" kern="0" dirty="0">
+            <a:off x="3811665" y="0"/>
+            <a:ext cx="2339628" cy="1931244"/>
+          </a:xfrm>
+          <a:prstGeom prst="rect">
+            <a:avLst/>
+          </a:prstGeom>
+          <a:noFill/>
+          <a:ln/>
+        </p:spPr>
+        <p:txBody>
+          <a:bodyPr wrap="none" lIns="0" tIns="0" rIns="0" bIns="0" rtlCol="0" anchor="t"/>
+          <a:lstStyle/>
+          <a:p>
+            <a:pPr algn="l" indent="0" marL="0">
+              <a:lnSpc>
+                <a:spcPts val="15200"/>
+              </a:lnSpc>
+              <a:buNone/>
+            </a:pPr>
+            <a:r>
+              <a:rPr lang="en-US" sz="19000" spc="-760" kern="0" dirty="0">
                 <a:solidFill>
                   <a:srgbClr val="000000">
                     <a:alpha val="0"/>
@@ -4079,7 +4079,7 @@
               </a:rPr>
               <a:t>01</a:t>
             </a:r>
-            <a:endParaRPr lang="en-US" sz="23000" dirty="0"/>
+            <a:endParaRPr lang="en-US" sz="19000" dirty="0"/>
           </a:p>
         </p:txBody>
       </p:sp>
@@ -4091,27 +4091,27 @@
         </p:nvSpPr>
         <p:spPr>
           <a:xfrm>
-            <a:off x="11434995" y="101644"/>
-            <a:ext cx="3529344" cy="2337821"/>
-          </a:xfrm>
-          <a:prstGeom prst="rect">
-            <a:avLst/>
-          </a:prstGeom>
-          <a:noFill/>
-          <a:ln/>
-        </p:spPr>
-        <p:txBody>
-          <a:bodyPr wrap="none" lIns="0" tIns="0" rIns="0" bIns="0" rtlCol="0" anchor="t"/>
-          <a:lstStyle/>
-          <a:p>
-            <a:pPr algn="l" indent="0" marL="0">
-              <a:lnSpc>
-                <a:spcPts val="18400"/>
-              </a:lnSpc>
-              <a:buNone/>
-            </a:pPr>
-            <a:r>
-              <a:rPr lang="en-US" sz="23000" spc="-920" kern="0" dirty="0">
+            <a:off x="11434995" y="0"/>
+            <a:ext cx="2924440" cy="1931244"/>
+          </a:xfrm>
+          <a:prstGeom prst="rect">
+            <a:avLst/>
+          </a:prstGeom>
+          <a:noFill/>
+          <a:ln/>
+        </p:spPr>
+        <p:txBody>
+          <a:bodyPr wrap="none" lIns="0" tIns="0" rIns="0" bIns="0" rtlCol="0" anchor="t"/>
+          <a:lstStyle/>
+          <a:p>
+            <a:pPr algn="l" indent="0" marL="0">
+              <a:lnSpc>
+                <a:spcPts val="15200"/>
+              </a:lnSpc>
+              <a:buNone/>
+            </a:pPr>
+            <a:r>
+              <a:rPr lang="en-US" sz="19000" spc="-760" kern="0" dirty="0">
                 <a:solidFill>
                   <a:srgbClr val="000000">
                     <a:alpha val="0"/>
@@ -4123,7 +4123,7 @@
               </a:rPr>
               <a:t>02</a:t>
             </a:r>
-            <a:endParaRPr lang="en-US" sz="23000" dirty="0"/>
+            <a:endParaRPr lang="en-US" sz="19000" dirty="0"/>
           </a:p>
         </p:txBody>
       </p:sp>
@@ -4425,7 +4425,7 @@
         </p:nvSpPr>
         <p:spPr>
           <a:xfrm>
-            <a:off x="4116598" y="1396022"/>
+            <a:off x="4116598" y="1777189"/>
             <a:ext cx="1143360" cy="101644"/>
           </a:xfrm>
           <a:prstGeom prst="rect">
@@ -4467,7 +4467,7 @@
         </p:nvSpPr>
         <p:spPr>
           <a:xfrm>
-            <a:off x="4116598" y="1592704"/>
+            <a:off x="4116598" y="1973871"/>
             <a:ext cx="3021836" cy="573274"/>
           </a:xfrm>
           <a:prstGeom prst="rect">
@@ -4549,7 +4549,7 @@
         </p:nvSpPr>
         <p:spPr>
           <a:xfrm>
-            <a:off x="4116598" y="2330388"/>
+            <a:off x="4116598" y="2711555"/>
             <a:ext cx="2877271" cy="252078"/>
           </a:xfrm>
           <a:prstGeom prst="rect">
@@ -11918,26 +11918,26 @@
         <p:spPr>
           <a:xfrm>
             <a:off x="4192831" y="101644"/>
-            <a:ext cx="3587432" cy="2337821"/>
-          </a:xfrm>
-          <a:prstGeom prst="rect">
-            <a:avLst/>
-          </a:prstGeom>
-          <a:noFill/>
-          <a:ln/>
-        </p:spPr>
-        <p:txBody>
-          <a:bodyPr wrap="none" lIns="0" tIns="0" rIns="0" bIns="0" rtlCol="0" anchor="t"/>
-          <a:lstStyle/>
-          <a:p>
-            <a:pPr algn="l" indent="0" marL="0">
-              <a:lnSpc>
-                <a:spcPts val="18400"/>
-              </a:lnSpc>
-              <a:buNone/>
-            </a:pPr>
-            <a:r>
-              <a:rPr lang="en-US" sz="23000" spc="-920" kern="0" dirty="0">
+            <a:ext cx="2972483" cy="1931244"/>
+          </a:xfrm>
+          <a:prstGeom prst="rect">
+            <a:avLst/>
+          </a:prstGeom>
+          <a:noFill/>
+          <a:ln/>
+        </p:spPr>
+        <p:txBody>
+          <a:bodyPr wrap="none" lIns="0" tIns="0" rIns="0" bIns="0" rtlCol="0" anchor="t"/>
+          <a:lstStyle/>
+          <a:p>
+            <a:pPr algn="l" indent="0" marL="0">
+              <a:lnSpc>
+                <a:spcPts val="15200"/>
+              </a:lnSpc>
+              <a:buNone/>
+            </a:pPr>
+            <a:r>
+              <a:rPr lang="en-US" sz="19000" spc="-760" kern="0" dirty="0">
                 <a:solidFill>
                   <a:srgbClr val="000000">
                     <a:alpha val="0"/>
@@ -11949,7 +11949,7 @@
               </a:rPr>
               <a:t>03</a:t>
             </a:r>
-            <a:endParaRPr lang="en-US" sz="23000" dirty="0"/>
+            <a:endParaRPr lang="en-US" sz="19000" dirty="0"/>
           </a:p>
         </p:txBody>
       </p:sp>
@@ -11962,26 +11962,26 @@
         <p:spPr>
           <a:xfrm>
             <a:off x="11816161" y="101644"/>
-            <a:ext cx="3578042" cy="2337821"/>
-          </a:xfrm>
-          <a:prstGeom prst="rect">
-            <a:avLst/>
-          </a:prstGeom>
-          <a:noFill/>
-          <a:ln/>
-        </p:spPr>
-        <p:txBody>
-          <a:bodyPr wrap="none" lIns="0" tIns="0" rIns="0" bIns="0" rtlCol="0" anchor="t"/>
-          <a:lstStyle/>
-          <a:p>
-            <a:pPr algn="l" indent="0" marL="0">
-              <a:lnSpc>
-                <a:spcPts val="18400"/>
-              </a:lnSpc>
-              <a:buNone/>
-            </a:pPr>
-            <a:r>
-              <a:rPr lang="en-US" sz="23000" spc="-920" kern="0" dirty="0">
+            <a:ext cx="2964622" cy="1931244"/>
+          </a:xfrm>
+          <a:prstGeom prst="rect">
+            <a:avLst/>
+          </a:prstGeom>
+          <a:noFill/>
+          <a:ln/>
+        </p:spPr>
+        <p:txBody>
+          <a:bodyPr wrap="none" lIns="0" tIns="0" rIns="0" bIns="0" rtlCol="0" anchor="t"/>
+          <a:lstStyle/>
+          <a:p>
+            <a:pPr algn="l" indent="0" marL="0">
+              <a:lnSpc>
+                <a:spcPts val="15200"/>
+              </a:lnSpc>
+              <a:buNone/>
+            </a:pPr>
+            <a:r>
+              <a:rPr lang="en-US" sz="19000" spc="-760" kern="0" dirty="0">
                 <a:solidFill>
                   <a:srgbClr val="000000">
                     <a:alpha val="0"/>
@@ -11993,7 +11993,7 @@
               </a:rPr>
               <a:t>04</a:t>
             </a:r>
-            <a:endParaRPr lang="en-US" sz="23000" dirty="0"/>
+            <a:endParaRPr lang="en-US" sz="19000" dirty="0"/>
           </a:p>
         </p:txBody>
       </p:sp>
@@ -16817,26 +16817,26 @@
         <p:spPr>
           <a:xfrm>
             <a:off x="10926773" y="101644"/>
-            <a:ext cx="3460337" cy="2337821"/>
-          </a:xfrm>
-          <a:prstGeom prst="rect">
-            <a:avLst/>
-          </a:prstGeom>
-          <a:noFill/>
-          <a:ln/>
-        </p:spPr>
-        <p:txBody>
-          <a:bodyPr wrap="none" lIns="0" tIns="0" rIns="0" bIns="0" rtlCol="0" anchor="t"/>
-          <a:lstStyle/>
-          <a:p>
-            <a:pPr algn="l" indent="0" marL="0">
-              <a:lnSpc>
-                <a:spcPts val="18400"/>
-              </a:lnSpc>
-              <a:buNone/>
-            </a:pPr>
-            <a:r>
-              <a:rPr lang="en-US" sz="23000" spc="-920" kern="0" dirty="0">
+            <a:ext cx="2867444" cy="1931244"/>
+          </a:xfrm>
+          <a:prstGeom prst="rect">
+            <a:avLst/>
+          </a:prstGeom>
+          <a:noFill/>
+          <a:ln/>
+        </p:spPr>
+        <p:txBody>
+          <a:bodyPr wrap="none" lIns="0" tIns="0" rIns="0" bIns="0" rtlCol="0" anchor="t"/>
+          <a:lstStyle/>
+          <a:p>
+            <a:pPr algn="l" indent="0" marL="0">
+              <a:lnSpc>
+                <a:spcPts val="15200"/>
+              </a:lnSpc>
+              <a:buNone/>
+            </a:pPr>
+            <a:r>
+              <a:rPr lang="en-US" sz="19000" spc="-760" kern="0" dirty="0">
                 <a:solidFill>
                   <a:srgbClr val="000000">
                     <a:alpha val="0"/>
@@ -16848,7 +16848,7 @@
               </a:rPr>
               <a:t>05</a:t>
             </a:r>
-            <a:endParaRPr lang="en-US" sz="23000" dirty="0"/>
+            <a:endParaRPr lang="en-US" sz="19000" dirty="0"/>
           </a:p>
         </p:txBody>
       </p:sp>

--- a/cover-proposals/v13_1007_case3_v2plus/台割案3_v2改_P02-11_編集用.pptx
+++ b/cover-proposals/v13_1007_case3_v2plus/台割案3_v2改_P02-11_編集用.pptx
@@ -1414,8 +1414,8 @@
         </p:nvSpPr>
         <p:spPr>
           <a:xfrm>
-            <a:off x="5400692" y="2326021"/>
-            <a:ext cx="1002071" cy="126039"/>
+            <a:off x="5362258" y="2322328"/>
+            <a:ext cx="1078939" cy="136203"/>
           </a:xfrm>
           <a:prstGeom prst="rect">
             <a:avLst/>
@@ -1429,12 +1429,12 @@
           <a:p>
             <a:pPr algn="ctr" indent="0" marL="0">
               <a:lnSpc>
-                <a:spcPts val="992"/>
-              </a:lnSpc>
-              <a:buNone/>
-            </a:pPr>
-            <a:r>
-              <a:rPr lang="en-US" sz="620" dirty="0">
+                <a:spcPts val="1072"/>
+              </a:lnSpc>
+              <a:buNone/>
+            </a:pPr>
+            <a:r>
+              <a:rPr lang="en-US" sz="670" dirty="0">
                 <a:solidFill>
                   <a:srgbClr val="8A96A3"/>
                 </a:solidFill>
@@ -1444,7 +1444,7 @@
               </a:rPr>
               <a:t>鉄道の写真（ストック）</a:t>
             </a:r>
-            <a:endParaRPr lang="en-US" sz="620" dirty="0"/>
+            <a:endParaRPr lang="en-US" sz="670" dirty="0"/>
           </a:p>
         </p:txBody>
       </p:sp>
@@ -1708,8 +1708,8 @@
         </p:nvSpPr>
         <p:spPr>
           <a:xfrm>
-            <a:off x="4839693" y="4085739"/>
-            <a:ext cx="2123872" cy="126039"/>
+            <a:off x="4756054" y="4082047"/>
+            <a:ext cx="2291148" cy="136203"/>
           </a:xfrm>
           <a:prstGeom prst="rect">
             <a:avLst/>
@@ -1723,12 +1723,12 @@
           <a:p>
             <a:pPr algn="ctr" indent="0" marL="0">
               <a:lnSpc>
-                <a:spcPts val="992"/>
-              </a:lnSpc>
-              <a:buNone/>
-            </a:pPr>
-            <a:r>
-              <a:rPr lang="en-US" sz="620" dirty="0">
+                <a:spcPts val="1072"/>
+              </a:lnSpc>
+              <a:buNone/>
+            </a:pPr>
+            <a:r>
+              <a:rPr lang="en-US" sz="670" dirty="0">
                 <a:solidFill>
                   <a:srgbClr val="8A96A3"/>
                 </a:solidFill>
@@ -1738,7 +1738,7 @@
               </a:rPr>
               <a:t>スマートフォン・データセンターの写真（ストック）</a:t>
             </a:r>
-            <a:endParaRPr lang="en-US" sz="620" dirty="0"/>
+            <a:endParaRPr lang="en-US" sz="670" dirty="0"/>
           </a:p>
         </p:txBody>
       </p:sp>
@@ -2232,27 +2232,27 @@
         </p:nvSpPr>
         <p:spPr>
           <a:xfrm>
-            <a:off x="508222" y="7867880"/>
-            <a:ext cx="3544848" cy="857942"/>
-          </a:xfrm>
-          <a:prstGeom prst="rect">
-            <a:avLst/>
-          </a:prstGeom>
-          <a:noFill/>
-          <a:ln/>
-        </p:spPr>
-        <p:txBody>
-          <a:bodyPr wrap="none" lIns="0" tIns="0" rIns="0" bIns="0" rtlCol="0" anchor="t"/>
-          <a:lstStyle/>
-          <a:p>
-            <a:pPr algn="l" indent="0" marL="0">
-              <a:lnSpc>
-                <a:spcPts val="1351"/>
-              </a:lnSpc>
-              <a:buNone/>
-            </a:pPr>
-            <a:r>
-              <a:rPr lang="en-US" sz="730" spc="20" kern="0" dirty="0">
+            <a:off x="508222" y="7869532"/>
+            <a:ext cx="3544848" cy="904953"/>
+          </a:xfrm>
+          <a:prstGeom prst="rect">
+            <a:avLst/>
+          </a:prstGeom>
+          <a:noFill/>
+          <a:ln/>
+        </p:spPr>
+        <p:txBody>
+          <a:bodyPr wrap="none" lIns="0" tIns="0" rIns="0" bIns="0" rtlCol="0" anchor="t"/>
+          <a:lstStyle/>
+          <a:p>
+            <a:pPr algn="l" indent="0" marL="0">
+              <a:lnSpc>
+                <a:spcPts val="1425"/>
+              </a:lnSpc>
+              <a:buNone/>
+            </a:pPr>
+            <a:r>
+              <a:rPr lang="en-US" sz="770" spc="20" kern="0" dirty="0">
                 <a:solidFill>
                   <a:srgbClr val="3D4249"/>
                 </a:solidFill>
@@ -2260,19 +2260,19 @@
                 <a:ea typeface="Noto Sans JP" pitchFamily="34" charset="-122"/>
                 <a:cs typeface="Noto Sans JP" pitchFamily="34" charset="-120"/>
               </a:rPr>
-              <a:t>ビル、鉄道、自動車、スマートフォン、送電網、再生可能エネルギー——</a:t>
-            </a:r>
-            <a:endParaRPr lang="en-US" sz="730" dirty="0"/>
-          </a:p>
-          <a:p>
-            <a:pPr algn="l" indent="0" marL="0">
-              <a:lnSpc>
-                <a:spcPts val="1351"/>
-              </a:lnSpc>
-              <a:buNone/>
-            </a:pPr>
-            <a:r>
-              <a:rPr lang="en-US" sz="730" spc="20" kern="0" dirty="0">
+              <a:t>ビル、鉄道、自動車、スマートフォン、送電網、再生可能エネルギー</a:t>
+            </a:r>
+            <a:endParaRPr lang="en-US" sz="770" dirty="0"/>
+          </a:p>
+          <a:p>
+            <a:pPr algn="l" indent="0" marL="0">
+              <a:lnSpc>
+                <a:spcPts val="1425"/>
+              </a:lnSpc>
+              <a:buNone/>
+            </a:pPr>
+            <a:r>
+              <a:rPr lang="en-US" sz="770" spc="20" kern="0" dirty="0">
                 <a:solidFill>
                   <a:srgbClr val="3D4249"/>
                 </a:solidFill>
@@ -2280,19 +2280,19 @@
                 <a:ea typeface="Noto Sans JP" pitchFamily="34" charset="-122"/>
                 <a:cs typeface="Noto Sans JP" pitchFamily="34" charset="-120"/>
               </a:rPr>
-              <a:t>私たちの豊かな暮らしは、鉄や銅をはじめとする金属に支えられていま</a:t>
-            </a:r>
-            <a:endParaRPr lang="en-US" sz="730" dirty="0"/>
-          </a:p>
-          <a:p>
-            <a:pPr algn="l" indent="0" marL="0">
-              <a:lnSpc>
-                <a:spcPts val="1351"/>
-              </a:lnSpc>
-              <a:buNone/>
-            </a:pPr>
-            <a:r>
-              <a:rPr lang="en-US" sz="730" spc="20" kern="0" dirty="0">
+              <a:t>——私たちの豊かな暮らしは、鉄や銅をはじめとする金属に支えられて</a:t>
+            </a:r>
+            <a:endParaRPr lang="en-US" sz="770" dirty="0"/>
+          </a:p>
+          <a:p>
+            <a:pPr algn="l" indent="0" marL="0">
+              <a:lnSpc>
+                <a:spcPts val="1425"/>
+              </a:lnSpc>
+              <a:buNone/>
+            </a:pPr>
+            <a:r>
+              <a:rPr lang="en-US" sz="770" spc="20" kern="0" dirty="0">
                 <a:solidFill>
                   <a:srgbClr val="3D4249"/>
                 </a:solidFill>
@@ -2300,19 +2300,19 @@
                 <a:ea typeface="Noto Sans JP" pitchFamily="34" charset="-122"/>
                 <a:cs typeface="Noto Sans JP" pitchFamily="34" charset="-120"/>
               </a:rPr>
-              <a:t>す。人口の増加と新興国の発展、そして社会の電化によって、金属の需要</a:t>
-            </a:r>
-            <a:endParaRPr lang="en-US" sz="730" dirty="0"/>
-          </a:p>
-          <a:p>
-            <a:pPr algn="l" indent="0" marL="0">
-              <a:lnSpc>
-                <a:spcPts val="1351"/>
-              </a:lnSpc>
-              <a:buNone/>
-            </a:pPr>
-            <a:r>
-              <a:rPr lang="en-US" sz="730" spc="20" kern="0" dirty="0">
+              <a:t>います。人口の増加と新興国の発展、そして社会の電化によって、金</a:t>
+            </a:r>
+            <a:endParaRPr lang="en-US" sz="770" dirty="0"/>
+          </a:p>
+          <a:p>
+            <a:pPr algn="l" indent="0" marL="0">
+              <a:lnSpc>
+                <a:spcPts val="1425"/>
+              </a:lnSpc>
+              <a:buNone/>
+            </a:pPr>
+            <a:r>
+              <a:rPr lang="en-US" sz="770" spc="20" kern="0" dirty="0">
                 <a:solidFill>
                   <a:srgbClr val="3D4249"/>
                 </a:solidFill>
@@ -2320,19 +2320,19 @@
                 <a:ea typeface="Noto Sans JP" pitchFamily="34" charset="-122"/>
                 <a:cs typeface="Noto Sans JP" pitchFamily="34" charset="-120"/>
               </a:rPr>
-              <a:t>はこれからも拡大を続けます。一方で、良質な資源の開発は年々難しくな</a:t>
-            </a:r>
-            <a:endParaRPr lang="en-US" sz="730" dirty="0"/>
-          </a:p>
-          <a:p>
-            <a:pPr algn="l" indent="0" marL="0">
-              <a:lnSpc>
-                <a:spcPts val="1351"/>
-              </a:lnSpc>
-              <a:buNone/>
-            </a:pPr>
-            <a:r>
-              <a:rPr lang="en-US" sz="730" spc="20" kern="0" dirty="0">
+              <a:t>属の需要はこれからも拡大を続けます。一方で、良質な資源の開発は</a:t>
+            </a:r>
+            <a:endParaRPr lang="en-US" sz="770" dirty="0"/>
+          </a:p>
+          <a:p>
+            <a:pPr algn="l" indent="0" marL="0">
+              <a:lnSpc>
+                <a:spcPts val="1425"/>
+              </a:lnSpc>
+              <a:buNone/>
+            </a:pPr>
+            <a:r>
+              <a:rPr lang="en-US" sz="770" spc="20" kern="0" dirty="0">
                 <a:solidFill>
                   <a:srgbClr val="3D4249"/>
                 </a:solidFill>
@@ -2340,9 +2340,9 @@
                 <a:ea typeface="Noto Sans JP" pitchFamily="34" charset="-122"/>
                 <a:cs typeface="Noto Sans JP" pitchFamily="34" charset="-120"/>
               </a:rPr>
-              <a:t>り、地政学的なリスクも常態化しつつあります。</a:t>
-            </a:r>
-            <a:endParaRPr lang="en-US" sz="730" dirty="0"/>
+              <a:t>年々難しくなり、地政学的なリスクも常態化しつつあります。</a:t>
+            </a:r>
+            <a:endParaRPr lang="en-US" sz="770" dirty="0"/>
           </a:p>
         </p:txBody>
       </p:sp>
@@ -2920,27 +2920,27 @@
         </p:nvSpPr>
         <p:spPr>
           <a:xfrm>
-            <a:off x="8068024" y="7486713"/>
-            <a:ext cx="4243654" cy="857942"/>
-          </a:xfrm>
-          <a:prstGeom prst="rect">
-            <a:avLst/>
-          </a:prstGeom>
-          <a:noFill/>
-          <a:ln/>
-        </p:spPr>
-        <p:txBody>
-          <a:bodyPr wrap="none" lIns="0" tIns="0" rIns="0" bIns="0" rtlCol="0" anchor="t"/>
-          <a:lstStyle/>
-          <a:p>
-            <a:pPr algn="l" indent="0" marL="0">
-              <a:lnSpc>
-                <a:spcPts val="1351"/>
-              </a:lnSpc>
-              <a:buNone/>
-            </a:pPr>
-            <a:r>
-              <a:rPr lang="en-US" sz="730" spc="20" kern="0" dirty="0">
+            <a:off x="8068024" y="7488365"/>
+            <a:ext cx="4243654" cy="904953"/>
+          </a:xfrm>
+          <a:prstGeom prst="rect">
+            <a:avLst/>
+          </a:prstGeom>
+          <a:noFill/>
+          <a:ln/>
+        </p:spPr>
+        <p:txBody>
+          <a:bodyPr wrap="none" lIns="0" tIns="0" rIns="0" bIns="0" rtlCol="0" anchor="t"/>
+          <a:lstStyle/>
+          <a:p>
+            <a:pPr algn="l" indent="0" marL="0">
+              <a:lnSpc>
+                <a:spcPts val="1425"/>
+              </a:lnSpc>
+              <a:buNone/>
+            </a:pPr>
+            <a:r>
+              <a:rPr lang="en-US" sz="770" spc="20" kern="0" dirty="0">
                 <a:solidFill>
                   <a:srgbClr val="3D4249"/>
                 </a:solidFill>
@@ -2948,19 +2948,19 @@
                 <a:ea typeface="Noto Sans JP" pitchFamily="34" charset="-122"/>
                 <a:cs typeface="Noto Sans JP" pitchFamily="34" charset="-120"/>
               </a:rPr>
-              <a:t>資源は、そこに「ある」だけでは、まだ価値ではありません。誰かが見出し、育て、必要</a:t>
-            </a:r>
-            <a:endParaRPr lang="en-US" sz="730" dirty="0"/>
-          </a:p>
-          <a:p>
-            <a:pPr algn="l" indent="0" marL="0">
-              <a:lnSpc>
-                <a:spcPts val="1351"/>
-              </a:lnSpc>
-              <a:buNone/>
-            </a:pPr>
-            <a:r>
-              <a:rPr lang="en-US" sz="730" spc="20" kern="0" dirty="0">
+              <a:t>資源は、そこに「ある」だけでは、まだ価値ではありません。誰かが見出し、育て、</a:t>
+            </a:r>
+            <a:endParaRPr lang="en-US" sz="770" dirty="0"/>
+          </a:p>
+          <a:p>
+            <a:pPr algn="l" indent="0" marL="0">
+              <a:lnSpc>
+                <a:spcPts val="1425"/>
+              </a:lnSpc>
+              <a:buNone/>
+            </a:pPr>
+            <a:r>
+              <a:rPr lang="en-US" sz="770" spc="20" kern="0" dirty="0">
                 <a:solidFill>
                   <a:srgbClr val="3D4249"/>
                 </a:solidFill>
@@ -2968,19 +2968,19 @@
                 <a:ea typeface="Noto Sans JP" pitchFamily="34" charset="-122"/>
                 <a:cs typeface="Noto Sans JP" pitchFamily="34" charset="-120"/>
               </a:rPr>
-              <a:t>とする場所へ届けて、はじめて力になる。私たちは、世界有数の資産に関わり、投資とト</a:t>
-            </a:r>
-            <a:endParaRPr lang="en-US" sz="730" dirty="0"/>
-          </a:p>
-          <a:p>
-            <a:pPr algn="l" indent="0" marL="0">
-              <a:lnSpc>
-                <a:spcPts val="1351"/>
-              </a:lnSpc>
-              <a:buNone/>
-            </a:pPr>
-            <a:r>
-              <a:rPr lang="en-US" sz="730" spc="20" kern="0" dirty="0">
+              <a:t>必要とする場所へ届けて、はじめて力になる。私たちは、世界有数の資産に関わり、</a:t>
+            </a:r>
+            <a:endParaRPr lang="en-US" sz="770" dirty="0"/>
+          </a:p>
+          <a:p>
+            <a:pPr algn="l" indent="0" marL="0">
+              <a:lnSpc>
+                <a:spcPts val="1425"/>
+              </a:lnSpc>
+              <a:buNone/>
+            </a:pPr>
+            <a:r>
+              <a:rPr lang="en-US" sz="770" spc="20" kern="0" dirty="0">
                 <a:solidFill>
                   <a:srgbClr val="3D4249"/>
                 </a:solidFill>
@@ -2988,19 +2988,19 @@
                 <a:ea typeface="Noto Sans JP" pitchFamily="34" charset="-122"/>
                 <a:cs typeface="Noto Sans JP" pitchFamily="34" charset="-120"/>
               </a:rPr>
-              <a:t>レーディングの両輪で川上から川下までをつなぎます。フェアな立場だからこそ、埋めら</a:t>
-            </a:r>
-            <a:endParaRPr lang="en-US" sz="730" dirty="0"/>
-          </a:p>
-          <a:p>
-            <a:pPr algn="l" indent="0" marL="0">
-              <a:lnSpc>
-                <a:spcPts val="1351"/>
-              </a:lnSpc>
-              <a:buNone/>
-            </a:pPr>
-            <a:r>
-              <a:rPr lang="en-US" sz="730" spc="20" kern="0" dirty="0">
+              <a:t>投資とトレーディングの両輪で川上から川下までをつなぎます。フェアな立場だから</a:t>
+            </a:r>
+            <a:endParaRPr lang="en-US" sz="770" dirty="0"/>
+          </a:p>
+          <a:p>
+            <a:pPr algn="l" indent="0" marL="0">
+              <a:lnSpc>
+                <a:spcPts val="1425"/>
+              </a:lnSpc>
+              <a:buNone/>
+            </a:pPr>
+            <a:r>
+              <a:rPr lang="en-US" sz="770" spc="20" kern="0" dirty="0">
                 <a:solidFill>
                   <a:srgbClr val="3D4249"/>
                 </a:solidFill>
@@ -3008,19 +3008,19 @@
                 <a:ea typeface="Noto Sans JP" pitchFamily="34" charset="-122"/>
                 <a:cs typeface="Noto Sans JP" pitchFamily="34" charset="-120"/>
               </a:rPr>
-              <a:t>れる隙間がある。多様なパートナーと使い手の間に立ち、その時々の最適解を導く。世界</a:t>
-            </a:r>
-            <a:endParaRPr lang="en-US" sz="730" dirty="0"/>
-          </a:p>
-          <a:p>
-            <a:pPr algn="l" indent="0" marL="0">
-              <a:lnSpc>
-                <a:spcPts val="1351"/>
-              </a:lnSpc>
-              <a:buNone/>
-            </a:pPr>
-            <a:r>
-              <a:rPr lang="en-US" sz="730" spc="20" kern="0" dirty="0">
+              <a:t>こそ、埋められる隙間がある。多様なパートナーと使い手の間に立ち、その時々の最</a:t>
+            </a:r>
+            <a:endParaRPr lang="en-US" sz="770" dirty="0"/>
+          </a:p>
+          <a:p>
+            <a:pPr algn="l" indent="0" marL="0">
+              <a:lnSpc>
+                <a:spcPts val="1425"/>
+              </a:lnSpc>
+              <a:buNone/>
+            </a:pPr>
+            <a:r>
+              <a:rPr lang="en-US" sz="770" spc="20" kern="0" dirty="0">
                 <a:solidFill>
                   <a:srgbClr val="3D4249"/>
                 </a:solidFill>
@@ -3028,9 +3028,9 @@
                 <a:ea typeface="Noto Sans JP" pitchFamily="34" charset="-122"/>
                 <a:cs typeface="Noto Sans JP" pitchFamily="34" charset="-120"/>
               </a:rPr>
-              <a:t>に眠る価値を、社会の力へ。</a:t>
-            </a:r>
-            <a:endParaRPr lang="en-US" sz="730" dirty="0"/>
+              <a:t>適解を導く。世界に眠る価値を、社会の力へ。</a:t>
+            </a:r>
+            <a:endParaRPr lang="en-US" sz="770" dirty="0"/>
           </a:p>
         </p:txBody>
       </p:sp>
@@ -4047,27 +4047,27 @@
         </p:nvSpPr>
         <p:spPr>
           <a:xfrm>
-            <a:off x="3811665" y="0"/>
-            <a:ext cx="2339628" cy="1931244"/>
-          </a:xfrm>
-          <a:prstGeom prst="rect">
-            <a:avLst/>
-          </a:prstGeom>
-          <a:noFill/>
-          <a:ln/>
-        </p:spPr>
-        <p:txBody>
-          <a:bodyPr wrap="none" lIns="0" tIns="0" rIns="0" bIns="0" rtlCol="0" anchor="t"/>
-          <a:lstStyle/>
-          <a:p>
-            <a:pPr algn="l" indent="0" marL="0">
-              <a:lnSpc>
-                <a:spcPts val="15200"/>
-              </a:lnSpc>
-              <a:buNone/>
-            </a:pPr>
-            <a:r>
-              <a:rPr lang="en-US" sz="19000" spc="-760" kern="0" dirty="0">
+            <a:off x="4319887" y="76233"/>
+            <a:ext cx="1737345" cy="1423022"/>
+          </a:xfrm>
+          <a:prstGeom prst="rect">
+            <a:avLst/>
+          </a:prstGeom>
+          <a:noFill/>
+          <a:ln/>
+        </p:spPr>
+        <p:txBody>
+          <a:bodyPr wrap="none" lIns="0" tIns="0" rIns="0" bIns="0" rtlCol="0" anchor="t"/>
+          <a:lstStyle/>
+          <a:p>
+            <a:pPr algn="l" indent="0" marL="0">
+              <a:lnSpc>
+                <a:spcPts val="11200"/>
+              </a:lnSpc>
+              <a:buNone/>
+            </a:pPr>
+            <a:r>
+              <a:rPr lang="en-US" sz="14000" spc="-560" kern="0" dirty="0">
                 <a:solidFill>
                   <a:srgbClr val="000000">
                     <a:alpha val="0"/>
@@ -4079,7 +4079,7 @@
               </a:rPr>
               <a:t>01</a:t>
             </a:r>
-            <a:endParaRPr lang="en-US" sz="19000" dirty="0"/>
+            <a:endParaRPr lang="en-US" sz="14000" dirty="0"/>
           </a:p>
         </p:txBody>
       </p:sp>
@@ -4091,27 +4091,27 @@
         </p:nvSpPr>
         <p:spPr>
           <a:xfrm>
-            <a:off x="11434995" y="0"/>
-            <a:ext cx="2924440" cy="1931244"/>
-          </a:xfrm>
-          <a:prstGeom prst="rect">
-            <a:avLst/>
-          </a:prstGeom>
-          <a:noFill/>
-          <a:ln/>
-        </p:spPr>
-        <p:txBody>
-          <a:bodyPr wrap="none" lIns="0" tIns="0" rIns="0" bIns="0" rtlCol="0" anchor="t"/>
-          <a:lstStyle/>
-          <a:p>
-            <a:pPr algn="l" indent="0" marL="0">
-              <a:lnSpc>
-                <a:spcPts val="15200"/>
-              </a:lnSpc>
-              <a:buNone/>
-            </a:pPr>
-            <a:r>
-              <a:rPr lang="en-US" sz="19000" spc="-760" kern="0" dirty="0">
+            <a:off x="12705550" y="76233"/>
+            <a:ext cx="2168202" cy="1423022"/>
+          </a:xfrm>
+          <a:prstGeom prst="rect">
+            <a:avLst/>
+          </a:prstGeom>
+          <a:noFill/>
+          <a:ln/>
+        </p:spPr>
+        <p:txBody>
+          <a:bodyPr wrap="none" lIns="0" tIns="0" rIns="0" bIns="0" rtlCol="0" anchor="t"/>
+          <a:lstStyle/>
+          <a:p>
+            <a:pPr algn="l" indent="0" marL="0">
+              <a:lnSpc>
+                <a:spcPts val="11200"/>
+              </a:lnSpc>
+              <a:buNone/>
+            </a:pPr>
+            <a:r>
+              <a:rPr lang="en-US" sz="14000" spc="-560" kern="0" dirty="0">
                 <a:solidFill>
                   <a:srgbClr val="000000">
                     <a:alpha val="0"/>
@@ -4123,7 +4123,7 @@
               </a:rPr>
               <a:t>02</a:t>
             </a:r>
-            <a:endParaRPr lang="en-US" sz="19000" dirty="0"/>
+            <a:endParaRPr lang="en-US" sz="14000" dirty="0"/>
           </a:p>
         </p:txBody>
       </p:sp>
@@ -4303,27 +4303,27 @@
         </p:nvSpPr>
         <p:spPr>
           <a:xfrm>
-            <a:off x="508222" y="1996328"/>
-            <a:ext cx="3544848" cy="857942"/>
-          </a:xfrm>
-          <a:prstGeom prst="rect">
-            <a:avLst/>
-          </a:prstGeom>
-          <a:noFill/>
-          <a:ln/>
-        </p:spPr>
-        <p:txBody>
-          <a:bodyPr wrap="none" lIns="0" tIns="0" rIns="0" bIns="0" rtlCol="0" anchor="t"/>
-          <a:lstStyle/>
-          <a:p>
-            <a:pPr algn="l" indent="0" marL="0">
-              <a:lnSpc>
-                <a:spcPts val="1351"/>
-              </a:lnSpc>
-              <a:buNone/>
-            </a:pPr>
-            <a:r>
-              <a:rPr lang="en-US" sz="730" spc="20" kern="0" dirty="0">
+            <a:off x="508222" y="1997979"/>
+            <a:ext cx="3544848" cy="904953"/>
+          </a:xfrm>
+          <a:prstGeom prst="rect">
+            <a:avLst/>
+          </a:prstGeom>
+          <a:noFill/>
+          <a:ln/>
+        </p:spPr>
+        <p:txBody>
+          <a:bodyPr wrap="none" lIns="0" tIns="0" rIns="0" bIns="0" rtlCol="0" anchor="t"/>
+          <a:lstStyle/>
+          <a:p>
+            <a:pPr algn="l" indent="0" marL="0">
+              <a:lnSpc>
+                <a:spcPts val="1425"/>
+              </a:lnSpc>
+              <a:buNone/>
+            </a:pPr>
+            <a:r>
+              <a:rPr lang="en-US" sz="770" spc="20" kern="0" dirty="0">
                 <a:solidFill>
                   <a:srgbClr val="3D4249"/>
                 </a:solidFill>
@@ -4331,19 +4331,19 @@
                 <a:ea typeface="Noto Sans JP" pitchFamily="34" charset="-122"/>
                 <a:cs typeface="Noto Sans JP" pitchFamily="34" charset="-120"/>
               </a:rPr>
-              <a:t>三菱商事は、三綱領（所期奉公・処事光明・立業貿易）を企業理念に、経</a:t>
-            </a:r>
-            <a:endParaRPr lang="en-US" sz="730" dirty="0"/>
-          </a:p>
-          <a:p>
-            <a:pPr algn="l" indent="0" marL="0">
-              <a:lnSpc>
-                <a:spcPts val="1351"/>
-              </a:lnSpc>
-              <a:buNone/>
-            </a:pPr>
-            <a:r>
-              <a:rPr lang="en-US" sz="730" spc="20" kern="0" dirty="0">
+              <a:t>三菱商事は、三綱領（所期奉公・処事光明・立業貿易）を企業理念</a:t>
+            </a:r>
+            <a:endParaRPr lang="en-US" sz="770" dirty="0"/>
+          </a:p>
+          <a:p>
+            <a:pPr algn="l" indent="0" marL="0">
+              <a:lnSpc>
+                <a:spcPts val="1425"/>
+              </a:lnSpc>
+              <a:buNone/>
+            </a:pPr>
+            <a:r>
+              <a:rPr lang="en-US" sz="770" spc="20" kern="0" dirty="0">
                 <a:solidFill>
                   <a:srgbClr val="3D4249"/>
                 </a:solidFill>
@@ -4351,19 +4351,19 @@
                 <a:ea typeface="Noto Sans JP" pitchFamily="34" charset="-122"/>
                 <a:cs typeface="Noto Sans JP" pitchFamily="34" charset="-120"/>
               </a:rPr>
-              <a:t>済価値・環境価値・社会価値の同時実現を目指す総合商社です。そのなか</a:t>
-            </a:r>
-            <a:endParaRPr lang="en-US" sz="730" dirty="0"/>
-          </a:p>
-          <a:p>
-            <a:pPr algn="l" indent="0" marL="0">
-              <a:lnSpc>
-                <a:spcPts val="1351"/>
-              </a:lnSpc>
-              <a:buNone/>
-            </a:pPr>
-            <a:r>
-              <a:rPr lang="en-US" sz="730" spc="20" kern="0" dirty="0">
+              <a:t>に、経済価値・環境価値・社会価値の同時実現を目指す総合商社で</a:t>
+            </a:r>
+            <a:endParaRPr lang="en-US" sz="770" dirty="0"/>
+          </a:p>
+          <a:p>
+            <a:pPr algn="l" indent="0" marL="0">
+              <a:lnSpc>
+                <a:spcPts val="1425"/>
+              </a:lnSpc>
+              <a:buNone/>
+            </a:pPr>
+            <a:r>
+              <a:rPr lang="en-US" sz="770" spc="20" kern="0" dirty="0">
                 <a:solidFill>
                   <a:srgbClr val="3D4249"/>
                 </a:solidFill>
@@ -4371,19 +4371,19 @@
                 <a:ea typeface="Noto Sans JP" pitchFamily="34" charset="-122"/>
                 <a:cs typeface="Noto Sans JP" pitchFamily="34" charset="-120"/>
               </a:rPr>
-              <a:t>で金属資源グループは、社会に不可欠な金属資源を世界から確保し、安定</a:t>
-            </a:r>
-            <a:endParaRPr lang="en-US" sz="730" dirty="0"/>
-          </a:p>
-          <a:p>
-            <a:pPr algn="l" indent="0" marL="0">
-              <a:lnSpc>
-                <a:spcPts val="1351"/>
-              </a:lnSpc>
-              <a:buNone/>
-            </a:pPr>
-            <a:r>
-              <a:rPr lang="en-US" sz="730" spc="20" kern="0" dirty="0">
+              <a:t>す。そのなかで金属資源グループは、社会に不可欠な金属資源を世界</a:t>
+            </a:r>
+            <a:endParaRPr lang="en-US" sz="770" dirty="0"/>
+          </a:p>
+          <a:p>
+            <a:pPr algn="l" indent="0" marL="0">
+              <a:lnSpc>
+                <a:spcPts val="1425"/>
+              </a:lnSpc>
+              <a:buNone/>
+            </a:pPr>
+            <a:r>
+              <a:rPr lang="en-US" sz="770" spc="20" kern="0" dirty="0">
                 <a:solidFill>
                   <a:srgbClr val="3D4249"/>
                 </a:solidFill>
@@ -4391,19 +4391,19 @@
                 <a:ea typeface="Noto Sans JP" pitchFamily="34" charset="-122"/>
                 <a:cs typeface="Noto Sans JP" pitchFamily="34" charset="-120"/>
               </a:rPr>
-              <a:t>的に届ける役割を担っています。原料炭と銅は、全社としてコミットする</a:t>
-            </a:r>
-            <a:endParaRPr lang="en-US" sz="730" dirty="0"/>
-          </a:p>
-          <a:p>
-            <a:pPr algn="l" indent="0" marL="0">
-              <a:lnSpc>
-                <a:spcPts val="1351"/>
-              </a:lnSpc>
-              <a:buNone/>
-            </a:pPr>
-            <a:r>
-              <a:rPr lang="en-US" sz="730" spc="20" kern="0" dirty="0">
+              <a:t>から確保し、安定的に届ける役割を担っています。原料炭と銅は、全</a:t>
+            </a:r>
+            <a:endParaRPr lang="en-US" sz="770" dirty="0"/>
+          </a:p>
+          <a:p>
+            <a:pPr algn="l" indent="0" marL="0">
+              <a:lnSpc>
+                <a:spcPts val="1425"/>
+              </a:lnSpc>
+              <a:buNone/>
+            </a:pPr>
+            <a:r>
+              <a:rPr lang="en-US" sz="770" spc="20" kern="0" dirty="0">
                 <a:solidFill>
                   <a:srgbClr val="3D4249"/>
                 </a:solidFill>
@@ -4411,9 +4411,9 @@
                 <a:ea typeface="Noto Sans JP" pitchFamily="34" charset="-122"/>
                 <a:cs typeface="Noto Sans JP" pitchFamily="34" charset="-120"/>
               </a:rPr>
-              <a:t>中核事業です。</a:t>
-            </a:r>
-            <a:endParaRPr lang="en-US" sz="730" dirty="0"/>
+              <a:t>社としてコミットする中核事業です。</a:t>
+            </a:r>
+            <a:endParaRPr lang="en-US" sz="770" dirty="0"/>
           </a:p>
         </p:txBody>
       </p:sp>
@@ -4905,27 +4905,27 @@
         </p:nvSpPr>
         <p:spPr>
           <a:xfrm>
-            <a:off x="508222" y="5023965"/>
-            <a:ext cx="840690" cy="126039"/>
-          </a:xfrm>
-          <a:prstGeom prst="rect">
-            <a:avLst/>
-          </a:prstGeom>
-          <a:noFill/>
-          <a:ln/>
-        </p:spPr>
-        <p:txBody>
-          <a:bodyPr wrap="none" lIns="0" tIns="0" rIns="0" bIns="0" rtlCol="0" anchor="t"/>
-          <a:lstStyle/>
-          <a:p>
-            <a:pPr algn="l" indent="0" marL="0">
-              <a:lnSpc>
-                <a:spcPts val="992"/>
-              </a:lnSpc>
-              <a:buNone/>
-            </a:pPr>
-            <a:r>
-              <a:rPr lang="en-US" sz="620" dirty="0">
+            <a:off x="508222" y="5025235"/>
+            <a:ext cx="904456" cy="136203"/>
+          </a:xfrm>
+          <a:prstGeom prst="rect">
+            <a:avLst/>
+          </a:prstGeom>
+          <a:noFill/>
+          <a:ln/>
+        </p:spPr>
+        <p:txBody>
+          <a:bodyPr wrap="none" lIns="0" tIns="0" rIns="0" bIns="0" rtlCol="0" anchor="t"/>
+          <a:lstStyle/>
+          <a:p>
+            <a:pPr algn="l" indent="0" marL="0">
+              <a:lnSpc>
+                <a:spcPts val="1072"/>
+              </a:lnSpc>
+              <a:buNone/>
+            </a:pPr>
+            <a:r>
+              <a:rPr lang="en-US" sz="670" dirty="0">
                 <a:solidFill>
                   <a:srgbClr val="7D838A"/>
                 </a:solidFill>
@@ -4935,7 +4935,7 @@
               </a:rPr>
               <a:t>主要関係会社：MDP</a:t>
             </a:r>
-            <a:endParaRPr lang="en-US" sz="620" dirty="0"/>
+            <a:endParaRPr lang="en-US" sz="670" dirty="0"/>
           </a:p>
         </p:txBody>
       </p:sp>
@@ -5115,27 +5115,27 @@
         </p:nvSpPr>
         <p:spPr>
           <a:xfrm>
-            <a:off x="2693577" y="5023965"/>
-            <a:ext cx="1099685" cy="126039"/>
-          </a:xfrm>
-          <a:prstGeom prst="rect">
-            <a:avLst/>
-          </a:prstGeom>
-          <a:noFill/>
-          <a:ln/>
-        </p:spPr>
-        <p:txBody>
-          <a:bodyPr wrap="none" lIns="0" tIns="0" rIns="0" bIns="0" rtlCol="0" anchor="t"/>
-          <a:lstStyle/>
-          <a:p>
-            <a:pPr algn="l" indent="0" marL="0">
-              <a:lnSpc>
-                <a:spcPts val="992"/>
-              </a:lnSpc>
-              <a:buNone/>
-            </a:pPr>
-            <a:r>
-              <a:rPr lang="en-US" sz="620" dirty="0">
+            <a:off x="2693577" y="5025235"/>
+            <a:ext cx="1184415" cy="136203"/>
+          </a:xfrm>
+          <a:prstGeom prst="rect">
+            <a:avLst/>
+          </a:prstGeom>
+          <a:noFill/>
+          <a:ln/>
+        </p:spPr>
+        <p:txBody>
+          <a:bodyPr wrap="none" lIns="0" tIns="0" rIns="0" bIns="0" rtlCol="0" anchor="t"/>
+          <a:lstStyle/>
+          <a:p>
+            <a:pPr algn="l" indent="0" marL="0">
+              <a:lnSpc>
+                <a:spcPts val="1072"/>
+              </a:lnSpc>
+              <a:buNone/>
+            </a:pPr>
+            <a:r>
+              <a:rPr lang="en-US" sz="670" dirty="0">
                 <a:solidFill>
                   <a:srgbClr val="7D838A"/>
                 </a:solidFill>
@@ -5145,7 +5145,7 @@
               </a:rPr>
               <a:t>主要関係会社：MCI · MCIP</a:t>
             </a:r>
-            <a:endParaRPr lang="en-US" sz="620" dirty="0"/>
+            <a:endParaRPr lang="en-US" sz="670" dirty="0"/>
           </a:p>
         </p:txBody>
       </p:sp>
@@ -5325,27 +5325,27 @@
         </p:nvSpPr>
         <p:spPr>
           <a:xfrm>
-            <a:off x="4878931" y="5023965"/>
-            <a:ext cx="1465466" cy="126039"/>
-          </a:xfrm>
-          <a:prstGeom prst="rect">
-            <a:avLst/>
-          </a:prstGeom>
-          <a:noFill/>
-          <a:ln/>
-        </p:spPr>
-        <p:txBody>
-          <a:bodyPr wrap="none" lIns="0" tIns="0" rIns="0" bIns="0" rtlCol="0" anchor="t"/>
-          <a:lstStyle/>
-          <a:p>
-            <a:pPr algn="l" indent="0" marL="0">
-              <a:lnSpc>
-                <a:spcPts val="992"/>
-              </a:lnSpc>
-              <a:buNone/>
-            </a:pPr>
-            <a:r>
-              <a:rPr lang="en-US" sz="620" dirty="0">
+            <a:off x="4878931" y="5025235"/>
+            <a:ext cx="1579895" cy="136203"/>
+          </a:xfrm>
+          <a:prstGeom prst="rect">
+            <a:avLst/>
+          </a:prstGeom>
+          <a:noFill/>
+          <a:ln/>
+        </p:spPr>
+        <p:txBody>
+          <a:bodyPr wrap="none" lIns="0" tIns="0" rIns="0" bIns="0" rtlCol="0" anchor="t"/>
+          <a:lstStyle/>
+          <a:p>
+            <a:pPr algn="l" indent="0" marL="0">
+              <a:lnSpc>
+                <a:spcPts val="1072"/>
+              </a:lnSpc>
+              <a:buNone/>
+            </a:pPr>
+            <a:r>
+              <a:rPr lang="en-US" sz="670" dirty="0">
                 <a:solidFill>
                   <a:srgbClr val="7D838A"/>
                 </a:solidFill>
@@ -5355,7 +5355,7 @@
               </a:rPr>
               <a:t>主要関係会社：RtM · Triland Metals</a:t>
             </a:r>
-            <a:endParaRPr lang="en-US" sz="620" dirty="0"/>
+            <a:endParaRPr lang="en-US" sz="670" dirty="0"/>
           </a:p>
         </p:txBody>
       </p:sp>
@@ -5535,27 +5535,27 @@
         </p:nvSpPr>
         <p:spPr>
           <a:xfrm>
-            <a:off x="508222" y="6116642"/>
-            <a:ext cx="2039797" cy="126039"/>
-          </a:xfrm>
-          <a:prstGeom prst="rect">
-            <a:avLst/>
-          </a:prstGeom>
-          <a:noFill/>
-          <a:ln/>
-        </p:spPr>
-        <p:txBody>
-          <a:bodyPr wrap="none" lIns="0" tIns="0" rIns="0" bIns="0" rtlCol="0" anchor="t"/>
-          <a:lstStyle/>
-          <a:p>
-            <a:pPr algn="l" indent="0" marL="0">
-              <a:lnSpc>
-                <a:spcPts val="992"/>
-              </a:lnSpc>
-              <a:buNone/>
-            </a:pPr>
-            <a:r>
-              <a:rPr lang="en-US" sz="620" dirty="0">
+            <a:off x="508222" y="6117913"/>
+            <a:ext cx="2200522" cy="136203"/>
+          </a:xfrm>
+          <a:prstGeom prst="rect">
+            <a:avLst/>
+          </a:prstGeom>
+          <a:noFill/>
+          <a:ln/>
+        </p:spPr>
+        <p:txBody>
+          <a:bodyPr wrap="none" lIns="0" tIns="0" rIns="0" bIns="0" rtlCol="0" anchor="t"/>
+          <a:lstStyle/>
+          <a:p>
+            <a:pPr algn="l" indent="0" marL="0">
+              <a:lnSpc>
+                <a:spcPts val="1072"/>
+              </a:lnSpc>
+              <a:buNone/>
+            </a:pPr>
+            <a:r>
+              <a:rPr lang="en-US" sz="670" dirty="0">
                 <a:solidFill>
                   <a:srgbClr val="7D838A"/>
                 </a:solidFill>
@@ -5565,7 +5565,7 @@
               </a:rPr>
               <a:t>事業を通じ、物心ともに豊かな社会の実現に努める</a:t>
             </a:r>
-            <a:endParaRPr lang="en-US" sz="620" dirty="0"/>
+            <a:endParaRPr lang="en-US" sz="670" dirty="0"/>
           </a:p>
         </p:txBody>
       </p:sp>
@@ -5661,27 +5661,27 @@
         </p:nvSpPr>
         <p:spPr>
           <a:xfrm>
-            <a:off x="2693577" y="6116642"/>
-            <a:ext cx="1518532" cy="126039"/>
-          </a:xfrm>
-          <a:prstGeom prst="rect">
-            <a:avLst/>
-          </a:prstGeom>
-          <a:noFill/>
-          <a:ln/>
-        </p:spPr>
-        <p:txBody>
-          <a:bodyPr wrap="none" lIns="0" tIns="0" rIns="0" bIns="0" rtlCol="0" anchor="t"/>
-          <a:lstStyle/>
-          <a:p>
-            <a:pPr algn="l" indent="0" marL="0">
-              <a:lnSpc>
-                <a:spcPts val="992"/>
-              </a:lnSpc>
-              <a:buNone/>
-            </a:pPr>
-            <a:r>
-              <a:rPr lang="en-US" sz="620" dirty="0">
+            <a:off x="2693577" y="6117913"/>
+            <a:ext cx="1637110" cy="136203"/>
+          </a:xfrm>
+          <a:prstGeom prst="rect">
+            <a:avLst/>
+          </a:prstGeom>
+          <a:noFill/>
+          <a:ln/>
+        </p:spPr>
+        <p:txBody>
+          <a:bodyPr wrap="none" lIns="0" tIns="0" rIns="0" bIns="0" rtlCol="0" anchor="t"/>
+          <a:lstStyle/>
+          <a:p>
+            <a:pPr algn="l" indent="0" marL="0">
+              <a:lnSpc>
+                <a:spcPts val="1072"/>
+              </a:lnSpc>
+              <a:buNone/>
+            </a:pPr>
+            <a:r>
+              <a:rPr lang="en-US" sz="670" dirty="0">
                 <a:solidFill>
                   <a:srgbClr val="7D838A"/>
                 </a:solidFill>
@@ -5691,7 +5691,7 @@
               </a:rPr>
               <a:t>公明正大で品格のある行動を旨とする</a:t>
             </a:r>
-            <a:endParaRPr lang="en-US" sz="620" dirty="0"/>
+            <a:endParaRPr lang="en-US" sz="670" dirty="0"/>
           </a:p>
         </p:txBody>
       </p:sp>
@@ -5787,27 +5787,27 @@
         </p:nvSpPr>
         <p:spPr>
           <a:xfrm>
-            <a:off x="4878931" y="6116642"/>
-            <a:ext cx="1953319" cy="126039"/>
-          </a:xfrm>
-          <a:prstGeom prst="rect">
-            <a:avLst/>
-          </a:prstGeom>
-          <a:noFill/>
-          <a:ln/>
-        </p:spPr>
-        <p:txBody>
-          <a:bodyPr wrap="none" lIns="0" tIns="0" rIns="0" bIns="0" rtlCol="0" anchor="t"/>
-          <a:lstStyle/>
-          <a:p>
-            <a:pPr algn="l" indent="0" marL="0">
-              <a:lnSpc>
-                <a:spcPts val="992"/>
-              </a:lnSpc>
-              <a:buNone/>
-            </a:pPr>
-            <a:r>
-              <a:rPr lang="en-US" sz="620" dirty="0">
+            <a:off x="4878931" y="6117913"/>
+            <a:ext cx="2107057" cy="136203"/>
+          </a:xfrm>
+          <a:prstGeom prst="rect">
+            <a:avLst/>
+          </a:prstGeom>
+          <a:noFill/>
+          <a:ln/>
+        </p:spPr>
+        <p:txBody>
+          <a:bodyPr wrap="none" lIns="0" tIns="0" rIns="0" bIns="0" rtlCol="0" anchor="t"/>
+          <a:lstStyle/>
+          <a:p>
+            <a:pPr algn="l" indent="0" marL="0">
+              <a:lnSpc>
+                <a:spcPts val="1072"/>
+              </a:lnSpc>
+              <a:buNone/>
+            </a:pPr>
+            <a:r>
+              <a:rPr lang="en-US" sz="670" dirty="0">
                 <a:solidFill>
                   <a:srgbClr val="7D838A"/>
                 </a:solidFill>
@@ -5817,7 +5817,7 @@
               </a:rPr>
               <a:t>全世界的、宇宙的視野に立脚した事業展開を図る</a:t>
             </a:r>
-            <a:endParaRPr lang="en-US" sz="620" dirty="0"/>
+            <a:endParaRPr lang="en-US" sz="670" dirty="0"/>
           </a:p>
         </p:txBody>
       </p:sp>
@@ -6017,27 +6017,27 @@
         </p:nvSpPr>
         <p:spPr>
           <a:xfrm>
-            <a:off x="8068024" y="2566489"/>
-            <a:ext cx="3544848" cy="514765"/>
-          </a:xfrm>
-          <a:prstGeom prst="rect">
-            <a:avLst/>
-          </a:prstGeom>
-          <a:noFill/>
-          <a:ln/>
-        </p:spPr>
-        <p:txBody>
-          <a:bodyPr wrap="none" lIns="0" tIns="0" rIns="0" bIns="0" rtlCol="0" anchor="t"/>
-          <a:lstStyle/>
-          <a:p>
-            <a:pPr algn="l" indent="0" marL="0">
-              <a:lnSpc>
-                <a:spcPts val="1351"/>
-              </a:lnSpc>
-              <a:buNone/>
-            </a:pPr>
-            <a:r>
-              <a:rPr lang="en-US" sz="730" spc="20" kern="0" dirty="0">
+            <a:off x="8068024" y="2568141"/>
+            <a:ext cx="3544848" cy="723962"/>
+          </a:xfrm>
+          <a:prstGeom prst="rect">
+            <a:avLst/>
+          </a:prstGeom>
+          <a:noFill/>
+          <a:ln/>
+        </p:spPr>
+        <p:txBody>
+          <a:bodyPr wrap="none" lIns="0" tIns="0" rIns="0" bIns="0" rtlCol="0" anchor="t"/>
+          <a:lstStyle/>
+          <a:p>
+            <a:pPr algn="l" indent="0" marL="0">
+              <a:lnSpc>
+                <a:spcPts val="1425"/>
+              </a:lnSpc>
+              <a:buNone/>
+            </a:pPr>
+            <a:r>
+              <a:rPr lang="en-US" sz="770" spc="20" kern="0" dirty="0">
                 <a:solidFill>
                   <a:srgbClr val="3D4249"/>
                 </a:solidFill>
@@ -6045,19 +6045,19 @@
                 <a:ea typeface="Noto Sans JP" pitchFamily="34" charset="-122"/>
                 <a:cs typeface="Noto Sans JP" pitchFamily="34" charset="-120"/>
               </a:rPr>
-              <a:t>資源事業は規模の経済が働くビジネスです。私たちは、規模で世界上位に</a:t>
-            </a:r>
-            <a:endParaRPr lang="en-US" sz="730" dirty="0"/>
-          </a:p>
-          <a:p>
-            <a:pPr algn="l" indent="0" marL="0">
-              <a:lnSpc>
-                <a:spcPts val="1351"/>
-              </a:lnSpc>
-              <a:buNone/>
-            </a:pPr>
-            <a:r>
-              <a:rPr lang="en-US" sz="730" spc="20" kern="0" dirty="0">
+              <a:t>資源事業は規模の経済が働くビジネスです。私たちは、規模で世界上</a:t>
+            </a:r>
+            <a:endParaRPr lang="en-US" sz="770" dirty="0"/>
+          </a:p>
+          <a:p>
+            <a:pPr algn="l" indent="0" marL="0">
+              <a:lnSpc>
+                <a:spcPts val="1425"/>
+              </a:lnSpc>
+              <a:buNone/>
+            </a:pPr>
+            <a:r>
+              <a:rPr lang="en-US" sz="770" spc="20" kern="0" dirty="0">
                 <a:solidFill>
                   <a:srgbClr val="3D4249"/>
                 </a:solidFill>
@@ -6065,19 +6065,19 @@
                 <a:ea typeface="Noto Sans JP" pitchFamily="34" charset="-122"/>
                 <a:cs typeface="Noto Sans JP" pitchFamily="34" charset="-120"/>
               </a:rPr>
-              <a:t>入る優良鉱山に早くから参画し、現在では資金があっても手に入らない資</a:t>
-            </a:r>
-            <a:endParaRPr lang="en-US" sz="730" dirty="0"/>
-          </a:p>
-          <a:p>
-            <a:pPr algn="l" indent="0" marL="0">
-              <a:lnSpc>
-                <a:spcPts val="1351"/>
-              </a:lnSpc>
-              <a:buNone/>
-            </a:pPr>
-            <a:r>
-              <a:rPr lang="en-US" sz="730" spc="20" kern="0" dirty="0">
+              <a:t>位に入る優良鉱山に早くから参画し、現在では資金があっても手に入</a:t>
+            </a:r>
+            <a:endParaRPr lang="en-US" sz="770" dirty="0"/>
+          </a:p>
+          <a:p>
+            <a:pPr algn="l" indent="0" marL="0">
+              <a:lnSpc>
+                <a:spcPts val="1425"/>
+              </a:lnSpc>
+              <a:buNone/>
+            </a:pPr>
+            <a:r>
+              <a:rPr lang="en-US" sz="770" spc="20" kern="0" dirty="0">
                 <a:solidFill>
                   <a:srgbClr val="3D4249"/>
                 </a:solidFill>
@@ -6085,9 +6085,29 @@
                 <a:ea typeface="Noto Sans JP" pitchFamily="34" charset="-122"/>
                 <a:cs typeface="Noto Sans JP" pitchFamily="34" charset="-120"/>
               </a:rPr>
-              <a:t>産のポートフォリオを築いてきました。その中核が、原料炭と銅です。</a:t>
-            </a:r>
-            <a:endParaRPr lang="en-US" sz="730" dirty="0"/>
+              <a:t>らない資産のポートフォリオを築いてきました。その中核が、原料炭</a:t>
+            </a:r>
+            <a:endParaRPr lang="en-US" sz="770" dirty="0"/>
+          </a:p>
+          <a:p>
+            <a:pPr algn="l" indent="0" marL="0">
+              <a:lnSpc>
+                <a:spcPts val="1425"/>
+              </a:lnSpc>
+              <a:buNone/>
+            </a:pPr>
+            <a:r>
+              <a:rPr lang="en-US" sz="770" spc="20" kern="0" dirty="0">
+                <a:solidFill>
+                  <a:srgbClr val="3D4249"/>
+                </a:solidFill>
+                <a:latin typeface="Noto Sans JP" pitchFamily="34" charset="0"/>
+                <a:ea typeface="Noto Sans JP" pitchFamily="34" charset="-122"/>
+                <a:cs typeface="Noto Sans JP" pitchFamily="34" charset="-120"/>
+              </a:rPr>
+              <a:t>と銅です。</a:t>
+            </a:r>
+            <a:endParaRPr lang="en-US" sz="770" dirty="0"/>
           </a:p>
         </p:txBody>
       </p:sp>
@@ -6100,7 +6120,7 @@
         <p:spPr>
           <a:xfrm>
             <a:off x="12395455" y="5352411"/>
-            <a:ext cx="1014955" cy="254111"/>
+            <a:ext cx="1040068" cy="254111"/>
           </a:xfrm>
           <a:prstGeom prst="rect">
             <a:avLst/>
@@ -6139,7 +6159,7 @@
               <a:buNone/>
             </a:pPr>
             <a:r>
-              <a:rPr lang="en-US" sz="620" dirty="0">
+              <a:rPr lang="en-US" sz="670" dirty="0">
                 <a:solidFill>
                   <a:srgbClr val="7D838A"/>
                 </a:solidFill>
@@ -6162,7 +6182,7 @@
         <p:spPr>
           <a:xfrm>
             <a:off x="9938519" y="5409586"/>
-            <a:ext cx="528194" cy="254111"/>
+            <a:ext cx="566846" cy="254111"/>
           </a:xfrm>
           <a:prstGeom prst="rect">
             <a:avLst/>
@@ -6201,7 +6221,7 @@
               <a:buNone/>
             </a:pPr>
             <a:r>
-              <a:rPr lang="en-US" sz="620" dirty="0">
+              <a:rPr lang="en-US" sz="670" dirty="0">
                 <a:solidFill>
                   <a:srgbClr val="7D838A"/>
                 </a:solidFill>
@@ -6263,7 +6283,7 @@
               <a:buNone/>
             </a:pPr>
             <a:r>
-              <a:rPr lang="en-US" sz="620" dirty="0">
+              <a:rPr lang="en-US" sz="670" dirty="0">
                 <a:solidFill>
                   <a:srgbClr val="7D838A"/>
                 </a:solidFill>
@@ -6369,27 +6389,27 @@
         </p:nvSpPr>
         <p:spPr>
           <a:xfrm>
-            <a:off x="8068024" y="6865078"/>
-            <a:ext cx="1633834" cy="126039"/>
-          </a:xfrm>
-          <a:prstGeom prst="rect">
-            <a:avLst/>
-          </a:prstGeom>
-          <a:noFill/>
-          <a:ln/>
-        </p:spPr>
-        <p:txBody>
-          <a:bodyPr wrap="none" lIns="0" tIns="0" rIns="0" bIns="0" rtlCol="0" anchor="t"/>
-          <a:lstStyle/>
-          <a:p>
-            <a:pPr algn="l" indent="0" marL="0">
-              <a:lnSpc>
-                <a:spcPts val="992"/>
-              </a:lnSpc>
-              <a:buNone/>
-            </a:pPr>
-            <a:r>
-              <a:rPr lang="en-US" sz="620" dirty="0">
+            <a:off x="8068024" y="6866349"/>
+            <a:ext cx="1761585" cy="136203"/>
+          </a:xfrm>
+          <a:prstGeom prst="rect">
+            <a:avLst/>
+          </a:prstGeom>
+          <a:noFill/>
+          <a:ln/>
+        </p:spPr>
+        <p:txBody>
+          <a:bodyPr wrap="none" lIns="0" tIns="0" rIns="0" bIns="0" rtlCol="0" anchor="t"/>
+          <a:lstStyle/>
+          <a:p>
+            <a:pPr algn="l" indent="0" marL="0">
+              <a:lnSpc>
+                <a:spcPts val="1072"/>
+              </a:lnSpc>
+              <a:buNone/>
+            </a:pPr>
+            <a:r>
+              <a:rPr lang="en-US" sz="670" dirty="0">
                 <a:solidFill>
                   <a:srgbClr val="7D838A"/>
                 </a:solidFill>
@@ -6399,7 +6419,7 @@
               </a:rPr>
               <a:t>銅の主要5鉱山すべてが規模で世界Top15</a:t>
             </a:r>
-            <a:endParaRPr lang="en-US" sz="620" dirty="0"/>
+            <a:endParaRPr lang="en-US" sz="670" dirty="0"/>
           </a:p>
         </p:txBody>
       </p:sp>
@@ -6495,27 +6515,27 @@
         </p:nvSpPr>
         <p:spPr>
           <a:xfrm>
-            <a:off x="10304201" y="6865078"/>
-            <a:ext cx="1787135" cy="126039"/>
-          </a:xfrm>
-          <a:prstGeom prst="rect">
-            <a:avLst/>
-          </a:prstGeom>
-          <a:noFill/>
-          <a:ln/>
-        </p:spPr>
-        <p:txBody>
-          <a:bodyPr wrap="none" lIns="0" tIns="0" rIns="0" bIns="0" rtlCol="0" anchor="t"/>
-          <a:lstStyle/>
-          <a:p>
-            <a:pPr algn="l" indent="0" marL="0">
-              <a:lnSpc>
-                <a:spcPts val="992"/>
-              </a:lnSpc>
-              <a:buNone/>
-            </a:pPr>
-            <a:r>
-              <a:rPr lang="en-US" sz="620" dirty="0">
+            <a:off x="10304201" y="6866349"/>
+            <a:ext cx="1927333" cy="136203"/>
+          </a:xfrm>
+          <a:prstGeom prst="rect">
+            <a:avLst/>
+          </a:prstGeom>
+          <a:noFill/>
+          <a:ln/>
+        </p:spPr>
+        <p:txBody>
+          <a:bodyPr wrap="none" lIns="0" tIns="0" rIns="0" bIns="0" rtlCol="0" anchor="t"/>
+          <a:lstStyle/>
+          <a:p>
+            <a:pPr algn="l" indent="0" marL="0">
+              <a:lnSpc>
+                <a:spcPts val="1072"/>
+              </a:lnSpc>
+              <a:buNone/>
+            </a:pPr>
+            <a:r>
+              <a:rPr lang="en-US" sz="670" dirty="0">
                 <a:solidFill>
                   <a:srgbClr val="7D838A"/>
                 </a:solidFill>
@@ -6525,7 +6545,7 @@
               </a:rPr>
               <a:t>一級強粘炭の世界供給に占めるBMAのシェア</a:t>
             </a:r>
-            <a:endParaRPr lang="en-US" sz="620" dirty="0"/>
+            <a:endParaRPr lang="en-US" sz="670" dirty="0"/>
           </a:p>
         </p:txBody>
       </p:sp>
@@ -6621,27 +6641,27 @@
         </p:nvSpPr>
         <p:spPr>
           <a:xfrm>
-            <a:off x="12540377" y="6865078"/>
-            <a:ext cx="742639" cy="126039"/>
-          </a:xfrm>
-          <a:prstGeom prst="rect">
-            <a:avLst/>
-          </a:prstGeom>
-          <a:noFill/>
-          <a:ln/>
-        </p:spPr>
-        <p:txBody>
-          <a:bodyPr wrap="none" lIns="0" tIns="0" rIns="0" bIns="0" rtlCol="0" anchor="t"/>
-          <a:lstStyle/>
-          <a:p>
-            <a:pPr algn="l" indent="0" marL="0">
-              <a:lnSpc>
-                <a:spcPts val="992"/>
-              </a:lnSpc>
-              <a:buNone/>
-            </a:pPr>
-            <a:r>
-              <a:rPr lang="en-US" sz="620" dirty="0">
+            <a:off x="12540377" y="6866349"/>
+            <a:ext cx="798544" cy="136203"/>
+          </a:xfrm>
+          <a:prstGeom prst="rect">
+            <a:avLst/>
+          </a:prstGeom>
+          <a:noFill/>
+          <a:ln/>
+        </p:spPr>
+        <p:txBody>
+          <a:bodyPr wrap="none" lIns="0" tIns="0" rIns="0" bIns="0" rtlCol="0" anchor="t"/>
+          <a:lstStyle/>
+          <a:p>
+            <a:pPr algn="l" indent="0" marL="0">
+              <a:lnSpc>
+                <a:spcPts val="1072"/>
+              </a:lnSpc>
+              <a:buNone/>
+            </a:pPr>
+            <a:r>
+              <a:rPr lang="en-US" sz="670" dirty="0">
                 <a:solidFill>
                   <a:srgbClr val="7D838A"/>
                 </a:solidFill>
@@ -6651,7 +6671,7 @@
               </a:rPr>
               <a:t>原料炭の炭鉱寿命</a:t>
             </a:r>
-            <a:endParaRPr lang="en-US" sz="620" dirty="0"/>
+            <a:endParaRPr lang="en-US" sz="670" dirty="0"/>
           </a:p>
         </p:txBody>
       </p:sp>
@@ -8080,27 +8100,27 @@
         </p:nvSpPr>
         <p:spPr>
           <a:xfrm>
-            <a:off x="508222" y="5733347"/>
-            <a:ext cx="3544848" cy="857942"/>
-          </a:xfrm>
-          <a:prstGeom prst="rect">
-            <a:avLst/>
-          </a:prstGeom>
-          <a:noFill/>
-          <a:ln/>
-        </p:spPr>
-        <p:txBody>
-          <a:bodyPr wrap="none" lIns="0" tIns="0" rIns="0" bIns="0" rtlCol="0" anchor="t"/>
-          <a:lstStyle/>
-          <a:p>
-            <a:pPr algn="l" indent="0" marL="0">
-              <a:lnSpc>
-                <a:spcPts val="1351"/>
-              </a:lnSpc>
-              <a:buNone/>
-            </a:pPr>
-            <a:r>
-              <a:rPr lang="en-US" sz="730" spc="20" kern="0" dirty="0">
+            <a:off x="508222" y="5734999"/>
+            <a:ext cx="3544848" cy="1085943"/>
+          </a:xfrm>
+          <a:prstGeom prst="rect">
+            <a:avLst/>
+          </a:prstGeom>
+          <a:noFill/>
+          <a:ln/>
+        </p:spPr>
+        <p:txBody>
+          <a:bodyPr wrap="none" lIns="0" tIns="0" rIns="0" bIns="0" rtlCol="0" anchor="t"/>
+          <a:lstStyle/>
+          <a:p>
+            <a:pPr algn="l" indent="0" marL="0">
+              <a:lnSpc>
+                <a:spcPts val="1425"/>
+              </a:lnSpc>
+              <a:buNone/>
+            </a:pPr>
+            <a:r>
+              <a:rPr lang="en-US" sz="770" spc="20" kern="0" dirty="0">
                 <a:solidFill>
                   <a:srgbClr val="3D4249"/>
                 </a:solidFill>
@@ -8108,19 +8128,19 @@
                 <a:ea typeface="Noto Sans JP" pitchFamily="34" charset="-122"/>
                 <a:cs typeface="Noto Sans JP" pitchFamily="34" charset="-120"/>
               </a:rPr>
-              <a:t>BHPと50:50の合弁であるBMA（BHP Mitsubishi Alliance）を通じ、豪州</a:t>
-            </a:r>
-            <a:endParaRPr lang="en-US" sz="730" dirty="0"/>
-          </a:p>
-          <a:p>
-            <a:pPr algn="l" indent="0" marL="0">
-              <a:lnSpc>
-                <a:spcPts val="1351"/>
-              </a:lnSpc>
-              <a:buNone/>
-            </a:pPr>
-            <a:r>
-              <a:rPr lang="en-US" sz="730" spc="20" kern="0" dirty="0">
+              <a:t>BHPと50:50の合弁であるBMA（BHP Mitsubishi Alliance）を通じ、</a:t>
+            </a:r>
+            <a:endParaRPr lang="en-US" sz="770" dirty="0"/>
+          </a:p>
+          <a:p>
+            <a:pPr algn="l" indent="0" marL="0">
+              <a:lnSpc>
+                <a:spcPts val="1425"/>
+              </a:lnSpc>
+              <a:buNone/>
+            </a:pPr>
+            <a:r>
+              <a:rPr lang="en-US" sz="770" spc="20" kern="0" dirty="0">
                 <a:solidFill>
                   <a:srgbClr val="3D4249"/>
                 </a:solidFill>
@@ -8128,19 +8148,19 @@
                 <a:ea typeface="Noto Sans JP" pitchFamily="34" charset="-122"/>
                 <a:cs typeface="Noto Sans JP" pitchFamily="34" charset="-120"/>
               </a:rPr>
-              <a:t>クイーンズランド州ボーエン・ベースンで世界最高品位の原料炭事業に参</a:t>
-            </a:r>
-            <a:endParaRPr lang="en-US" sz="730" dirty="0"/>
-          </a:p>
-          <a:p>
-            <a:pPr algn="l" indent="0" marL="0">
-              <a:lnSpc>
-                <a:spcPts val="1351"/>
-              </a:lnSpc>
-              <a:buNone/>
-            </a:pPr>
-            <a:r>
-              <a:rPr lang="en-US" sz="730" spc="20" kern="0" dirty="0">
+              <a:t>豪州クイーンズランド州ボーエン・ベースンで世界最高品位の原料炭</a:t>
+            </a:r>
+            <a:endParaRPr lang="en-US" sz="770" dirty="0"/>
+          </a:p>
+          <a:p>
+            <a:pPr algn="l" indent="0" marL="0">
+              <a:lnSpc>
+                <a:spcPts val="1425"/>
+              </a:lnSpc>
+              <a:buNone/>
+            </a:pPr>
+            <a:r>
+              <a:rPr lang="en-US" sz="770" spc="20" kern="0" dirty="0">
                 <a:solidFill>
                   <a:srgbClr val="3D4249"/>
                 </a:solidFill>
@@ -8148,19 +8168,19 @@
                 <a:ea typeface="Noto Sans JP" pitchFamily="34" charset="-122"/>
                 <a:cs typeface="Noto Sans JP" pitchFamily="34" charset="-120"/>
               </a:rPr>
-              <a:t>画しています。炭鉱（露天掘4・坑内掘1）に加え、港湾と鉄道までを自社</a:t>
-            </a:r>
-            <a:endParaRPr lang="en-US" sz="730" dirty="0"/>
-          </a:p>
-          <a:p>
-            <a:pPr algn="l" indent="0" marL="0">
-              <a:lnSpc>
-                <a:spcPts val="1351"/>
-              </a:lnSpc>
-              <a:buNone/>
-            </a:pPr>
-            <a:r>
-              <a:rPr lang="en-US" sz="730" spc="20" kern="0" dirty="0">
+              <a:t>事業に参画しています。炭鉱（露天掘4・坑内掘1）に加え、港湾と鉄</a:t>
+            </a:r>
+            <a:endParaRPr lang="en-US" sz="770" dirty="0"/>
+          </a:p>
+          <a:p>
+            <a:pPr algn="l" indent="0" marL="0">
+              <a:lnSpc>
+                <a:spcPts val="1425"/>
+              </a:lnSpc>
+              <a:buNone/>
+            </a:pPr>
+            <a:r>
+              <a:rPr lang="en-US" sz="770" spc="20" kern="0" dirty="0">
                 <a:solidFill>
                   <a:srgbClr val="3D4249"/>
                 </a:solidFill>
@@ -8168,19 +8188,19 @@
                 <a:ea typeface="Noto Sans JP" pitchFamily="34" charset="-122"/>
                 <a:cs typeface="Noto Sans JP" pitchFamily="34" charset="-120"/>
               </a:rPr>
-              <a:t>で保有し、山から港まで全体最適で運営。保有鉱山は高品位のものに集約</a:t>
-            </a:r>
-            <a:endParaRPr lang="en-US" sz="730" dirty="0"/>
-          </a:p>
-          <a:p>
-            <a:pPr algn="l" indent="0" marL="0">
-              <a:lnSpc>
-                <a:spcPts val="1351"/>
-              </a:lnSpc>
-              <a:buNone/>
-            </a:pPr>
-            <a:r>
-              <a:rPr lang="en-US" sz="730" spc="20" kern="0" dirty="0">
+              <a:t>道までを自社で保有し、山から港まで全体最適で運営。保有鉱山は高</a:t>
+            </a:r>
+            <a:endParaRPr lang="en-US" sz="770" dirty="0"/>
+          </a:p>
+          <a:p>
+            <a:pPr algn="l" indent="0" marL="0">
+              <a:lnSpc>
+                <a:spcPts val="1425"/>
+              </a:lnSpc>
+              <a:buNone/>
+            </a:pPr>
+            <a:r>
+              <a:rPr lang="en-US" sz="770" spc="20" kern="0" dirty="0">
                 <a:solidFill>
                   <a:srgbClr val="3D4249"/>
                 </a:solidFill>
@@ -8188,9 +8208,29 @@
                 <a:ea typeface="Noto Sans JP" pitchFamily="34" charset="-122"/>
                 <a:cs typeface="Noto Sans JP" pitchFamily="34" charset="-120"/>
               </a:rPr>
-              <a:t>し、高品位原料の供給を通じて鉄鋼業の脱炭素にも貢献しています。</a:t>
-            </a:r>
-            <a:endParaRPr lang="en-US" sz="730" dirty="0"/>
+              <a:t>品位のものに集約し、高品位原料の供給を通じて鉄鋼業の脱炭素にも</a:t>
+            </a:r>
+            <a:endParaRPr lang="en-US" sz="770" dirty="0"/>
+          </a:p>
+          <a:p>
+            <a:pPr algn="l" indent="0" marL="0">
+              <a:lnSpc>
+                <a:spcPts val="1425"/>
+              </a:lnSpc>
+              <a:buNone/>
+            </a:pPr>
+            <a:r>
+              <a:rPr lang="en-US" sz="770" spc="20" kern="0" dirty="0">
+                <a:solidFill>
+                  <a:srgbClr val="3D4249"/>
+                </a:solidFill>
+                <a:latin typeface="Noto Sans JP" pitchFamily="34" charset="0"/>
+                <a:ea typeface="Noto Sans JP" pitchFamily="34" charset="-122"/>
+                <a:cs typeface="Noto Sans JP" pitchFamily="34" charset="-120"/>
+              </a:rPr>
+              <a:t>貢献しています。</a:t>
+            </a:r>
+            <a:endParaRPr lang="en-US" sz="770" dirty="0"/>
           </a:p>
         </p:txBody>
       </p:sp>
@@ -9398,27 +9438,27 @@
         </p:nvSpPr>
         <p:spPr>
           <a:xfrm>
-            <a:off x="8068024" y="5733347"/>
-            <a:ext cx="3544848" cy="857942"/>
-          </a:xfrm>
-          <a:prstGeom prst="rect">
-            <a:avLst/>
-          </a:prstGeom>
-          <a:noFill/>
-          <a:ln/>
-        </p:spPr>
-        <p:txBody>
-          <a:bodyPr wrap="none" lIns="0" tIns="0" rIns="0" bIns="0" rtlCol="0" anchor="t"/>
-          <a:lstStyle/>
-          <a:p>
-            <a:pPr algn="l" indent="0" marL="0">
-              <a:lnSpc>
-                <a:spcPts val="1351"/>
-              </a:lnSpc>
-              <a:buNone/>
-            </a:pPr>
-            <a:r>
-              <a:rPr lang="en-US" sz="730" spc="20" kern="0" dirty="0">
+            <a:off x="8068024" y="5734999"/>
+            <a:ext cx="3544848" cy="1085943"/>
+          </a:xfrm>
+          <a:prstGeom prst="rect">
+            <a:avLst/>
+          </a:prstGeom>
+          <a:noFill/>
+          <a:ln/>
+        </p:spPr>
+        <p:txBody>
+          <a:bodyPr wrap="none" lIns="0" tIns="0" rIns="0" bIns="0" rtlCol="0" anchor="t"/>
+          <a:lstStyle/>
+          <a:p>
+            <a:pPr algn="l" indent="0" marL="0">
+              <a:lnSpc>
+                <a:spcPts val="1425"/>
+              </a:lnSpc>
+              <a:buNone/>
+            </a:pPr>
+            <a:r>
+              <a:rPr lang="en-US" sz="770" spc="20" kern="0" dirty="0">
                 <a:solidFill>
                   <a:srgbClr val="3D4249"/>
                 </a:solidFill>
@@ -9426,19 +9466,19 @@
                 <a:ea typeface="Noto Sans JP" pitchFamily="34" charset="-122"/>
                 <a:cs typeface="Noto Sans JP" pitchFamily="34" charset="-120"/>
               </a:rPr>
-              <a:t>銅は原料炭に比べてプレイヤーが多く、寡占化が進んでいない市場です。</a:t>
-            </a:r>
-            <a:endParaRPr lang="en-US" sz="730" dirty="0"/>
-          </a:p>
-          <a:p>
-            <a:pPr algn="l" indent="0" marL="0">
-              <a:lnSpc>
-                <a:spcPts val="1351"/>
-              </a:lnSpc>
-              <a:buNone/>
-            </a:pPr>
-            <a:r>
-              <a:rPr lang="en-US" sz="730" spc="20" kern="0" dirty="0">
+              <a:t>銅は原料炭に比べてプレイヤーが多く、寡占化が進んでいない市場で</a:t>
+            </a:r>
+            <a:endParaRPr lang="en-US" sz="770" dirty="0"/>
+          </a:p>
+          <a:p>
+            <a:pPr algn="l" indent="0" marL="0">
+              <a:lnSpc>
+                <a:spcPts val="1425"/>
+              </a:lnSpc>
+              <a:buNone/>
+            </a:pPr>
+            <a:r>
+              <a:rPr lang="en-US" sz="770" spc="20" kern="0" dirty="0">
                 <a:solidFill>
                   <a:srgbClr val="3D4249"/>
                 </a:solidFill>
@@ -9446,19 +9486,19 @@
                 <a:ea typeface="Noto Sans JP" pitchFamily="34" charset="-122"/>
                 <a:cs typeface="Noto Sans JP" pitchFamily="34" charset="-120"/>
               </a:rPr>
-              <a:t>そのなかで私たちは、規模で世界上位15に入る優良鉱山に複数参画し、日</a:t>
-            </a:r>
-            <a:endParaRPr lang="en-US" sz="730" dirty="0"/>
-          </a:p>
-          <a:p>
-            <a:pPr algn="l" indent="0" marL="0">
-              <a:lnSpc>
-                <a:spcPts val="1351"/>
-              </a:lnSpc>
-              <a:buNone/>
-            </a:pPr>
-            <a:r>
-              <a:rPr lang="en-US" sz="730" spc="20" kern="0" dirty="0">
+              <a:t>す。そのなかで私たちは、規模で世界上位15に入る優良鉱山に複数参</a:t>
+            </a:r>
+            <a:endParaRPr lang="en-US" sz="770" dirty="0"/>
+          </a:p>
+          <a:p>
+            <a:pPr algn="l" indent="0" marL="0">
+              <a:lnSpc>
+                <a:spcPts val="1425"/>
+              </a:lnSpc>
+              <a:buNone/>
+            </a:pPr>
+            <a:r>
+              <a:rPr lang="en-US" sz="770" spc="20" kern="0" dirty="0">
                 <a:solidFill>
                   <a:srgbClr val="3D4249"/>
                 </a:solidFill>
@@ -9466,19 +9506,19 @@
                 <a:ea typeface="Noto Sans JP" pitchFamily="34" charset="-122"/>
                 <a:cs typeface="Noto Sans JP" pitchFamily="34" charset="-120"/>
               </a:rPr>
-              <a:t>本最大・世界第20位の持分生産量を有しています。特定の1社に偏らず、</a:t>
-            </a:r>
-            <a:endParaRPr lang="en-US" sz="730" dirty="0"/>
-          </a:p>
-          <a:p>
-            <a:pPr algn="l" indent="0" marL="0">
-              <a:lnSpc>
-                <a:spcPts val="1351"/>
-              </a:lnSpc>
-              <a:buNone/>
-            </a:pPr>
-            <a:r>
-              <a:rPr lang="en-US" sz="730" spc="20" kern="0" dirty="0">
+              <a:t>画し、日本最大・世界第20位の持分生産量を有しています。特定の1社</a:t>
+            </a:r>
+            <a:endParaRPr lang="en-US" sz="770" dirty="0"/>
+          </a:p>
+          <a:p>
+            <a:pPr algn="l" indent="0" marL="0">
+              <a:lnSpc>
+                <a:spcPts val="1425"/>
+              </a:lnSpc>
+              <a:buNone/>
+            </a:pPr>
+            <a:r>
+              <a:rPr lang="en-US" sz="770" spc="20" kern="0" dirty="0">
                 <a:solidFill>
                   <a:srgbClr val="3D4249"/>
                 </a:solidFill>
@@ -9486,19 +9526,19 @@
                 <a:ea typeface="Noto Sans JP" pitchFamily="34" charset="-122"/>
                 <a:cs typeface="Noto Sans JP" pitchFamily="34" charset="-120"/>
               </a:rPr>
-              <a:t>主要メジャーのほぼすべてと共同事業・取引を行い、販売を通じた幅広い</a:t>
-            </a:r>
-            <a:endParaRPr lang="en-US" sz="730" dirty="0"/>
-          </a:p>
-          <a:p>
-            <a:pPr algn="l" indent="0" marL="0">
-              <a:lnSpc>
-                <a:spcPts val="1351"/>
-              </a:lnSpc>
-              <a:buNone/>
-            </a:pPr>
-            <a:r>
-              <a:rPr lang="en-US" sz="730" spc="20" kern="0" dirty="0">
+              <a:t>に偏らず、主要メジャーのほぼすべてと共同事業・取引を行い、販売</a:t>
+            </a:r>
+            <a:endParaRPr lang="en-US" sz="770" dirty="0"/>
+          </a:p>
+          <a:p>
+            <a:pPr algn="l" indent="0" marL="0">
+              <a:lnSpc>
+                <a:spcPts val="1425"/>
+              </a:lnSpc>
+              <a:buNone/>
+            </a:pPr>
+            <a:r>
+              <a:rPr lang="en-US" sz="770" spc="20" kern="0" dirty="0">
                 <a:solidFill>
                   <a:srgbClr val="3D4249"/>
                 </a:solidFill>
@@ -9506,9 +9546,29 @@
                 <a:ea typeface="Noto Sans JP" pitchFamily="34" charset="-122"/>
                 <a:cs typeface="Noto Sans JP" pitchFamily="34" charset="-120"/>
               </a:rPr>
-              <a:t>関係から、新しい案件で“声がかかる存在”であり続けています。</a:t>
-            </a:r>
-            <a:endParaRPr lang="en-US" sz="730" dirty="0"/>
+              <a:t>を通じた幅広い関係から、新しい案件で“声がかかる存在”であり続け</a:t>
+            </a:r>
+            <a:endParaRPr lang="en-US" sz="770" dirty="0"/>
+          </a:p>
+          <a:p>
+            <a:pPr algn="l" indent="0" marL="0">
+              <a:lnSpc>
+                <a:spcPts val="1425"/>
+              </a:lnSpc>
+              <a:buNone/>
+            </a:pPr>
+            <a:r>
+              <a:rPr lang="en-US" sz="770" spc="20" kern="0" dirty="0">
+                <a:solidFill>
+                  <a:srgbClr val="3D4249"/>
+                </a:solidFill>
+                <a:latin typeface="Noto Sans JP" pitchFamily="34" charset="0"/>
+                <a:ea typeface="Noto Sans JP" pitchFamily="34" charset="-122"/>
+                <a:cs typeface="Noto Sans JP" pitchFamily="34" charset="-120"/>
+              </a:rPr>
+              <a:t>ています。</a:t>
+            </a:r>
+            <a:endParaRPr lang="en-US" sz="770" dirty="0"/>
           </a:p>
         </p:txBody>
       </p:sp>
@@ -9773,21 +9833,21 @@
         <p:spPr>
           <a:xfrm>
             <a:off x="11797103" y="6276541"/>
-            <a:ext cx="1091387" cy="114350"/>
-          </a:xfrm>
-          <a:prstGeom prst="rect">
-            <a:avLst/>
-          </a:prstGeom>
-          <a:noFill/>
-          <a:ln/>
-        </p:spPr>
-        <p:txBody>
-          <a:bodyPr wrap="none" lIns="0" tIns="0" rIns="0" bIns="0" rtlCol="0" anchor="t"/>
-          <a:lstStyle/>
-          <a:p>
-            <a:pPr algn="l" indent="0" marL="0">
-              <a:lnSpc>
-                <a:spcPts val="900"/>
+            <a:ext cx="1130476" cy="127055"/>
+          </a:xfrm>
+          <a:prstGeom prst="rect">
+            <a:avLst/>
+          </a:prstGeom>
+          <a:noFill/>
+          <a:ln/>
+        </p:spPr>
+        <p:txBody>
+          <a:bodyPr wrap="none" lIns="0" tIns="0" rIns="0" bIns="0" rtlCol="0" anchor="t"/>
+          <a:lstStyle/>
+          <a:p>
+            <a:pPr algn="l" indent="0" marL="0">
+              <a:lnSpc>
+                <a:spcPts val="1000"/>
               </a:lnSpc>
               <a:buNone/>
             </a:pPr>
@@ -9804,7 +9864,7 @@
             </a:r>
             <a:pPr algn="l" indent="0" marL="0">
               <a:lnSpc>
-                <a:spcPts val="900"/>
+                <a:spcPts val="1000"/>
               </a:lnSpc>
               <a:buNone/>
             </a:pPr>
@@ -9821,12 +9881,12 @@
             </a:r>
             <a:pPr algn="l" indent="0" marL="0">
               <a:lnSpc>
-                <a:spcPts val="900"/>
-              </a:lnSpc>
-              <a:buNone/>
-            </a:pPr>
-            <a:r>
-              <a:rPr lang="en-US" sz="620" spc="30" kern="0" dirty="0">
+                <a:spcPts val="1000"/>
+              </a:lnSpc>
+              <a:buNone/>
+            </a:pPr>
+            <a:r>
+              <a:rPr lang="en-US" sz="670" spc="30" kern="0" dirty="0">
                 <a:solidFill>
                   <a:srgbClr val="7D838A"/>
                 </a:solidFill>
@@ -9849,21 +9909,21 @@
         <p:spPr>
           <a:xfrm>
             <a:off x="12464144" y="6441714"/>
-            <a:ext cx="1290328" cy="114350"/>
-          </a:xfrm>
-          <a:prstGeom prst="rect">
-            <a:avLst/>
-          </a:prstGeom>
-          <a:noFill/>
-          <a:ln/>
-        </p:spPr>
-        <p:txBody>
-          <a:bodyPr wrap="none" lIns="0" tIns="0" rIns="0" bIns="0" rtlCol="0" anchor="t"/>
-          <a:lstStyle/>
-          <a:p>
-            <a:pPr algn="l" indent="0" marL="0">
-              <a:lnSpc>
-                <a:spcPts val="900"/>
+            <a:ext cx="1329417" cy="127055"/>
+          </a:xfrm>
+          <a:prstGeom prst="rect">
+            <a:avLst/>
+          </a:prstGeom>
+          <a:noFill/>
+          <a:ln/>
+        </p:spPr>
+        <p:txBody>
+          <a:bodyPr wrap="none" lIns="0" tIns="0" rIns="0" bIns="0" rtlCol="0" anchor="t"/>
+          <a:lstStyle/>
+          <a:p>
+            <a:pPr algn="l" indent="0" marL="0">
+              <a:lnSpc>
+                <a:spcPts val="1000"/>
               </a:lnSpc>
               <a:buNone/>
             </a:pPr>
@@ -9880,7 +9940,7 @@
             </a:r>
             <a:pPr algn="l" indent="0" marL="0">
               <a:lnSpc>
-                <a:spcPts val="900"/>
+                <a:spcPts val="1000"/>
               </a:lnSpc>
               <a:buNone/>
             </a:pPr>
@@ -9897,12 +9957,12 @@
             </a:r>
             <a:pPr algn="l" indent="0" marL="0">
               <a:lnSpc>
-                <a:spcPts val="900"/>
-              </a:lnSpc>
-              <a:buNone/>
-            </a:pPr>
-            <a:r>
-              <a:rPr lang="en-US" sz="620" spc="30" kern="0" dirty="0">
+                <a:spcPts val="1000"/>
+              </a:lnSpc>
+              <a:buNone/>
+            </a:pPr>
+            <a:r>
+              <a:rPr lang="en-US" sz="670" spc="30" kern="0" dirty="0">
                 <a:solidFill>
                   <a:srgbClr val="7D838A"/>
                 </a:solidFill>
@@ -9925,21 +9985,21 @@
         <p:spPr>
           <a:xfrm>
             <a:off x="12612243" y="6606886"/>
-            <a:ext cx="1027839" cy="114350"/>
-          </a:xfrm>
-          <a:prstGeom prst="rect">
-            <a:avLst/>
-          </a:prstGeom>
-          <a:noFill/>
-          <a:ln/>
-        </p:spPr>
-        <p:txBody>
-          <a:bodyPr wrap="none" lIns="0" tIns="0" rIns="0" bIns="0" rtlCol="0" anchor="t"/>
-          <a:lstStyle/>
-          <a:p>
-            <a:pPr algn="l" indent="0" marL="0">
-              <a:lnSpc>
-                <a:spcPts val="900"/>
+            <a:ext cx="1065182" cy="127055"/>
+          </a:xfrm>
+          <a:prstGeom prst="rect">
+            <a:avLst/>
+          </a:prstGeom>
+          <a:noFill/>
+          <a:ln/>
+        </p:spPr>
+        <p:txBody>
+          <a:bodyPr wrap="none" lIns="0" tIns="0" rIns="0" bIns="0" rtlCol="0" anchor="t"/>
+          <a:lstStyle/>
+          <a:p>
+            <a:pPr algn="l" indent="0" marL="0">
+              <a:lnSpc>
+                <a:spcPts val="1000"/>
               </a:lnSpc>
               <a:buNone/>
             </a:pPr>
@@ -9956,7 +10016,7 @@
             </a:r>
             <a:pPr algn="l" indent="0" marL="0">
               <a:lnSpc>
-                <a:spcPts val="900"/>
+                <a:spcPts val="1000"/>
               </a:lnSpc>
               <a:buNone/>
             </a:pPr>
@@ -9973,12 +10033,12 @@
             </a:r>
             <a:pPr algn="l" indent="0" marL="0">
               <a:lnSpc>
-                <a:spcPts val="900"/>
-              </a:lnSpc>
-              <a:buNone/>
-            </a:pPr>
-            <a:r>
-              <a:rPr lang="en-US" sz="620" spc="30" kern="0" dirty="0">
+                <a:spcPts val="1000"/>
+              </a:lnSpc>
+              <a:buNone/>
+            </a:pPr>
+            <a:r>
+              <a:rPr lang="en-US" sz="670" spc="30" kern="0" dirty="0">
                 <a:solidFill>
                   <a:srgbClr val="7D838A"/>
                 </a:solidFill>
@@ -10001,21 +10061,21 @@
         <p:spPr>
           <a:xfrm>
             <a:off x="13501632" y="6772058"/>
-            <a:ext cx="1541898" cy="114350"/>
-          </a:xfrm>
-          <a:prstGeom prst="rect">
-            <a:avLst/>
-          </a:prstGeom>
-          <a:noFill/>
-          <a:ln/>
-        </p:spPr>
-        <p:txBody>
-          <a:bodyPr wrap="none" lIns="0" tIns="0" rIns="0" bIns="0" rtlCol="0" anchor="t"/>
-          <a:lstStyle/>
-          <a:p>
-            <a:pPr algn="l" indent="0" marL="0">
-              <a:lnSpc>
-                <a:spcPts val="900"/>
+            <a:ext cx="1580987" cy="127055"/>
+          </a:xfrm>
+          <a:prstGeom prst="rect">
+            <a:avLst/>
+          </a:prstGeom>
+          <a:noFill/>
+          <a:ln/>
+        </p:spPr>
+        <p:txBody>
+          <a:bodyPr wrap="none" lIns="0" tIns="0" rIns="0" bIns="0" rtlCol="0" anchor="t"/>
+          <a:lstStyle/>
+          <a:p>
+            <a:pPr algn="l" indent="0" marL="0">
+              <a:lnSpc>
+                <a:spcPts val="1000"/>
               </a:lnSpc>
               <a:buNone/>
             </a:pPr>
@@ -10032,7 +10092,7 @@
             </a:r>
             <a:pPr algn="l" indent="0" marL="0">
               <a:lnSpc>
-                <a:spcPts val="900"/>
+                <a:spcPts val="1000"/>
               </a:lnSpc>
               <a:buNone/>
             </a:pPr>
@@ -10049,12 +10109,12 @@
             </a:r>
             <a:pPr algn="l" indent="0" marL="0">
               <a:lnSpc>
-                <a:spcPts val="900"/>
-              </a:lnSpc>
-              <a:buNone/>
-            </a:pPr>
-            <a:r>
-              <a:rPr lang="en-US" sz="620" spc="30" kern="0" dirty="0">
+                <a:spcPts val="1000"/>
+              </a:lnSpc>
+              <a:buNone/>
+            </a:pPr>
+            <a:r>
+              <a:rPr lang="en-US" sz="670" spc="30" kern="0" dirty="0">
                 <a:solidFill>
                   <a:srgbClr val="7D838A"/>
                 </a:solidFill>
@@ -10077,21 +10137,21 @@
         <p:spPr>
           <a:xfrm>
             <a:off x="13501632" y="6937230"/>
-            <a:ext cx="1106673" cy="114350"/>
-          </a:xfrm>
-          <a:prstGeom prst="rect">
-            <a:avLst/>
-          </a:prstGeom>
-          <a:noFill/>
-          <a:ln/>
-        </p:spPr>
-        <p:txBody>
-          <a:bodyPr wrap="none" lIns="0" tIns="0" rIns="0" bIns="0" rtlCol="0" anchor="t"/>
-          <a:lstStyle/>
-          <a:p>
-            <a:pPr algn="l" indent="0" marL="0">
-              <a:lnSpc>
-                <a:spcPts val="900"/>
+            <a:ext cx="1144016" cy="127055"/>
+          </a:xfrm>
+          <a:prstGeom prst="rect">
+            <a:avLst/>
+          </a:prstGeom>
+          <a:noFill/>
+          <a:ln/>
+        </p:spPr>
+        <p:txBody>
+          <a:bodyPr wrap="none" lIns="0" tIns="0" rIns="0" bIns="0" rtlCol="0" anchor="t"/>
+          <a:lstStyle/>
+          <a:p>
+            <a:pPr algn="l" indent="0" marL="0">
+              <a:lnSpc>
+                <a:spcPts val="1000"/>
               </a:lnSpc>
               <a:buNone/>
             </a:pPr>
@@ -10108,7 +10168,7 @@
             </a:r>
             <a:pPr algn="l" indent="0" marL="0">
               <a:lnSpc>
-                <a:spcPts val="900"/>
+                <a:spcPts val="1000"/>
               </a:lnSpc>
               <a:buNone/>
             </a:pPr>
@@ -10125,12 +10185,12 @@
             </a:r>
             <a:pPr algn="l" indent="0" marL="0">
               <a:lnSpc>
-                <a:spcPts val="900"/>
-              </a:lnSpc>
-              <a:buNone/>
-            </a:pPr>
-            <a:r>
-              <a:rPr lang="en-US" sz="620" spc="30" kern="0" dirty="0">
+                <a:spcPts val="1000"/>
+              </a:lnSpc>
+              <a:buNone/>
+            </a:pPr>
+            <a:r>
+              <a:rPr lang="en-US" sz="670" spc="30" kern="0" dirty="0">
                 <a:solidFill>
                   <a:srgbClr val="7D838A"/>
                 </a:solidFill>
@@ -10152,8 +10212,8 @@
         </p:nvSpPr>
         <p:spPr>
           <a:xfrm>
-            <a:off x="12800821" y="7102402"/>
-            <a:ext cx="1437732" cy="114350"/>
+            <a:off x="12733780" y="7102402"/>
+            <a:ext cx="1504774" cy="127055"/>
           </a:xfrm>
           <a:prstGeom prst="rect">
             <a:avLst/>
@@ -10167,7 +10227,7 @@
           <a:p>
             <a:pPr algn="r" indent="0" marL="0">
               <a:lnSpc>
-                <a:spcPts val="900"/>
+                <a:spcPts val="1000"/>
               </a:lnSpc>
               <a:buNone/>
             </a:pPr>
@@ -10184,7 +10244,7 @@
             </a:r>
             <a:pPr algn="r" indent="0" marL="0">
               <a:lnSpc>
-                <a:spcPts val="900"/>
+                <a:spcPts val="1000"/>
               </a:lnSpc>
               <a:buNone/>
             </a:pPr>
@@ -10201,12 +10261,12 @@
             </a:r>
             <a:pPr algn="r" indent="0" marL="0">
               <a:lnSpc>
-                <a:spcPts val="900"/>
-              </a:lnSpc>
-              <a:buNone/>
-            </a:pPr>
-            <a:r>
-              <a:rPr lang="en-US" sz="620" spc="30" kern="0" dirty="0">
+                <a:spcPts val="1000"/>
+              </a:lnSpc>
+              <a:buNone/>
+            </a:pPr>
+            <a:r>
+              <a:rPr lang="en-US" sz="670" spc="30" kern="0" dirty="0">
                 <a:solidFill>
                   <a:srgbClr val="7D838A"/>
                 </a:solidFill>
@@ -10228,8 +10288,8 @@
         </p:nvSpPr>
         <p:spPr>
           <a:xfrm>
-            <a:off x="12808703" y="7267574"/>
-            <a:ext cx="1578148" cy="114350"/>
+            <a:off x="12744937" y="7267574"/>
+            <a:ext cx="1641914" cy="127055"/>
           </a:xfrm>
           <a:prstGeom prst="rect">
             <a:avLst/>
@@ -10243,7 +10303,7 @@
           <a:p>
             <a:pPr algn="r" indent="0" marL="0">
               <a:lnSpc>
-                <a:spcPts val="900"/>
+                <a:spcPts val="1000"/>
               </a:lnSpc>
               <a:buNone/>
             </a:pPr>
@@ -10260,7 +10320,7 @@
             </a:r>
             <a:pPr algn="r" indent="0" marL="0">
               <a:lnSpc>
-                <a:spcPts val="900"/>
+                <a:spcPts val="1000"/>
               </a:lnSpc>
               <a:buNone/>
             </a:pPr>
@@ -10277,12 +10337,12 @@
             </a:r>
             <a:pPr algn="r" indent="0" marL="0">
               <a:lnSpc>
-                <a:spcPts val="900"/>
-              </a:lnSpc>
-              <a:buNone/>
-            </a:pPr>
-            <a:r>
-              <a:rPr lang="en-US" sz="620" spc="30" kern="0" dirty="0">
+                <a:spcPts val="1000"/>
+              </a:lnSpc>
+              <a:buNone/>
+            </a:pPr>
+            <a:r>
+              <a:rPr lang="en-US" sz="670" spc="30" kern="0" dirty="0">
                 <a:solidFill>
                   <a:srgbClr val="7D838A"/>
                 </a:solidFill>
@@ -11312,27 +11372,27 @@
         </p:nvSpPr>
         <p:spPr>
           <a:xfrm>
-            <a:off x="12260855" y="8481463"/>
-            <a:ext cx="2635746" cy="252078"/>
-          </a:xfrm>
-          <a:prstGeom prst="rect">
-            <a:avLst/>
-          </a:prstGeom>
-          <a:noFill/>
-          <a:ln/>
-        </p:spPr>
-        <p:txBody>
-          <a:bodyPr wrap="none" lIns="0" tIns="0" rIns="0" bIns="0" rtlCol="0" anchor="t"/>
-          <a:lstStyle/>
-          <a:p>
-            <a:pPr algn="l" indent="0" marL="0">
-              <a:lnSpc>
-                <a:spcPts val="992"/>
-              </a:lnSpc>
-              <a:buNone/>
-            </a:pPr>
-            <a:r>
-              <a:rPr lang="en-US" sz="620" dirty="0">
+            <a:off x="12260855" y="8482733"/>
+            <a:ext cx="2574383" cy="408610"/>
+          </a:xfrm>
+          <a:prstGeom prst="rect">
+            <a:avLst/>
+          </a:prstGeom>
+          <a:noFill/>
+          <a:ln/>
+        </p:spPr>
+        <p:txBody>
+          <a:bodyPr wrap="none" lIns="0" tIns="0" rIns="0" bIns="0" rtlCol="0" anchor="t"/>
+          <a:lstStyle/>
+          <a:p>
+            <a:pPr algn="l" indent="0" marL="0">
+              <a:lnSpc>
+                <a:spcPts val="1072"/>
+              </a:lnSpc>
+              <a:buNone/>
+            </a:pPr>
+            <a:r>
+              <a:rPr lang="en-US" sz="670" dirty="0">
                 <a:solidFill>
                   <a:srgbClr val="7D838A"/>
                 </a:solidFill>
@@ -11340,19 +11400,19 @@
                 <a:ea typeface="Noto Sans JP" pitchFamily="34" charset="-122"/>
                 <a:cs typeface="Noto Sans JP" pitchFamily="34" charset="-120"/>
               </a:rPr>
-              <a:t>上位には協業が難しい国有・政府系なども含まれる。協業可能</a:t>
-            </a:r>
-            <a:endParaRPr lang="en-US" sz="620" dirty="0"/>
-          </a:p>
-          <a:p>
-            <a:pPr algn="l" indent="0" marL="0">
-              <a:lnSpc>
-                <a:spcPts val="992"/>
-              </a:lnSpc>
-              <a:buNone/>
-            </a:pPr>
-            <a:r>
-              <a:rPr lang="en-US" sz="620" dirty="0">
+              <a:t>上位には協業が難しい国有・政府系なども含まれる。協業可</a:t>
+            </a:r>
+            <a:endParaRPr lang="en-US" sz="670" dirty="0"/>
+          </a:p>
+          <a:p>
+            <a:pPr algn="l" indent="0" marL="0">
+              <a:lnSpc>
+                <a:spcPts val="1072"/>
+              </a:lnSpc>
+              <a:buNone/>
+            </a:pPr>
+            <a:r>
+              <a:rPr lang="en-US" sz="670" dirty="0">
                 <a:solidFill>
                   <a:srgbClr val="7D838A"/>
                 </a:solidFill>
@@ -11360,9 +11420,29 @@
                 <a:ea typeface="Noto Sans JP" pitchFamily="34" charset="-122"/>
                 <a:cs typeface="Noto Sans JP" pitchFamily="34" charset="-120"/>
               </a:rPr>
-              <a:t>で、オペレーターシップを求めないパートナーとしては最大規模。</a:t>
-            </a:r>
-            <a:endParaRPr lang="en-US" sz="620" dirty="0"/>
+              <a:t>能で、オペレーターシップを求めないパートナーとしては最</a:t>
+            </a:r>
+            <a:endParaRPr lang="en-US" sz="670" dirty="0"/>
+          </a:p>
+          <a:p>
+            <a:pPr algn="l" indent="0" marL="0">
+              <a:lnSpc>
+                <a:spcPts val="1072"/>
+              </a:lnSpc>
+              <a:buNone/>
+            </a:pPr>
+            <a:r>
+              <a:rPr lang="en-US" sz="670" dirty="0">
+                <a:solidFill>
+                  <a:srgbClr val="7D838A"/>
+                </a:solidFill>
+                <a:latin typeface="Noto Sans JP" pitchFamily="34" charset="0"/>
+                <a:ea typeface="Noto Sans JP" pitchFamily="34" charset="-122"/>
+                <a:cs typeface="Noto Sans JP" pitchFamily="34" charset="-120"/>
+              </a:rPr>
+              <a:t>大規模。</a:t>
+            </a:r>
+            <a:endParaRPr lang="en-US" sz="670" dirty="0"/>
           </a:p>
         </p:txBody>
       </p:sp>
@@ -11542,27 +11622,27 @@
         </p:nvSpPr>
         <p:spPr>
           <a:xfrm>
-            <a:off x="1778777" y="10133184"/>
-            <a:ext cx="1831029" cy="126039"/>
-          </a:xfrm>
-          <a:prstGeom prst="rect">
-            <a:avLst/>
-          </a:prstGeom>
-          <a:noFill/>
-          <a:ln/>
-        </p:spPr>
-        <p:txBody>
-          <a:bodyPr wrap="none" lIns="0" tIns="0" rIns="0" bIns="0" rtlCol="0" anchor="t"/>
-          <a:lstStyle/>
-          <a:p>
-            <a:pPr algn="l" indent="0" marL="0">
-              <a:lnSpc>
-                <a:spcPts val="992"/>
-              </a:lnSpc>
-              <a:buNone/>
-            </a:pPr>
-            <a:r>
-              <a:rPr lang="en-US" sz="620" dirty="0">
+            <a:off x="1778777" y="10134455"/>
+            <a:ext cx="1974939" cy="136203"/>
+          </a:xfrm>
+          <a:prstGeom prst="rect">
+            <a:avLst/>
+          </a:prstGeom>
+          <a:noFill/>
+          <a:ln/>
+        </p:spPr>
+        <p:txBody>
+          <a:bodyPr wrap="none" lIns="0" tIns="0" rIns="0" bIns="0" rtlCol="0" anchor="t"/>
+          <a:lstStyle/>
+          <a:p>
+            <a:pPr algn="l" indent="0" marL="0">
+              <a:lnSpc>
+                <a:spcPts val="1072"/>
+              </a:lnSpc>
+              <a:buNone/>
+            </a:pPr>
+            <a:r>
+              <a:rPr lang="en-US" sz="670" dirty="0">
                 <a:solidFill>
                   <a:srgbClr val="7D838A"/>
                 </a:solidFill>
@@ -11572,7 +11652,7 @@
               </a:rPr>
               <a:t>上位5社で約80%｜寡占度が高く、供給は漸減</a:t>
             </a:r>
-            <a:endParaRPr lang="en-US" sz="620" dirty="0"/>
+            <a:endParaRPr lang="en-US" sz="670" dirty="0"/>
           </a:p>
         </p:txBody>
       </p:sp>
@@ -11668,27 +11748,27 @@
         </p:nvSpPr>
         <p:spPr>
           <a:xfrm>
-            <a:off x="9338579" y="10133184"/>
-            <a:ext cx="1911609" cy="126039"/>
-          </a:xfrm>
-          <a:prstGeom prst="rect">
-            <a:avLst/>
-          </a:prstGeom>
-          <a:noFill/>
-          <a:ln/>
-        </p:spPr>
-        <p:txBody>
-          <a:bodyPr wrap="none" lIns="0" tIns="0" rIns="0" bIns="0" rtlCol="0" anchor="t"/>
-          <a:lstStyle/>
-          <a:p>
-            <a:pPr algn="l" indent="0" marL="0">
-              <a:lnSpc>
-                <a:spcPts val="992"/>
-              </a:lnSpc>
-              <a:buNone/>
-            </a:pPr>
-            <a:r>
-              <a:rPr lang="en-US" sz="620" dirty="0">
+            <a:off x="9338579" y="10134455"/>
+            <a:ext cx="2061853" cy="136203"/>
+          </a:xfrm>
+          <a:prstGeom prst="rect">
+            <a:avLst/>
+          </a:prstGeom>
+          <a:noFill/>
+          <a:ln/>
+        </p:spPr>
+        <p:txBody>
+          <a:bodyPr wrap="none" lIns="0" tIns="0" rIns="0" bIns="0" rtlCol="0" anchor="t"/>
+          <a:lstStyle/>
+          <a:p>
+            <a:pPr algn="l" indent="0" marL="0">
+              <a:lnSpc>
+                <a:spcPts val="1072"/>
+              </a:lnSpc>
+              <a:buNone/>
+            </a:pPr>
+            <a:r>
+              <a:rPr lang="en-US" sz="670" dirty="0">
                 <a:solidFill>
                   <a:srgbClr val="7D838A"/>
                 </a:solidFill>
@@ -11698,7 +11778,7 @@
               </a:rPr>
               <a:t>上位5社で約25%｜寡占化が進まず、再編の機運</a:t>
             </a:r>
-            <a:endParaRPr lang="en-US" sz="620" dirty="0"/>
+            <a:endParaRPr lang="en-US" sz="670" dirty="0"/>
           </a:p>
         </p:txBody>
       </p:sp>
@@ -11917,27 +11997,27 @@
         </p:nvSpPr>
         <p:spPr>
           <a:xfrm>
-            <a:off x="4192831" y="101644"/>
-            <a:ext cx="2972483" cy="1931244"/>
-          </a:xfrm>
-          <a:prstGeom prst="rect">
-            <a:avLst/>
-          </a:prstGeom>
-          <a:noFill/>
-          <a:ln/>
-        </p:spPr>
-        <p:txBody>
-          <a:bodyPr wrap="none" lIns="0" tIns="0" rIns="0" bIns="0" rtlCol="0" anchor="t"/>
-          <a:lstStyle/>
-          <a:p>
-            <a:pPr algn="l" indent="0" marL="0">
-              <a:lnSpc>
-                <a:spcPts val="15200"/>
-              </a:lnSpc>
-              <a:buNone/>
-            </a:pPr>
-            <a:r>
-              <a:rPr lang="en-US" sz="19000" spc="-760" kern="0" dirty="0">
+            <a:off x="5539620" y="330344"/>
+            <a:ext cx="2203579" cy="1423022"/>
+          </a:xfrm>
+          <a:prstGeom prst="rect">
+            <a:avLst/>
+          </a:prstGeom>
+          <a:noFill/>
+          <a:ln/>
+        </p:spPr>
+        <p:txBody>
+          <a:bodyPr wrap="none" lIns="0" tIns="0" rIns="0" bIns="0" rtlCol="0" anchor="t"/>
+          <a:lstStyle/>
+          <a:p>
+            <a:pPr algn="l" indent="0" marL="0">
+              <a:lnSpc>
+                <a:spcPts val="11200"/>
+              </a:lnSpc>
+              <a:buNone/>
+            </a:pPr>
+            <a:r>
+              <a:rPr lang="en-US" sz="14000" spc="-560" kern="0" dirty="0">
                 <a:solidFill>
                   <a:srgbClr val="000000">
                     <a:alpha val="0"/>
@@ -11949,7 +12029,7 @@
               </a:rPr>
               <a:t>03</a:t>
             </a:r>
-            <a:endParaRPr lang="en-US" sz="19000" dirty="0"/>
+            <a:endParaRPr lang="en-US" sz="14000" dirty="0"/>
           </a:p>
         </p:txBody>
       </p:sp>
@@ -11961,27 +12041,27 @@
         </p:nvSpPr>
         <p:spPr>
           <a:xfrm>
-            <a:off x="11816161" y="101644"/>
-            <a:ext cx="2964622" cy="1931244"/>
-          </a:xfrm>
-          <a:prstGeom prst="rect">
-            <a:avLst/>
-          </a:prstGeom>
-          <a:noFill/>
-          <a:ln/>
-        </p:spPr>
-        <p:txBody>
-          <a:bodyPr wrap="none" lIns="0" tIns="0" rIns="0" bIns="0" rtlCol="0" anchor="t"/>
-          <a:lstStyle/>
-          <a:p>
-            <a:pPr algn="l" indent="0" marL="0">
-              <a:lnSpc>
-                <a:spcPts val="15200"/>
-              </a:lnSpc>
-              <a:buNone/>
-            </a:pPr>
-            <a:r>
-              <a:rPr lang="en-US" sz="19000" spc="-760" kern="0" dirty="0">
+            <a:off x="12705550" y="330344"/>
+            <a:ext cx="2197901" cy="1423022"/>
+          </a:xfrm>
+          <a:prstGeom prst="rect">
+            <a:avLst/>
+          </a:prstGeom>
+          <a:noFill/>
+          <a:ln/>
+        </p:spPr>
+        <p:txBody>
+          <a:bodyPr wrap="none" lIns="0" tIns="0" rIns="0" bIns="0" rtlCol="0" anchor="t"/>
+          <a:lstStyle/>
+          <a:p>
+            <a:pPr algn="l" indent="0" marL="0">
+              <a:lnSpc>
+                <a:spcPts val="11200"/>
+              </a:lnSpc>
+              <a:buNone/>
+            </a:pPr>
+            <a:r>
+              <a:rPr lang="en-US" sz="14000" spc="-560" kern="0" dirty="0">
                 <a:solidFill>
                   <a:srgbClr val="000000">
                     <a:alpha val="0"/>
@@ -11993,7 +12073,7 @@
               </a:rPr>
               <a:t>04</a:t>
             </a:r>
-            <a:endParaRPr lang="en-US" sz="19000" dirty="0"/>
+            <a:endParaRPr lang="en-US" sz="14000" dirty="0"/>
           </a:p>
         </p:txBody>
       </p:sp>
@@ -12193,27 +12273,27 @@
         </p:nvSpPr>
         <p:spPr>
           <a:xfrm>
-            <a:off x="508222" y="2333819"/>
-            <a:ext cx="7248516" cy="343177"/>
-          </a:xfrm>
-          <a:prstGeom prst="rect">
-            <a:avLst/>
-          </a:prstGeom>
-          <a:noFill/>
-          <a:ln/>
-        </p:spPr>
-        <p:txBody>
-          <a:bodyPr wrap="none" lIns="0" tIns="0" rIns="0" bIns="0" rtlCol="0" anchor="t"/>
-          <a:lstStyle/>
-          <a:p>
-            <a:pPr algn="l" indent="0" marL="0">
-              <a:lnSpc>
-                <a:spcPts val="1351"/>
-              </a:lnSpc>
-              <a:buNone/>
-            </a:pPr>
-            <a:r>
-              <a:rPr lang="en-US" sz="730" spc="20" kern="0" dirty="0">
+            <a:off x="508222" y="2335471"/>
+            <a:ext cx="7248516" cy="361981"/>
+          </a:xfrm>
+          <a:prstGeom prst="rect">
+            <a:avLst/>
+          </a:prstGeom>
+          <a:noFill/>
+          <a:ln/>
+        </p:spPr>
+        <p:txBody>
+          <a:bodyPr wrap="none" lIns="0" tIns="0" rIns="0" bIns="0" rtlCol="0" anchor="t"/>
+          <a:lstStyle/>
+          <a:p>
+            <a:pPr algn="l" indent="0" marL="0">
+              <a:lnSpc>
+                <a:spcPts val="1425"/>
+              </a:lnSpc>
+              <a:buNone/>
+            </a:pPr>
+            <a:r>
+              <a:rPr lang="en-US" sz="770" spc="20" kern="0" dirty="0">
                 <a:solidFill>
                   <a:srgbClr val="3D4249"/>
                 </a:solidFill>
@@ -12221,19 +12301,19 @@
                 <a:ea typeface="Noto Sans JP" pitchFamily="34" charset="-122"/>
                 <a:cs typeface="Noto Sans JP" pitchFamily="34" charset="-120"/>
               </a:rPr>
-              <a:t>資源は、ただ存在するだけでは社会の価値になりません。良質な資源を安定的に確保し、高品質な金属へと精錬し、必要とする産業へ届けてはじめて価</a:t>
-            </a:r>
-            <a:endParaRPr lang="en-US" sz="730" dirty="0"/>
-          </a:p>
-          <a:p>
-            <a:pPr algn="l" indent="0" marL="0">
-              <a:lnSpc>
-                <a:spcPts val="1351"/>
-              </a:lnSpc>
-              <a:buNone/>
-            </a:pPr>
-            <a:r>
-              <a:rPr lang="en-US" sz="730" spc="20" kern="0" dirty="0">
+              <a:t>資源は、ただ存在するだけでは社会の価値になりません。良質な資源を安定的に確保し、高品質な金属へと精錬し、必要とする産業へ届けてはじ</a:t>
+            </a:r>
+            <a:endParaRPr lang="en-US" sz="770" dirty="0"/>
+          </a:p>
+          <a:p>
+            <a:pPr algn="l" indent="0" marL="0">
+              <a:lnSpc>
+                <a:spcPts val="1425"/>
+              </a:lnSpc>
+              <a:buNone/>
+            </a:pPr>
+            <a:r>
+              <a:rPr lang="en-US" sz="770" spc="20" kern="0" dirty="0">
                 <a:solidFill>
                   <a:srgbClr val="3D4249"/>
                 </a:solidFill>
@@ -12241,9 +12321,9 @@
                 <a:ea typeface="Noto Sans JP" pitchFamily="34" charset="-122"/>
                 <a:cs typeface="Noto Sans JP" pitchFamily="34" charset="-120"/>
               </a:rPr>
-              <a:t>値になります。原料炭と銅に加え、私たちは鉄鉱石、電池資源、アルミ、肥料、二次資源へと事業領域を広げています。</a:t>
-            </a:r>
-            <a:endParaRPr lang="en-US" sz="730" dirty="0"/>
+              <a:t>めて価値になります。原料炭と銅に加え、私たちは鉄鉱石、電池資源、アルミ、肥料、二次資源へと事業領域を広げています。</a:t>
+            </a:r>
+            <a:endParaRPr lang="en-US" sz="770" dirty="0"/>
           </a:p>
         </p:txBody>
       </p:sp>
@@ -12255,8 +12335,8 @@
         </p:nvSpPr>
         <p:spPr>
           <a:xfrm>
-            <a:off x="1168911" y="3258179"/>
-            <a:ext cx="483208" cy="114350"/>
+            <a:off x="1448433" y="3309002"/>
+            <a:ext cx="494127" cy="114350"/>
           </a:xfrm>
           <a:prstGeom prst="rect">
             <a:avLst/>
@@ -12275,7 +12355,7 @@
               <a:buNone/>
             </a:pPr>
             <a:r>
-              <a:rPr lang="en-US" sz="740" spc="30" kern="0" dirty="0">
+              <a:rPr lang="en-US" sz="760" spc="30" kern="0" dirty="0">
                 <a:solidFill>
                   <a:srgbClr val="121519"/>
                 </a:solidFill>
@@ -12285,7 +12365,7 @@
               </a:rPr>
               <a:t>Iron Ore</a:t>
             </a:r>
-            <a:endParaRPr lang="en-US" sz="740" dirty="0"/>
+            <a:endParaRPr lang="en-US" sz="760" dirty="0"/>
           </a:p>
         </p:txBody>
       </p:sp>
@@ -12297,27 +12377,27 @@
         </p:nvSpPr>
         <p:spPr>
           <a:xfrm>
-            <a:off x="1168911" y="3394955"/>
-            <a:ext cx="373364" cy="145733"/>
-          </a:xfrm>
-          <a:prstGeom prst="rect">
-            <a:avLst/>
-          </a:prstGeom>
-          <a:noFill/>
-          <a:ln/>
-        </p:spPr>
-        <p:txBody>
-          <a:bodyPr wrap="none" lIns="0" tIns="0" rIns="0" bIns="0" rtlCol="0" anchor="t"/>
-          <a:lstStyle/>
-          <a:p>
-            <a:pPr algn="l" indent="0" marL="0">
-              <a:lnSpc>
-                <a:spcPts val="1147"/>
-              </a:lnSpc>
-              <a:buNone/>
-            </a:pPr>
-            <a:r>
-              <a:rPr lang="en-US" sz="740" spc="30" kern="0" dirty="0">
+            <a:off x="1448433" y="3454544"/>
+            <a:ext cx="390398" cy="153610"/>
+          </a:xfrm>
+          <a:prstGeom prst="rect">
+            <a:avLst/>
+          </a:prstGeom>
+          <a:noFill/>
+          <a:ln/>
+        </p:spPr>
+        <p:txBody>
+          <a:bodyPr wrap="none" lIns="0" tIns="0" rIns="0" bIns="0" rtlCol="0" anchor="t"/>
+          <a:lstStyle/>
+          <a:p>
+            <a:pPr algn="l" indent="0" marL="0">
+              <a:lnSpc>
+                <a:spcPts val="1209"/>
+              </a:lnSpc>
+              <a:buNone/>
+            </a:pPr>
+            <a:r>
+              <a:rPr lang="en-US" sz="780" spc="30" kern="0" dirty="0">
                 <a:solidFill>
                   <a:srgbClr val="121519"/>
                 </a:solidFill>
@@ -12327,7 +12407,7 @@
               </a:rPr>
               <a:t>鉄鉱石</a:t>
             </a:r>
-            <a:endParaRPr lang="en-US" sz="740" dirty="0"/>
+            <a:endParaRPr lang="en-US" sz="780" dirty="0"/>
           </a:p>
         </p:txBody>
       </p:sp>
@@ -12339,27 +12419,27 @@
         </p:nvSpPr>
         <p:spPr>
           <a:xfrm>
-            <a:off x="508222" y="3811379"/>
-            <a:ext cx="1197081" cy="126039"/>
-          </a:xfrm>
-          <a:prstGeom prst="rect">
-            <a:avLst/>
-          </a:prstGeom>
-          <a:noFill/>
-          <a:ln/>
-        </p:spPr>
-        <p:txBody>
-          <a:bodyPr wrap="none" lIns="0" tIns="0" rIns="0" bIns="0" rtlCol="0" anchor="t"/>
-          <a:lstStyle/>
-          <a:p>
-            <a:pPr algn="l" indent="0" marL="0">
-              <a:lnSpc>
-                <a:spcPts val="992"/>
-              </a:lnSpc>
-              <a:buNone/>
-            </a:pPr>
-            <a:r>
-              <a:rPr lang="en-US" sz="620" dirty="0">
+            <a:off x="1448433" y="3660183"/>
+            <a:ext cx="1289891" cy="136203"/>
+          </a:xfrm>
+          <a:prstGeom prst="rect">
+            <a:avLst/>
+          </a:prstGeom>
+          <a:noFill/>
+          <a:ln/>
+        </p:spPr>
+        <p:txBody>
+          <a:bodyPr wrap="none" lIns="0" tIns="0" rIns="0" bIns="0" rtlCol="0" anchor="t"/>
+          <a:lstStyle/>
+          <a:p>
+            <a:pPr algn="l" indent="0" marL="0">
+              <a:lnSpc>
+                <a:spcPts val="1072"/>
+              </a:lnSpc>
+              <a:buNone/>
+            </a:pPr>
+            <a:r>
+              <a:rPr lang="en-US" sz="670" dirty="0">
                 <a:solidFill>
                   <a:srgbClr val="7D838A"/>
                 </a:solidFill>
@@ -12369,7 +12449,7 @@
               </a:rPr>
               <a:t>IOC（カナダ）・CMP（チリ）</a:t>
             </a:r>
-            <a:endParaRPr lang="en-US" sz="620" dirty="0"/>
+            <a:endParaRPr lang="en-US" sz="670" dirty="0"/>
           </a:p>
         </p:txBody>
       </p:sp>
@@ -12381,8 +12461,8 @@
         </p:nvSpPr>
         <p:spPr>
           <a:xfrm>
-            <a:off x="3379676" y="3258179"/>
-            <a:ext cx="386249" cy="114350"/>
+            <a:off x="3659198" y="3309002"/>
+            <a:ext cx="394765" cy="114350"/>
           </a:xfrm>
           <a:prstGeom prst="rect">
             <a:avLst/>
@@ -12401,7 +12481,7 @@
               <a:buNone/>
             </a:pPr>
             <a:r>
-              <a:rPr lang="en-US" sz="740" spc="30" kern="0" dirty="0">
+              <a:rPr lang="en-US" sz="760" spc="30" kern="0" dirty="0">
                 <a:solidFill>
                   <a:srgbClr val="121519"/>
                 </a:solidFill>
@@ -12411,7 +12491,7 @@
               </a:rPr>
               <a:t>Nickel</a:t>
             </a:r>
-            <a:endParaRPr lang="en-US" sz="740" dirty="0"/>
+            <a:endParaRPr lang="en-US" sz="760" dirty="0"/>
           </a:p>
         </p:txBody>
       </p:sp>
@@ -12423,27 +12503,27 @@
         </p:nvSpPr>
         <p:spPr>
           <a:xfrm>
-            <a:off x="3379676" y="3394955"/>
-            <a:ext cx="480806" cy="145733"/>
-          </a:xfrm>
-          <a:prstGeom prst="rect">
-            <a:avLst/>
-          </a:prstGeom>
-          <a:noFill/>
-          <a:ln/>
-        </p:spPr>
-        <p:txBody>
-          <a:bodyPr wrap="none" lIns="0" tIns="0" rIns="0" bIns="0" rtlCol="0" anchor="t"/>
-          <a:lstStyle/>
-          <a:p>
-            <a:pPr algn="l" indent="0" marL="0">
-              <a:lnSpc>
-                <a:spcPts val="1147"/>
-              </a:lnSpc>
-              <a:buNone/>
-            </a:pPr>
-            <a:r>
-              <a:rPr lang="en-US" sz="740" spc="30" kern="0" dirty="0">
+            <a:off x="3659198" y="3454544"/>
+            <a:ext cx="503517" cy="153610"/>
+          </a:xfrm>
+          <a:prstGeom prst="rect">
+            <a:avLst/>
+          </a:prstGeom>
+          <a:noFill/>
+          <a:ln/>
+        </p:spPr>
+        <p:txBody>
+          <a:bodyPr wrap="none" lIns="0" tIns="0" rIns="0" bIns="0" rtlCol="0" anchor="t"/>
+          <a:lstStyle/>
+          <a:p>
+            <a:pPr algn="l" indent="0" marL="0">
+              <a:lnSpc>
+                <a:spcPts val="1209"/>
+              </a:lnSpc>
+              <a:buNone/>
+            </a:pPr>
+            <a:r>
+              <a:rPr lang="en-US" sz="780" spc="30" kern="0" dirty="0">
                 <a:solidFill>
                   <a:srgbClr val="121519"/>
                 </a:solidFill>
@@ -12453,7 +12533,7 @@
               </a:rPr>
               <a:t>ニッケル</a:t>
             </a:r>
-            <a:endParaRPr lang="en-US" sz="740" dirty="0"/>
+            <a:endParaRPr lang="en-US" sz="780" dirty="0"/>
           </a:p>
         </p:txBody>
       </p:sp>
@@ -12465,27 +12545,27 @@
         </p:nvSpPr>
         <p:spPr>
           <a:xfrm>
-            <a:off x="2718988" y="3811379"/>
-            <a:ext cx="1690176" cy="126039"/>
-          </a:xfrm>
-          <a:prstGeom prst="rect">
-            <a:avLst/>
-          </a:prstGeom>
-          <a:noFill/>
-          <a:ln/>
-        </p:spPr>
-        <p:txBody>
-          <a:bodyPr wrap="none" lIns="0" tIns="0" rIns="0" bIns="0" rtlCol="0" anchor="t"/>
-          <a:lstStyle/>
-          <a:p>
-            <a:pPr algn="l" indent="0" marL="0">
-              <a:lnSpc>
-                <a:spcPts val="992"/>
-              </a:lnSpc>
-              <a:buNone/>
-            </a:pPr>
-            <a:r>
-              <a:rPr lang="en-US" sz="620" dirty="0">
+            <a:off x="3659198" y="3660183"/>
+            <a:ext cx="1004473" cy="272407"/>
+          </a:xfrm>
+          <a:prstGeom prst="rect">
+            <a:avLst/>
+          </a:prstGeom>
+          <a:noFill/>
+          <a:ln/>
+        </p:spPr>
+        <p:txBody>
+          <a:bodyPr wrap="none" lIns="0" tIns="0" rIns="0" bIns="0" rtlCol="0" anchor="t"/>
+          <a:lstStyle/>
+          <a:p>
+            <a:pPr algn="l" indent="0" marL="0">
+              <a:lnSpc>
+                <a:spcPts val="1072"/>
+              </a:lnSpc>
+              <a:buNone/>
+            </a:pPr>
+            <a:r>
+              <a:rPr lang="en-US" sz="670" dirty="0">
                 <a:solidFill>
                   <a:srgbClr val="7D838A"/>
                 </a:solidFill>
@@ -12493,9 +12573,29 @@
                 <a:ea typeface="Noto Sans JP" pitchFamily="34" charset="-122"/>
                 <a:cs typeface="Noto Sans JP" pitchFamily="34" charset="-120"/>
               </a:rPr>
-              <a:t>Turnagain（カナダ）・Kalgoorlie（豪州）</a:t>
-            </a:r>
-            <a:endParaRPr lang="en-US" sz="620" dirty="0"/>
+              <a:t>Turnagain（カナダ）・</a:t>
+            </a:r>
+            <a:endParaRPr lang="en-US" sz="670" dirty="0"/>
+          </a:p>
+          <a:p>
+            <a:pPr algn="l" indent="0" marL="0">
+              <a:lnSpc>
+                <a:spcPts val="1072"/>
+              </a:lnSpc>
+              <a:buNone/>
+            </a:pPr>
+            <a:r>
+              <a:rPr lang="en-US" sz="670" dirty="0">
+                <a:solidFill>
+                  <a:srgbClr val="7D838A"/>
+                </a:solidFill>
+                <a:latin typeface="Noto Sans JP" pitchFamily="34" charset="0"/>
+                <a:ea typeface="Noto Sans JP" pitchFamily="34" charset="-122"/>
+                <a:cs typeface="Noto Sans JP" pitchFamily="34" charset="-120"/>
+              </a:rPr>
+              <a:t>Kalgoorlie（豪州）</a:t>
+            </a:r>
+            <a:endParaRPr lang="en-US" sz="670" dirty="0"/>
           </a:p>
         </p:txBody>
       </p:sp>
@@ -12507,8 +12607,8 @@
         </p:nvSpPr>
         <p:spPr>
           <a:xfrm>
-            <a:off x="5590442" y="3258179"/>
-            <a:ext cx="448923" cy="114350"/>
+            <a:off x="5869964" y="3309002"/>
+            <a:ext cx="458968" cy="114350"/>
           </a:xfrm>
           <a:prstGeom prst="rect">
             <a:avLst/>
@@ -12527,7 +12627,7 @@
               <a:buNone/>
             </a:pPr>
             <a:r>
-              <a:rPr lang="en-US" sz="740" spc="30" kern="0" dirty="0">
+              <a:rPr lang="en-US" sz="760" spc="30" kern="0" dirty="0">
                 <a:solidFill>
                   <a:srgbClr val="121519"/>
                 </a:solidFill>
@@ -12537,7 +12637,7 @@
               </a:rPr>
               <a:t>Lithium</a:t>
             </a:r>
-            <a:endParaRPr lang="en-US" sz="740" dirty="0"/>
+            <a:endParaRPr lang="en-US" sz="760" dirty="0"/>
           </a:p>
         </p:txBody>
       </p:sp>
@@ -12549,27 +12649,27 @@
         </p:nvSpPr>
         <p:spPr>
           <a:xfrm>
-            <a:off x="5590442" y="3394955"/>
-            <a:ext cx="480806" cy="145733"/>
-          </a:xfrm>
-          <a:prstGeom prst="rect">
-            <a:avLst/>
-          </a:prstGeom>
-          <a:noFill/>
-          <a:ln/>
-        </p:spPr>
-        <p:txBody>
-          <a:bodyPr wrap="none" lIns="0" tIns="0" rIns="0" bIns="0" rtlCol="0" anchor="t"/>
-          <a:lstStyle/>
-          <a:p>
-            <a:pPr algn="l" indent="0" marL="0">
-              <a:lnSpc>
-                <a:spcPts val="1147"/>
-              </a:lnSpc>
-              <a:buNone/>
-            </a:pPr>
-            <a:r>
-              <a:rPr lang="en-US" sz="740" spc="30" kern="0" dirty="0">
+            <a:off x="5869964" y="3454544"/>
+            <a:ext cx="503517" cy="153610"/>
+          </a:xfrm>
+          <a:prstGeom prst="rect">
+            <a:avLst/>
+          </a:prstGeom>
+          <a:noFill/>
+          <a:ln/>
+        </p:spPr>
+        <p:txBody>
+          <a:bodyPr wrap="none" lIns="0" tIns="0" rIns="0" bIns="0" rtlCol="0" anchor="t"/>
+          <a:lstStyle/>
+          <a:p>
+            <a:pPr algn="l" indent="0" marL="0">
+              <a:lnSpc>
+                <a:spcPts val="1209"/>
+              </a:lnSpc>
+              <a:buNone/>
+            </a:pPr>
+            <a:r>
+              <a:rPr lang="en-US" sz="780" spc="30" kern="0" dirty="0">
                 <a:solidFill>
                   <a:srgbClr val="121519"/>
                 </a:solidFill>
@@ -12579,7 +12679,7 @@
               </a:rPr>
               <a:t>リチウム</a:t>
             </a:r>
-            <a:endParaRPr lang="en-US" sz="740" dirty="0"/>
+            <a:endParaRPr lang="en-US" sz="780" dirty="0"/>
           </a:p>
         </p:txBody>
       </p:sp>
@@ -12591,27 +12691,27 @@
         </p:nvSpPr>
         <p:spPr>
           <a:xfrm>
-            <a:off x="4929753" y="3811379"/>
-            <a:ext cx="973027" cy="126039"/>
-          </a:xfrm>
-          <a:prstGeom prst="rect">
-            <a:avLst/>
-          </a:prstGeom>
-          <a:noFill/>
-          <a:ln/>
-        </p:spPr>
-        <p:txBody>
-          <a:bodyPr wrap="none" lIns="0" tIns="0" rIns="0" bIns="0" rtlCol="0" anchor="t"/>
-          <a:lstStyle/>
-          <a:p>
-            <a:pPr algn="l" indent="0" marL="0">
-              <a:lnSpc>
-                <a:spcPts val="992"/>
-              </a:lnSpc>
-              <a:buNone/>
-            </a:pPr>
-            <a:r>
-              <a:rPr lang="en-US" sz="620" dirty="0">
+            <a:off x="5869964" y="3660183"/>
+            <a:ext cx="1047493" cy="136203"/>
+          </a:xfrm>
+          <a:prstGeom prst="rect">
+            <a:avLst/>
+          </a:prstGeom>
+          <a:noFill/>
+          <a:ln/>
+        </p:spPr>
+        <p:txBody>
+          <a:bodyPr wrap="none" lIns="0" tIns="0" rIns="0" bIns="0" rtlCol="0" anchor="t"/>
+          <a:lstStyle/>
+          <a:p>
+            <a:pPr algn="l" indent="0" marL="0">
+              <a:lnSpc>
+                <a:spcPts val="1072"/>
+              </a:lnSpc>
+              <a:buNone/>
+            </a:pPr>
+            <a:r>
+              <a:rPr lang="en-US" sz="670" dirty="0">
                 <a:solidFill>
                   <a:srgbClr val="7D838A"/>
                 </a:solidFill>
@@ -12621,7 +12721,7 @@
               </a:rPr>
               <a:t>PAK Lithium（カナダ）</a:t>
             </a:r>
-            <a:endParaRPr lang="en-US" sz="620" dirty="0"/>
+            <a:endParaRPr lang="en-US" sz="670" dirty="0"/>
           </a:p>
         </p:txBody>
       </p:sp>
@@ -12633,8 +12733,8 @@
         </p:nvSpPr>
         <p:spPr>
           <a:xfrm>
-            <a:off x="1168911" y="4579557"/>
-            <a:ext cx="1120431" cy="114350"/>
+            <a:off x="1448433" y="4630379"/>
+            <a:ext cx="1147728" cy="114350"/>
           </a:xfrm>
           <a:prstGeom prst="rect">
             <a:avLst/>
@@ -12653,7 +12753,7 @@
               <a:buNone/>
             </a:pPr>
             <a:r>
-              <a:rPr lang="en-US" sz="740" spc="30" kern="0" dirty="0">
+              <a:rPr lang="en-US" sz="760" spc="30" kern="0" dirty="0">
                 <a:solidFill>
                   <a:srgbClr val="121519"/>
                 </a:solidFill>
@@ -12663,7 +12763,7 @@
               </a:rPr>
               <a:t>Bauxite · Aluminium</a:t>
             </a:r>
-            <a:endParaRPr lang="en-US" sz="740" dirty="0"/>
+            <a:endParaRPr lang="en-US" sz="760" dirty="0"/>
           </a:p>
         </p:txBody>
       </p:sp>
@@ -12675,27 +12775,27 @@
         </p:nvSpPr>
         <p:spPr>
           <a:xfrm>
-            <a:off x="1168911" y="4716332"/>
-            <a:ext cx="1447122" cy="145733"/>
-          </a:xfrm>
-          <a:prstGeom prst="rect">
-            <a:avLst/>
-          </a:prstGeom>
-          <a:noFill/>
-          <a:ln/>
-        </p:spPr>
-        <p:txBody>
-          <a:bodyPr wrap="none" lIns="0" tIns="0" rIns="0" bIns="0" rtlCol="0" anchor="t"/>
-          <a:lstStyle/>
-          <a:p>
-            <a:pPr algn="l" indent="0" marL="0">
-              <a:lnSpc>
-                <a:spcPts val="1147"/>
-              </a:lnSpc>
-              <a:buNone/>
-            </a:pPr>
-            <a:r>
-              <a:rPr lang="en-US" sz="740" spc="30" kern="0" dirty="0">
+            <a:off x="1448433" y="4775921"/>
+            <a:ext cx="1520934" cy="153610"/>
+          </a:xfrm>
+          <a:prstGeom prst="rect">
+            <a:avLst/>
+          </a:prstGeom>
+          <a:noFill/>
+          <a:ln/>
+        </p:spPr>
+        <p:txBody>
+          <a:bodyPr wrap="none" lIns="0" tIns="0" rIns="0" bIns="0" rtlCol="0" anchor="t"/>
+          <a:lstStyle/>
+          <a:p>
+            <a:pPr algn="l" indent="0" marL="0">
+              <a:lnSpc>
+                <a:spcPts val="1209"/>
+              </a:lnSpc>
+              <a:buNone/>
+            </a:pPr>
+            <a:r>
+              <a:rPr lang="en-US" sz="780" spc="30" kern="0" dirty="0">
                 <a:solidFill>
                   <a:srgbClr val="121519"/>
                 </a:solidFill>
@@ -12705,7 +12805,7 @@
               </a:rPr>
               <a:t>ボーキサイト・低炭素アルミ</a:t>
             </a:r>
-            <a:endParaRPr lang="en-US" sz="740" dirty="0"/>
+            <a:endParaRPr lang="en-US" sz="780" dirty="0"/>
           </a:p>
         </p:txBody>
       </p:sp>
@@ -12717,27 +12817,27 @@
         </p:nvSpPr>
         <p:spPr>
           <a:xfrm>
-            <a:off x="508222" y="5132756"/>
-            <a:ext cx="1385103" cy="126039"/>
-          </a:xfrm>
-          <a:prstGeom prst="rect">
-            <a:avLst/>
-          </a:prstGeom>
-          <a:noFill/>
-          <a:ln/>
-        </p:spPr>
-        <p:txBody>
-          <a:bodyPr wrap="none" lIns="0" tIns="0" rIns="0" bIns="0" rtlCol="0" anchor="t"/>
-          <a:lstStyle/>
-          <a:p>
-            <a:pPr algn="l" indent="0" marL="0">
-              <a:lnSpc>
-                <a:spcPts val="992"/>
-              </a:lnSpc>
-              <a:buNone/>
-            </a:pPr>
-            <a:r>
-              <a:rPr lang="en-US" sz="620" dirty="0">
+            <a:off x="1448433" y="4981560"/>
+            <a:ext cx="1306051" cy="272407"/>
+          </a:xfrm>
+          <a:prstGeom prst="rect">
+            <a:avLst/>
+          </a:prstGeom>
+          <a:noFill/>
+          <a:ln/>
+        </p:spPr>
+        <p:txBody>
+          <a:bodyPr wrap="none" lIns="0" tIns="0" rIns="0" bIns="0" rtlCol="0" anchor="t"/>
+          <a:lstStyle/>
+          <a:p>
+            <a:pPr algn="l" indent="0" marL="0">
+              <a:lnSpc>
+                <a:spcPts val="1072"/>
+              </a:lnSpc>
+              <a:buNone/>
+            </a:pPr>
+            <a:r>
+              <a:rPr lang="en-US" sz="670" dirty="0">
                 <a:solidFill>
                   <a:srgbClr val="7D838A"/>
                 </a:solidFill>
@@ -12745,9 +12845,29 @@
                 <a:ea typeface="Noto Sans JP" pitchFamily="34" charset="-122"/>
                 <a:cs typeface="Noto Sans JP" pitchFamily="34" charset="-120"/>
               </a:rPr>
-              <a:t>Aurukun（豪州）・Arctial（北欧）</a:t>
-            </a:r>
-            <a:endParaRPr lang="en-US" sz="620" dirty="0"/>
+              <a:t>Aurukun（豪州）・Arctial（北</a:t>
+            </a:r>
+            <a:endParaRPr lang="en-US" sz="670" dirty="0"/>
+          </a:p>
+          <a:p>
+            <a:pPr algn="l" indent="0" marL="0">
+              <a:lnSpc>
+                <a:spcPts val="1072"/>
+              </a:lnSpc>
+              <a:buNone/>
+            </a:pPr>
+            <a:r>
+              <a:rPr lang="en-US" sz="670" dirty="0">
+                <a:solidFill>
+                  <a:srgbClr val="7D838A"/>
+                </a:solidFill>
+                <a:latin typeface="Noto Sans JP" pitchFamily="34" charset="0"/>
+                <a:ea typeface="Noto Sans JP" pitchFamily="34" charset="-122"/>
+                <a:cs typeface="Noto Sans JP" pitchFamily="34" charset="-120"/>
+              </a:rPr>
+              <a:t>欧）</a:t>
+            </a:r>
+            <a:endParaRPr lang="en-US" sz="670" dirty="0"/>
           </a:p>
         </p:txBody>
       </p:sp>
@@ -12759,8 +12879,8 @@
         </p:nvSpPr>
         <p:spPr>
           <a:xfrm>
-            <a:off x="3379676" y="4579557"/>
-            <a:ext cx="530377" cy="114350"/>
+            <a:off x="3659198" y="4630379"/>
+            <a:ext cx="542388" cy="114350"/>
           </a:xfrm>
           <a:prstGeom prst="rect">
             <a:avLst/>
@@ -12779,7 +12899,7 @@
               <a:buNone/>
             </a:pPr>
             <a:r>
-              <a:rPr lang="en-US" sz="740" spc="30" kern="0" dirty="0">
+              <a:rPr lang="en-US" sz="760" spc="30" kern="0" dirty="0">
                 <a:solidFill>
                   <a:srgbClr val="121519"/>
                 </a:solidFill>
@@ -12789,7 +12909,7 @@
               </a:rPr>
               <a:t>Fertilizer</a:t>
             </a:r>
-            <a:endParaRPr lang="en-US" sz="740" dirty="0"/>
+            <a:endParaRPr lang="en-US" sz="760" dirty="0"/>
           </a:p>
         </p:txBody>
       </p:sp>
@@ -12801,27 +12921,27 @@
         </p:nvSpPr>
         <p:spPr>
           <a:xfrm>
-            <a:off x="3379676" y="4716332"/>
-            <a:ext cx="480806" cy="145733"/>
-          </a:xfrm>
-          <a:prstGeom prst="rect">
-            <a:avLst/>
-          </a:prstGeom>
-          <a:noFill/>
-          <a:ln/>
-        </p:spPr>
-        <p:txBody>
-          <a:bodyPr wrap="none" lIns="0" tIns="0" rIns="0" bIns="0" rtlCol="0" anchor="t"/>
-          <a:lstStyle/>
-          <a:p>
-            <a:pPr algn="l" indent="0" marL="0">
-              <a:lnSpc>
-                <a:spcPts val="1147"/>
-              </a:lnSpc>
-              <a:buNone/>
-            </a:pPr>
-            <a:r>
-              <a:rPr lang="en-US" sz="740" spc="30" kern="0" dirty="0">
+            <a:off x="3659198" y="4775921"/>
+            <a:ext cx="503517" cy="153610"/>
+          </a:xfrm>
+          <a:prstGeom prst="rect">
+            <a:avLst/>
+          </a:prstGeom>
+          <a:noFill/>
+          <a:ln/>
+        </p:spPr>
+        <p:txBody>
+          <a:bodyPr wrap="none" lIns="0" tIns="0" rIns="0" bIns="0" rtlCol="0" anchor="t"/>
+          <a:lstStyle/>
+          <a:p>
+            <a:pPr algn="l" indent="0" marL="0">
+              <a:lnSpc>
+                <a:spcPts val="1209"/>
+              </a:lnSpc>
+              <a:buNone/>
+            </a:pPr>
+            <a:r>
+              <a:rPr lang="en-US" sz="780" spc="30" kern="0" dirty="0">
                 <a:solidFill>
                   <a:srgbClr val="121519"/>
                 </a:solidFill>
@@ -12831,7 +12951,7 @@
               </a:rPr>
               <a:t>肥料資源</a:t>
             </a:r>
-            <a:endParaRPr lang="en-US" sz="740" dirty="0"/>
+            <a:endParaRPr lang="en-US" sz="780" dirty="0"/>
           </a:p>
         </p:txBody>
       </p:sp>
@@ -12843,27 +12963,27 @@
         </p:nvSpPr>
         <p:spPr>
           <a:xfrm>
-            <a:off x="2718988" y="5132756"/>
-            <a:ext cx="860563" cy="126039"/>
-          </a:xfrm>
-          <a:prstGeom prst="rect">
-            <a:avLst/>
-          </a:prstGeom>
-          <a:noFill/>
-          <a:ln/>
-        </p:spPr>
-        <p:txBody>
-          <a:bodyPr wrap="none" lIns="0" tIns="0" rIns="0" bIns="0" rtlCol="0" anchor="t"/>
-          <a:lstStyle/>
-          <a:p>
-            <a:pPr algn="l" indent="0" marL="0">
-              <a:lnSpc>
-                <a:spcPts val="992"/>
-              </a:lnSpc>
-              <a:buNone/>
-            </a:pPr>
-            <a:r>
-              <a:rPr lang="en-US" sz="620" dirty="0">
+            <a:off x="3659198" y="4981560"/>
+            <a:ext cx="926076" cy="136203"/>
+          </a:xfrm>
+          <a:prstGeom prst="rect">
+            <a:avLst/>
+          </a:prstGeom>
+          <a:noFill/>
+          <a:ln/>
+        </p:spPr>
+        <p:txBody>
+          <a:bodyPr wrap="none" lIns="0" tIns="0" rIns="0" bIns="0" rtlCol="0" anchor="t"/>
+          <a:lstStyle/>
+          <a:p>
+            <a:pPr algn="l" indent="0" marL="0">
+              <a:lnSpc>
+                <a:spcPts val="1072"/>
+              </a:lnSpc>
+              <a:buNone/>
+            </a:pPr>
+            <a:r>
+              <a:rPr lang="en-US" sz="670" dirty="0">
                 <a:solidFill>
                   <a:srgbClr val="7D838A"/>
                 </a:solidFill>
@@ -12873,7 +12993,7 @@
               </a:rPr>
               <a:t>Woodsmith（英国）</a:t>
             </a:r>
-            <a:endParaRPr lang="en-US" sz="620" dirty="0"/>
+            <a:endParaRPr lang="en-US" sz="670" dirty="0"/>
           </a:p>
         </p:txBody>
       </p:sp>
@@ -12885,8 +13005,8 @@
         </p:nvSpPr>
         <p:spPr>
           <a:xfrm>
-            <a:off x="5590442" y="4579557"/>
-            <a:ext cx="541514" cy="114350"/>
+            <a:off x="5869964" y="4630379"/>
+            <a:ext cx="553962" cy="114350"/>
           </a:xfrm>
           <a:prstGeom prst="rect">
             <a:avLst/>
@@ -12905,7 +13025,7 @@
               <a:buNone/>
             </a:pPr>
             <a:r>
-              <a:rPr lang="en-US" sz="740" spc="30" kern="0" dirty="0">
+              <a:rPr lang="en-US" sz="760" spc="30" kern="0" dirty="0">
                 <a:solidFill>
                   <a:srgbClr val="121519"/>
                 </a:solidFill>
@@ -12915,7 +13035,7 @@
               </a:rPr>
               <a:t>Recycled</a:t>
             </a:r>
-            <a:endParaRPr lang="en-US" sz="740" dirty="0"/>
+            <a:endParaRPr lang="en-US" sz="760" dirty="0"/>
           </a:p>
         </p:txBody>
       </p:sp>
@@ -12927,27 +13047,27 @@
         </p:nvSpPr>
         <p:spPr>
           <a:xfrm>
-            <a:off x="5590442" y="4716332"/>
-            <a:ext cx="480806" cy="145733"/>
-          </a:xfrm>
-          <a:prstGeom prst="rect">
-            <a:avLst/>
-          </a:prstGeom>
-          <a:noFill/>
-          <a:ln/>
-        </p:spPr>
-        <p:txBody>
-          <a:bodyPr wrap="none" lIns="0" tIns="0" rIns="0" bIns="0" rtlCol="0" anchor="t"/>
-          <a:lstStyle/>
-          <a:p>
-            <a:pPr algn="l" indent="0" marL="0">
-              <a:lnSpc>
-                <a:spcPts val="1147"/>
-              </a:lnSpc>
-              <a:buNone/>
-            </a:pPr>
-            <a:r>
-              <a:rPr lang="en-US" sz="740" spc="30" kern="0" dirty="0">
+            <a:off x="5869964" y="4775921"/>
+            <a:ext cx="503517" cy="153610"/>
+          </a:xfrm>
+          <a:prstGeom prst="rect">
+            <a:avLst/>
+          </a:prstGeom>
+          <a:noFill/>
+          <a:ln/>
+        </p:spPr>
+        <p:txBody>
+          <a:bodyPr wrap="none" lIns="0" tIns="0" rIns="0" bIns="0" rtlCol="0" anchor="t"/>
+          <a:lstStyle/>
+          <a:p>
+            <a:pPr algn="l" indent="0" marL="0">
+              <a:lnSpc>
+                <a:spcPts val="1209"/>
+              </a:lnSpc>
+              <a:buNone/>
+            </a:pPr>
+            <a:r>
+              <a:rPr lang="en-US" sz="780" spc="30" kern="0" dirty="0">
                 <a:solidFill>
                   <a:srgbClr val="121519"/>
                 </a:solidFill>
@@ -12957,7 +13077,7 @@
               </a:rPr>
               <a:t>二次資源</a:t>
             </a:r>
-            <a:endParaRPr lang="en-US" sz="740" dirty="0"/>
+            <a:endParaRPr lang="en-US" sz="780" dirty="0"/>
           </a:p>
         </p:txBody>
       </p:sp>
@@ -12969,27 +13089,27 @@
         </p:nvSpPr>
         <p:spPr>
           <a:xfrm>
-            <a:off x="4929753" y="5132756"/>
-            <a:ext cx="1084399" cy="126039"/>
-          </a:xfrm>
-          <a:prstGeom prst="rect">
-            <a:avLst/>
-          </a:prstGeom>
-          <a:noFill/>
-          <a:ln/>
-        </p:spPr>
-        <p:txBody>
-          <a:bodyPr wrap="none" lIns="0" tIns="0" rIns="0" bIns="0" rtlCol="0" anchor="t"/>
-          <a:lstStyle/>
-          <a:p>
-            <a:pPr algn="l" indent="0" marL="0">
-              <a:lnSpc>
-                <a:spcPts val="992"/>
-              </a:lnSpc>
-              <a:buNone/>
-            </a:pPr>
-            <a:r>
-              <a:rPr lang="en-US" sz="620" dirty="0">
+            <a:off x="5869964" y="4981560"/>
+            <a:ext cx="1167819" cy="136203"/>
+          </a:xfrm>
+          <a:prstGeom prst="rect">
+            <a:avLst/>
+          </a:prstGeom>
+          <a:noFill/>
+          <a:ln/>
+        </p:spPr>
+        <p:txBody>
+          <a:bodyPr wrap="none" lIns="0" tIns="0" rIns="0" bIns="0" rtlCol="0" anchor="t"/>
+          <a:lstStyle/>
+          <a:p>
+            <a:pPr algn="l" indent="0" marL="0">
+              <a:lnSpc>
+                <a:spcPts val="1072"/>
+              </a:lnSpc>
+              <a:buNone/>
+            </a:pPr>
+            <a:r>
+              <a:rPr lang="en-US" sz="670" dirty="0">
                 <a:solidFill>
                   <a:srgbClr val="7D838A"/>
                 </a:solidFill>
@@ -12999,7 +13119,7 @@
               </a:rPr>
               <a:t>リサイクル由来の金属資源</a:t>
             </a:r>
-            <a:endParaRPr lang="en-US" sz="620" dirty="0"/>
+            <a:endParaRPr lang="en-US" sz="670" dirty="0"/>
           </a:p>
         </p:txBody>
       </p:sp>
@@ -13137,27 +13257,27 @@
         </p:nvSpPr>
         <p:spPr>
           <a:xfrm>
-            <a:off x="609866" y="6657422"/>
-            <a:ext cx="223776" cy="126039"/>
-          </a:xfrm>
-          <a:prstGeom prst="rect">
-            <a:avLst/>
-          </a:prstGeom>
-          <a:noFill/>
-          <a:ln/>
-        </p:spPr>
-        <p:txBody>
-          <a:bodyPr wrap="none" lIns="0" tIns="0" rIns="0" bIns="0" rtlCol="0" anchor="t"/>
-          <a:lstStyle/>
-          <a:p>
-            <a:pPr algn="l" indent="0" marL="0">
-              <a:lnSpc>
-                <a:spcPts val="992"/>
-              </a:lnSpc>
-              <a:buNone/>
-            </a:pPr>
-            <a:r>
-              <a:rPr lang="en-US" sz="620" dirty="0">
+            <a:off x="609866" y="6658693"/>
+            <a:ext cx="237753" cy="136203"/>
+          </a:xfrm>
+          <a:prstGeom prst="rect">
+            <a:avLst/>
+          </a:prstGeom>
+          <a:noFill/>
+          <a:ln/>
+        </p:spPr>
+        <p:txBody>
+          <a:bodyPr wrap="none" lIns="0" tIns="0" rIns="0" bIns="0" rtlCol="0" anchor="t"/>
+          <a:lstStyle/>
+          <a:p>
+            <a:pPr algn="l" indent="0" marL="0">
+              <a:lnSpc>
+                <a:spcPts val="1072"/>
+              </a:lnSpc>
+              <a:buNone/>
+            </a:pPr>
+            <a:r>
+              <a:rPr lang="en-US" sz="670" dirty="0">
                 <a:solidFill>
                   <a:srgbClr val="7D838A"/>
                 </a:solidFill>
@@ -13167,7 +13287,7 @@
               </a:rPr>
               <a:t>採掘</a:t>
             </a:r>
-            <a:endParaRPr lang="en-US" sz="620" dirty="0"/>
+            <a:endParaRPr lang="en-US" sz="670" dirty="0"/>
           </a:p>
         </p:txBody>
       </p:sp>
@@ -13263,27 +13383,27 @@
         </p:nvSpPr>
         <p:spPr>
           <a:xfrm>
-            <a:off x="1931244" y="6657422"/>
-            <a:ext cx="483208" cy="126039"/>
-          </a:xfrm>
-          <a:prstGeom prst="rect">
-            <a:avLst/>
-          </a:prstGeom>
-          <a:noFill/>
-          <a:ln/>
-        </p:spPr>
-        <p:txBody>
-          <a:bodyPr wrap="none" lIns="0" tIns="0" rIns="0" bIns="0" rtlCol="0" anchor="t"/>
-          <a:lstStyle/>
-          <a:p>
-            <a:pPr algn="l" indent="0" marL="0">
-              <a:lnSpc>
-                <a:spcPts val="992"/>
-              </a:lnSpc>
-              <a:buNone/>
-            </a:pPr>
-            <a:r>
-              <a:rPr lang="en-US" sz="620" dirty="0">
+            <a:off x="1931244" y="6658693"/>
+            <a:ext cx="518148" cy="136203"/>
+          </a:xfrm>
+          <a:prstGeom prst="rect">
+            <a:avLst/>
+          </a:prstGeom>
+          <a:noFill/>
+          <a:ln/>
+        </p:spPr>
+        <p:txBody>
+          <a:bodyPr wrap="none" lIns="0" tIns="0" rIns="0" bIns="0" rtlCol="0" anchor="t"/>
+          <a:lstStyle/>
+          <a:p>
+            <a:pPr algn="l" indent="0" marL="0">
+              <a:lnSpc>
+                <a:spcPts val="1072"/>
+              </a:lnSpc>
+              <a:buNone/>
+            </a:pPr>
+            <a:r>
+              <a:rPr lang="en-US" sz="670" dirty="0">
                 <a:solidFill>
                   <a:srgbClr val="7D838A"/>
                 </a:solidFill>
@@ -13293,7 +13413,7 @@
               </a:rPr>
               <a:t>選鉱・浸出</a:t>
             </a:r>
-            <a:endParaRPr lang="en-US" sz="620" dirty="0"/>
+            <a:endParaRPr lang="en-US" sz="670" dirty="0"/>
           </a:p>
         </p:txBody>
       </p:sp>
@@ -13389,27 +13509,27 @@
         </p:nvSpPr>
         <p:spPr>
           <a:xfrm>
-            <a:off x="3252621" y="6657422"/>
-            <a:ext cx="483208" cy="126039"/>
-          </a:xfrm>
-          <a:prstGeom prst="rect">
-            <a:avLst/>
-          </a:prstGeom>
-          <a:noFill/>
-          <a:ln/>
-        </p:spPr>
-        <p:txBody>
-          <a:bodyPr wrap="none" lIns="0" tIns="0" rIns="0" bIns="0" rtlCol="0" anchor="t"/>
-          <a:lstStyle/>
-          <a:p>
-            <a:pPr algn="l" indent="0" marL="0">
-              <a:lnSpc>
-                <a:spcPts val="992"/>
-              </a:lnSpc>
-              <a:buNone/>
-            </a:pPr>
-            <a:r>
-              <a:rPr lang="en-US" sz="620" dirty="0">
+            <a:off x="3252621" y="6658693"/>
+            <a:ext cx="518148" cy="136203"/>
+          </a:xfrm>
+          <a:prstGeom prst="rect">
+            <a:avLst/>
+          </a:prstGeom>
+          <a:noFill/>
+          <a:ln/>
+        </p:spPr>
+        <p:txBody>
+          <a:bodyPr wrap="none" lIns="0" tIns="0" rIns="0" bIns="0" rtlCol="0" anchor="t"/>
+          <a:lstStyle/>
+          <a:p>
+            <a:pPr algn="l" indent="0" marL="0">
+              <a:lnSpc>
+                <a:spcPts val="1072"/>
+              </a:lnSpc>
+              <a:buNone/>
+            </a:pPr>
+            <a:r>
+              <a:rPr lang="en-US" sz="670" dirty="0">
                 <a:solidFill>
                   <a:srgbClr val="7D838A"/>
                 </a:solidFill>
@@ -13419,7 +13539,7 @@
               </a:rPr>
               <a:t>製錬・精製</a:t>
             </a:r>
-            <a:endParaRPr lang="en-US" sz="620" dirty="0"/>
+            <a:endParaRPr lang="en-US" sz="670" dirty="0"/>
           </a:p>
         </p:txBody>
       </p:sp>
@@ -13515,27 +13635,27 @@
         </p:nvSpPr>
         <p:spPr>
           <a:xfrm>
-            <a:off x="4573998" y="6657422"/>
-            <a:ext cx="396731" cy="126039"/>
-          </a:xfrm>
-          <a:prstGeom prst="rect">
-            <a:avLst/>
-          </a:prstGeom>
-          <a:noFill/>
-          <a:ln/>
-        </p:spPr>
-        <p:txBody>
-          <a:bodyPr wrap="none" lIns="0" tIns="0" rIns="0" bIns="0" rtlCol="0" anchor="t"/>
-          <a:lstStyle/>
-          <a:p>
-            <a:pPr algn="l" indent="0" marL="0">
-              <a:lnSpc>
-                <a:spcPts val="992"/>
-              </a:lnSpc>
-              <a:buNone/>
-            </a:pPr>
-            <a:r>
-              <a:rPr lang="en-US" sz="620" dirty="0">
+            <a:off x="4573998" y="6658693"/>
+            <a:ext cx="424683" cy="136203"/>
+          </a:xfrm>
+          <a:prstGeom prst="rect">
+            <a:avLst/>
+          </a:prstGeom>
+          <a:noFill/>
+          <a:ln/>
+        </p:spPr>
+        <p:txBody>
+          <a:bodyPr wrap="none" lIns="0" tIns="0" rIns="0" bIns="0" rtlCol="0" anchor="t"/>
+          <a:lstStyle/>
+          <a:p>
+            <a:pPr algn="l" indent="0" marL="0">
+              <a:lnSpc>
+                <a:spcPts val="1072"/>
+              </a:lnSpc>
+              <a:buNone/>
+            </a:pPr>
+            <a:r>
+              <a:rPr lang="en-US" sz="670" dirty="0">
                 <a:solidFill>
                   <a:srgbClr val="7D838A"/>
                 </a:solidFill>
@@ -13545,7 +13665,7 @@
               </a:rPr>
               <a:t>最終製品</a:t>
             </a:r>
-            <a:endParaRPr lang="en-US" sz="620" dirty="0"/>
+            <a:endParaRPr lang="en-US" sz="670" dirty="0"/>
           </a:p>
         </p:txBody>
       </p:sp>
@@ -13641,27 +13761,27 @@
         </p:nvSpPr>
         <p:spPr>
           <a:xfrm>
-            <a:off x="5895375" y="6657422"/>
-            <a:ext cx="223776" cy="126039"/>
-          </a:xfrm>
-          <a:prstGeom prst="rect">
-            <a:avLst/>
-          </a:prstGeom>
-          <a:noFill/>
-          <a:ln/>
-        </p:spPr>
-        <p:txBody>
-          <a:bodyPr wrap="none" lIns="0" tIns="0" rIns="0" bIns="0" rtlCol="0" anchor="t"/>
-          <a:lstStyle/>
-          <a:p>
-            <a:pPr algn="l" indent="0" marL="0">
-              <a:lnSpc>
-                <a:spcPts val="992"/>
-              </a:lnSpc>
-              <a:buNone/>
-            </a:pPr>
-            <a:r>
-              <a:rPr lang="en-US" sz="620" dirty="0">
+            <a:off x="5895375" y="6658693"/>
+            <a:ext cx="237753" cy="136203"/>
+          </a:xfrm>
+          <a:prstGeom prst="rect">
+            <a:avLst/>
+          </a:prstGeom>
+          <a:noFill/>
+          <a:ln/>
+        </p:spPr>
+        <p:txBody>
+          <a:bodyPr wrap="none" lIns="0" tIns="0" rIns="0" bIns="0" rtlCol="0" anchor="t"/>
+          <a:lstStyle/>
+          <a:p>
+            <a:pPr algn="l" indent="0" marL="0">
+              <a:lnSpc>
+                <a:spcPts val="1072"/>
+              </a:lnSpc>
+              <a:buNone/>
+            </a:pPr>
+            <a:r>
+              <a:rPr lang="en-US" sz="670" dirty="0">
                 <a:solidFill>
                   <a:srgbClr val="7D838A"/>
                 </a:solidFill>
@@ -13671,7 +13791,7 @@
               </a:rPr>
               <a:t>回収</a:t>
             </a:r>
-            <a:endParaRPr lang="en-US" sz="620" dirty="0"/>
+            <a:endParaRPr lang="en-US" sz="670" dirty="0"/>
           </a:p>
         </p:txBody>
       </p:sp>
@@ -13809,27 +13929,27 @@
         </p:nvSpPr>
         <p:spPr>
           <a:xfrm>
-            <a:off x="622572" y="7788216"/>
-            <a:ext cx="1431181" cy="252078"/>
-          </a:xfrm>
-          <a:prstGeom prst="rect">
-            <a:avLst/>
-          </a:prstGeom>
-          <a:noFill/>
-          <a:ln/>
-        </p:spPr>
-        <p:txBody>
-          <a:bodyPr wrap="none" lIns="0" tIns="0" rIns="0" bIns="0" rtlCol="0" anchor="t"/>
-          <a:lstStyle/>
-          <a:p>
-            <a:pPr algn="l" indent="0" marL="0">
-              <a:lnSpc>
-                <a:spcPts val="992"/>
-              </a:lnSpc>
-              <a:buNone/>
-            </a:pPr>
-            <a:r>
-              <a:rPr lang="en-US" sz="620" dirty="0">
+            <a:off x="622572" y="7789487"/>
+            <a:ext cx="1449088" cy="272407"/>
+          </a:xfrm>
+          <a:prstGeom prst="rect">
+            <a:avLst/>
+          </a:prstGeom>
+          <a:noFill/>
+          <a:ln/>
+        </p:spPr>
+        <p:txBody>
+          <a:bodyPr wrap="none" lIns="0" tIns="0" rIns="0" bIns="0" rtlCol="0" anchor="t"/>
+          <a:lstStyle/>
+          <a:p>
+            <a:pPr algn="l" indent="0" marL="0">
+              <a:lnSpc>
+                <a:spcPts val="1072"/>
+              </a:lnSpc>
+              <a:buNone/>
+            </a:pPr>
+            <a:r>
+              <a:rPr lang="en-US" sz="670" dirty="0">
                 <a:solidFill>
                   <a:srgbClr val="7D838A"/>
                 </a:solidFill>
@@ -13837,19 +13957,19 @@
                 <a:ea typeface="Noto Sans JP" pitchFamily="34" charset="-122"/>
                 <a:cs typeface="Noto Sans JP" pitchFamily="34" charset="-120"/>
               </a:rPr>
-              <a:t>浮遊選鉱の高度化で、回収率・処理</a:t>
-            </a:r>
-            <a:endParaRPr lang="en-US" sz="620" dirty="0"/>
-          </a:p>
-          <a:p>
-            <a:pPr algn="l" indent="0" marL="0">
-              <a:lnSpc>
-                <a:spcPts val="992"/>
-              </a:lnSpc>
-              <a:buNone/>
-            </a:pPr>
-            <a:r>
-              <a:rPr lang="en-US" sz="620" dirty="0">
+              <a:t>浮遊選鉱の高度化で、回収率・処</a:t>
+            </a:r>
+            <a:endParaRPr lang="en-US" sz="670" dirty="0"/>
+          </a:p>
+          <a:p>
+            <a:pPr algn="l" indent="0" marL="0">
+              <a:lnSpc>
+                <a:spcPts val="1072"/>
+              </a:lnSpc>
+              <a:buNone/>
+            </a:pPr>
+            <a:r>
+              <a:rPr lang="en-US" sz="670" dirty="0">
                 <a:solidFill>
                   <a:srgbClr val="7D838A"/>
                 </a:solidFill>
@@ -13857,9 +13977,9 @@
                 <a:ea typeface="Noto Sans JP" pitchFamily="34" charset="-122"/>
                 <a:cs typeface="Noto Sans JP" pitchFamily="34" charset="-120"/>
               </a:rPr>
-              <a:t>能力を向上</a:t>
-            </a:r>
-            <a:endParaRPr lang="en-US" sz="620" dirty="0"/>
+              <a:t>理能力を向上</a:t>
+            </a:r>
+            <a:endParaRPr lang="en-US" sz="670" dirty="0"/>
           </a:p>
         </p:txBody>
       </p:sp>
@@ -13955,27 +14075,27 @@
         </p:nvSpPr>
         <p:spPr>
           <a:xfrm>
-            <a:off x="2274293" y="7788216"/>
-            <a:ext cx="1431181" cy="252078"/>
-          </a:xfrm>
-          <a:prstGeom prst="rect">
-            <a:avLst/>
-          </a:prstGeom>
-          <a:noFill/>
-          <a:ln/>
-        </p:spPr>
-        <p:txBody>
-          <a:bodyPr wrap="none" lIns="0" tIns="0" rIns="0" bIns="0" rtlCol="0" anchor="t"/>
-          <a:lstStyle/>
-          <a:p>
-            <a:pPr algn="l" indent="0" marL="0">
-              <a:lnSpc>
-                <a:spcPts val="992"/>
-              </a:lnSpc>
-              <a:buNone/>
-            </a:pPr>
-            <a:r>
-              <a:rPr lang="en-US" sz="620" dirty="0">
+            <a:off x="2274293" y="7789487"/>
+            <a:ext cx="1449088" cy="272407"/>
+          </a:xfrm>
+          <a:prstGeom prst="rect">
+            <a:avLst/>
+          </a:prstGeom>
+          <a:noFill/>
+          <a:ln/>
+        </p:spPr>
+        <p:txBody>
+          <a:bodyPr wrap="none" lIns="0" tIns="0" rIns="0" bIns="0" rtlCol="0" anchor="t"/>
+          <a:lstStyle/>
+          <a:p>
+            <a:pPr algn="l" indent="0" marL="0">
+              <a:lnSpc>
+                <a:spcPts val="1072"/>
+              </a:lnSpc>
+              <a:buNone/>
+            </a:pPr>
+            <a:r>
+              <a:rPr lang="en-US" sz="670" dirty="0">
                 <a:solidFill>
                   <a:srgbClr val="7D838A"/>
                 </a:solidFill>
@@ -13983,19 +14103,19 @@
                 <a:ea typeface="Noto Sans JP" pitchFamily="34" charset="-122"/>
                 <a:cs typeface="Noto Sans JP" pitchFamily="34" charset="-120"/>
               </a:rPr>
-              <a:t>新しい触媒で、硫化鉱から銅をリー</a:t>
-            </a:r>
-            <a:endParaRPr lang="en-US" sz="620" dirty="0"/>
-          </a:p>
-          <a:p>
-            <a:pPr algn="l" indent="0" marL="0">
-              <a:lnSpc>
-                <a:spcPts val="992"/>
-              </a:lnSpc>
-              <a:buNone/>
-            </a:pPr>
-            <a:r>
-              <a:rPr lang="en-US" sz="620" dirty="0">
+              <a:t>新しい触媒で、硫化鉱から銅をリ</a:t>
+            </a:r>
+            <a:endParaRPr lang="en-US" sz="670" dirty="0"/>
+          </a:p>
+          <a:p>
+            <a:pPr algn="l" indent="0" marL="0">
+              <a:lnSpc>
+                <a:spcPts val="1072"/>
+              </a:lnSpc>
+              <a:buNone/>
+            </a:pPr>
+            <a:r>
+              <a:rPr lang="en-US" sz="670" dirty="0">
                 <a:solidFill>
                   <a:srgbClr val="7D838A"/>
                 </a:solidFill>
@@ -14003,9 +14123,9 @@
                 <a:ea typeface="Noto Sans JP" pitchFamily="34" charset="-122"/>
                 <a:cs typeface="Noto Sans JP" pitchFamily="34" charset="-120"/>
               </a:rPr>
-              <a:t>チング</a:t>
-            </a:r>
-            <a:endParaRPr lang="en-US" sz="620" dirty="0"/>
+              <a:t>ーチング</a:t>
+            </a:r>
+            <a:endParaRPr lang="en-US" sz="670" dirty="0"/>
           </a:p>
         </p:txBody>
       </p:sp>
@@ -14101,27 +14221,27 @@
         </p:nvSpPr>
         <p:spPr>
           <a:xfrm>
-            <a:off x="3926015" y="7788216"/>
-            <a:ext cx="1433146" cy="252078"/>
-          </a:xfrm>
-          <a:prstGeom prst="rect">
-            <a:avLst/>
-          </a:prstGeom>
-          <a:noFill/>
-          <a:ln/>
-        </p:spPr>
-        <p:txBody>
-          <a:bodyPr wrap="none" lIns="0" tIns="0" rIns="0" bIns="0" rtlCol="0" anchor="t"/>
-          <a:lstStyle/>
-          <a:p>
-            <a:pPr algn="l" indent="0" marL="0">
-              <a:lnSpc>
-                <a:spcPts val="992"/>
-              </a:lnSpc>
-              <a:buNone/>
-            </a:pPr>
-            <a:r>
-              <a:rPr lang="en-US" sz="620" dirty="0">
+            <a:off x="3926015" y="7789487"/>
+            <a:ext cx="1451272" cy="272407"/>
+          </a:xfrm>
+          <a:prstGeom prst="rect">
+            <a:avLst/>
+          </a:prstGeom>
+          <a:noFill/>
+          <a:ln/>
+        </p:spPr>
+        <p:txBody>
+          <a:bodyPr wrap="none" lIns="0" tIns="0" rIns="0" bIns="0" rtlCol="0" anchor="t"/>
+          <a:lstStyle/>
+          <a:p>
+            <a:pPr algn="l" indent="0" marL="0">
+              <a:lnSpc>
+                <a:spcPts val="1072"/>
+              </a:lnSpc>
+              <a:buNone/>
+            </a:pPr>
+            <a:r>
+              <a:rPr lang="en-US" sz="670" dirty="0">
                 <a:solidFill>
                   <a:srgbClr val="7D838A"/>
                 </a:solidFill>
@@ -14129,19 +14249,19 @@
                 <a:ea typeface="Noto Sans JP" pitchFamily="34" charset="-122"/>
                 <a:cs typeface="Noto Sans JP" pitchFamily="34" charset="-120"/>
               </a:rPr>
-              <a:t>LME・CMEでのブローカー・ヘッジ</a:t>
-            </a:r>
-            <a:endParaRPr lang="en-US" sz="620" dirty="0"/>
-          </a:p>
-          <a:p>
-            <a:pPr algn="l" indent="0" marL="0">
-              <a:lnSpc>
-                <a:spcPts val="992"/>
-              </a:lnSpc>
-              <a:buNone/>
-            </a:pPr>
-            <a:r>
-              <a:rPr lang="en-US" sz="620" dirty="0">
+              <a:t>LME・CMEでのブローカー・ヘッ</a:t>
+            </a:r>
+            <a:endParaRPr lang="en-US" sz="670" dirty="0"/>
+          </a:p>
+          <a:p>
+            <a:pPr algn="l" indent="0" marL="0">
+              <a:lnSpc>
+                <a:spcPts val="1072"/>
+              </a:lnSpc>
+              <a:buNone/>
+            </a:pPr>
+            <a:r>
+              <a:rPr lang="en-US" sz="670" dirty="0">
                 <a:solidFill>
                   <a:srgbClr val="7D838A"/>
                 </a:solidFill>
@@ -14149,9 +14269,9 @@
                 <a:ea typeface="Noto Sans JP" pitchFamily="34" charset="-122"/>
                 <a:cs typeface="Noto Sans JP" pitchFamily="34" charset="-120"/>
               </a:rPr>
-              <a:t>機能</a:t>
-            </a:r>
-            <a:endParaRPr lang="en-US" sz="620" dirty="0"/>
+              <a:t>ジ機能</a:t>
+            </a:r>
+            <a:endParaRPr lang="en-US" sz="670" dirty="0"/>
           </a:p>
         </p:txBody>
       </p:sp>
@@ -14247,27 +14367,27 @@
         </p:nvSpPr>
         <p:spPr>
           <a:xfrm>
-            <a:off x="5577736" y="7788216"/>
-            <a:ext cx="1434457" cy="252078"/>
-          </a:xfrm>
-          <a:prstGeom prst="rect">
-            <a:avLst/>
-          </a:prstGeom>
-          <a:noFill/>
-          <a:ln/>
-        </p:spPr>
-        <p:txBody>
-          <a:bodyPr wrap="none" lIns="0" tIns="0" rIns="0" bIns="0" rtlCol="0" anchor="t"/>
-          <a:lstStyle/>
-          <a:p>
-            <a:pPr algn="l" indent="0" marL="0">
-              <a:lnSpc>
-                <a:spcPts val="992"/>
-              </a:lnSpc>
-              <a:buNone/>
-            </a:pPr>
-            <a:r>
-              <a:rPr lang="en-US" sz="620" dirty="0">
+            <a:off x="5577736" y="7789487"/>
+            <a:ext cx="1452800" cy="272407"/>
+          </a:xfrm>
+          <a:prstGeom prst="rect">
+            <a:avLst/>
+          </a:prstGeom>
+          <a:noFill/>
+          <a:ln/>
+        </p:spPr>
+        <p:txBody>
+          <a:bodyPr wrap="none" lIns="0" tIns="0" rIns="0" bIns="0" rtlCol="0" anchor="t"/>
+          <a:lstStyle/>
+          <a:p>
+            <a:pPr algn="l" indent="0" marL="0">
+              <a:lnSpc>
+                <a:spcPts val="1072"/>
+              </a:lnSpc>
+              <a:buNone/>
+            </a:pPr>
+            <a:r>
+              <a:rPr lang="en-US" sz="670" dirty="0">
                 <a:solidFill>
                   <a:srgbClr val="7D838A"/>
                 </a:solidFill>
@@ -14275,19 +14395,19 @@
                 <a:ea typeface="Noto Sans JP" pitchFamily="34" charset="-122"/>
                 <a:cs typeface="Noto Sans JP" pitchFamily="34" charset="-120"/>
               </a:rPr>
-              <a:t>電子スクラップから銅・貴金属を回</a:t>
-            </a:r>
-            <a:endParaRPr lang="en-US" sz="620" dirty="0"/>
-          </a:p>
-          <a:p>
-            <a:pPr algn="l" indent="0" marL="0">
-              <a:lnSpc>
-                <a:spcPts val="992"/>
-              </a:lnSpc>
-              <a:buNone/>
-            </a:pPr>
-            <a:r>
-              <a:rPr lang="en-US" sz="620" dirty="0">
+              <a:t>電子スクラップから銅・貴金属を</a:t>
+            </a:r>
+            <a:endParaRPr lang="en-US" sz="670" dirty="0"/>
+          </a:p>
+          <a:p>
+            <a:pPr algn="l" indent="0" marL="0">
+              <a:lnSpc>
+                <a:spcPts val="1072"/>
+              </a:lnSpc>
+              <a:buNone/>
+            </a:pPr>
+            <a:r>
+              <a:rPr lang="en-US" sz="670" dirty="0">
                 <a:solidFill>
                   <a:srgbClr val="7D838A"/>
                 </a:solidFill>
@@ -14295,9 +14415,9 @@
                 <a:ea typeface="Noto Sans JP" pitchFamily="34" charset="-122"/>
                 <a:cs typeface="Noto Sans JP" pitchFamily="34" charset="-120"/>
               </a:rPr>
-              <a:t>収</a:t>
-            </a:r>
-            <a:endParaRPr lang="en-US" sz="620" dirty="0"/>
+              <a:t>回収</a:t>
+            </a:r>
+            <a:endParaRPr lang="en-US" sz="670" dirty="0"/>
           </a:p>
         </p:txBody>
       </p:sp>
@@ -14309,27 +14429,27 @@
         </p:nvSpPr>
         <p:spPr>
           <a:xfrm>
-            <a:off x="508222" y="8483305"/>
-            <a:ext cx="3544848" cy="686354"/>
-          </a:xfrm>
-          <a:prstGeom prst="rect">
-            <a:avLst/>
-          </a:prstGeom>
-          <a:noFill/>
-          <a:ln/>
-        </p:spPr>
-        <p:txBody>
-          <a:bodyPr wrap="none" lIns="0" tIns="0" rIns="0" bIns="0" rtlCol="0" anchor="t"/>
-          <a:lstStyle/>
-          <a:p>
-            <a:pPr algn="l" indent="0" marL="0">
-              <a:lnSpc>
-                <a:spcPts val="1351"/>
-              </a:lnSpc>
-              <a:buNone/>
-            </a:pPr>
-            <a:r>
-              <a:rPr lang="en-US" sz="730" spc="20" kern="0" dirty="0">
+            <a:off x="508222" y="8484957"/>
+            <a:ext cx="3544848" cy="723962"/>
+          </a:xfrm>
+          <a:prstGeom prst="rect">
+            <a:avLst/>
+          </a:prstGeom>
+          <a:noFill/>
+          <a:ln/>
+        </p:spPr>
+        <p:txBody>
+          <a:bodyPr wrap="none" lIns="0" tIns="0" rIns="0" bIns="0" rtlCol="0" anchor="t"/>
+          <a:lstStyle/>
+          <a:p>
+            <a:pPr algn="l" indent="0" marL="0">
+              <a:lnSpc>
+                <a:spcPts val="1425"/>
+              </a:lnSpc>
+              <a:buNone/>
+            </a:pPr>
+            <a:r>
+              <a:rPr lang="en-US" sz="770" spc="20" kern="0" dirty="0">
                 <a:solidFill>
                   <a:srgbClr val="3D4249"/>
                 </a:solidFill>
@@ -14337,19 +14457,19 @@
                 <a:ea typeface="Noto Sans JP" pitchFamily="34" charset="-122"/>
                 <a:cs typeface="Noto Sans JP" pitchFamily="34" charset="-120"/>
               </a:rPr>
-              <a:t>新技術の把握は、既存事業の高度化と将来価値の創出に還元されます。業</a:t>
-            </a:r>
-            <a:endParaRPr lang="en-US" sz="730" dirty="0"/>
-          </a:p>
-          <a:p>
-            <a:pPr algn="l" indent="0" marL="0">
-              <a:lnSpc>
-                <a:spcPts val="1351"/>
-              </a:lnSpc>
-              <a:buNone/>
-            </a:pPr>
-            <a:r>
-              <a:rPr lang="en-US" sz="730" spc="20" kern="0" dirty="0">
+              <a:t>新技術の把握は、既存事業の高度化と将来価値の創出に還元されま</a:t>
+            </a:r>
+            <a:endParaRPr lang="en-US" sz="770" dirty="0"/>
+          </a:p>
+          <a:p>
+            <a:pPr algn="l" indent="0" marL="0">
+              <a:lnSpc>
+                <a:spcPts val="1425"/>
+              </a:lnSpc>
+              <a:buNone/>
+            </a:pPr>
+            <a:r>
+              <a:rPr lang="en-US" sz="770" spc="20" kern="0" dirty="0">
                 <a:solidFill>
                   <a:srgbClr val="3D4249"/>
                 </a:solidFill>
@@ -14357,19 +14477,19 @@
                 <a:ea typeface="Noto Sans JP" pitchFamily="34" charset="-122"/>
                 <a:cs typeface="Noto Sans JP" pitchFamily="34" charset="-120"/>
               </a:rPr>
-              <a:t>界のボトルネック——鉱石品位の低下、回収率、リサイクル——に挑むスタ</a:t>
-            </a:r>
-            <a:endParaRPr lang="en-US" sz="730" dirty="0"/>
-          </a:p>
-          <a:p>
-            <a:pPr algn="l" indent="0" marL="0">
-              <a:lnSpc>
-                <a:spcPts val="1351"/>
-              </a:lnSpc>
-              <a:buNone/>
-            </a:pPr>
-            <a:r>
-              <a:rPr lang="en-US" sz="730" spc="20" kern="0" dirty="0">
+              <a:t>す。業界のボトルネック——鉱石品位の低下、回収率、リサイクル——</a:t>
+            </a:r>
+            <a:endParaRPr lang="en-US" sz="770" dirty="0"/>
+          </a:p>
+          <a:p>
+            <a:pPr algn="l" indent="0" marL="0">
+              <a:lnSpc>
+                <a:spcPts val="1425"/>
+              </a:lnSpc>
+              <a:buNone/>
+            </a:pPr>
+            <a:r>
+              <a:rPr lang="en-US" sz="770" spc="20" kern="0" dirty="0">
                 <a:solidFill>
                   <a:srgbClr val="3D4249"/>
                 </a:solidFill>
@@ -14377,19 +14497,19 @@
                 <a:ea typeface="Noto Sans JP" pitchFamily="34" charset="-122"/>
                 <a:cs typeface="Noto Sans JP" pitchFamily="34" charset="-120"/>
               </a:rPr>
-              <a:t>ートアップへの投資を通じ、山を持つだけでも、売るだけでもない、川上</a:t>
-            </a:r>
-            <a:endParaRPr lang="en-US" sz="730" dirty="0"/>
-          </a:p>
-          <a:p>
-            <a:pPr algn="l" indent="0" marL="0">
-              <a:lnSpc>
-                <a:spcPts val="1351"/>
-              </a:lnSpc>
-              <a:buNone/>
-            </a:pPr>
-            <a:r>
-              <a:rPr lang="en-US" sz="730" spc="20" kern="0" dirty="0">
+              <a:t>に挑むスタートアップへの投資を通じ、山を持つだけでも、売るだけ</a:t>
+            </a:r>
+            <a:endParaRPr lang="en-US" sz="770" dirty="0"/>
+          </a:p>
+          <a:p>
+            <a:pPr algn="l" indent="0" marL="0">
+              <a:lnSpc>
+                <a:spcPts val="1425"/>
+              </a:lnSpc>
+              <a:buNone/>
+            </a:pPr>
+            <a:r>
+              <a:rPr lang="en-US" sz="770" spc="20" kern="0" dirty="0">
                 <a:solidFill>
                   <a:srgbClr val="3D4249"/>
                 </a:solidFill>
@@ -14397,9 +14517,9 @@
                 <a:ea typeface="Noto Sans JP" pitchFamily="34" charset="-122"/>
                 <a:cs typeface="Noto Sans JP" pitchFamily="34" charset="-120"/>
               </a:rPr>
-              <a:t>から川下までのフットプリントを広げています。</a:t>
-            </a:r>
-            <a:endParaRPr lang="en-US" sz="730" dirty="0"/>
+              <a:t>でもない、川上から川下までのフットプリントを広げています。</a:t>
+            </a:r>
+            <a:endParaRPr lang="en-US" sz="770" dirty="0"/>
           </a:p>
         </p:txBody>
       </p:sp>
@@ -14663,27 +14783,27 @@
         </p:nvSpPr>
         <p:spPr>
           <a:xfrm>
-            <a:off x="8068024" y="1867287"/>
-            <a:ext cx="7248516" cy="514765"/>
-          </a:xfrm>
-          <a:prstGeom prst="rect">
-            <a:avLst/>
-          </a:prstGeom>
-          <a:noFill/>
-          <a:ln/>
-        </p:spPr>
-        <p:txBody>
-          <a:bodyPr wrap="none" lIns="0" tIns="0" rIns="0" bIns="0" rtlCol="0" anchor="t"/>
-          <a:lstStyle/>
-          <a:p>
-            <a:pPr algn="l" indent="0" marL="0">
-              <a:lnSpc>
-                <a:spcPts val="1351"/>
-              </a:lnSpc>
-              <a:buNone/>
-            </a:pPr>
-            <a:r>
-              <a:rPr lang="en-US" sz="730" spc="20" kern="0" dirty="0">
+            <a:off x="8068024" y="1868939"/>
+            <a:ext cx="7248516" cy="542972"/>
+          </a:xfrm>
+          <a:prstGeom prst="rect">
+            <a:avLst/>
+          </a:prstGeom>
+          <a:noFill/>
+          <a:ln/>
+        </p:spPr>
+        <p:txBody>
+          <a:bodyPr wrap="none" lIns="0" tIns="0" rIns="0" bIns="0" rtlCol="0" anchor="t"/>
+          <a:lstStyle/>
+          <a:p>
+            <a:pPr algn="l" indent="0" marL="0">
+              <a:lnSpc>
+                <a:spcPts val="1425"/>
+              </a:lnSpc>
+              <a:buNone/>
+            </a:pPr>
+            <a:r>
+              <a:rPr lang="en-US" sz="770" spc="20" kern="0" dirty="0">
                 <a:solidFill>
                   <a:srgbClr val="3D4249"/>
                 </a:solidFill>
@@ -14691,19 +14811,19 @@
                 <a:ea typeface="Noto Sans JP" pitchFamily="34" charset="-122"/>
                 <a:cs typeface="Noto Sans JP" pitchFamily="34" charset="-120"/>
               </a:rPr>
-              <a:t>資源業界では、良い案件があっても単独では規模が大きすぎることが少なくありません。そのとき「三菱に声をかけよう」と思われる存在であること。</a:t>
-            </a:r>
-            <a:endParaRPr lang="en-US" sz="730" dirty="0"/>
-          </a:p>
-          <a:p>
-            <a:pPr algn="l" indent="0" marL="0">
-              <a:lnSpc>
-                <a:spcPts val="1351"/>
-              </a:lnSpc>
-              <a:buNone/>
-            </a:pPr>
-            <a:r>
-              <a:rPr lang="en-US" sz="730" spc="20" kern="0" dirty="0">
+              <a:t>資源業界では、良い案件があっても単独では規模が大きすぎることが少なくありません。そのとき「三菱に声をかけよう」と思われる存在である</a:t>
+            </a:r>
+            <a:endParaRPr lang="en-US" sz="770" dirty="0"/>
+          </a:p>
+          <a:p>
+            <a:pPr algn="l" indent="0" marL="0">
+              <a:lnSpc>
+                <a:spcPts val="1425"/>
+              </a:lnSpc>
+              <a:buNone/>
+            </a:pPr>
+            <a:r>
+              <a:rPr lang="en-US" sz="770" spc="20" kern="0" dirty="0">
                 <a:solidFill>
                   <a:srgbClr val="3D4249"/>
                 </a:solidFill>
@@ -14711,19 +14831,19 @@
                 <a:ea typeface="Noto Sans JP" pitchFamily="34" charset="-122"/>
                 <a:cs typeface="Noto Sans JP" pitchFamily="34" charset="-120"/>
               </a:rPr>
-              <a:t>BHP、Rio Tinto、Anglo Americanをはじめとする業界最大手とJVを組み、単なる共同出資者に留まらず、人材派遣・ガバナンス参画・総合力で事業価</a:t>
-            </a:r>
-            <a:endParaRPr lang="en-US" sz="730" dirty="0"/>
-          </a:p>
-          <a:p>
-            <a:pPr algn="l" indent="0" marL="0">
-              <a:lnSpc>
-                <a:spcPts val="1351"/>
-              </a:lnSpc>
-              <a:buNone/>
-            </a:pPr>
-            <a:r>
-              <a:rPr lang="en-US" sz="730" spc="20" kern="0" dirty="0">
+              <a:t>こと。BHP、Rio Tinto、Anglo Americanをはじめとする業界最大手とJVを組み、単なる共同出資者に留まらず、人材派遣・ガバナンス参画・総</a:t>
+            </a:r>
+            <a:endParaRPr lang="en-US" sz="770" dirty="0"/>
+          </a:p>
+          <a:p>
+            <a:pPr algn="l" indent="0" marL="0">
+              <a:lnSpc>
+                <a:spcPts val="1425"/>
+              </a:lnSpc>
+              <a:buNone/>
+            </a:pPr>
+            <a:r>
+              <a:rPr lang="en-US" sz="770" spc="20" kern="0" dirty="0">
                 <a:solidFill>
                   <a:srgbClr val="3D4249"/>
                 </a:solidFill>
@@ -14731,9 +14851,9 @@
                 <a:ea typeface="Noto Sans JP" pitchFamily="34" charset="-122"/>
                 <a:cs typeface="Noto Sans JP" pitchFamily="34" charset="-120"/>
               </a:rPr>
-              <a:t>値の最大化に貢献してきました。</a:t>
-            </a:r>
-            <a:endParaRPr lang="en-US" sz="730" dirty="0"/>
+              <a:t>合力で事業価値の最大化に貢献してきました。</a:t>
+            </a:r>
+            <a:endParaRPr lang="en-US" sz="770" dirty="0"/>
           </a:p>
         </p:txBody>
       </p:sp>
@@ -14871,27 +14991,27 @@
         </p:nvSpPr>
         <p:spPr>
           <a:xfrm>
-            <a:off x="8474602" y="3141558"/>
-            <a:ext cx="2378935" cy="126039"/>
-          </a:xfrm>
-          <a:prstGeom prst="rect">
-            <a:avLst/>
-          </a:prstGeom>
-          <a:noFill/>
-          <a:ln/>
-        </p:spPr>
-        <p:txBody>
-          <a:bodyPr wrap="none" lIns="0" tIns="0" rIns="0" bIns="0" rtlCol="0" anchor="t"/>
-          <a:lstStyle/>
-          <a:p>
-            <a:pPr algn="l" indent="0" marL="0">
-              <a:lnSpc>
-                <a:spcPts val="992"/>
-              </a:lnSpc>
-              <a:buNone/>
-            </a:pPr>
-            <a:r>
-              <a:rPr lang="en-US" sz="620" dirty="0">
+            <a:off x="8474602" y="3142829"/>
+            <a:ext cx="2566958" cy="136203"/>
+          </a:xfrm>
+          <a:prstGeom prst="rect">
+            <a:avLst/>
+          </a:prstGeom>
+          <a:noFill/>
+          <a:ln/>
+        </p:spPr>
+        <p:txBody>
+          <a:bodyPr wrap="none" lIns="0" tIns="0" rIns="0" bIns="0" rtlCol="0" anchor="t"/>
+          <a:lstStyle/>
+          <a:p>
+            <a:pPr algn="l" indent="0" marL="0">
+              <a:lnSpc>
+                <a:spcPts val="1072"/>
+              </a:lnSpc>
+              <a:buNone/>
+            </a:pPr>
+            <a:r>
+              <a:rPr lang="en-US" sz="670" dirty="0">
                 <a:solidFill>
                   <a:srgbClr val="7D838A"/>
                 </a:solidFill>
@@ -14901,7 +15021,7 @@
               </a:rPr>
               <a:t>短期の成果を求める投資家とは一線を画す、中長期の視座。</a:t>
             </a:r>
-            <a:endParaRPr lang="en-US" sz="620" dirty="0"/>
+            <a:endParaRPr lang="en-US" sz="670" dirty="0"/>
           </a:p>
         </p:txBody>
       </p:sp>
@@ -15039,27 +15159,27 @@
         </p:nvSpPr>
         <p:spPr>
           <a:xfrm>
-            <a:off x="11803456" y="3141558"/>
-            <a:ext cx="1517658" cy="126039"/>
-          </a:xfrm>
-          <a:prstGeom prst="rect">
-            <a:avLst/>
-          </a:prstGeom>
-          <a:noFill/>
-          <a:ln/>
-        </p:spPr>
-        <p:txBody>
-          <a:bodyPr wrap="none" lIns="0" tIns="0" rIns="0" bIns="0" rtlCol="0" anchor="t"/>
-          <a:lstStyle/>
-          <a:p>
-            <a:pPr algn="l" indent="0" marL="0">
-              <a:lnSpc>
-                <a:spcPts val="992"/>
-              </a:lnSpc>
-              <a:buNone/>
-            </a:pPr>
-            <a:r>
-              <a:rPr lang="en-US" sz="620" dirty="0">
+            <a:off x="11803456" y="3142829"/>
+            <a:ext cx="1636018" cy="136203"/>
+          </a:xfrm>
+          <a:prstGeom prst="rect">
+            <a:avLst/>
+          </a:prstGeom>
+          <a:noFill/>
+          <a:ln/>
+        </p:spPr>
+        <p:txBody>
+          <a:bodyPr wrap="none" lIns="0" tIns="0" rIns="0" bIns="0" rtlCol="0" anchor="t"/>
+          <a:lstStyle/>
+          <a:p>
+            <a:pPr algn="l" indent="0" marL="0">
+              <a:lnSpc>
+                <a:spcPts val="1072"/>
+              </a:lnSpc>
+              <a:buNone/>
+            </a:pPr>
+            <a:r>
+              <a:rPr lang="en-US" sz="670" dirty="0">
                 <a:solidFill>
                   <a:srgbClr val="7D838A"/>
                 </a:solidFill>
@@ -15069,7 +15189,7 @@
               </a:rPr>
               <a:t>実質的な経営貢献と、高い目利き力。</a:t>
             </a:r>
-            <a:endParaRPr lang="en-US" sz="620" dirty="0"/>
+            <a:endParaRPr lang="en-US" sz="670" dirty="0"/>
           </a:p>
         </p:txBody>
       </p:sp>
@@ -15207,27 +15327,27 @@
         </p:nvSpPr>
         <p:spPr>
           <a:xfrm>
-            <a:off x="8474602" y="4081769"/>
-            <a:ext cx="2205981" cy="126039"/>
-          </a:xfrm>
-          <a:prstGeom prst="rect">
-            <a:avLst/>
-          </a:prstGeom>
-          <a:noFill/>
-          <a:ln/>
-        </p:spPr>
-        <p:txBody>
-          <a:bodyPr wrap="none" lIns="0" tIns="0" rIns="0" bIns="0" rtlCol="0" anchor="t"/>
-          <a:lstStyle/>
-          <a:p>
-            <a:pPr algn="l" indent="0" marL="0">
-              <a:lnSpc>
-                <a:spcPts val="992"/>
-              </a:lnSpc>
-              <a:buNone/>
-            </a:pPr>
-            <a:r>
-              <a:rPr lang="en-US" sz="620" dirty="0">
+            <a:off x="8474602" y="4083040"/>
+            <a:ext cx="2380027" cy="136203"/>
+          </a:xfrm>
+          <a:prstGeom prst="rect">
+            <a:avLst/>
+          </a:prstGeom>
+          <a:noFill/>
+          <a:ln/>
+        </p:spPr>
+        <p:txBody>
+          <a:bodyPr wrap="none" lIns="0" tIns="0" rIns="0" bIns="0" rtlCol="0" anchor="t"/>
+          <a:lstStyle/>
+          <a:p>
+            <a:pPr algn="l" indent="0" marL="0">
+              <a:lnSpc>
+                <a:spcPts val="1072"/>
+              </a:lnSpc>
+              <a:buNone/>
+            </a:pPr>
+            <a:r>
+              <a:rPr lang="en-US" sz="670" dirty="0">
                 <a:solidFill>
                   <a:srgbClr val="7D838A"/>
                 </a:solidFill>
@@ -15237,7 +15357,7 @@
               </a:rPr>
               <a:t>リスクシェアリングと制度金融のファシリテーション。</a:t>
             </a:r>
-            <a:endParaRPr lang="en-US" sz="620" dirty="0"/>
+            <a:endParaRPr lang="en-US" sz="670" dirty="0"/>
           </a:p>
         </p:txBody>
       </p:sp>
@@ -15375,27 +15495,27 @@
         </p:nvSpPr>
         <p:spPr>
           <a:xfrm>
-            <a:off x="11803456" y="4081769"/>
-            <a:ext cx="1866842" cy="126039"/>
-          </a:xfrm>
-          <a:prstGeom prst="rect">
-            <a:avLst/>
-          </a:prstGeom>
-          <a:noFill/>
-          <a:ln/>
-        </p:spPr>
-        <p:txBody>
-          <a:bodyPr wrap="none" lIns="0" tIns="0" rIns="0" bIns="0" rtlCol="0" anchor="t"/>
-          <a:lstStyle/>
-          <a:p>
-            <a:pPr algn="l" indent="0" marL="0">
-              <a:lnSpc>
-                <a:spcPts val="992"/>
-              </a:lnSpc>
-              <a:buNone/>
-            </a:pPr>
-            <a:r>
-              <a:rPr lang="en-US" sz="620" dirty="0">
+            <a:off x="11803456" y="4083040"/>
+            <a:ext cx="2013591" cy="136203"/>
+          </a:xfrm>
+          <a:prstGeom prst="rect">
+            <a:avLst/>
+          </a:prstGeom>
+          <a:noFill/>
+          <a:ln/>
+        </p:spPr>
+        <p:txBody>
+          <a:bodyPr wrap="none" lIns="0" tIns="0" rIns="0" bIns="0" rtlCol="0" anchor="t"/>
+          <a:lstStyle/>
+          <a:p>
+            <a:pPr algn="l" indent="0" marL="0">
+              <a:lnSpc>
+                <a:spcPts val="1072"/>
+              </a:lnSpc>
+              <a:buNone/>
+            </a:pPr>
+            <a:r>
+              <a:rPr lang="en-US" sz="670" dirty="0">
                 <a:solidFill>
                   <a:srgbClr val="7D838A"/>
                 </a:solidFill>
@@ -15405,7 +15525,7 @@
               </a:rPr>
               <a:t>国・地域の拠点と幅広い産業接点からの知見。</a:t>
             </a:r>
-            <a:endParaRPr lang="en-US" sz="620" dirty="0"/>
+            <a:endParaRPr lang="en-US" sz="670" dirty="0"/>
           </a:p>
         </p:txBody>
       </p:sp>
@@ -15501,27 +15621,27 @@
         </p:nvSpPr>
         <p:spPr>
           <a:xfrm>
-            <a:off x="8068024" y="6949848"/>
-            <a:ext cx="3805808" cy="126039"/>
-          </a:xfrm>
-          <a:prstGeom prst="rect">
-            <a:avLst/>
-          </a:prstGeom>
-          <a:noFill/>
-          <a:ln/>
-        </p:spPr>
-        <p:txBody>
-          <a:bodyPr wrap="none" lIns="0" tIns="0" rIns="0" bIns="0" rtlCol="0" anchor="t"/>
-          <a:lstStyle/>
-          <a:p>
-            <a:pPr algn="l" indent="0" marL="0">
-              <a:lnSpc>
-                <a:spcPts val="992"/>
-              </a:lnSpc>
-              <a:buNone/>
-            </a:pPr>
-            <a:r>
-              <a:rPr lang="en-US" sz="620" dirty="0">
+            <a:off x="8068024" y="6951119"/>
+            <a:ext cx="4109134" cy="136203"/>
+          </a:xfrm>
+          <a:prstGeom prst="rect">
+            <a:avLst/>
+          </a:prstGeom>
+          <a:noFill/>
+          <a:ln/>
+        </p:spPr>
+        <p:txBody>
+          <a:bodyPr wrap="none" lIns="0" tIns="0" rIns="0" bIns="0" rtlCol="0" anchor="t"/>
+          <a:lstStyle/>
+          <a:p>
+            <a:pPr algn="l" indent="0" marL="0">
+              <a:lnSpc>
+                <a:spcPts val="1072"/>
+              </a:lnSpc>
+              <a:buNone/>
+            </a:pPr>
+            <a:r>
+              <a:rPr lang="en-US" sz="670" dirty="0">
                 <a:solidFill>
                   <a:srgbClr val="7D838A"/>
                 </a:solidFill>
@@ -15531,7 +15651,7 @@
               </a:rPr>
               <a:t>Singapore（拠点集約）・Japan・India・China・USA・UK・UAE・Indonesia・Thailand・Chile</a:t>
             </a:r>
-            <a:endParaRPr lang="en-US" sz="620" dirty="0"/>
+            <a:endParaRPr lang="en-US" sz="670" dirty="0"/>
           </a:p>
         </p:txBody>
       </p:sp>
@@ -16005,27 +16125,27 @@
         </p:nvSpPr>
         <p:spPr>
           <a:xfrm>
-            <a:off x="12794488" y="7737592"/>
-            <a:ext cx="829117" cy="252078"/>
-          </a:xfrm>
-          <a:prstGeom prst="rect">
-            <a:avLst/>
-          </a:prstGeom>
-          <a:noFill/>
-          <a:ln/>
-        </p:spPr>
-        <p:txBody>
-          <a:bodyPr wrap="none" lIns="0" tIns="0" rIns="0" bIns="0" rtlCol="0" anchor="t"/>
-          <a:lstStyle/>
-          <a:p>
-            <a:pPr algn="l" indent="0" marL="0">
-              <a:lnSpc>
-                <a:spcPts val="992"/>
-              </a:lnSpc>
-              <a:buNone/>
-            </a:pPr>
-            <a:r>
-              <a:rPr lang="en-US" sz="620" dirty="0">
+            <a:off x="12794488" y="7738863"/>
+            <a:ext cx="892009" cy="272407"/>
+          </a:xfrm>
+          <a:prstGeom prst="rect">
+            <a:avLst/>
+          </a:prstGeom>
+          <a:noFill/>
+          <a:ln/>
+        </p:spPr>
+        <p:txBody>
+          <a:bodyPr wrap="none" lIns="0" tIns="0" rIns="0" bIns="0" rtlCol="0" anchor="t"/>
+          <a:lstStyle/>
+          <a:p>
+            <a:pPr algn="l" indent="0" marL="0">
+              <a:lnSpc>
+                <a:spcPts val="1072"/>
+              </a:lnSpc>
+              <a:buNone/>
+            </a:pPr>
+            <a:r>
+              <a:rPr lang="en-US" sz="670" dirty="0">
                 <a:solidFill>
                   <a:srgbClr val="7D838A"/>
                 </a:solidFill>
@@ -16035,17 +16155,17 @@
               </a:rPr>
               <a:t>他社ロゴは使用せず</a:t>
             </a:r>
-            <a:endParaRPr lang="en-US" sz="620" dirty="0"/>
-          </a:p>
-          <a:p>
-            <a:pPr algn="l" indent="0" marL="0">
-              <a:lnSpc>
-                <a:spcPts val="992"/>
-              </a:lnSpc>
-              <a:buNone/>
-            </a:pPr>
-            <a:r>
-              <a:rPr lang="en-US" sz="620" dirty="0">
+            <a:endParaRPr lang="en-US" sz="670" dirty="0"/>
+          </a:p>
+          <a:p>
+            <a:pPr algn="l" indent="0" marL="0">
+              <a:lnSpc>
+                <a:spcPts val="1072"/>
+              </a:lnSpc>
+              <a:buNone/>
+            </a:pPr>
+            <a:r>
+              <a:rPr lang="en-US" sz="670" dirty="0">
                 <a:solidFill>
                   <a:srgbClr val="7D838A"/>
                 </a:solidFill>
@@ -16055,7 +16175,7 @@
               </a:rPr>
               <a:t>社名テキストで表記</a:t>
             </a:r>
-            <a:endParaRPr lang="en-US" sz="620" dirty="0"/>
+            <a:endParaRPr lang="en-US" sz="670" dirty="0"/>
           </a:p>
         </p:txBody>
       </p:sp>
@@ -16235,27 +16355,27 @@
         </p:nvSpPr>
         <p:spPr>
           <a:xfrm>
-            <a:off x="8220491" y="8935884"/>
-            <a:ext cx="1949170" cy="252078"/>
-          </a:xfrm>
-          <a:prstGeom prst="rect">
-            <a:avLst/>
-          </a:prstGeom>
-          <a:noFill/>
-          <a:ln/>
-        </p:spPr>
-        <p:txBody>
-          <a:bodyPr wrap="none" lIns="0" tIns="0" rIns="0" bIns="0" rtlCol="0" anchor="t"/>
-          <a:lstStyle/>
-          <a:p>
-            <a:pPr algn="l" indent="0" marL="0">
-              <a:lnSpc>
-                <a:spcPts val="992"/>
-              </a:lnSpc>
-              <a:buNone/>
-            </a:pPr>
-            <a:r>
-              <a:rPr lang="en-US" sz="620" dirty="0">
+            <a:off x="8220491" y="8937155"/>
+            <a:ext cx="1915540" cy="272407"/>
+          </a:xfrm>
+          <a:prstGeom prst="rect">
+            <a:avLst/>
+          </a:prstGeom>
+          <a:noFill/>
+          <a:ln/>
+        </p:spPr>
+        <p:txBody>
+          <a:bodyPr wrap="none" lIns="0" tIns="0" rIns="0" bIns="0" rtlCol="0" anchor="t"/>
+          <a:lstStyle/>
+          <a:p>
+            <a:pPr algn="l" indent="0" marL="0">
+              <a:lnSpc>
+                <a:spcPts val="1072"/>
+              </a:lnSpc>
+              <a:buNone/>
+            </a:pPr>
+            <a:r>
+              <a:rPr lang="en-US" sz="670" dirty="0">
                 <a:solidFill>
                   <a:srgbClr val="7D838A"/>
                 </a:solidFill>
@@ -16263,19 +16383,19 @@
                 <a:ea typeface="Noto Sans JP" pitchFamily="34" charset="-122"/>
                 <a:cs typeface="Noto Sans JP" pitchFamily="34" charset="-120"/>
               </a:rPr>
-              <a:t>資源事業は長期にわたる。短期的リターンを求め</a:t>
-            </a:r>
-            <a:endParaRPr lang="en-US" sz="620" dirty="0"/>
-          </a:p>
-          <a:p>
-            <a:pPr algn="l" indent="0" marL="0">
-              <a:lnSpc>
-                <a:spcPts val="992"/>
-              </a:lnSpc>
-              <a:buNone/>
-            </a:pPr>
-            <a:r>
-              <a:rPr lang="en-US" sz="620" dirty="0">
+              <a:t>資源事業は長期にわたる。短期的リターンを</a:t>
+            </a:r>
+            <a:endParaRPr lang="en-US" sz="670" dirty="0"/>
+          </a:p>
+          <a:p>
+            <a:pPr algn="l" indent="0" marL="0">
+              <a:lnSpc>
+                <a:spcPts val="1072"/>
+              </a:lnSpc>
+              <a:buNone/>
+            </a:pPr>
+            <a:r>
+              <a:rPr lang="en-US" sz="670" dirty="0">
                 <a:solidFill>
                   <a:srgbClr val="7D838A"/>
                 </a:solidFill>
@@ -16283,9 +16403,9 @@
                 <a:ea typeface="Noto Sans JP" pitchFamily="34" charset="-122"/>
                 <a:cs typeface="Noto Sans JP" pitchFamily="34" charset="-120"/>
               </a:rPr>
-              <a:t>る投資家とは一線を画す。</a:t>
-            </a:r>
-            <a:endParaRPr lang="en-US" sz="620" dirty="0"/>
+              <a:t>求める投資家とは一線を画す。</a:t>
+            </a:r>
+            <a:endParaRPr lang="en-US" sz="670" dirty="0"/>
           </a:p>
         </p:txBody>
       </p:sp>
@@ -16381,27 +16501,27 @@
         </p:nvSpPr>
         <p:spPr>
           <a:xfrm>
-            <a:off x="10456667" y="8935884"/>
-            <a:ext cx="1862693" cy="252078"/>
-          </a:xfrm>
-          <a:prstGeom prst="rect">
-            <a:avLst/>
-          </a:prstGeom>
-          <a:noFill/>
-          <a:ln/>
-        </p:spPr>
-        <p:txBody>
-          <a:bodyPr wrap="none" lIns="0" tIns="0" rIns="0" bIns="0" rtlCol="0" anchor="t"/>
-          <a:lstStyle/>
-          <a:p>
-            <a:pPr algn="l" indent="0" marL="0">
-              <a:lnSpc>
-                <a:spcPts val="992"/>
-              </a:lnSpc>
-              <a:buNone/>
-            </a:pPr>
-            <a:r>
-              <a:rPr lang="en-US" sz="620" dirty="0">
+            <a:off x="10456667" y="8937155"/>
+            <a:ext cx="1915540" cy="272407"/>
+          </a:xfrm>
+          <a:prstGeom prst="rect">
+            <a:avLst/>
+          </a:prstGeom>
+          <a:noFill/>
+          <a:ln/>
+        </p:spPr>
+        <p:txBody>
+          <a:bodyPr wrap="none" lIns="0" tIns="0" rIns="0" bIns="0" rtlCol="0" anchor="t"/>
+          <a:lstStyle/>
+          <a:p>
+            <a:pPr algn="l" indent="0" marL="0">
+              <a:lnSpc>
+                <a:spcPts val="1072"/>
+              </a:lnSpc>
+              <a:buNone/>
+            </a:pPr>
+            <a:r>
+              <a:rPr lang="en-US" sz="670" dirty="0">
                 <a:solidFill>
                   <a:srgbClr val="7D838A"/>
                 </a:solidFill>
@@ -16409,19 +16529,19 @@
                 <a:ea typeface="Noto Sans JP" pitchFamily="34" charset="-122"/>
                 <a:cs typeface="Noto Sans JP" pitchFamily="34" charset="-120"/>
               </a:rPr>
-              <a:t>リスクの高い案件ほど、資金面の分担を担保す</a:t>
-            </a:r>
-            <a:endParaRPr lang="en-US" sz="620" dirty="0"/>
-          </a:p>
-          <a:p>
-            <a:pPr algn="l" indent="0" marL="0">
-              <a:lnSpc>
-                <a:spcPts val="992"/>
-              </a:lnSpc>
-              <a:buNone/>
-            </a:pPr>
-            <a:r>
-              <a:rPr lang="en-US" sz="620" dirty="0">
+              <a:t>リスクの高い案件ほど、資金面の分担を担保</a:t>
+            </a:r>
+            <a:endParaRPr lang="en-US" sz="670" dirty="0"/>
+          </a:p>
+          <a:p>
+            <a:pPr algn="l" indent="0" marL="0">
+              <a:lnSpc>
+                <a:spcPts val="1072"/>
+              </a:lnSpc>
+              <a:buNone/>
+            </a:pPr>
+            <a:r>
+              <a:rPr lang="en-US" sz="670" dirty="0">
                 <a:solidFill>
                   <a:srgbClr val="7D838A"/>
                 </a:solidFill>
@@ -16429,9 +16549,9 @@
                 <a:ea typeface="Noto Sans JP" pitchFamily="34" charset="-122"/>
                 <a:cs typeface="Noto Sans JP" pitchFamily="34" charset="-120"/>
               </a:rPr>
-              <a:t>る。</a:t>
-            </a:r>
-            <a:endParaRPr lang="en-US" sz="620" dirty="0"/>
+              <a:t>する。</a:t>
+            </a:r>
+            <a:endParaRPr lang="en-US" sz="670" dirty="0"/>
           </a:p>
         </p:txBody>
       </p:sp>
@@ -16527,27 +16647,27 @@
         </p:nvSpPr>
         <p:spPr>
           <a:xfrm>
-            <a:off x="12692844" y="8935884"/>
-            <a:ext cx="1949170" cy="252078"/>
-          </a:xfrm>
-          <a:prstGeom prst="rect">
-            <a:avLst/>
-          </a:prstGeom>
-          <a:noFill/>
-          <a:ln/>
-        </p:spPr>
-        <p:txBody>
-          <a:bodyPr wrap="none" lIns="0" tIns="0" rIns="0" bIns="0" rtlCol="0" anchor="t"/>
-          <a:lstStyle/>
-          <a:p>
-            <a:pPr algn="l" indent="0" marL="0">
-              <a:lnSpc>
-                <a:spcPts val="992"/>
-              </a:lnSpc>
-              <a:buNone/>
-            </a:pPr>
-            <a:r>
-              <a:rPr lang="en-US" sz="620" dirty="0">
+            <a:off x="12692844" y="8937155"/>
+            <a:ext cx="1920126" cy="272407"/>
+          </a:xfrm>
+          <a:prstGeom prst="rect">
+            <a:avLst/>
+          </a:prstGeom>
+          <a:noFill/>
+          <a:ln/>
+        </p:spPr>
+        <p:txBody>
+          <a:bodyPr wrap="none" lIns="0" tIns="0" rIns="0" bIns="0" rtlCol="0" anchor="t"/>
+          <a:lstStyle/>
+          <a:p>
+            <a:pPr algn="l" indent="0" marL="0">
+              <a:lnSpc>
+                <a:spcPts val="1072"/>
+              </a:lnSpc>
+              <a:buNone/>
+            </a:pPr>
+            <a:r>
+              <a:rPr lang="en-US" sz="670" dirty="0">
                 <a:solidFill>
                   <a:srgbClr val="7D838A"/>
                 </a:solidFill>
@@ -16555,19 +16675,19 @@
                 <a:ea typeface="Noto Sans JP" pitchFamily="34" charset="-122"/>
                 <a:cs typeface="Noto Sans JP" pitchFamily="34" charset="-120"/>
               </a:rPr>
-              <a:t>幅広い産業接点を通じ、多様なバリューチェーン</a:t>
-            </a:r>
-            <a:endParaRPr lang="en-US" sz="620" dirty="0"/>
-          </a:p>
-          <a:p>
-            <a:pPr algn="l" indent="0" marL="0">
-              <a:lnSpc>
-                <a:spcPts val="992"/>
-              </a:lnSpc>
-              <a:buNone/>
-            </a:pPr>
-            <a:r>
-              <a:rPr lang="en-US" sz="620" dirty="0">
+              <a:t>幅広い産業接点を通じ、多様なバリューチェ</a:t>
+            </a:r>
+            <a:endParaRPr lang="en-US" sz="670" dirty="0"/>
+          </a:p>
+          <a:p>
+            <a:pPr algn="l" indent="0" marL="0">
+              <a:lnSpc>
+                <a:spcPts val="1072"/>
+              </a:lnSpc>
+              <a:buNone/>
+            </a:pPr>
+            <a:r>
+              <a:rPr lang="en-US" sz="670" dirty="0">
                 <a:solidFill>
                   <a:srgbClr val="7D838A"/>
                 </a:solidFill>
@@ -16575,9 +16695,9 @@
                 <a:ea typeface="Noto Sans JP" pitchFamily="34" charset="-122"/>
                 <a:cs typeface="Noto Sans JP" pitchFamily="34" charset="-120"/>
               </a:rPr>
-              <a:t>に知見を提供する。</a:t>
-            </a:r>
-            <a:endParaRPr lang="en-US" sz="620" dirty="0"/>
+              <a:t>ーンに知見を提供する。</a:t>
+            </a:r>
+            <a:endParaRPr lang="en-US" sz="670" dirty="0"/>
           </a:p>
         </p:txBody>
       </p:sp>
@@ -16816,27 +16936,27 @@
         </p:nvSpPr>
         <p:spPr>
           <a:xfrm>
-            <a:off x="10926773" y="101644"/>
-            <a:ext cx="2867444" cy="1931244"/>
-          </a:xfrm>
-          <a:prstGeom prst="rect">
-            <a:avLst/>
-          </a:prstGeom>
-          <a:noFill/>
-          <a:ln/>
-        </p:spPr>
-        <p:txBody>
-          <a:bodyPr wrap="none" lIns="0" tIns="0" rIns="0" bIns="0" rtlCol="0" anchor="t"/>
-          <a:lstStyle/>
-          <a:p>
-            <a:pPr algn="l" indent="0" marL="0">
-              <a:lnSpc>
-                <a:spcPts val="15200"/>
-              </a:lnSpc>
-              <a:buNone/>
-            </a:pPr>
-            <a:r>
-              <a:rPr lang="en-US" sz="19000" spc="-760" kern="0" dirty="0">
+            <a:off x="12832605" y="76233"/>
+            <a:ext cx="2126274" cy="1423022"/>
+          </a:xfrm>
+          <a:prstGeom prst="rect">
+            <a:avLst/>
+          </a:prstGeom>
+          <a:noFill/>
+          <a:ln/>
+        </p:spPr>
+        <p:txBody>
+          <a:bodyPr wrap="none" lIns="0" tIns="0" rIns="0" bIns="0" rtlCol="0" anchor="t"/>
+          <a:lstStyle/>
+          <a:p>
+            <a:pPr algn="l" indent="0" marL="0">
+              <a:lnSpc>
+                <a:spcPts val="11200"/>
+              </a:lnSpc>
+              <a:buNone/>
+            </a:pPr>
+            <a:r>
+              <a:rPr lang="en-US" sz="14000" spc="-560" kern="0" dirty="0">
                 <a:solidFill>
                   <a:srgbClr val="000000">
                     <a:alpha val="0"/>
@@ -16848,7 +16968,7 @@
               </a:rPr>
               <a:t>05</a:t>
             </a:r>
-            <a:endParaRPr lang="en-US" sz="19000" dirty="0"/>
+            <a:endParaRPr lang="en-US" sz="14000" dirty="0"/>
           </a:p>
         </p:txBody>
       </p:sp>
@@ -16944,27 +17064,27 @@
         </p:nvSpPr>
         <p:spPr>
           <a:xfrm>
-            <a:off x="508222" y="883544"/>
-            <a:ext cx="12312015" cy="596144"/>
-          </a:xfrm>
-          <a:prstGeom prst="rect">
-            <a:avLst/>
-          </a:prstGeom>
-          <a:noFill/>
-          <a:ln/>
-        </p:spPr>
-        <p:txBody>
-          <a:bodyPr wrap="none" lIns="0" tIns="0" rIns="0" bIns="0" rtlCol="0" anchor="t"/>
-          <a:lstStyle/>
-          <a:p>
-            <a:pPr algn="l" indent="0" marL="0">
-              <a:lnSpc>
-                <a:spcPts val="4692"/>
-              </a:lnSpc>
-              <a:buNone/>
-            </a:pPr>
-            <a:r>
-              <a:rPr lang="en-US" sz="4600" spc="-115" kern="0" dirty="0">
+            <a:off x="508222" y="877953"/>
+            <a:ext cx="10712625" cy="518386"/>
+          </a:xfrm>
+          <a:prstGeom prst="rect">
+            <a:avLst/>
+          </a:prstGeom>
+          <a:noFill/>
+          <a:ln/>
+        </p:spPr>
+        <p:txBody>
+          <a:bodyPr wrap="none" lIns="0" tIns="0" rIns="0" bIns="0" rtlCol="0" anchor="t"/>
+          <a:lstStyle/>
+          <a:p>
+            <a:pPr algn="l" indent="0" marL="0">
+              <a:lnSpc>
+                <a:spcPts val="4080"/>
+              </a:lnSpc>
+              <a:buNone/>
+            </a:pPr>
+            <a:r>
+              <a:rPr lang="en-US" sz="4000" spc="-100" kern="0" dirty="0">
                 <a:solidFill>
                   <a:srgbClr val="121519"/>
                 </a:solidFill>
@@ -16974,7 +17094,7 @@
               </a:rPr>
               <a:t>From mine to market — one integrated chain.</a:t>
             </a:r>
-            <a:endParaRPr lang="en-US" sz="4600" dirty="0"/>
+            <a:endParaRPr lang="en-US" sz="4000" dirty="0"/>
           </a:p>
         </p:txBody>
       </p:sp>
@@ -17532,27 +17652,27 @@
         </p:nvSpPr>
         <p:spPr>
           <a:xfrm>
-            <a:off x="647983" y="3365097"/>
-            <a:ext cx="1605227" cy="126039"/>
-          </a:xfrm>
-          <a:prstGeom prst="rect">
-            <a:avLst/>
-          </a:prstGeom>
-          <a:noFill/>
-          <a:ln/>
-        </p:spPr>
-        <p:txBody>
-          <a:bodyPr wrap="none" lIns="0" tIns="0" rIns="0" bIns="0" rtlCol="0" anchor="t"/>
-          <a:lstStyle/>
-          <a:p>
-            <a:pPr algn="l" indent="0" marL="0">
-              <a:lnSpc>
-                <a:spcPts val="992"/>
-              </a:lnSpc>
-              <a:buNone/>
-            </a:pPr>
-            <a:r>
-              <a:rPr lang="en-US" sz="620" dirty="0">
+            <a:off x="647983" y="3366367"/>
+            <a:ext cx="1730794" cy="136203"/>
+          </a:xfrm>
+          <a:prstGeom prst="rect">
+            <a:avLst/>
+          </a:prstGeom>
+          <a:noFill/>
+          <a:ln/>
+        </p:spPr>
+        <p:txBody>
+          <a:bodyPr wrap="none" lIns="0" tIns="0" rIns="0" bIns="0" rtlCol="0" anchor="t"/>
+          <a:lstStyle/>
+          <a:p>
+            <a:pPr algn="l" indent="0" marL="0">
+              <a:lnSpc>
+                <a:spcPts val="1072"/>
+              </a:lnSpc>
+              <a:buNone/>
+            </a:pPr>
+            <a:r>
+              <a:rPr lang="en-US" sz="670" dirty="0">
                 <a:solidFill>
                   <a:srgbClr val="7D838A"/>
                 </a:solidFill>
@@ -17562,7 +17682,7 @@
               </a:rPr>
               <a:t>鉱山会社／当社資産（BMA・IOC ほか）</a:t>
             </a:r>
-            <a:endParaRPr lang="en-US" sz="620" dirty="0"/>
+            <a:endParaRPr lang="en-US" sz="670" dirty="0"/>
           </a:p>
         </p:txBody>
       </p:sp>
@@ -17616,27 +17736,27 @@
         </p:nvSpPr>
         <p:spPr>
           <a:xfrm>
-            <a:off x="3570259" y="3365097"/>
-            <a:ext cx="208709" cy="126039"/>
-          </a:xfrm>
-          <a:prstGeom prst="rect">
-            <a:avLst/>
-          </a:prstGeom>
-          <a:noFill/>
-          <a:ln/>
-        </p:spPr>
-        <p:txBody>
-          <a:bodyPr wrap="none" lIns="0" tIns="0" rIns="0" bIns="0" rtlCol="0" anchor="t"/>
-          <a:lstStyle/>
-          <a:p>
-            <a:pPr algn="l" indent="0" marL="0">
-              <a:lnSpc>
-                <a:spcPts val="992"/>
-              </a:lnSpc>
-              <a:buNone/>
-            </a:pPr>
-            <a:r>
-              <a:rPr lang="en-US" sz="620" dirty="0">
+            <a:off x="3570259" y="3366367"/>
+            <a:ext cx="221374" cy="136203"/>
+          </a:xfrm>
+          <a:prstGeom prst="rect">
+            <a:avLst/>
+          </a:prstGeom>
+          <a:noFill/>
+          <a:ln/>
+        </p:spPr>
+        <p:txBody>
+          <a:bodyPr wrap="none" lIns="0" tIns="0" rIns="0" bIns="0" rtlCol="0" anchor="t"/>
+          <a:lstStyle/>
+          <a:p>
+            <a:pPr algn="l" indent="0" marL="0">
+              <a:lnSpc>
+                <a:spcPts val="1072"/>
+              </a:lnSpc>
+              <a:buNone/>
+            </a:pPr>
+            <a:r>
+              <a:rPr lang="en-US" sz="670" dirty="0">
                 <a:solidFill>
                   <a:srgbClr val="7D838A"/>
                 </a:solidFill>
@@ -17646,7 +17766,7 @@
               </a:rPr>
               <a:t>RtM</a:t>
             </a:r>
-            <a:endParaRPr lang="en-US" sz="620" dirty="0"/>
+            <a:endParaRPr lang="en-US" sz="670" dirty="0"/>
           </a:p>
         </p:txBody>
       </p:sp>
@@ -17700,27 +17820,27 @@
         </p:nvSpPr>
         <p:spPr>
           <a:xfrm>
-            <a:off x="6238425" y="3365097"/>
-            <a:ext cx="483208" cy="126039"/>
-          </a:xfrm>
-          <a:prstGeom prst="rect">
-            <a:avLst/>
-          </a:prstGeom>
-          <a:noFill/>
-          <a:ln/>
-        </p:spPr>
-        <p:txBody>
-          <a:bodyPr wrap="none" lIns="0" tIns="0" rIns="0" bIns="0" rtlCol="0" anchor="t"/>
-          <a:lstStyle/>
-          <a:p>
-            <a:pPr algn="l" indent="0" marL="0">
-              <a:lnSpc>
-                <a:spcPts val="992"/>
-              </a:lnSpc>
-              <a:buNone/>
-            </a:pPr>
-            <a:r>
-              <a:rPr lang="en-US" sz="620" dirty="0">
+            <a:off x="6238425" y="3366367"/>
+            <a:ext cx="518148" cy="136203"/>
+          </a:xfrm>
+          <a:prstGeom prst="rect">
+            <a:avLst/>
+          </a:prstGeom>
+          <a:noFill/>
+          <a:ln/>
+        </p:spPr>
+        <p:txBody>
+          <a:bodyPr wrap="none" lIns="0" tIns="0" rIns="0" bIns="0" rtlCol="0" anchor="t"/>
+          <a:lstStyle/>
+          <a:p>
+            <a:pPr algn="l" indent="0" marL="0">
+              <a:lnSpc>
+                <a:spcPts val="1072"/>
+              </a:lnSpc>
+              <a:buNone/>
+            </a:pPr>
+            <a:r>
+              <a:rPr lang="en-US" sz="670" dirty="0">
                 <a:solidFill>
                   <a:srgbClr val="7D838A"/>
                 </a:solidFill>
@@ -17730,7 +17850,7 @@
               </a:rPr>
               <a:t>鋼材を製造</a:t>
             </a:r>
-            <a:endParaRPr lang="en-US" sz="620" dirty="0"/>
+            <a:endParaRPr lang="en-US" sz="670" dirty="0"/>
           </a:p>
         </p:txBody>
       </p:sp>
@@ -17784,27 +17904,27 @@
         </p:nvSpPr>
         <p:spPr>
           <a:xfrm>
-            <a:off x="9160701" y="3365097"/>
-            <a:ext cx="1602388" cy="126039"/>
-          </a:xfrm>
-          <a:prstGeom prst="rect">
-            <a:avLst/>
-          </a:prstGeom>
-          <a:noFill/>
-          <a:ln/>
-        </p:spPr>
-        <p:txBody>
-          <a:bodyPr wrap="none" lIns="0" tIns="0" rIns="0" bIns="0" rtlCol="0" anchor="t"/>
-          <a:lstStyle/>
-          <a:p>
-            <a:pPr algn="l" indent="0" marL="0">
-              <a:lnSpc>
-                <a:spcPts val="992"/>
-              </a:lnSpc>
-              <a:buNone/>
-            </a:pPr>
-            <a:r>
-              <a:rPr lang="en-US" sz="620" dirty="0">
+            <a:off x="9160701" y="3366367"/>
+            <a:ext cx="1727736" cy="136203"/>
+          </a:xfrm>
+          <a:prstGeom prst="rect">
+            <a:avLst/>
+          </a:prstGeom>
+          <a:noFill/>
+          <a:ln/>
+        </p:spPr>
+        <p:txBody>
+          <a:bodyPr wrap="none" lIns="0" tIns="0" rIns="0" bIns="0" rtlCol="0" anchor="t"/>
+          <a:lstStyle/>
+          <a:p>
+            <a:pPr algn="l" indent="0" marL="0">
+              <a:lnSpc>
+                <a:spcPts val="1072"/>
+              </a:lnSpc>
+              <a:buNone/>
+            </a:pPr>
+            <a:r>
+              <a:rPr lang="en-US" sz="670" dirty="0">
                 <a:solidFill>
                   <a:srgbClr val="7D838A"/>
                 </a:solidFill>
@@ -17814,7 +17934,7 @@
               </a:rPr>
               <a:t>※鋼材販売はメタルワン（別グループ）</a:t>
             </a:r>
-            <a:endParaRPr lang="en-US" sz="620" dirty="0"/>
+            <a:endParaRPr lang="en-US" sz="670" dirty="0"/>
           </a:p>
         </p:txBody>
       </p:sp>
@@ -17868,27 +17988,27 @@
         </p:nvSpPr>
         <p:spPr>
           <a:xfrm>
-            <a:off x="11828867" y="3365097"/>
-            <a:ext cx="907950" cy="126039"/>
-          </a:xfrm>
-          <a:prstGeom prst="rect">
-            <a:avLst/>
-          </a:prstGeom>
-          <a:noFill/>
-          <a:ln/>
-        </p:spPr>
-        <p:txBody>
-          <a:bodyPr wrap="none" lIns="0" tIns="0" rIns="0" bIns="0" rtlCol="0" anchor="t"/>
-          <a:lstStyle/>
-          <a:p>
-            <a:pPr algn="l" indent="0" marL="0">
-              <a:lnSpc>
-                <a:spcPts val="992"/>
-              </a:lnSpc>
-              <a:buNone/>
-            </a:pPr>
-            <a:r>
-              <a:rPr lang="en-US" sz="620" dirty="0">
+            <a:off x="11828867" y="3366367"/>
+            <a:ext cx="977176" cy="136203"/>
+          </a:xfrm>
+          <a:prstGeom prst="rect">
+            <a:avLst/>
+          </a:prstGeom>
+          <a:noFill/>
+          <a:ln/>
+        </p:spPr>
+        <p:txBody>
+          <a:bodyPr wrap="none" lIns="0" tIns="0" rIns="0" bIns="0" rtlCol="0" anchor="t"/>
+          <a:lstStyle/>
+          <a:p>
+            <a:pPr algn="l" indent="0" marL="0">
+              <a:lnSpc>
+                <a:spcPts val="1072"/>
+              </a:lnSpc>
+              <a:buNone/>
+            </a:pPr>
+            <a:r>
+              <a:rPr lang="en-US" sz="670" dirty="0">
                 <a:solidFill>
                   <a:srgbClr val="7D838A"/>
                 </a:solidFill>
@@ -17898,7 +18018,7 @@
               </a:rPr>
               <a:t>インフラ・モビリティ</a:t>
             </a:r>
-            <a:endParaRPr lang="en-US" sz="620" dirty="0"/>
+            <a:endParaRPr lang="en-US" sz="670" dirty="0"/>
           </a:p>
         </p:txBody>
       </p:sp>
@@ -17994,27 +18114,27 @@
         </p:nvSpPr>
         <p:spPr>
           <a:xfrm>
-            <a:off x="647983" y="4457774"/>
-            <a:ext cx="1196644" cy="126039"/>
-          </a:xfrm>
-          <a:prstGeom prst="rect">
-            <a:avLst/>
-          </a:prstGeom>
-          <a:noFill/>
-          <a:ln/>
-        </p:spPr>
-        <p:txBody>
-          <a:bodyPr wrap="none" lIns="0" tIns="0" rIns="0" bIns="0" rtlCol="0" anchor="t"/>
-          <a:lstStyle/>
-          <a:p>
-            <a:pPr algn="l" indent="0" marL="0">
-              <a:lnSpc>
-                <a:spcPts val="992"/>
-              </a:lnSpc>
-              <a:buNone/>
-            </a:pPr>
-            <a:r>
-              <a:rPr lang="en-US" sz="620" dirty="0">
+            <a:off x="647983" y="4459044"/>
+            <a:ext cx="1289236" cy="136203"/>
+          </a:xfrm>
+          <a:prstGeom prst="rect">
+            <a:avLst/>
+          </a:prstGeom>
+          <a:noFill/>
+          <a:ln/>
+        </p:spPr>
+        <p:txBody>
+          <a:bodyPr wrap="none" lIns="0" tIns="0" rIns="0" bIns="0" rtlCol="0" anchor="t"/>
+          <a:lstStyle/>
+          <a:p>
+            <a:pPr algn="l" indent="0" marL="0">
+              <a:lnSpc>
+                <a:spcPts val="1072"/>
+              </a:lnSpc>
+              <a:buNone/>
+            </a:pPr>
+            <a:r>
+              <a:rPr lang="en-US" sz="670" dirty="0">
                 <a:solidFill>
                   <a:srgbClr val="7D838A"/>
                 </a:solidFill>
@@ -18024,7 +18144,7 @@
               </a:rPr>
               <a:t>Escondida・Quellaveco ほか</a:t>
             </a:r>
-            <a:endParaRPr lang="en-US" sz="620" dirty="0"/>
+            <a:endParaRPr lang="en-US" sz="670" dirty="0"/>
           </a:p>
         </p:txBody>
       </p:sp>
@@ -18078,27 +18198,27 @@
         </p:nvSpPr>
         <p:spPr>
           <a:xfrm>
-            <a:off x="3570259" y="4457774"/>
-            <a:ext cx="208709" cy="126039"/>
-          </a:xfrm>
-          <a:prstGeom prst="rect">
-            <a:avLst/>
-          </a:prstGeom>
-          <a:noFill/>
-          <a:ln/>
-        </p:spPr>
-        <p:txBody>
-          <a:bodyPr wrap="none" lIns="0" tIns="0" rIns="0" bIns="0" rtlCol="0" anchor="t"/>
-          <a:lstStyle/>
-          <a:p>
-            <a:pPr algn="l" indent="0" marL="0">
-              <a:lnSpc>
-                <a:spcPts val="992"/>
-              </a:lnSpc>
-              <a:buNone/>
-            </a:pPr>
-            <a:r>
-              <a:rPr lang="en-US" sz="620" dirty="0">
+            <a:off x="3570259" y="4459044"/>
+            <a:ext cx="221374" cy="136203"/>
+          </a:xfrm>
+          <a:prstGeom prst="rect">
+            <a:avLst/>
+          </a:prstGeom>
+          <a:noFill/>
+          <a:ln/>
+        </p:spPr>
+        <p:txBody>
+          <a:bodyPr wrap="none" lIns="0" tIns="0" rIns="0" bIns="0" rtlCol="0" anchor="t"/>
+          <a:lstStyle/>
+          <a:p>
+            <a:pPr algn="l" indent="0" marL="0">
+              <a:lnSpc>
+                <a:spcPts val="1072"/>
+              </a:lnSpc>
+              <a:buNone/>
+            </a:pPr>
+            <a:r>
+              <a:rPr lang="en-US" sz="670" dirty="0">
                 <a:solidFill>
                   <a:srgbClr val="7D838A"/>
                 </a:solidFill>
@@ -18108,7 +18228,7 @@
               </a:rPr>
               <a:t>RtM</a:t>
             </a:r>
-            <a:endParaRPr lang="en-US" sz="620" dirty="0"/>
+            <a:endParaRPr lang="en-US" sz="670" dirty="0"/>
           </a:p>
         </p:txBody>
       </p:sp>
@@ -18162,27 +18282,27 @@
         </p:nvSpPr>
         <p:spPr>
           <a:xfrm>
-            <a:off x="6238425" y="4457774"/>
-            <a:ext cx="828243" cy="126039"/>
-          </a:xfrm>
-          <a:prstGeom prst="rect">
-            <a:avLst/>
-          </a:prstGeom>
-          <a:noFill/>
-          <a:ln/>
-        </p:spPr>
-        <p:txBody>
-          <a:bodyPr wrap="none" lIns="0" tIns="0" rIns="0" bIns="0" rtlCol="0" anchor="t"/>
-          <a:lstStyle/>
-          <a:p>
-            <a:pPr algn="l" indent="0" marL="0">
-              <a:lnSpc>
-                <a:spcPts val="992"/>
-              </a:lnSpc>
-              <a:buNone/>
-            </a:pPr>
-            <a:r>
-              <a:rPr lang="en-US" sz="620" dirty="0">
+            <a:off x="6238425" y="4459044"/>
+            <a:ext cx="891135" cy="136203"/>
+          </a:xfrm>
+          <a:prstGeom prst="rect">
+            <a:avLst/>
+          </a:prstGeom>
+          <a:noFill/>
+          <a:ln/>
+        </p:spPr>
+        <p:txBody>
+          <a:bodyPr wrap="none" lIns="0" tIns="0" rIns="0" bIns="0" rtlCol="0" anchor="t"/>
+          <a:lstStyle/>
+          <a:p>
+            <a:pPr algn="l" indent="0" marL="0">
+              <a:lnSpc>
+                <a:spcPts val="1072"/>
+              </a:lnSpc>
+              <a:buNone/>
+            </a:pPr>
+            <a:r>
+              <a:rPr lang="en-US" sz="670" dirty="0">
                 <a:solidFill>
                   <a:srgbClr val="7D838A"/>
                 </a:solidFill>
@@ -18192,7 +18312,7 @@
               </a:rPr>
               <a:t>銅地金・アルミ地金</a:t>
             </a:r>
-            <a:endParaRPr lang="en-US" sz="620" dirty="0"/>
+            <a:endParaRPr lang="en-US" sz="670" dirty="0"/>
           </a:p>
         </p:txBody>
       </p:sp>
@@ -18246,27 +18366,27 @@
         </p:nvSpPr>
         <p:spPr>
           <a:xfrm>
-            <a:off x="9160701" y="4457774"/>
-            <a:ext cx="859471" cy="126039"/>
-          </a:xfrm>
-          <a:prstGeom prst="rect">
-            <a:avLst/>
-          </a:prstGeom>
-          <a:noFill/>
-          <a:ln/>
-        </p:spPr>
-        <p:txBody>
-          <a:bodyPr wrap="none" lIns="0" tIns="0" rIns="0" bIns="0" rtlCol="0" anchor="t"/>
-          <a:lstStyle/>
-          <a:p>
-            <a:pPr algn="l" indent="0" marL="0">
-              <a:lnSpc>
-                <a:spcPts val="992"/>
-              </a:lnSpc>
-              <a:buNone/>
-            </a:pPr>
-            <a:r>
-              <a:rPr lang="en-US" sz="620" dirty="0">
+            <a:off x="9160701" y="4459044"/>
+            <a:ext cx="924765" cy="136203"/>
+          </a:xfrm>
+          <a:prstGeom prst="rect">
+            <a:avLst/>
+          </a:prstGeom>
+          <a:noFill/>
+          <a:ln/>
+        </p:spPr>
+        <p:txBody>
+          <a:bodyPr wrap="none" lIns="0" tIns="0" rIns="0" bIns="0" rtlCol="0" anchor="t"/>
+          <a:lstStyle/>
+          <a:p>
+            <a:pPr algn="l" indent="0" marL="0">
+              <a:lnSpc>
+                <a:spcPts val="1072"/>
+              </a:lnSpc>
+              <a:buNone/>
+            </a:pPr>
+            <a:r>
+              <a:rPr lang="en-US" sz="670" dirty="0">
                 <a:solidFill>
                   <a:srgbClr val="7D838A"/>
                 </a:solidFill>
@@ -18276,7 +18396,7 @@
               </a:rPr>
               <a:t>RtM・Triland Metals</a:t>
             </a:r>
-            <a:endParaRPr lang="en-US" sz="620" dirty="0"/>
+            <a:endParaRPr lang="en-US" sz="670" dirty="0"/>
           </a:p>
         </p:txBody>
       </p:sp>
@@ -18330,27 +18450,27 @@
         </p:nvSpPr>
         <p:spPr>
           <a:xfrm>
-            <a:off x="11828867" y="4457774"/>
-            <a:ext cx="656162" cy="126039"/>
-          </a:xfrm>
-          <a:prstGeom prst="rect">
-            <a:avLst/>
-          </a:prstGeom>
-          <a:noFill/>
-          <a:ln/>
-        </p:spPr>
-        <p:txBody>
-          <a:bodyPr wrap="none" lIns="0" tIns="0" rIns="0" bIns="0" rtlCol="0" anchor="t"/>
-          <a:lstStyle/>
-          <a:p>
-            <a:pPr algn="l" indent="0" marL="0">
-              <a:lnSpc>
-                <a:spcPts val="992"/>
-              </a:lnSpc>
-              <a:buNone/>
-            </a:pPr>
-            <a:r>
-              <a:rPr lang="en-US" sz="620" dirty="0">
+            <a:off x="11828867" y="4459044"/>
+            <a:ext cx="705079" cy="136203"/>
+          </a:xfrm>
+          <a:prstGeom prst="rect">
+            <a:avLst/>
+          </a:prstGeom>
+          <a:noFill/>
+          <a:ln/>
+        </p:spPr>
+        <p:txBody>
+          <a:bodyPr wrap="none" lIns="0" tIns="0" rIns="0" bIns="0" rtlCol="0" anchor="t"/>
+          <a:lstStyle/>
+          <a:p>
+            <a:pPr algn="l" indent="0" marL="0">
+              <a:lnSpc>
+                <a:spcPts val="1072"/>
+              </a:lnSpc>
+              <a:buNone/>
+            </a:pPr>
+            <a:r>
+              <a:rPr lang="en-US" sz="670" dirty="0">
                 <a:solidFill>
                   <a:srgbClr val="7D838A"/>
                 </a:solidFill>
@@ -18360,7 +18480,7 @@
               </a:rPr>
               <a:t>配線・モーター</a:t>
             </a:r>
-            <a:endParaRPr lang="en-US" sz="620" dirty="0"/>
+            <a:endParaRPr lang="en-US" sz="670" dirty="0"/>
           </a:p>
         </p:txBody>
       </p:sp>
@@ -18608,8 +18728,8 @@
         </p:nvSpPr>
         <p:spPr>
           <a:xfrm>
-            <a:off x="772507" y="6397752"/>
-            <a:ext cx="1504119" cy="126039"/>
+            <a:off x="713972" y="6399023"/>
+            <a:ext cx="1621387" cy="136203"/>
           </a:xfrm>
           <a:prstGeom prst="rect">
             <a:avLst/>
@@ -18623,12 +18743,12 @@
           <a:p>
             <a:pPr algn="ctr" indent="0" marL="0">
               <a:lnSpc>
-                <a:spcPts val="992"/>
-              </a:lnSpc>
-              <a:buNone/>
-            </a:pPr>
-            <a:r>
-              <a:rPr lang="en-US" sz="620" dirty="0">
+                <a:spcPts val="1072"/>
+              </a:lnSpc>
+              <a:buNone/>
+            </a:pPr>
+            <a:r>
+              <a:rPr lang="en-US" sz="670" dirty="0">
                 <a:solidFill>
                   <a:srgbClr val="9C7442"/>
                 </a:solidFill>
@@ -18638,7 +18758,7 @@
               </a:rPr>
               <a:t>持分見合いのオフテイクをRtMが販売</a:t>
             </a:r>
-            <a:endParaRPr lang="en-US" sz="620" dirty="0"/>
+            <a:endParaRPr lang="en-US" sz="670" dirty="0"/>
           </a:p>
         </p:txBody>
       </p:sp>
@@ -18650,8 +18770,8 @@
         </p:nvSpPr>
         <p:spPr>
           <a:xfrm>
-            <a:off x="550190" y="8201940"/>
-            <a:ext cx="1948952" cy="126039"/>
+            <a:off x="473540" y="8203211"/>
+            <a:ext cx="2102252" cy="136203"/>
           </a:xfrm>
           <a:prstGeom prst="rect">
             <a:avLst/>
@@ -18665,12 +18785,12 @@
           <a:p>
             <a:pPr algn="ctr" indent="0" marL="0">
               <a:lnSpc>
-                <a:spcPts val="992"/>
-              </a:lnSpc>
-              <a:buNone/>
-            </a:pPr>
-            <a:r>
-              <a:rPr lang="en-US" sz="620" dirty="0">
+                <a:spcPts val="1072"/>
+              </a:lnSpc>
+              <a:buNone/>
+            </a:pPr>
+            <a:r>
+              <a:rPr lang="en-US" sz="670" dirty="0">
                 <a:solidFill>
                   <a:srgbClr val="1F3A56"/>
                 </a:solidFill>
@@ -18680,7 +18800,7 @@
               </a:rPr>
               <a:t>顧客接点から得た“生きた情報”を投資判断へ還元</a:t>
             </a:r>
-            <a:endParaRPr lang="en-US" sz="620" dirty="0"/>
+            <a:endParaRPr lang="en-US" sz="670" dirty="0"/>
           </a:p>
         </p:txBody>
       </p:sp>
@@ -18776,27 +18896,27 @@
         </p:nvSpPr>
         <p:spPr>
           <a:xfrm>
-            <a:off x="2668165" y="6495680"/>
-            <a:ext cx="4942459" cy="857942"/>
-          </a:xfrm>
-          <a:prstGeom prst="rect">
-            <a:avLst/>
-          </a:prstGeom>
-          <a:noFill/>
-          <a:ln/>
-        </p:spPr>
-        <p:txBody>
-          <a:bodyPr wrap="none" lIns="0" tIns="0" rIns="0" bIns="0" rtlCol="0" anchor="t"/>
-          <a:lstStyle/>
-          <a:p>
-            <a:pPr algn="l" indent="0" marL="0">
-              <a:lnSpc>
-                <a:spcPts val="1351"/>
-              </a:lnSpc>
-              <a:buNone/>
-            </a:pPr>
-            <a:r>
-              <a:rPr lang="en-US" sz="730" spc="20" kern="0" dirty="0">
+            <a:off x="2668165" y="6497332"/>
+            <a:ext cx="4942459" cy="904953"/>
+          </a:xfrm>
+          <a:prstGeom prst="rect">
+            <a:avLst/>
+          </a:prstGeom>
+          <a:noFill/>
+          <a:ln/>
+        </p:spPr>
+        <p:txBody>
+          <a:bodyPr wrap="none" lIns="0" tIns="0" rIns="0" bIns="0" rtlCol="0" anchor="t"/>
+          <a:lstStyle/>
+          <a:p>
+            <a:pPr algn="l" indent="0" marL="0">
+              <a:lnSpc>
+                <a:spcPts val="1425"/>
+              </a:lnSpc>
+              <a:buNone/>
+            </a:pPr>
+            <a:r>
+              <a:rPr lang="en-US" sz="770" spc="20" kern="0" dirty="0">
                 <a:solidFill>
                   <a:srgbClr val="3D4249"/>
                 </a:solidFill>
@@ -18804,19 +18924,19 @@
                 <a:ea typeface="Noto Sans JP" pitchFamily="34" charset="-122"/>
                 <a:cs typeface="Noto Sans JP" pitchFamily="34" charset="-120"/>
               </a:rPr>
-              <a:t>出資案件から得られる持分見合いのオフテイクをRtMが引き受け、ヘッジ・在庫・物流などの機能を付</a:t>
-            </a:r>
-            <a:endParaRPr lang="en-US" sz="730" dirty="0"/>
-          </a:p>
-          <a:p>
-            <a:pPr algn="l" indent="0" marL="0">
-              <a:lnSpc>
-                <a:spcPts val="1351"/>
-              </a:lnSpc>
-              <a:buNone/>
-            </a:pPr>
-            <a:r>
-              <a:rPr lang="en-US" sz="730" spc="20" kern="0" dirty="0">
+              <a:t>出資案件から得られる持分見合いのオフテイクをRtMが引き受け、ヘッジ・在庫・物流などの機能</a:t>
+            </a:r>
+            <a:endParaRPr lang="en-US" sz="770" dirty="0"/>
+          </a:p>
+          <a:p>
+            <a:pPr algn="l" indent="0" marL="0">
+              <a:lnSpc>
+                <a:spcPts val="1425"/>
+              </a:lnSpc>
+              <a:buNone/>
+            </a:pPr>
+            <a:r>
+              <a:rPr lang="en-US" sz="770" spc="20" kern="0" dirty="0">
                 <a:solidFill>
                   <a:srgbClr val="3D4249"/>
                 </a:solidFill>
@@ -18824,19 +18944,19 @@
                 <a:ea typeface="Noto Sans JP" pitchFamily="34" charset="-122"/>
                 <a:cs typeface="Noto Sans JP" pitchFamily="34" charset="-120"/>
               </a:rPr>
-              <a:t>加して欧州・シンガポール・米州の顧客に届けます。顧客と接するRtMを通じて得た市場の生きた情報</a:t>
-            </a:r>
-            <a:endParaRPr lang="en-US" sz="730" dirty="0"/>
-          </a:p>
-          <a:p>
-            <a:pPr algn="l" indent="0" marL="0">
-              <a:lnSpc>
-                <a:spcPts val="1351"/>
-              </a:lnSpc>
-              <a:buNone/>
-            </a:pPr>
-            <a:r>
-              <a:rPr lang="en-US" sz="730" spc="20" kern="0" dirty="0">
+              <a:t>を付加して欧州・シンガポール・米州の顧客に届けます。顧客と接するRtMを通じて得た市場の生</a:t>
+            </a:r>
+            <a:endParaRPr lang="en-US" sz="770" dirty="0"/>
+          </a:p>
+          <a:p>
+            <a:pPr algn="l" indent="0" marL="0">
+              <a:lnSpc>
+                <a:spcPts val="1425"/>
+              </a:lnSpc>
+              <a:buNone/>
+            </a:pPr>
+            <a:r>
+              <a:rPr lang="en-US" sz="770" spc="20" kern="0" dirty="0">
                 <a:solidFill>
                   <a:srgbClr val="3D4249"/>
                 </a:solidFill>
@@ -18844,19 +18964,19 @@
                 <a:ea typeface="Noto Sans JP" pitchFamily="34" charset="-122"/>
                 <a:cs typeface="Noto Sans JP" pitchFamily="34" charset="-120"/>
               </a:rPr>
-              <a:t>は、資源投資の判断へ還元されます。肥料資源では、本格投資に先立ちシンガポールにトレーディング</a:t>
-            </a:r>
-            <a:endParaRPr lang="en-US" sz="730" dirty="0"/>
-          </a:p>
-          <a:p>
-            <a:pPr algn="l" indent="0" marL="0">
-              <a:lnSpc>
-                <a:spcPts val="1351"/>
-              </a:lnSpc>
-              <a:buNone/>
-            </a:pPr>
-            <a:r>
-              <a:rPr lang="en-US" sz="730" spc="20" kern="0" dirty="0">
+              <a:t>きた情報は、資源投資の判断へ還元されます。肥料資源では、本格投資に先立ちシンガポールにト</a:t>
+            </a:r>
+            <a:endParaRPr lang="en-US" sz="770" dirty="0"/>
+          </a:p>
+          <a:p>
+            <a:pPr algn="l" indent="0" marL="0">
+              <a:lnSpc>
+                <a:spcPts val="1425"/>
+              </a:lnSpc>
+              <a:buNone/>
+            </a:pPr>
+            <a:r>
+              <a:rPr lang="en-US" sz="770" spc="20" kern="0" dirty="0">
                 <a:solidFill>
                   <a:srgbClr val="3D4249"/>
                 </a:solidFill>
@@ -18864,19 +18984,19 @@
                 <a:ea typeface="Noto Sans JP" pitchFamily="34" charset="-122"/>
                 <a:cs typeface="Noto Sans JP" pitchFamily="34" charset="-120"/>
               </a:rPr>
-              <a:t>デスクを設け、市場理解を深めてから投資へ——この「事業機会の発掘」こそ、投資と販売を併せ持つ私</a:t>
-            </a:r>
-            <a:endParaRPr lang="en-US" sz="730" dirty="0"/>
-          </a:p>
-          <a:p>
-            <a:pPr algn="l" indent="0" marL="0">
-              <a:lnSpc>
-                <a:spcPts val="1351"/>
-              </a:lnSpc>
-              <a:buNone/>
-            </a:pPr>
-            <a:r>
-              <a:rPr lang="en-US" sz="730" spc="20" kern="0" dirty="0">
+              <a:t>レーディングデスクを設け、市場理解を深めてから投資へ——この「事業機会の発掘」こそ、投資</a:t>
+            </a:r>
+            <a:endParaRPr lang="en-US" sz="770" dirty="0"/>
+          </a:p>
+          <a:p>
+            <a:pPr algn="l" indent="0" marL="0">
+              <a:lnSpc>
+                <a:spcPts val="1425"/>
+              </a:lnSpc>
+              <a:buNone/>
+            </a:pPr>
+            <a:r>
+              <a:rPr lang="en-US" sz="770" spc="20" kern="0" dirty="0">
                 <a:solidFill>
                   <a:srgbClr val="3D4249"/>
                 </a:solidFill>
@@ -18884,9 +19004,9 @@
                 <a:ea typeface="Noto Sans JP" pitchFamily="34" charset="-122"/>
                 <a:cs typeface="Noto Sans JP" pitchFamily="34" charset="-120"/>
               </a:rPr>
-              <a:t>たちのアイデンティティです。</a:t>
-            </a:r>
-            <a:endParaRPr lang="en-US" sz="730" dirty="0"/>
+              <a:t>と販売を併せ持つ私たちのアイデンティティです。</a:t>
+            </a:r>
+            <a:endParaRPr lang="en-US" sz="770" dirty="0"/>
           </a:p>
         </p:txBody>
       </p:sp>
@@ -19002,27 +19122,27 @@
         </p:nvSpPr>
         <p:spPr>
           <a:xfrm>
-            <a:off x="2744399" y="8125707"/>
-            <a:ext cx="483208" cy="126039"/>
-          </a:xfrm>
-          <a:prstGeom prst="rect">
-            <a:avLst/>
-          </a:prstGeom>
-          <a:noFill/>
-          <a:ln/>
-        </p:spPr>
-        <p:txBody>
-          <a:bodyPr wrap="none" lIns="0" tIns="0" rIns="0" bIns="0" rtlCol="0" anchor="t"/>
-          <a:lstStyle/>
-          <a:p>
-            <a:pPr algn="l" indent="0" marL="0">
-              <a:lnSpc>
-                <a:spcPts val="992"/>
-              </a:lnSpc>
-              <a:buNone/>
-            </a:pPr>
-            <a:r>
-              <a:rPr lang="en-US" sz="620" dirty="0">
+            <a:off x="2744399" y="8126978"/>
+            <a:ext cx="518148" cy="136203"/>
+          </a:xfrm>
+          <a:prstGeom prst="rect">
+            <a:avLst/>
+          </a:prstGeom>
+          <a:noFill/>
+          <a:ln/>
+        </p:spPr>
+        <p:txBody>
+          <a:bodyPr wrap="none" lIns="0" tIns="0" rIns="0" bIns="0" rtlCol="0" anchor="t"/>
+          <a:lstStyle/>
+          <a:p>
+            <a:pPr algn="l" indent="0" marL="0">
+              <a:lnSpc>
+                <a:spcPts val="1072"/>
+              </a:lnSpc>
+              <a:buNone/>
+            </a:pPr>
+            <a:r>
+              <a:rPr lang="en-US" sz="670" dirty="0">
                 <a:solidFill>
                   <a:srgbClr val="7D838A"/>
                 </a:solidFill>
@@ -19032,7 +19152,7 @@
               </a:rPr>
               <a:t>販売・調達</a:t>
             </a:r>
-            <a:endParaRPr lang="en-US" sz="620" dirty="0"/>
+            <a:endParaRPr lang="en-US" sz="670" dirty="0"/>
           </a:p>
         </p:txBody>
       </p:sp>
@@ -19086,27 +19206,27 @@
         </p:nvSpPr>
         <p:spPr>
           <a:xfrm>
-            <a:off x="3633787" y="8036768"/>
-            <a:ext cx="223776" cy="126039"/>
-          </a:xfrm>
-          <a:prstGeom prst="rect">
-            <a:avLst/>
-          </a:prstGeom>
-          <a:noFill/>
-          <a:ln/>
-        </p:spPr>
-        <p:txBody>
-          <a:bodyPr wrap="none" lIns="0" tIns="0" rIns="0" bIns="0" rtlCol="0" anchor="t"/>
-          <a:lstStyle/>
-          <a:p>
-            <a:pPr algn="l" indent="0" marL="0">
-              <a:lnSpc>
-                <a:spcPts val="992"/>
-              </a:lnSpc>
-              <a:buNone/>
-            </a:pPr>
-            <a:r>
-              <a:rPr lang="en-US" sz="620" dirty="0">
+            <a:off x="3633787" y="8038039"/>
+            <a:ext cx="237753" cy="136203"/>
+          </a:xfrm>
+          <a:prstGeom prst="rect">
+            <a:avLst/>
+          </a:prstGeom>
+          <a:noFill/>
+          <a:ln/>
+        </p:spPr>
+        <p:txBody>
+          <a:bodyPr wrap="none" lIns="0" tIns="0" rIns="0" bIns="0" rtlCol="0" anchor="t"/>
+          <a:lstStyle/>
+          <a:p>
+            <a:pPr algn="l" indent="0" marL="0">
+              <a:lnSpc>
+                <a:spcPts val="1072"/>
+              </a:lnSpc>
+              <a:buNone/>
+            </a:pPr>
+            <a:r>
+              <a:rPr lang="en-US" sz="670" dirty="0">
                 <a:solidFill>
                   <a:srgbClr val="7D838A"/>
                 </a:solidFill>
@@ -19116,7 +19236,7 @@
               </a:rPr>
               <a:t>物流</a:t>
             </a:r>
-            <a:endParaRPr lang="en-US" sz="620" dirty="0"/>
+            <a:endParaRPr lang="en-US" sz="670" dirty="0"/>
           </a:p>
         </p:txBody>
       </p:sp>
@@ -19170,27 +19290,27 @@
         </p:nvSpPr>
         <p:spPr>
           <a:xfrm>
-            <a:off x="4523176" y="8036768"/>
-            <a:ext cx="566409" cy="126039"/>
-          </a:xfrm>
-          <a:prstGeom prst="rect">
-            <a:avLst/>
-          </a:prstGeom>
-          <a:noFill/>
-          <a:ln/>
-        </p:spPr>
-        <p:txBody>
-          <a:bodyPr wrap="none" lIns="0" tIns="0" rIns="0" bIns="0" rtlCol="0" anchor="t"/>
-          <a:lstStyle/>
-          <a:p>
-            <a:pPr algn="l" indent="0" marL="0">
-              <a:lnSpc>
-                <a:spcPts val="992"/>
-              </a:lnSpc>
-              <a:buNone/>
-            </a:pPr>
-            <a:r>
-              <a:rPr lang="en-US" sz="620" dirty="0">
+            <a:off x="4523176" y="8038039"/>
+            <a:ext cx="607901" cy="136203"/>
+          </a:xfrm>
+          <a:prstGeom prst="rect">
+            <a:avLst/>
+          </a:prstGeom>
+          <a:noFill/>
+          <a:ln/>
+        </p:spPr>
+        <p:txBody>
+          <a:bodyPr wrap="none" lIns="0" tIns="0" rIns="0" bIns="0" rtlCol="0" anchor="t"/>
+          <a:lstStyle/>
+          <a:p>
+            <a:pPr algn="l" indent="0" marL="0">
+              <a:lnSpc>
+                <a:spcPts val="1072"/>
+              </a:lnSpc>
+              <a:buNone/>
+            </a:pPr>
+            <a:r>
+              <a:rPr lang="en-US" sz="670" dirty="0">
                 <a:solidFill>
                   <a:srgbClr val="7D838A"/>
                 </a:solidFill>
@@ -19200,7 +19320,7 @@
               </a:rPr>
               <a:t>ファイナンス</a:t>
             </a:r>
-            <a:endParaRPr lang="en-US" sz="620" dirty="0"/>
+            <a:endParaRPr lang="en-US" sz="670" dirty="0"/>
           </a:p>
         </p:txBody>
       </p:sp>
@@ -19274,27 +19394,27 @@
         </p:nvSpPr>
         <p:spPr>
           <a:xfrm>
-            <a:off x="5412564" y="8125707"/>
-            <a:ext cx="483208" cy="126039"/>
-          </a:xfrm>
-          <a:prstGeom prst="rect">
-            <a:avLst/>
-          </a:prstGeom>
-          <a:noFill/>
-          <a:ln/>
-        </p:spPr>
-        <p:txBody>
-          <a:bodyPr wrap="none" lIns="0" tIns="0" rIns="0" bIns="0" rtlCol="0" anchor="t"/>
-          <a:lstStyle/>
-          <a:p>
-            <a:pPr algn="l" indent="0" marL="0">
-              <a:lnSpc>
-                <a:spcPts val="992"/>
-              </a:lnSpc>
-              <a:buNone/>
-            </a:pPr>
-            <a:r>
-              <a:rPr lang="en-US" sz="620" dirty="0">
+            <a:off x="5412564" y="8126978"/>
+            <a:ext cx="518148" cy="136203"/>
+          </a:xfrm>
+          <a:prstGeom prst="rect">
+            <a:avLst/>
+          </a:prstGeom>
+          <a:noFill/>
+          <a:ln/>
+        </p:spPr>
+        <p:txBody>
+          <a:bodyPr wrap="none" lIns="0" tIns="0" rIns="0" bIns="0" rtlCol="0" anchor="t"/>
+          <a:lstStyle/>
+          <a:p>
+            <a:pPr algn="l" indent="0" marL="0">
+              <a:lnSpc>
+                <a:spcPts val="1072"/>
+              </a:lnSpc>
+              <a:buNone/>
+            </a:pPr>
+            <a:r>
+              <a:rPr lang="en-US" sz="670" dirty="0">
                 <a:solidFill>
                   <a:srgbClr val="7D838A"/>
                 </a:solidFill>
@@ -19304,7 +19424,7 @@
               </a:rPr>
               <a:t>リスク管理</a:t>
             </a:r>
-            <a:endParaRPr lang="en-US" sz="620" dirty="0"/>
+            <a:endParaRPr lang="en-US" sz="670" dirty="0"/>
           </a:p>
         </p:txBody>
       </p:sp>
@@ -19378,27 +19498,27 @@
         </p:nvSpPr>
         <p:spPr>
           <a:xfrm>
-            <a:off x="6301953" y="8125707"/>
-            <a:ext cx="310254" cy="126039"/>
-          </a:xfrm>
-          <a:prstGeom prst="rect">
-            <a:avLst/>
-          </a:prstGeom>
-          <a:noFill/>
-          <a:ln/>
-        </p:spPr>
-        <p:txBody>
-          <a:bodyPr wrap="none" lIns="0" tIns="0" rIns="0" bIns="0" rtlCol="0" anchor="t"/>
-          <a:lstStyle/>
-          <a:p>
-            <a:pPr algn="l" indent="0" marL="0">
-              <a:lnSpc>
-                <a:spcPts val="992"/>
-              </a:lnSpc>
-              <a:buNone/>
-            </a:pPr>
-            <a:r>
-              <a:rPr lang="en-US" sz="620" dirty="0">
+            <a:off x="6301953" y="8126978"/>
+            <a:ext cx="331218" cy="136203"/>
+          </a:xfrm>
+          <a:prstGeom prst="rect">
+            <a:avLst/>
+          </a:prstGeom>
+          <a:noFill/>
+          <a:ln/>
+        </p:spPr>
+        <p:txBody>
+          <a:bodyPr wrap="none" lIns="0" tIns="0" rIns="0" bIns="0" rtlCol="0" anchor="t"/>
+          <a:lstStyle/>
+          <a:p>
+            <a:pPr algn="l" indent="0" marL="0">
+              <a:lnSpc>
+                <a:spcPts val="1072"/>
+              </a:lnSpc>
+              <a:buNone/>
+            </a:pPr>
+            <a:r>
+              <a:rPr lang="en-US" sz="670" dirty="0">
                 <a:solidFill>
                   <a:srgbClr val="7D838A"/>
                 </a:solidFill>
@@ -19408,7 +19528,7 @@
               </a:rPr>
               <a:t>脱炭素</a:t>
             </a:r>
-            <a:endParaRPr lang="en-US" sz="620" dirty="0"/>
+            <a:endParaRPr lang="en-US" sz="670" dirty="0"/>
           </a:p>
         </p:txBody>
       </p:sp>
@@ -19690,27 +19810,27 @@
         </p:nvSpPr>
         <p:spPr>
           <a:xfrm>
-            <a:off x="8881179" y="8443346"/>
-            <a:ext cx="3556859" cy="126039"/>
-          </a:xfrm>
-          <a:prstGeom prst="rect">
-            <a:avLst/>
-          </a:prstGeom>
-          <a:noFill/>
-          <a:ln/>
-        </p:spPr>
-        <p:txBody>
-          <a:bodyPr wrap="none" lIns="0" tIns="0" rIns="0" bIns="0" rtlCol="0" anchor="t"/>
-          <a:lstStyle/>
-          <a:p>
-            <a:pPr algn="l" indent="0" marL="0">
-              <a:lnSpc>
-                <a:spcPts val="992"/>
-              </a:lnSpc>
-              <a:buNone/>
-            </a:pPr>
-            <a:r>
-              <a:rPr lang="en-US" sz="620" dirty="0">
+            <a:off x="8881179" y="8444616"/>
+            <a:ext cx="3840312" cy="136203"/>
+          </a:xfrm>
+          <a:prstGeom prst="rect">
+            <a:avLst/>
+          </a:prstGeom>
+          <a:noFill/>
+          <a:ln/>
+        </p:spPr>
+        <p:txBody>
+          <a:bodyPr wrap="none" lIns="0" tIns="0" rIns="0" bIns="0" rtlCol="0" anchor="t"/>
+          <a:lstStyle/>
+          <a:p>
+            <a:pPr algn="l" indent="0" marL="0">
+              <a:lnSpc>
+                <a:spcPts val="1072"/>
+              </a:lnSpc>
+              <a:buNone/>
+            </a:pPr>
+            <a:r>
+              <a:rPr lang="en-US" sz="670" dirty="0">
                 <a:solidFill>
                   <a:srgbClr val="9AA1A8"/>
                 </a:solidFill>
@@ -19720,7 +19840,7 @@
               </a:rPr>
               <a:t>2-3-1 Marunouchi, Chiyoda-ku, Tokyo 100-8086, Japan　|　www.mitsubishicorp.com</a:t>
             </a:r>
-            <a:endParaRPr lang="en-US" sz="620" dirty="0"/>
+            <a:endParaRPr lang="en-US" sz="670" dirty="0"/>
           </a:p>
         </p:txBody>
       </p:sp>

--- a/cover-proposals/v13_1007_case3_v2plus/台割案3_v2改_P02-11_編集用.pptx
+++ b/cover-proposals/v13_1007_case3_v2plus/台割案3_v2改_P02-11_編集用.pptx
@@ -4047,7 +4047,7 @@
         </p:nvSpPr>
         <p:spPr>
           <a:xfrm>
-            <a:off x="4319887" y="76233"/>
+            <a:off x="5539620" y="76233"/>
             <a:ext cx="1737345" cy="1423022"/>
           </a:xfrm>
           <a:prstGeom prst="rect">

--- a/cover-proposals/v13_1007_case3_v2plus/台割案3_v2改_P02-11_編集用.pptx
+++ b/cover-proposals/v13_1007_case3_v2plus/台割案3_v2改_P02-11_編集用.pptx
@@ -9335,7 +9335,7 @@
         <p:spPr>
           <a:xfrm>
             <a:off x="8068024" y="4468542"/>
-            <a:ext cx="5779060" cy="777580"/>
+            <a:ext cx="4184692" cy="777580"/>
           </a:xfrm>
           <a:prstGeom prst="rect">
             <a:avLst/>
@@ -9362,7 +9362,7 @@
                 <a:ea typeface="Inter Tight SemiBold" pitchFamily="34" charset="-122"/>
                 <a:cs typeface="Inter Tight SemiBold" pitchFamily="34" charset="-120"/>
               </a:rPr>
-              <a:t>The world's largest</a:t>
+              <a:t>The partner the copper</a:t>
             </a:r>
             <a:endParaRPr lang="en-US" sz="3000" dirty="0"/>
           </a:p>
@@ -9382,7 +9382,7 @@
                 <a:ea typeface="Inter Tight SemiBold" pitchFamily="34" charset="-122"/>
                 <a:cs typeface="Inter Tight SemiBold" pitchFamily="34" charset="-120"/>
               </a:rPr>
-              <a:t>non-operating copper producer.</a:t>
+              <a:t>industry calls first.</a:t>
             </a:r>
             <a:endParaRPr lang="en-US" sz="3000" dirty="0"/>
           </a:p>

--- a/cover-proposals/v13_1007_case3_v2plus/台割案3_v2改_P02-11_編集用.pptx
+++ b/cover-proposals/v13_1007_case3_v2plus/台割案3_v2改_P02-11_編集用.pptx
@@ -2396,27 +2396,69 @@
         </p:nvSpPr>
         <p:spPr>
           <a:xfrm>
-            <a:off x="4319887" y="8000430"/>
-            <a:ext cx="955120" cy="109776"/>
-          </a:xfrm>
-          <a:prstGeom prst="rect">
-            <a:avLst/>
-          </a:prstGeom>
-          <a:noFill/>
-          <a:ln/>
-        </p:spPr>
-        <p:txBody>
-          <a:bodyPr wrap="none" lIns="0" tIns="0" rIns="0" bIns="0" rtlCol="0" anchor="t"/>
-          <a:lstStyle/>
-          <a:p>
-            <a:pPr algn="l" indent="0" marL="0">
-              <a:lnSpc>
-                <a:spcPts val="864"/>
-              </a:lnSpc>
-              <a:buNone/>
-            </a:pPr>
-            <a:r>
-              <a:rPr lang="en-US" sz="540" dirty="0">
+            <a:off x="6162192" y="8156963"/>
+            <a:ext cx="432108" cy="101644"/>
+          </a:xfrm>
+          <a:prstGeom prst="rect">
+            <a:avLst/>
+          </a:prstGeom>
+          <a:noFill/>
+          <a:ln/>
+        </p:spPr>
+        <p:txBody>
+          <a:bodyPr wrap="none" lIns="0" tIns="0" rIns="0" bIns="0" rtlCol="0" anchor="t"/>
+          <a:lstStyle/>
+          <a:p>
+            <a:pPr algn="l" indent="0" marL="0">
+              <a:lnSpc>
+                <a:spcPts val="800"/>
+              </a:lnSpc>
+              <a:buNone/>
+            </a:pPr>
+            <a:r>
+              <a:rPr lang="en-US" sz="640" spc="30" kern="0" dirty="0">
+                <a:solidFill>
+                  <a:srgbClr val="121519"/>
+                </a:solidFill>
+                <a:latin typeface="Inter Medium" pitchFamily="34" charset="0"/>
+                <a:ea typeface="Inter Medium" pitchFamily="34" charset="-122"/>
+                <a:cs typeface="Inter Medium" pitchFamily="34" charset="-120"/>
+              </a:rPr>
+              <a:t>Demand</a:t>
+            </a:r>
+            <a:endParaRPr lang="en-US" sz="640" dirty="0"/>
+          </a:p>
+        </p:txBody>
+      </p:sp>
+      <p:sp>
+        <p:nvSpPr>
+          <p:cNvPr id="28" name="Text 26"/>
+          <p:cNvSpPr/>
+          <p:nvPr/>
+        </p:nvSpPr>
+        <p:spPr>
+          <a:xfrm>
+            <a:off x="6162192" y="8265214"/>
+            <a:ext cx="520114" cy="113842"/>
+          </a:xfrm>
+          <a:prstGeom prst="rect">
+            <a:avLst/>
+          </a:prstGeom>
+          <a:noFill/>
+          <a:ln/>
+        </p:spPr>
+        <p:txBody>
+          <a:bodyPr wrap="none" lIns="0" tIns="0" rIns="0" bIns="0" rtlCol="0" anchor="t"/>
+          <a:lstStyle/>
+          <a:p>
+            <a:pPr algn="l" indent="0" marL="0">
+              <a:lnSpc>
+                <a:spcPts val="896"/>
+              </a:lnSpc>
+              <a:buNone/>
+            </a:pPr>
+            <a:r>
+              <a:rPr lang="en-US" sz="560" dirty="0">
                 <a:solidFill>
                   <a:srgbClr val="7D838A"/>
                 </a:solidFill>
@@ -2424,22 +2466,22 @@
                 <a:ea typeface="Noto Sans JP" pitchFamily="34" charset="-122"/>
                 <a:cs typeface="Noto Sans JP" pitchFamily="34" charset="-120"/>
               </a:rPr>
-              <a:t>概念図（数値は入れない）</a:t>
-            </a:r>
-            <a:endParaRPr lang="en-US" sz="540" dirty="0"/>
-          </a:p>
-        </p:txBody>
-      </p:sp>
-      <p:sp>
-        <p:nvSpPr>
-          <p:cNvPr id="28" name="Text 26"/>
-          <p:cNvSpPr/>
-          <p:nvPr/>
-        </p:nvSpPr>
-        <p:spPr>
-          <a:xfrm>
-            <a:off x="6162192" y="8156963"/>
-            <a:ext cx="432108" cy="101644"/>
+              <a:t>人口増・電化</a:t>
+            </a:r>
+            <a:endParaRPr lang="en-US" sz="560" dirty="0"/>
+          </a:p>
+        </p:txBody>
+      </p:sp>
+      <p:sp>
+        <p:nvSpPr>
+          <p:cNvPr id="29" name="Text 27"/>
+          <p:cNvSpPr/>
+          <p:nvPr/>
+        </p:nvSpPr>
+        <p:spPr>
+          <a:xfrm>
+            <a:off x="6263836" y="8817651"/>
+            <a:ext cx="372491" cy="101644"/>
           </a:xfrm>
           <a:prstGeom prst="rect">
             <a:avLst/>
@@ -2460,13 +2502,13 @@
             <a:r>
               <a:rPr lang="en-US" sz="640" spc="30" kern="0" dirty="0">
                 <a:solidFill>
-                  <a:srgbClr val="121519"/>
+                  <a:srgbClr val="7D838A"/>
                 </a:solidFill>
                 <a:latin typeface="Inter Medium" pitchFamily="34" charset="0"/>
                 <a:ea typeface="Inter Medium" pitchFamily="34" charset="-122"/>
                 <a:cs typeface="Inter Medium" pitchFamily="34" charset="-120"/>
               </a:rPr>
-              <a:t>Demand</a:t>
+              <a:t>Supply</a:t>
             </a:r>
             <a:endParaRPr lang="en-US" sz="640" dirty="0"/>
           </a:p>
@@ -2474,14 +2516,14 @@
       </p:sp>
       <p:sp>
         <p:nvSpPr>
-          <p:cNvPr id="29" name="Text 27"/>
-          <p:cNvSpPr/>
-          <p:nvPr/>
-        </p:nvSpPr>
-        <p:spPr>
-          <a:xfrm>
-            <a:off x="6162192" y="8265214"/>
-            <a:ext cx="520114" cy="113842"/>
+          <p:cNvPr id="30" name="Text 28"/>
+          <p:cNvSpPr/>
+          <p:nvPr/>
+        </p:nvSpPr>
+        <p:spPr>
+          <a:xfrm>
+            <a:off x="6263836" y="8925903"/>
+            <a:ext cx="676471" cy="113842"/>
           </a:xfrm>
           <a:prstGeom prst="rect">
             <a:avLst/>
@@ -2508,7 +2550,7 @@
                 <a:ea typeface="Noto Sans JP" pitchFamily="34" charset="-122"/>
                 <a:cs typeface="Noto Sans JP" pitchFamily="34" charset="-120"/>
               </a:rPr>
-              <a:t>人口増・電化</a:t>
+              <a:t>供給制約・地政学</a:t>
             </a:r>
             <a:endParaRPr lang="en-US" sz="560" dirty="0"/>
           </a:p>
@@ -2516,14 +2558,14 @@
       </p:sp>
       <p:sp>
         <p:nvSpPr>
-          <p:cNvPr id="30" name="Text 28"/>
-          <p:cNvSpPr/>
-          <p:nvPr/>
-        </p:nvSpPr>
-        <p:spPr>
-          <a:xfrm>
-            <a:off x="6263836" y="8817651"/>
-            <a:ext cx="372491" cy="101644"/>
+          <p:cNvPr id="31" name="Text 29"/>
+          <p:cNvSpPr/>
+          <p:nvPr/>
+        </p:nvSpPr>
+        <p:spPr>
+          <a:xfrm>
+            <a:off x="5730203" y="8716007"/>
+            <a:ext cx="323575" cy="101644"/>
           </a:xfrm>
           <a:prstGeom prst="rect">
             <a:avLst/>
@@ -2542,15 +2584,493 @@
               <a:buNone/>
             </a:pPr>
             <a:r>
+              <a:rPr lang="en-US" sz="660" spc="190" kern="0" dirty="0">
+                <a:solidFill>
+                  <a:srgbClr val="9C7442"/>
+                </a:solidFill>
+                <a:latin typeface="Inter SemiBold" pitchFamily="34" charset="0"/>
+                <a:ea typeface="Inter SemiBold" pitchFamily="34" charset="-122"/>
+                <a:cs typeface="Inter SemiBold" pitchFamily="34" charset="-120"/>
+              </a:rPr>
+              <a:t>GAP</a:t>
+            </a:r>
+            <a:endParaRPr lang="en-US" sz="660" dirty="0"/>
+          </a:p>
+        </p:txBody>
+      </p:sp>
+      <p:sp>
+        <p:nvSpPr>
+          <p:cNvPr id="32" name="Text 30"/>
+          <p:cNvSpPr/>
+          <p:nvPr/>
+        </p:nvSpPr>
+        <p:spPr>
+          <a:xfrm>
+            <a:off x="4396120" y="9372630"/>
+            <a:ext cx="264395" cy="109776"/>
+          </a:xfrm>
+          <a:prstGeom prst="rect">
+            <a:avLst/>
+          </a:prstGeom>
+          <a:noFill/>
+          <a:ln/>
+        </p:spPr>
+        <p:txBody>
+          <a:bodyPr wrap="none" lIns="0" tIns="0" rIns="0" bIns="0" rtlCol="0" anchor="t"/>
+          <a:lstStyle/>
+          <a:p>
+            <a:pPr algn="l" indent="0" marL="0">
+              <a:lnSpc>
+                <a:spcPts val="864"/>
+              </a:lnSpc>
+              <a:buNone/>
+            </a:pPr>
+            <a:r>
+              <a:rPr lang="en-US" sz="540" dirty="0">
+                <a:solidFill>
+                  <a:srgbClr val="7D838A"/>
+                </a:solidFill>
+                <a:latin typeface="Noto Sans JP" pitchFamily="34" charset="0"/>
+                <a:ea typeface="Noto Sans JP" pitchFamily="34" charset="-122"/>
+                <a:cs typeface="Noto Sans JP" pitchFamily="34" charset="-120"/>
+              </a:rPr>
+              <a:t>Today</a:t>
+            </a:r>
+            <a:endParaRPr lang="en-US" sz="540" dirty="0"/>
+          </a:p>
+        </p:txBody>
+      </p:sp>
+      <p:sp>
+        <p:nvSpPr>
+          <p:cNvPr id="33" name="Text 31"/>
+          <p:cNvSpPr/>
+          <p:nvPr/>
+        </p:nvSpPr>
+        <p:spPr>
+          <a:xfrm>
+            <a:off x="6543358" y="9372630"/>
+            <a:ext cx="280773" cy="109776"/>
+          </a:xfrm>
+          <a:prstGeom prst="rect">
+            <a:avLst/>
+          </a:prstGeom>
+          <a:noFill/>
+          <a:ln/>
+        </p:spPr>
+        <p:txBody>
+          <a:bodyPr wrap="none" lIns="0" tIns="0" rIns="0" bIns="0" rtlCol="0" anchor="t"/>
+          <a:lstStyle/>
+          <a:p>
+            <a:pPr algn="l" indent="0" marL="0">
+              <a:lnSpc>
+                <a:spcPts val="864"/>
+              </a:lnSpc>
+              <a:buNone/>
+            </a:pPr>
+            <a:r>
+              <a:rPr lang="en-US" sz="540" dirty="0">
+                <a:solidFill>
+                  <a:srgbClr val="7D838A"/>
+                </a:solidFill>
+                <a:latin typeface="Noto Sans JP" pitchFamily="34" charset="0"/>
+                <a:ea typeface="Noto Sans JP" pitchFamily="34" charset="-122"/>
+                <a:cs typeface="Noto Sans JP" pitchFamily="34" charset="-120"/>
+              </a:rPr>
+              <a:t>Future</a:t>
+            </a:r>
+            <a:endParaRPr lang="en-US" sz="540" dirty="0"/>
+          </a:p>
+        </p:txBody>
+      </p:sp>
+      <p:sp>
+        <p:nvSpPr>
+          <p:cNvPr id="34" name="Text 32"/>
+          <p:cNvSpPr/>
+          <p:nvPr/>
+        </p:nvSpPr>
+        <p:spPr>
+          <a:xfrm>
+            <a:off x="8068024" y="5565031"/>
+            <a:ext cx="1095318" cy="101644"/>
+          </a:xfrm>
+          <a:prstGeom prst="rect">
+            <a:avLst/>
+          </a:prstGeom>
+          <a:noFill/>
+          <a:ln/>
+        </p:spPr>
+        <p:txBody>
+          <a:bodyPr wrap="none" lIns="0" tIns="0" rIns="0" bIns="0" rtlCol="0" anchor="t"/>
+          <a:lstStyle/>
+          <a:p>
+            <a:pPr algn="l" indent="0" marL="0">
+              <a:lnSpc>
+                <a:spcPts val="800"/>
+              </a:lnSpc>
+              <a:buNone/>
+            </a:pPr>
+            <a:r>
+              <a:rPr lang="en-US" sz="660" spc="190" kern="0" dirty="0">
+                <a:solidFill>
+                  <a:srgbClr val="9C7442"/>
+                </a:solidFill>
+                <a:latin typeface="Inter SemiBold" pitchFamily="34" charset="0"/>
+                <a:ea typeface="Inter SemiBold" pitchFamily="34" charset="-122"/>
+                <a:cs typeface="Inter SemiBold" pitchFamily="34" charset="-120"/>
+              </a:rPr>
+              <a:t>CORE MESSAGE</a:t>
+            </a:r>
+            <a:endParaRPr lang="en-US" sz="660" dirty="0"/>
+          </a:p>
+        </p:txBody>
+      </p:sp>
+      <p:sp>
+        <p:nvSpPr>
+          <p:cNvPr id="35" name="Text 33"/>
+          <p:cNvSpPr/>
+          <p:nvPr/>
+        </p:nvSpPr>
+        <p:spPr>
+          <a:xfrm>
+            <a:off x="8068024" y="5704792"/>
+            <a:ext cx="748317" cy="127055"/>
+          </a:xfrm>
+          <a:prstGeom prst="rect">
+            <a:avLst/>
+          </a:prstGeom>
+          <a:noFill/>
+          <a:ln/>
+        </p:spPr>
+        <p:txBody>
+          <a:bodyPr wrap="none" lIns="0" tIns="0" rIns="0" bIns="0" rtlCol="0" anchor="t"/>
+          <a:lstStyle/>
+          <a:p>
+            <a:pPr algn="l" indent="0" marL="0">
+              <a:lnSpc>
+                <a:spcPts val="1000"/>
+              </a:lnSpc>
+              <a:buNone/>
+            </a:pPr>
+            <a:r>
+              <a:rPr lang="en-US" sz="660" spc="60" kern="0" dirty="0">
+                <a:solidFill>
+                  <a:srgbClr val="7D838A"/>
+                </a:solidFill>
+                <a:latin typeface="Noto Sans JP" pitchFamily="34" charset="0"/>
+                <a:ea typeface="Noto Sans JP" pitchFamily="34" charset="-122"/>
+                <a:cs typeface="Noto Sans JP" pitchFamily="34" charset="-120"/>
+              </a:rPr>
+              <a:t>コアメッセージ</a:t>
+            </a:r>
+            <a:endParaRPr lang="en-US" sz="660" dirty="0"/>
+          </a:p>
+        </p:txBody>
+      </p:sp>
+      <p:sp>
+        <p:nvSpPr>
+          <p:cNvPr id="36" name="Text 34"/>
+          <p:cNvSpPr/>
+          <p:nvPr/>
+        </p:nvSpPr>
+        <p:spPr>
+          <a:xfrm>
+            <a:off x="8068024" y="5964620"/>
+            <a:ext cx="4628652" cy="1120629"/>
+          </a:xfrm>
+          <a:prstGeom prst="rect">
+            <a:avLst/>
+          </a:prstGeom>
+          <a:noFill/>
+          <a:ln/>
+        </p:spPr>
+        <p:txBody>
+          <a:bodyPr wrap="none" lIns="0" tIns="0" rIns="0" bIns="0" rtlCol="0" anchor="t"/>
+          <a:lstStyle/>
+          <a:p>
+            <a:pPr algn="l" indent="0" marL="0">
+              <a:lnSpc>
+                <a:spcPts val="4410"/>
+              </a:lnSpc>
+              <a:buNone/>
+            </a:pPr>
+            <a:r>
+              <a:rPr lang="en-US" sz="4200" spc="-84" kern="0" dirty="0">
+                <a:solidFill>
+                  <a:srgbClr val="121519"/>
+                </a:solidFill>
+                <a:latin typeface="Inter Tight Light" pitchFamily="34" charset="0"/>
+                <a:ea typeface="Inter Tight Light" pitchFamily="34" charset="-122"/>
+                <a:cs typeface="Inter Tight Light" pitchFamily="34" charset="-120"/>
+              </a:rPr>
+              <a:t>Strength to Hold.</a:t>
+            </a:r>
+            <a:endParaRPr lang="en-US" sz="4200" dirty="0"/>
+          </a:p>
+          <a:p>
+            <a:pPr algn="l" indent="0" marL="0">
+              <a:lnSpc>
+                <a:spcPts val="4410"/>
+              </a:lnSpc>
+              <a:buNone/>
+            </a:pPr>
+            <a:r>
+              <a:rPr lang="en-US" sz="4200" spc="-84" kern="0" dirty="0">
+                <a:solidFill>
+                  <a:srgbClr val="121519"/>
+                </a:solidFill>
+                <a:latin typeface="Inter Tight Light" pitchFamily="34" charset="0"/>
+                <a:ea typeface="Inter Tight Light" pitchFamily="34" charset="-122"/>
+                <a:cs typeface="Inter Tight Light" pitchFamily="34" charset="-120"/>
+              </a:rPr>
+              <a:t>Power to Connect.</a:t>
+            </a:r>
+            <a:endParaRPr lang="en-US" sz="4200" dirty="0"/>
+          </a:p>
+        </p:txBody>
+      </p:sp>
+      <p:sp>
+        <p:nvSpPr>
+          <p:cNvPr id="37" name="Text 35"/>
+          <p:cNvSpPr/>
+          <p:nvPr/>
+        </p:nvSpPr>
+        <p:spPr>
+          <a:xfrm>
+            <a:off x="8068024" y="7188165"/>
+            <a:ext cx="1930390" cy="247758"/>
+          </a:xfrm>
+          <a:prstGeom prst="rect">
+            <a:avLst/>
+          </a:prstGeom>
+          <a:noFill/>
+          <a:ln/>
+        </p:spPr>
+        <p:txBody>
+          <a:bodyPr wrap="none" lIns="0" tIns="0" rIns="0" bIns="0" rtlCol="0" anchor="t"/>
+          <a:lstStyle/>
+          <a:p>
+            <a:pPr algn="l" indent="0" marL="0">
+              <a:lnSpc>
+                <a:spcPts val="1950"/>
+              </a:lnSpc>
+              <a:buNone/>
+            </a:pPr>
+            <a:r>
+              <a:rPr lang="en-US" sz="1300" spc="50" kern="0" dirty="0">
+                <a:solidFill>
+                  <a:srgbClr val="121519"/>
+                </a:solidFill>
+                <a:latin typeface="Noto Sans JP Medium" pitchFamily="34" charset="0"/>
+                <a:ea typeface="Noto Sans JP Medium" pitchFamily="34" charset="-122"/>
+                <a:cs typeface="Noto Sans JP Medium" pitchFamily="34" charset="-120"/>
+              </a:rPr>
+              <a:t>持つ力と、つなぐ力。</a:t>
+            </a:r>
+            <a:endParaRPr lang="en-US" sz="1300" dirty="0"/>
+          </a:p>
+        </p:txBody>
+      </p:sp>
+      <p:sp>
+        <p:nvSpPr>
+          <p:cNvPr id="38" name="Text 36"/>
+          <p:cNvSpPr/>
+          <p:nvPr/>
+        </p:nvSpPr>
+        <p:spPr>
+          <a:xfrm>
+            <a:off x="8068024" y="7488365"/>
+            <a:ext cx="4243654" cy="904953"/>
+          </a:xfrm>
+          <a:prstGeom prst="rect">
+            <a:avLst/>
+          </a:prstGeom>
+          <a:noFill/>
+          <a:ln/>
+        </p:spPr>
+        <p:txBody>
+          <a:bodyPr wrap="none" lIns="0" tIns="0" rIns="0" bIns="0" rtlCol="0" anchor="t"/>
+          <a:lstStyle/>
+          <a:p>
+            <a:pPr algn="l" indent="0" marL="0">
+              <a:lnSpc>
+                <a:spcPts val="1425"/>
+              </a:lnSpc>
+              <a:buNone/>
+            </a:pPr>
+            <a:r>
+              <a:rPr lang="en-US" sz="770" spc="20" kern="0" dirty="0">
+                <a:solidFill>
+                  <a:srgbClr val="3D4249"/>
+                </a:solidFill>
+                <a:latin typeface="Noto Sans JP" pitchFamily="34" charset="0"/>
+                <a:ea typeface="Noto Sans JP" pitchFamily="34" charset="-122"/>
+                <a:cs typeface="Noto Sans JP" pitchFamily="34" charset="-120"/>
+              </a:rPr>
+              <a:t>資源は、そこに「ある」だけでは、まだ価値ではありません。誰かが見出し、育て、</a:t>
+            </a:r>
+            <a:endParaRPr lang="en-US" sz="770" dirty="0"/>
+          </a:p>
+          <a:p>
+            <a:pPr algn="l" indent="0" marL="0">
+              <a:lnSpc>
+                <a:spcPts val="1425"/>
+              </a:lnSpc>
+              <a:buNone/>
+            </a:pPr>
+            <a:r>
+              <a:rPr lang="en-US" sz="770" spc="20" kern="0" dirty="0">
+                <a:solidFill>
+                  <a:srgbClr val="3D4249"/>
+                </a:solidFill>
+                <a:latin typeface="Noto Sans JP" pitchFamily="34" charset="0"/>
+                <a:ea typeface="Noto Sans JP" pitchFamily="34" charset="-122"/>
+                <a:cs typeface="Noto Sans JP" pitchFamily="34" charset="-120"/>
+              </a:rPr>
+              <a:t>必要とする場所へ届けて、はじめて力になる。私たちは、世界有数の資産に関わり、</a:t>
+            </a:r>
+            <a:endParaRPr lang="en-US" sz="770" dirty="0"/>
+          </a:p>
+          <a:p>
+            <a:pPr algn="l" indent="0" marL="0">
+              <a:lnSpc>
+                <a:spcPts val="1425"/>
+              </a:lnSpc>
+              <a:buNone/>
+            </a:pPr>
+            <a:r>
+              <a:rPr lang="en-US" sz="770" spc="20" kern="0" dirty="0">
+                <a:solidFill>
+                  <a:srgbClr val="3D4249"/>
+                </a:solidFill>
+                <a:latin typeface="Noto Sans JP" pitchFamily="34" charset="0"/>
+                <a:ea typeface="Noto Sans JP" pitchFamily="34" charset="-122"/>
+                <a:cs typeface="Noto Sans JP" pitchFamily="34" charset="-120"/>
+              </a:rPr>
+              <a:t>投資とトレーディングの両輪で川上から川下までをつなぎます。フェアな立場だから</a:t>
+            </a:r>
+            <a:endParaRPr lang="en-US" sz="770" dirty="0"/>
+          </a:p>
+          <a:p>
+            <a:pPr algn="l" indent="0" marL="0">
+              <a:lnSpc>
+                <a:spcPts val="1425"/>
+              </a:lnSpc>
+              <a:buNone/>
+            </a:pPr>
+            <a:r>
+              <a:rPr lang="en-US" sz="770" spc="20" kern="0" dirty="0">
+                <a:solidFill>
+                  <a:srgbClr val="3D4249"/>
+                </a:solidFill>
+                <a:latin typeface="Noto Sans JP" pitchFamily="34" charset="0"/>
+                <a:ea typeface="Noto Sans JP" pitchFamily="34" charset="-122"/>
+                <a:cs typeface="Noto Sans JP" pitchFamily="34" charset="-120"/>
+              </a:rPr>
+              <a:t>こそ、埋められる隙間がある。多様なパートナーと使い手の間に立ち、その時々の最</a:t>
+            </a:r>
+            <a:endParaRPr lang="en-US" sz="770" dirty="0"/>
+          </a:p>
+          <a:p>
+            <a:pPr algn="l" indent="0" marL="0">
+              <a:lnSpc>
+                <a:spcPts val="1425"/>
+              </a:lnSpc>
+              <a:buNone/>
+            </a:pPr>
+            <a:r>
+              <a:rPr lang="en-US" sz="770" spc="20" kern="0" dirty="0">
+                <a:solidFill>
+                  <a:srgbClr val="3D4249"/>
+                </a:solidFill>
+                <a:latin typeface="Noto Sans JP" pitchFamily="34" charset="0"/>
+                <a:ea typeface="Noto Sans JP" pitchFamily="34" charset="-122"/>
+                <a:cs typeface="Noto Sans JP" pitchFamily="34" charset="-120"/>
+              </a:rPr>
+              <a:t>適解を導く。世界に眠る価値を、社会の力へ。</a:t>
+            </a:r>
+            <a:endParaRPr lang="en-US" sz="770" dirty="0"/>
+          </a:p>
+        </p:txBody>
+      </p:sp>
+      <p:sp>
+        <p:nvSpPr>
+          <p:cNvPr id="39" name="Text 37"/>
+          <p:cNvSpPr/>
+          <p:nvPr/>
+        </p:nvSpPr>
+        <p:spPr>
+          <a:xfrm>
+            <a:off x="12260855" y="7496274"/>
+            <a:ext cx="779108" cy="101644"/>
+          </a:xfrm>
+          <a:prstGeom prst="rect">
+            <a:avLst/>
+          </a:prstGeom>
+          <a:noFill/>
+          <a:ln/>
+        </p:spPr>
+        <p:txBody>
+          <a:bodyPr wrap="none" lIns="0" tIns="0" rIns="0" bIns="0" rtlCol="0" anchor="t"/>
+          <a:lstStyle/>
+          <a:p>
+            <a:pPr algn="l" indent="0" marL="0">
+              <a:lnSpc>
+                <a:spcPts val="800"/>
+              </a:lnSpc>
+              <a:buNone/>
+            </a:pPr>
+            <a:r>
+              <a:rPr lang="en-US" sz="660" spc="190" kern="0" dirty="0">
+                <a:solidFill>
+                  <a:srgbClr val="9C7442"/>
+                </a:solidFill>
+                <a:latin typeface="Inter SemiBold" pitchFamily="34" charset="0"/>
+                <a:ea typeface="Inter SemiBold" pitchFamily="34" charset="-122"/>
+                <a:cs typeface="Inter SemiBold" pitchFamily="34" charset="-120"/>
+              </a:rPr>
+              <a:t>CONTENTS</a:t>
+            </a:r>
+            <a:endParaRPr lang="en-US" sz="660" dirty="0"/>
+          </a:p>
+        </p:txBody>
+      </p:sp>
+      <p:sp>
+        <p:nvSpPr>
+          <p:cNvPr id="40" name="Text 38"/>
+          <p:cNvSpPr/>
+          <p:nvPr/>
+        </p:nvSpPr>
+        <p:spPr>
+          <a:xfrm>
+            <a:off x="12260855" y="7775796"/>
+            <a:ext cx="154114" cy="101644"/>
+          </a:xfrm>
+          <a:prstGeom prst="rect">
+            <a:avLst/>
+          </a:prstGeom>
+          <a:noFill/>
+          <a:ln/>
+        </p:spPr>
+        <p:txBody>
+          <a:bodyPr wrap="none" lIns="0" tIns="0" rIns="0" bIns="0" rtlCol="0" anchor="t"/>
+          <a:lstStyle/>
+          <a:p>
+            <a:pPr algn="l" indent="0" marL="0">
+              <a:lnSpc>
+                <a:spcPts val="800"/>
+              </a:lnSpc>
+              <a:buNone/>
+            </a:pPr>
+            <a:r>
               <a:rPr lang="en-US" sz="640" spc="30" kern="0" dirty="0">
                 <a:solidFill>
-                  <a:srgbClr val="7D838A"/>
+                  <a:srgbClr val="9C7442"/>
                 </a:solidFill>
                 <a:latin typeface="Inter Medium" pitchFamily="34" charset="0"/>
                 <a:ea typeface="Inter Medium" pitchFamily="34" charset="-122"/>
                 <a:cs typeface="Inter Medium" pitchFamily="34" charset="-120"/>
               </a:rPr>
-              <a:t>Supply</a:t>
+              <a:t>01</a:t>
             </a:r>
             <a:endParaRPr lang="en-US" sz="640" dirty="0"/>
           </a:p>
@@ -2558,125 +3078,839 @@
       </p:sp>
       <p:sp>
         <p:nvSpPr>
-          <p:cNvPr id="31" name="Text 29"/>
-          <p:cNvSpPr/>
-          <p:nvPr/>
-        </p:nvSpPr>
-        <p:spPr>
-          <a:xfrm>
-            <a:off x="6263836" y="8925903"/>
-            <a:ext cx="676471" cy="113842"/>
-          </a:xfrm>
-          <a:prstGeom prst="rect">
-            <a:avLst/>
-          </a:prstGeom>
-          <a:noFill/>
-          <a:ln/>
-        </p:spPr>
-        <p:txBody>
-          <a:bodyPr wrap="none" lIns="0" tIns="0" rIns="0" bIns="0" rtlCol="0" anchor="t"/>
-          <a:lstStyle/>
-          <a:p>
-            <a:pPr algn="l" indent="0" marL="0">
-              <a:lnSpc>
-                <a:spcPts val="896"/>
-              </a:lnSpc>
-              <a:buNone/>
-            </a:pPr>
-            <a:r>
-              <a:rPr lang="en-US" sz="560" dirty="0">
+          <p:cNvPr id="41" name="Text 39"/>
+          <p:cNvSpPr/>
+          <p:nvPr/>
+        </p:nvSpPr>
+        <p:spPr>
+          <a:xfrm>
+            <a:off x="12514966" y="7775796"/>
+            <a:ext cx="623842" cy="101644"/>
+          </a:xfrm>
+          <a:prstGeom prst="rect">
+            <a:avLst/>
+          </a:prstGeom>
+          <a:noFill/>
+          <a:ln/>
+        </p:spPr>
+        <p:txBody>
+          <a:bodyPr wrap="none" lIns="0" tIns="0" rIns="0" bIns="0" rtlCol="0" anchor="t"/>
+          <a:lstStyle/>
+          <a:p>
+            <a:pPr algn="l" indent="0" marL="0">
+              <a:lnSpc>
+                <a:spcPts val="800"/>
+              </a:lnSpc>
+              <a:buNone/>
+            </a:pPr>
+            <a:r>
+              <a:rPr lang="en-US" sz="640" spc="30" kern="0" dirty="0">
+                <a:solidFill>
+                  <a:srgbClr val="121519"/>
+                </a:solidFill>
+                <a:latin typeface="Inter Medium" pitchFamily="34" charset="0"/>
+                <a:ea typeface="Inter Medium" pitchFamily="34" charset="-122"/>
+                <a:cs typeface="Inter Medium" pitchFamily="34" charset="-120"/>
+              </a:rPr>
+              <a:t>Who We Are</a:t>
+            </a:r>
+            <a:endParaRPr lang="en-US" sz="640" dirty="0"/>
+          </a:p>
+        </p:txBody>
+      </p:sp>
+      <p:sp>
+        <p:nvSpPr>
+          <p:cNvPr id="42" name="Text 40"/>
+          <p:cNvSpPr/>
+          <p:nvPr/>
+        </p:nvSpPr>
+        <p:spPr>
+          <a:xfrm>
+            <a:off x="14357271" y="7775796"/>
+            <a:ext cx="305013" cy="76233"/>
+          </a:xfrm>
+          <a:prstGeom prst="rect">
+            <a:avLst/>
+          </a:prstGeom>
+          <a:noFill/>
+          <a:ln/>
+        </p:spPr>
+        <p:txBody>
+          <a:bodyPr wrap="none" lIns="0" tIns="0" rIns="0" bIns="0" rtlCol="0" anchor="t"/>
+          <a:lstStyle/>
+          <a:p>
+            <a:pPr algn="l" indent="0" marL="0">
+              <a:lnSpc>
+                <a:spcPts val="600"/>
+              </a:lnSpc>
+              <a:buNone/>
+            </a:pPr>
+            <a:r>
+              <a:rPr lang="en-US" sz="540" spc="160" kern="0" dirty="0">
                 <a:solidFill>
                   <a:srgbClr val="7D838A"/>
+                </a:solidFill>
+                <a:latin typeface="Inter Medium" pitchFamily="34" charset="0"/>
+                <a:ea typeface="Inter Medium" pitchFamily="34" charset="-122"/>
+                <a:cs typeface="Inter Medium" pitchFamily="34" charset="-120"/>
+              </a:rPr>
+              <a:t>P.04</a:t>
+            </a:r>
+            <a:endParaRPr lang="en-US" sz="540" dirty="0"/>
+          </a:p>
+        </p:txBody>
+      </p:sp>
+      <p:sp>
+        <p:nvSpPr>
+          <p:cNvPr id="43" name="Text 41"/>
+          <p:cNvSpPr/>
+          <p:nvPr/>
+        </p:nvSpPr>
+        <p:spPr>
+          <a:xfrm>
+            <a:off x="12260855" y="8042613"/>
+            <a:ext cx="172021" cy="101644"/>
+          </a:xfrm>
+          <a:prstGeom prst="rect">
+            <a:avLst/>
+          </a:prstGeom>
+          <a:noFill/>
+          <a:ln/>
+        </p:spPr>
+        <p:txBody>
+          <a:bodyPr wrap="none" lIns="0" tIns="0" rIns="0" bIns="0" rtlCol="0" anchor="t"/>
+          <a:lstStyle/>
+          <a:p>
+            <a:pPr algn="l" indent="0" marL="0">
+              <a:lnSpc>
+                <a:spcPts val="800"/>
+              </a:lnSpc>
+              <a:buNone/>
+            </a:pPr>
+            <a:r>
+              <a:rPr lang="en-US" sz="640" spc="30" kern="0" dirty="0">
+                <a:solidFill>
+                  <a:srgbClr val="9C7442"/>
+                </a:solidFill>
+                <a:latin typeface="Inter Medium" pitchFamily="34" charset="0"/>
+                <a:ea typeface="Inter Medium" pitchFamily="34" charset="-122"/>
+                <a:cs typeface="Inter Medium" pitchFamily="34" charset="-120"/>
+              </a:rPr>
+              <a:t>02</a:t>
+            </a:r>
+            <a:endParaRPr lang="en-US" sz="640" dirty="0"/>
+          </a:p>
+        </p:txBody>
+      </p:sp>
+      <p:sp>
+        <p:nvSpPr>
+          <p:cNvPr id="44" name="Text 42"/>
+          <p:cNvSpPr/>
+          <p:nvPr/>
+        </p:nvSpPr>
+        <p:spPr>
+          <a:xfrm>
+            <a:off x="12514966" y="8042613"/>
+            <a:ext cx="700711" cy="101644"/>
+          </a:xfrm>
+          <a:prstGeom prst="rect">
+            <a:avLst/>
+          </a:prstGeom>
+          <a:noFill/>
+          <a:ln/>
+        </p:spPr>
+        <p:txBody>
+          <a:bodyPr wrap="none" lIns="0" tIns="0" rIns="0" bIns="0" rtlCol="0" anchor="t"/>
+          <a:lstStyle/>
+          <a:p>
+            <a:pPr algn="l" indent="0" marL="0">
+              <a:lnSpc>
+                <a:spcPts val="800"/>
+              </a:lnSpc>
+              <a:buNone/>
+            </a:pPr>
+            <a:r>
+              <a:rPr lang="en-US" sz="640" spc="30" kern="0" dirty="0">
+                <a:solidFill>
+                  <a:srgbClr val="121519"/>
+                </a:solidFill>
+                <a:latin typeface="Inter Medium" pitchFamily="34" charset="0"/>
+                <a:ea typeface="Inter Medium" pitchFamily="34" charset="-122"/>
+                <a:cs typeface="Inter Medium" pitchFamily="34" charset="-120"/>
+              </a:rPr>
+              <a:t>Our Strengths</a:t>
+            </a:r>
+            <a:endParaRPr lang="en-US" sz="640" dirty="0"/>
+          </a:p>
+        </p:txBody>
+      </p:sp>
+      <p:sp>
+        <p:nvSpPr>
+          <p:cNvPr id="45" name="Text 43"/>
+          <p:cNvSpPr/>
+          <p:nvPr/>
+        </p:nvSpPr>
+        <p:spPr>
+          <a:xfrm>
+            <a:off x="14357271" y="8042613"/>
+            <a:ext cx="301082" cy="76233"/>
+          </a:xfrm>
+          <a:prstGeom prst="rect">
+            <a:avLst/>
+          </a:prstGeom>
+          <a:noFill/>
+          <a:ln/>
+        </p:spPr>
+        <p:txBody>
+          <a:bodyPr wrap="none" lIns="0" tIns="0" rIns="0" bIns="0" rtlCol="0" anchor="t"/>
+          <a:lstStyle/>
+          <a:p>
+            <a:pPr algn="l" indent="0" marL="0">
+              <a:lnSpc>
+                <a:spcPts val="600"/>
+              </a:lnSpc>
+              <a:buNone/>
+            </a:pPr>
+            <a:r>
+              <a:rPr lang="en-US" sz="540" spc="160" kern="0" dirty="0">
+                <a:solidFill>
+                  <a:srgbClr val="7D838A"/>
+                </a:solidFill>
+                <a:latin typeface="Inter Medium" pitchFamily="34" charset="0"/>
+                <a:ea typeface="Inter Medium" pitchFamily="34" charset="-122"/>
+                <a:cs typeface="Inter Medium" pitchFamily="34" charset="-120"/>
+              </a:rPr>
+              <a:t>P.05</a:t>
+            </a:r>
+            <a:endParaRPr lang="en-US" sz="540" dirty="0"/>
+          </a:p>
+        </p:txBody>
+      </p:sp>
+      <p:sp>
+        <p:nvSpPr>
+          <p:cNvPr id="46" name="Text 44"/>
+          <p:cNvSpPr/>
+          <p:nvPr/>
+        </p:nvSpPr>
+        <p:spPr>
+          <a:xfrm>
+            <a:off x="12260855" y="8309429"/>
+            <a:ext cx="172895" cy="101644"/>
+          </a:xfrm>
+          <a:prstGeom prst="rect">
+            <a:avLst/>
+          </a:prstGeom>
+          <a:noFill/>
+          <a:ln/>
+        </p:spPr>
+        <p:txBody>
+          <a:bodyPr wrap="none" lIns="0" tIns="0" rIns="0" bIns="0" rtlCol="0" anchor="t"/>
+          <a:lstStyle/>
+          <a:p>
+            <a:pPr algn="l" indent="0" marL="0">
+              <a:lnSpc>
+                <a:spcPts val="800"/>
+              </a:lnSpc>
+              <a:buNone/>
+            </a:pPr>
+            <a:r>
+              <a:rPr lang="en-US" sz="640" spc="30" kern="0" dirty="0">
+                <a:solidFill>
+                  <a:srgbClr val="9C7442"/>
+                </a:solidFill>
+                <a:latin typeface="Inter Medium" pitchFamily="34" charset="0"/>
+                <a:ea typeface="Inter Medium" pitchFamily="34" charset="-122"/>
+                <a:cs typeface="Inter Medium" pitchFamily="34" charset="-120"/>
+              </a:rPr>
+              <a:t>03</a:t>
+            </a:r>
+            <a:endParaRPr lang="en-US" sz="640" dirty="0"/>
+          </a:p>
+        </p:txBody>
+      </p:sp>
+      <p:sp>
+        <p:nvSpPr>
+          <p:cNvPr id="47" name="Text 45"/>
+          <p:cNvSpPr/>
+          <p:nvPr/>
+        </p:nvSpPr>
+        <p:spPr>
+          <a:xfrm>
+            <a:off x="12514966" y="8309429"/>
+            <a:ext cx="721894" cy="101644"/>
+          </a:xfrm>
+          <a:prstGeom prst="rect">
+            <a:avLst/>
+          </a:prstGeom>
+          <a:noFill/>
+          <a:ln/>
+        </p:spPr>
+        <p:txBody>
+          <a:bodyPr wrap="none" lIns="0" tIns="0" rIns="0" bIns="0" rtlCol="0" anchor="t"/>
+          <a:lstStyle/>
+          <a:p>
+            <a:pPr algn="l" indent="0" marL="0">
+              <a:lnSpc>
+                <a:spcPts val="800"/>
+              </a:lnSpc>
+              <a:buNone/>
+            </a:pPr>
+            <a:r>
+              <a:rPr lang="en-US" sz="640" spc="30" kern="0" dirty="0">
+                <a:solidFill>
+                  <a:srgbClr val="121519"/>
+                </a:solidFill>
+                <a:latin typeface="Inter Medium" pitchFamily="34" charset="0"/>
+                <a:ea typeface="Inter Medium" pitchFamily="34" charset="-122"/>
+                <a:cs typeface="Inter Medium" pitchFamily="34" charset="-120"/>
+              </a:rPr>
+              <a:t>Coal &amp; Copper</a:t>
+            </a:r>
+            <a:endParaRPr lang="en-US" sz="640" dirty="0"/>
+          </a:p>
+        </p:txBody>
+      </p:sp>
+      <p:sp>
+        <p:nvSpPr>
+          <p:cNvPr id="48" name="Text 46"/>
+          <p:cNvSpPr/>
+          <p:nvPr/>
+        </p:nvSpPr>
+        <p:spPr>
+          <a:xfrm>
+            <a:off x="14357271" y="8309429"/>
+            <a:ext cx="303047" cy="76233"/>
+          </a:xfrm>
+          <a:prstGeom prst="rect">
+            <a:avLst/>
+          </a:prstGeom>
+          <a:noFill/>
+          <a:ln/>
+        </p:spPr>
+        <p:txBody>
+          <a:bodyPr wrap="none" lIns="0" tIns="0" rIns="0" bIns="0" rtlCol="0" anchor="t"/>
+          <a:lstStyle/>
+          <a:p>
+            <a:pPr algn="l" indent="0" marL="0">
+              <a:lnSpc>
+                <a:spcPts val="600"/>
+              </a:lnSpc>
+              <a:buNone/>
+            </a:pPr>
+            <a:r>
+              <a:rPr lang="en-US" sz="540" spc="160" kern="0" dirty="0">
+                <a:solidFill>
+                  <a:srgbClr val="7D838A"/>
+                </a:solidFill>
+                <a:latin typeface="Inter Medium" pitchFamily="34" charset="0"/>
+                <a:ea typeface="Inter Medium" pitchFamily="34" charset="-122"/>
+                <a:cs typeface="Inter Medium" pitchFamily="34" charset="-120"/>
+              </a:rPr>
+              <a:t>P.06</a:t>
+            </a:r>
+            <a:endParaRPr lang="en-US" sz="540" dirty="0"/>
+          </a:p>
+        </p:txBody>
+      </p:sp>
+      <p:sp>
+        <p:nvSpPr>
+          <p:cNvPr id="49" name="Text 47"/>
+          <p:cNvSpPr/>
+          <p:nvPr/>
+        </p:nvSpPr>
+        <p:spPr>
+          <a:xfrm>
+            <a:off x="12260855" y="8576246"/>
+            <a:ext cx="175515" cy="101644"/>
+          </a:xfrm>
+          <a:prstGeom prst="rect">
+            <a:avLst/>
+          </a:prstGeom>
+          <a:noFill/>
+          <a:ln/>
+        </p:spPr>
+        <p:txBody>
+          <a:bodyPr wrap="none" lIns="0" tIns="0" rIns="0" bIns="0" rtlCol="0" anchor="t"/>
+          <a:lstStyle/>
+          <a:p>
+            <a:pPr algn="l" indent="0" marL="0">
+              <a:lnSpc>
+                <a:spcPts val="800"/>
+              </a:lnSpc>
+              <a:buNone/>
+            </a:pPr>
+            <a:r>
+              <a:rPr lang="en-US" sz="640" spc="30" kern="0" dirty="0">
+                <a:solidFill>
+                  <a:srgbClr val="9C7442"/>
+                </a:solidFill>
+                <a:latin typeface="Inter Medium" pitchFamily="34" charset="0"/>
+                <a:ea typeface="Inter Medium" pitchFamily="34" charset="-122"/>
+                <a:cs typeface="Inter Medium" pitchFamily="34" charset="-120"/>
+              </a:rPr>
+              <a:t>04</a:t>
+            </a:r>
+            <a:endParaRPr lang="en-US" sz="640" dirty="0"/>
+          </a:p>
+        </p:txBody>
+      </p:sp>
+      <p:sp>
+        <p:nvSpPr>
+          <p:cNvPr id="50" name="Text 48"/>
+          <p:cNvSpPr/>
+          <p:nvPr/>
+        </p:nvSpPr>
+        <p:spPr>
+          <a:xfrm>
+            <a:off x="12514966" y="8576246"/>
+            <a:ext cx="945293" cy="101644"/>
+          </a:xfrm>
+          <a:prstGeom prst="rect">
+            <a:avLst/>
+          </a:prstGeom>
+          <a:noFill/>
+          <a:ln/>
+        </p:spPr>
+        <p:txBody>
+          <a:bodyPr wrap="none" lIns="0" tIns="0" rIns="0" bIns="0" rtlCol="0" anchor="t"/>
+          <a:lstStyle/>
+          <a:p>
+            <a:pPr algn="l" indent="0" marL="0">
+              <a:lnSpc>
+                <a:spcPts val="800"/>
+              </a:lnSpc>
+              <a:buNone/>
+            </a:pPr>
+            <a:r>
+              <a:rPr lang="en-US" sz="640" spc="30" kern="0" dirty="0">
+                <a:solidFill>
+                  <a:srgbClr val="121519"/>
+                </a:solidFill>
+                <a:latin typeface="Inter Medium" pitchFamily="34" charset="0"/>
+                <a:ea typeface="Inter Medium" pitchFamily="34" charset="-122"/>
+                <a:cs typeface="Inter Medium" pitchFamily="34" charset="-120"/>
+              </a:rPr>
+              <a:t>Resources to Value</a:t>
+            </a:r>
+            <a:endParaRPr lang="en-US" sz="640" dirty="0"/>
+          </a:p>
+        </p:txBody>
+      </p:sp>
+      <p:sp>
+        <p:nvSpPr>
+          <p:cNvPr id="51" name="Text 49"/>
+          <p:cNvSpPr/>
+          <p:nvPr/>
+        </p:nvSpPr>
+        <p:spPr>
+          <a:xfrm>
+            <a:off x="14357271" y="8576246"/>
+            <a:ext cx="303047" cy="76233"/>
+          </a:xfrm>
+          <a:prstGeom prst="rect">
+            <a:avLst/>
+          </a:prstGeom>
+          <a:noFill/>
+          <a:ln/>
+        </p:spPr>
+        <p:txBody>
+          <a:bodyPr wrap="none" lIns="0" tIns="0" rIns="0" bIns="0" rtlCol="0" anchor="t"/>
+          <a:lstStyle/>
+          <a:p>
+            <a:pPr algn="l" indent="0" marL="0">
+              <a:lnSpc>
+                <a:spcPts val="600"/>
+              </a:lnSpc>
+              <a:buNone/>
+            </a:pPr>
+            <a:r>
+              <a:rPr lang="en-US" sz="540" spc="160" kern="0" dirty="0">
+                <a:solidFill>
+                  <a:srgbClr val="7D838A"/>
+                </a:solidFill>
+                <a:latin typeface="Inter Medium" pitchFamily="34" charset="0"/>
+                <a:ea typeface="Inter Medium" pitchFamily="34" charset="-122"/>
+                <a:cs typeface="Inter Medium" pitchFamily="34" charset="-120"/>
+              </a:rPr>
+              <a:t>P.08</a:t>
+            </a:r>
+            <a:endParaRPr lang="en-US" sz="540" dirty="0"/>
+          </a:p>
+        </p:txBody>
+      </p:sp>
+      <p:sp>
+        <p:nvSpPr>
+          <p:cNvPr id="52" name="Text 50"/>
+          <p:cNvSpPr/>
+          <p:nvPr/>
+        </p:nvSpPr>
+        <p:spPr>
+          <a:xfrm>
+            <a:off x="12260855" y="8843063"/>
+            <a:ext cx="170929" cy="101644"/>
+          </a:xfrm>
+          <a:prstGeom prst="rect">
+            <a:avLst/>
+          </a:prstGeom>
+          <a:noFill/>
+          <a:ln/>
+        </p:spPr>
+        <p:txBody>
+          <a:bodyPr wrap="none" lIns="0" tIns="0" rIns="0" bIns="0" rtlCol="0" anchor="t"/>
+          <a:lstStyle/>
+          <a:p>
+            <a:pPr algn="l" indent="0" marL="0">
+              <a:lnSpc>
+                <a:spcPts val="800"/>
+              </a:lnSpc>
+              <a:buNone/>
+            </a:pPr>
+            <a:r>
+              <a:rPr lang="en-US" sz="640" spc="30" kern="0" dirty="0">
+                <a:solidFill>
+                  <a:srgbClr val="9C7442"/>
+                </a:solidFill>
+                <a:latin typeface="Inter Medium" pitchFamily="34" charset="0"/>
+                <a:ea typeface="Inter Medium" pitchFamily="34" charset="-122"/>
+                <a:cs typeface="Inter Medium" pitchFamily="34" charset="-120"/>
+              </a:rPr>
+              <a:t>05</a:t>
+            </a:r>
+            <a:endParaRPr lang="en-US" sz="640" dirty="0"/>
+          </a:p>
+        </p:txBody>
+      </p:sp>
+      <p:sp>
+        <p:nvSpPr>
+          <p:cNvPr id="53" name="Text 51"/>
+          <p:cNvSpPr/>
+          <p:nvPr/>
+        </p:nvSpPr>
+        <p:spPr>
+          <a:xfrm>
+            <a:off x="12514966" y="8843063"/>
+            <a:ext cx="643715" cy="101644"/>
+          </a:xfrm>
+          <a:prstGeom prst="rect">
+            <a:avLst/>
+          </a:prstGeom>
+          <a:noFill/>
+          <a:ln/>
+        </p:spPr>
+        <p:txBody>
+          <a:bodyPr wrap="none" lIns="0" tIns="0" rIns="0" bIns="0" rtlCol="0" anchor="t"/>
+          <a:lstStyle/>
+          <a:p>
+            <a:pPr algn="l" indent="0" marL="0">
+              <a:lnSpc>
+                <a:spcPts val="800"/>
+              </a:lnSpc>
+              <a:buNone/>
+            </a:pPr>
+            <a:r>
+              <a:rPr lang="en-US" sz="640" spc="30" kern="0" dirty="0">
+                <a:solidFill>
+                  <a:srgbClr val="121519"/>
+                </a:solidFill>
+                <a:latin typeface="Inter Medium" pitchFamily="34" charset="0"/>
+                <a:ea typeface="Inter Medium" pitchFamily="34" charset="-122"/>
+                <a:cs typeface="Inter Medium" pitchFamily="34" charset="-120"/>
+              </a:rPr>
+              <a:t>Partnerships</a:t>
+            </a:r>
+            <a:endParaRPr lang="en-US" sz="640" dirty="0"/>
+          </a:p>
+        </p:txBody>
+      </p:sp>
+      <p:sp>
+        <p:nvSpPr>
+          <p:cNvPr id="54" name="Text 52"/>
+          <p:cNvSpPr/>
+          <p:nvPr/>
+        </p:nvSpPr>
+        <p:spPr>
+          <a:xfrm>
+            <a:off x="14357271" y="8843063"/>
+            <a:ext cx="303047" cy="76233"/>
+          </a:xfrm>
+          <a:prstGeom prst="rect">
+            <a:avLst/>
+          </a:prstGeom>
+          <a:noFill/>
+          <a:ln/>
+        </p:spPr>
+        <p:txBody>
+          <a:bodyPr wrap="none" lIns="0" tIns="0" rIns="0" bIns="0" rtlCol="0" anchor="t"/>
+          <a:lstStyle/>
+          <a:p>
+            <a:pPr algn="l" indent="0" marL="0">
+              <a:lnSpc>
+                <a:spcPts val="600"/>
+              </a:lnSpc>
+              <a:buNone/>
+            </a:pPr>
+            <a:r>
+              <a:rPr lang="en-US" sz="540" spc="160" kern="0" dirty="0">
+                <a:solidFill>
+                  <a:srgbClr val="7D838A"/>
+                </a:solidFill>
+                <a:latin typeface="Inter Medium" pitchFamily="34" charset="0"/>
+                <a:ea typeface="Inter Medium" pitchFamily="34" charset="-122"/>
+                <a:cs typeface="Inter Medium" pitchFamily="34" charset="-120"/>
+              </a:rPr>
+              <a:t>P.09</a:t>
+            </a:r>
+            <a:endParaRPr lang="en-US" sz="540" dirty="0"/>
+          </a:p>
+        </p:txBody>
+      </p:sp>
+      <p:sp>
+        <p:nvSpPr>
+          <p:cNvPr id="55" name="Text 53"/>
+          <p:cNvSpPr/>
+          <p:nvPr/>
+        </p:nvSpPr>
+        <p:spPr>
+          <a:xfrm>
+            <a:off x="12260855" y="9109879"/>
+            <a:ext cx="173331" cy="101644"/>
+          </a:xfrm>
+          <a:prstGeom prst="rect">
+            <a:avLst/>
+          </a:prstGeom>
+          <a:noFill/>
+          <a:ln/>
+        </p:spPr>
+        <p:txBody>
+          <a:bodyPr wrap="none" lIns="0" tIns="0" rIns="0" bIns="0" rtlCol="0" anchor="t"/>
+          <a:lstStyle/>
+          <a:p>
+            <a:pPr algn="l" indent="0" marL="0">
+              <a:lnSpc>
+                <a:spcPts val="800"/>
+              </a:lnSpc>
+              <a:buNone/>
+            </a:pPr>
+            <a:r>
+              <a:rPr lang="en-US" sz="640" spc="30" kern="0" dirty="0">
+                <a:solidFill>
+                  <a:srgbClr val="9C7442"/>
+                </a:solidFill>
+                <a:latin typeface="Inter Medium" pitchFamily="34" charset="0"/>
+                <a:ea typeface="Inter Medium" pitchFamily="34" charset="-122"/>
+                <a:cs typeface="Inter Medium" pitchFamily="34" charset="-120"/>
+              </a:rPr>
+              <a:t>06</a:t>
+            </a:r>
+            <a:endParaRPr lang="en-US" sz="640" dirty="0"/>
+          </a:p>
+        </p:txBody>
+      </p:sp>
+      <p:sp>
+        <p:nvSpPr>
+          <p:cNvPr id="56" name="Text 54"/>
+          <p:cNvSpPr/>
+          <p:nvPr/>
+        </p:nvSpPr>
+        <p:spPr>
+          <a:xfrm>
+            <a:off x="12514966" y="9109879"/>
+            <a:ext cx="605062" cy="101644"/>
+          </a:xfrm>
+          <a:prstGeom prst="rect">
+            <a:avLst/>
+          </a:prstGeom>
+          <a:noFill/>
+          <a:ln/>
+        </p:spPr>
+        <p:txBody>
+          <a:bodyPr wrap="none" lIns="0" tIns="0" rIns="0" bIns="0" rtlCol="0" anchor="t"/>
+          <a:lstStyle/>
+          <a:p>
+            <a:pPr algn="l" indent="0" marL="0">
+              <a:lnSpc>
+                <a:spcPts val="800"/>
+              </a:lnSpc>
+              <a:buNone/>
+            </a:pPr>
+            <a:r>
+              <a:rPr lang="en-US" sz="640" spc="30" kern="0" dirty="0">
+                <a:solidFill>
+                  <a:srgbClr val="121519"/>
+                </a:solidFill>
+                <a:latin typeface="Inter Medium" pitchFamily="34" charset="0"/>
+                <a:ea typeface="Inter Medium" pitchFamily="34" charset="-122"/>
+                <a:cs typeface="Inter Medium" pitchFamily="34" charset="-120"/>
+              </a:rPr>
+              <a:t>Value Chain</a:t>
+            </a:r>
+            <a:endParaRPr lang="en-US" sz="640" dirty="0"/>
+          </a:p>
+        </p:txBody>
+      </p:sp>
+      <p:sp>
+        <p:nvSpPr>
+          <p:cNvPr id="57" name="Text 55"/>
+          <p:cNvSpPr/>
+          <p:nvPr/>
+        </p:nvSpPr>
+        <p:spPr>
+          <a:xfrm>
+            <a:off x="14357271" y="9109879"/>
+            <a:ext cx="282301" cy="76233"/>
+          </a:xfrm>
+          <a:prstGeom prst="rect">
+            <a:avLst/>
+          </a:prstGeom>
+          <a:noFill/>
+          <a:ln/>
+        </p:spPr>
+        <p:txBody>
+          <a:bodyPr wrap="none" lIns="0" tIns="0" rIns="0" bIns="0" rtlCol="0" anchor="t"/>
+          <a:lstStyle/>
+          <a:p>
+            <a:pPr algn="l" indent="0" marL="0">
+              <a:lnSpc>
+                <a:spcPts val="600"/>
+              </a:lnSpc>
+              <a:buNone/>
+            </a:pPr>
+            <a:r>
+              <a:rPr lang="en-US" sz="540" spc="160" kern="0" dirty="0">
+                <a:solidFill>
+                  <a:srgbClr val="7D838A"/>
+                </a:solidFill>
+                <a:latin typeface="Inter Medium" pitchFamily="34" charset="0"/>
+                <a:ea typeface="Inter Medium" pitchFamily="34" charset="-122"/>
+                <a:cs typeface="Inter Medium" pitchFamily="34" charset="-120"/>
+              </a:rPr>
+              <a:t>P.10</a:t>
+            </a:r>
+            <a:endParaRPr lang="en-US" sz="540" dirty="0"/>
+          </a:p>
+        </p:txBody>
+      </p:sp>
+      <p:sp>
+        <p:nvSpPr>
+          <p:cNvPr id="58" name="Text 56"/>
+          <p:cNvSpPr/>
+          <p:nvPr/>
+        </p:nvSpPr>
+        <p:spPr>
+          <a:xfrm>
+            <a:off x="508222" y="10316906"/>
+            <a:ext cx="201502" cy="88939"/>
+          </a:xfrm>
+          <a:prstGeom prst="rect">
+            <a:avLst/>
+          </a:prstGeom>
+          <a:noFill/>
+          <a:ln/>
+        </p:spPr>
+        <p:txBody>
+          <a:bodyPr wrap="none" lIns="0" tIns="0" rIns="0" bIns="0" rtlCol="0" anchor="t"/>
+          <a:lstStyle/>
+          <a:p>
+            <a:pPr algn="l" indent="0" marL="0">
+              <a:lnSpc>
+                <a:spcPts val="700"/>
+              </a:lnSpc>
+              <a:buNone/>
+            </a:pPr>
+            <a:r>
+              <a:rPr lang="en-US" sz="600" spc="160" kern="0" dirty="0">
+                <a:solidFill>
+                  <a:srgbClr val="7D838A"/>
+                </a:solidFill>
+                <a:latin typeface="Inter Medium" pitchFamily="34" charset="0"/>
+                <a:ea typeface="Inter Medium" pitchFamily="34" charset="-122"/>
+                <a:cs typeface="Inter Medium" pitchFamily="34" charset="-120"/>
+              </a:rPr>
+              <a:t>02</a:t>
+            </a:r>
+            <a:endParaRPr lang="en-US" sz="600" dirty="0"/>
+          </a:p>
+        </p:txBody>
+      </p:sp>
+      <p:sp>
+        <p:nvSpPr>
+          <p:cNvPr id="59" name="Text 57"/>
+          <p:cNvSpPr/>
+          <p:nvPr/>
+        </p:nvSpPr>
+        <p:spPr>
+          <a:xfrm>
+            <a:off x="14458915" y="10316906"/>
+            <a:ext cx="202376" cy="88939"/>
+          </a:xfrm>
+          <a:prstGeom prst="rect">
+            <a:avLst/>
+          </a:prstGeom>
+          <a:noFill/>
+          <a:ln/>
+        </p:spPr>
+        <p:txBody>
+          <a:bodyPr wrap="none" lIns="0" tIns="0" rIns="0" bIns="0" rtlCol="0" anchor="t"/>
+          <a:lstStyle/>
+          <a:p>
+            <a:pPr algn="l" indent="0" marL="0">
+              <a:lnSpc>
+                <a:spcPts val="700"/>
+              </a:lnSpc>
+              <a:buNone/>
+            </a:pPr>
+            <a:r>
+              <a:rPr lang="en-US" sz="600" spc="160" kern="0" dirty="0">
+                <a:solidFill>
+                  <a:srgbClr val="7D838A"/>
+                </a:solidFill>
+                <a:latin typeface="Inter Medium" pitchFamily="34" charset="0"/>
+                <a:ea typeface="Inter Medium" pitchFamily="34" charset="-122"/>
+                <a:cs typeface="Inter Medium" pitchFamily="34" charset="-120"/>
+              </a:rPr>
+              <a:t>03</a:t>
+            </a:r>
+            <a:endParaRPr lang="en-US" sz="600" dirty="0"/>
+          </a:p>
+        </p:txBody>
+      </p:sp>
+      <p:sp>
+        <p:nvSpPr>
+          <p:cNvPr id="60" name="Text 58"/>
+          <p:cNvSpPr/>
+          <p:nvPr/>
+        </p:nvSpPr>
+        <p:spPr>
+          <a:xfrm>
+            <a:off x="876683" y="10328977"/>
+            <a:ext cx="6501450" cy="102915"/>
+          </a:xfrm>
+          <a:prstGeom prst="rect">
+            <a:avLst/>
+          </a:prstGeom>
+          <a:noFill/>
+          <a:ln/>
+        </p:spPr>
+        <p:txBody>
+          <a:bodyPr wrap="none" lIns="0" tIns="0" rIns="0" bIns="0" rtlCol="0" anchor="t"/>
+          <a:lstStyle/>
+          <a:p>
+            <a:pPr algn="l" indent="0" marL="0">
+              <a:lnSpc>
+                <a:spcPts val="810"/>
+              </a:lnSpc>
+              <a:buNone/>
+            </a:pPr>
+            <a:r>
+              <a:rPr lang="en-US" sz="540" dirty="0">
+                <a:solidFill>
+                  <a:srgbClr val="A3A8AE"/>
                 </a:solidFill>
                 <a:latin typeface="Noto Sans JP" pitchFamily="34" charset="0"/>
                 <a:ea typeface="Noto Sans JP" pitchFamily="34" charset="-122"/>
                 <a:cs typeface="Noto Sans JP" pitchFamily="34" charset="-120"/>
               </a:rPr>
-              <a:t>供給制約・地政学</a:t>
-            </a:r>
-            <a:endParaRPr lang="en-US" sz="560" dirty="0"/>
-          </a:p>
-        </p:txBody>
-      </p:sp>
-      <p:sp>
-        <p:nvSpPr>
-          <p:cNvPr id="32" name="Text 30"/>
-          <p:cNvSpPr/>
-          <p:nvPr/>
-        </p:nvSpPr>
-        <p:spPr>
-          <a:xfrm>
-            <a:off x="5730203" y="8716007"/>
-            <a:ext cx="323575" cy="101644"/>
-          </a:xfrm>
-          <a:prstGeom prst="rect">
-            <a:avLst/>
-          </a:prstGeom>
-          <a:noFill/>
-          <a:ln/>
-        </p:spPr>
-        <p:txBody>
-          <a:bodyPr wrap="none" lIns="0" tIns="0" rIns="0" bIns="0" rtlCol="0" anchor="t"/>
-          <a:lstStyle/>
-          <a:p>
-            <a:pPr algn="l" indent="0" marL="0">
-              <a:lnSpc>
-                <a:spcPts val="800"/>
-              </a:lnSpc>
-              <a:buNone/>
-            </a:pPr>
-            <a:r>
-              <a:rPr lang="en-US" sz="660" spc="190" kern="0" dirty="0">
-                <a:solidFill>
-                  <a:srgbClr val="9C7442"/>
-                </a:solidFill>
-                <a:latin typeface="Inter SemiBold" pitchFamily="34" charset="0"/>
-                <a:ea typeface="Inter SemiBold" pitchFamily="34" charset="-122"/>
-                <a:cs typeface="Inter SemiBold" pitchFamily="34" charset="-120"/>
-              </a:rPr>
-              <a:t>GAP</a:t>
-            </a:r>
-            <a:endParaRPr lang="en-US" sz="660" dirty="0"/>
-          </a:p>
-        </p:txBody>
-      </p:sp>
-      <p:sp>
-        <p:nvSpPr>
-          <p:cNvPr id="33" name="Text 31"/>
-          <p:cNvSpPr/>
-          <p:nvPr/>
-        </p:nvSpPr>
-        <p:spPr>
-          <a:xfrm>
-            <a:off x="4396120" y="9372630"/>
-            <a:ext cx="264395" cy="109776"/>
-          </a:xfrm>
-          <a:prstGeom prst="rect">
-            <a:avLst/>
-          </a:prstGeom>
-          <a:noFill/>
-          <a:ln/>
-        </p:spPr>
-        <p:txBody>
-          <a:bodyPr wrap="none" lIns="0" tIns="0" rIns="0" bIns="0" rtlCol="0" anchor="t"/>
-          <a:lstStyle/>
-          <a:p>
-            <a:pPr algn="l" indent="0" marL="0">
-              <a:lnSpc>
-                <a:spcPts val="864"/>
-              </a:lnSpc>
-              <a:buNone/>
-            </a:pPr>
-            <a:r>
-              <a:rPr lang="en-US" sz="540" dirty="0">
-                <a:solidFill>
-                  <a:srgbClr val="7D838A"/>
-                </a:solidFill>
-                <a:latin typeface="Noto Sans JP" pitchFamily="34" charset="0"/>
-                <a:ea typeface="Noto Sans JP" pitchFamily="34" charset="-122"/>
-                <a:cs typeface="Noto Sans JP" pitchFamily="34" charset="-120"/>
-              </a:rPr>
-              <a:t>Today</a:t>
+              <a:t>台割メモ｜動画01 OPENING。地球儀は使わず、暮らしと金属の写真を見開きで1枚のモザイクに（左＝暮らし、右＝それを支える金属）。キャッチコピー＋需要と供給のギャップを概念図で。</a:t>
             </a:r>
             <a:endParaRPr lang="en-US" sz="540" dirty="0"/>
           </a:p>
@@ -2684,1283 +3918,7 @@
       </p:sp>
       <p:sp>
         <p:nvSpPr>
-          <p:cNvPr id="34" name="Text 32"/>
-          <p:cNvSpPr/>
-          <p:nvPr/>
-        </p:nvSpPr>
-        <p:spPr>
-          <a:xfrm>
-            <a:off x="6543358" y="9372630"/>
-            <a:ext cx="280773" cy="109776"/>
-          </a:xfrm>
-          <a:prstGeom prst="rect">
-            <a:avLst/>
-          </a:prstGeom>
-          <a:noFill/>
-          <a:ln/>
-        </p:spPr>
-        <p:txBody>
-          <a:bodyPr wrap="none" lIns="0" tIns="0" rIns="0" bIns="0" rtlCol="0" anchor="t"/>
-          <a:lstStyle/>
-          <a:p>
-            <a:pPr algn="l" indent="0" marL="0">
-              <a:lnSpc>
-                <a:spcPts val="864"/>
-              </a:lnSpc>
-              <a:buNone/>
-            </a:pPr>
-            <a:r>
-              <a:rPr lang="en-US" sz="540" dirty="0">
-                <a:solidFill>
-                  <a:srgbClr val="7D838A"/>
-                </a:solidFill>
-                <a:latin typeface="Noto Sans JP" pitchFamily="34" charset="0"/>
-                <a:ea typeface="Noto Sans JP" pitchFamily="34" charset="-122"/>
-                <a:cs typeface="Noto Sans JP" pitchFamily="34" charset="-120"/>
-              </a:rPr>
-              <a:t>Future</a:t>
-            </a:r>
-            <a:endParaRPr lang="en-US" sz="540" dirty="0"/>
-          </a:p>
-        </p:txBody>
-      </p:sp>
-      <p:sp>
-        <p:nvSpPr>
-          <p:cNvPr id="35" name="Text 33"/>
-          <p:cNvSpPr/>
-          <p:nvPr/>
-        </p:nvSpPr>
-        <p:spPr>
-          <a:xfrm>
-            <a:off x="8068024" y="5565031"/>
-            <a:ext cx="1095318" cy="101644"/>
-          </a:xfrm>
-          <a:prstGeom prst="rect">
-            <a:avLst/>
-          </a:prstGeom>
-          <a:noFill/>
-          <a:ln/>
-        </p:spPr>
-        <p:txBody>
-          <a:bodyPr wrap="none" lIns="0" tIns="0" rIns="0" bIns="0" rtlCol="0" anchor="t"/>
-          <a:lstStyle/>
-          <a:p>
-            <a:pPr algn="l" indent="0" marL="0">
-              <a:lnSpc>
-                <a:spcPts val="800"/>
-              </a:lnSpc>
-              <a:buNone/>
-            </a:pPr>
-            <a:r>
-              <a:rPr lang="en-US" sz="660" spc="190" kern="0" dirty="0">
-                <a:solidFill>
-                  <a:srgbClr val="9C7442"/>
-                </a:solidFill>
-                <a:latin typeface="Inter SemiBold" pitchFamily="34" charset="0"/>
-                <a:ea typeface="Inter SemiBold" pitchFamily="34" charset="-122"/>
-                <a:cs typeface="Inter SemiBold" pitchFamily="34" charset="-120"/>
-              </a:rPr>
-              <a:t>CORE MESSAGE</a:t>
-            </a:r>
-            <a:endParaRPr lang="en-US" sz="660" dirty="0"/>
-          </a:p>
-        </p:txBody>
-      </p:sp>
-      <p:sp>
-        <p:nvSpPr>
-          <p:cNvPr id="36" name="Text 34"/>
-          <p:cNvSpPr/>
-          <p:nvPr/>
-        </p:nvSpPr>
-        <p:spPr>
-          <a:xfrm>
-            <a:off x="8068024" y="5704792"/>
-            <a:ext cx="748317" cy="127055"/>
-          </a:xfrm>
-          <a:prstGeom prst="rect">
-            <a:avLst/>
-          </a:prstGeom>
-          <a:noFill/>
-          <a:ln/>
-        </p:spPr>
-        <p:txBody>
-          <a:bodyPr wrap="none" lIns="0" tIns="0" rIns="0" bIns="0" rtlCol="0" anchor="t"/>
-          <a:lstStyle/>
-          <a:p>
-            <a:pPr algn="l" indent="0" marL="0">
-              <a:lnSpc>
-                <a:spcPts val="1000"/>
-              </a:lnSpc>
-              <a:buNone/>
-            </a:pPr>
-            <a:r>
-              <a:rPr lang="en-US" sz="660" spc="60" kern="0" dirty="0">
-                <a:solidFill>
-                  <a:srgbClr val="7D838A"/>
-                </a:solidFill>
-                <a:latin typeface="Noto Sans JP" pitchFamily="34" charset="0"/>
-                <a:ea typeface="Noto Sans JP" pitchFamily="34" charset="-122"/>
-                <a:cs typeface="Noto Sans JP" pitchFamily="34" charset="-120"/>
-              </a:rPr>
-              <a:t>コアメッセージ</a:t>
-            </a:r>
-            <a:endParaRPr lang="en-US" sz="660" dirty="0"/>
-          </a:p>
-        </p:txBody>
-      </p:sp>
-      <p:sp>
-        <p:nvSpPr>
-          <p:cNvPr id="37" name="Text 35"/>
-          <p:cNvSpPr/>
-          <p:nvPr/>
-        </p:nvSpPr>
-        <p:spPr>
-          <a:xfrm>
-            <a:off x="8068024" y="5964620"/>
-            <a:ext cx="4628652" cy="1120629"/>
-          </a:xfrm>
-          <a:prstGeom prst="rect">
-            <a:avLst/>
-          </a:prstGeom>
-          <a:noFill/>
-          <a:ln/>
-        </p:spPr>
-        <p:txBody>
-          <a:bodyPr wrap="none" lIns="0" tIns="0" rIns="0" bIns="0" rtlCol="0" anchor="t"/>
-          <a:lstStyle/>
-          <a:p>
-            <a:pPr algn="l" indent="0" marL="0">
-              <a:lnSpc>
-                <a:spcPts val="4410"/>
-              </a:lnSpc>
-              <a:buNone/>
-            </a:pPr>
-            <a:r>
-              <a:rPr lang="en-US" sz="4200" spc="-84" kern="0" dirty="0">
-                <a:solidFill>
-                  <a:srgbClr val="121519"/>
-                </a:solidFill>
-                <a:latin typeface="Inter Tight Light" pitchFamily="34" charset="0"/>
-                <a:ea typeface="Inter Tight Light" pitchFamily="34" charset="-122"/>
-                <a:cs typeface="Inter Tight Light" pitchFamily="34" charset="-120"/>
-              </a:rPr>
-              <a:t>Strength to Hold.</a:t>
-            </a:r>
-            <a:endParaRPr lang="en-US" sz="4200" dirty="0"/>
-          </a:p>
-          <a:p>
-            <a:pPr algn="l" indent="0" marL="0">
-              <a:lnSpc>
-                <a:spcPts val="4410"/>
-              </a:lnSpc>
-              <a:buNone/>
-            </a:pPr>
-            <a:r>
-              <a:rPr lang="en-US" sz="4200" spc="-84" kern="0" dirty="0">
-                <a:solidFill>
-                  <a:srgbClr val="121519"/>
-                </a:solidFill>
-                <a:latin typeface="Inter Tight Light" pitchFamily="34" charset="0"/>
-                <a:ea typeface="Inter Tight Light" pitchFamily="34" charset="-122"/>
-                <a:cs typeface="Inter Tight Light" pitchFamily="34" charset="-120"/>
-              </a:rPr>
-              <a:t>Power to Connect.</a:t>
-            </a:r>
-            <a:endParaRPr lang="en-US" sz="4200" dirty="0"/>
-          </a:p>
-        </p:txBody>
-      </p:sp>
-      <p:sp>
-        <p:nvSpPr>
-          <p:cNvPr id="38" name="Text 36"/>
-          <p:cNvSpPr/>
-          <p:nvPr/>
-        </p:nvSpPr>
-        <p:spPr>
-          <a:xfrm>
-            <a:off x="8068024" y="7188165"/>
-            <a:ext cx="1930390" cy="247758"/>
-          </a:xfrm>
-          <a:prstGeom prst="rect">
-            <a:avLst/>
-          </a:prstGeom>
-          <a:noFill/>
-          <a:ln/>
-        </p:spPr>
-        <p:txBody>
-          <a:bodyPr wrap="none" lIns="0" tIns="0" rIns="0" bIns="0" rtlCol="0" anchor="t"/>
-          <a:lstStyle/>
-          <a:p>
-            <a:pPr algn="l" indent="0" marL="0">
-              <a:lnSpc>
-                <a:spcPts val="1950"/>
-              </a:lnSpc>
-              <a:buNone/>
-            </a:pPr>
-            <a:r>
-              <a:rPr lang="en-US" sz="1300" spc="50" kern="0" dirty="0">
-                <a:solidFill>
-                  <a:srgbClr val="121519"/>
-                </a:solidFill>
-                <a:latin typeface="Noto Sans JP Medium" pitchFamily="34" charset="0"/>
-                <a:ea typeface="Noto Sans JP Medium" pitchFamily="34" charset="-122"/>
-                <a:cs typeface="Noto Sans JP Medium" pitchFamily="34" charset="-120"/>
-              </a:rPr>
-              <a:t>持つ力と、つなぐ力。</a:t>
-            </a:r>
-            <a:endParaRPr lang="en-US" sz="1300" dirty="0"/>
-          </a:p>
-        </p:txBody>
-      </p:sp>
-      <p:sp>
-        <p:nvSpPr>
-          <p:cNvPr id="39" name="Text 37"/>
-          <p:cNvSpPr/>
-          <p:nvPr/>
-        </p:nvSpPr>
-        <p:spPr>
-          <a:xfrm>
-            <a:off x="8068024" y="7488365"/>
-            <a:ext cx="4243654" cy="904953"/>
-          </a:xfrm>
-          <a:prstGeom prst="rect">
-            <a:avLst/>
-          </a:prstGeom>
-          <a:noFill/>
-          <a:ln/>
-        </p:spPr>
-        <p:txBody>
-          <a:bodyPr wrap="none" lIns="0" tIns="0" rIns="0" bIns="0" rtlCol="0" anchor="t"/>
-          <a:lstStyle/>
-          <a:p>
-            <a:pPr algn="l" indent="0" marL="0">
-              <a:lnSpc>
-                <a:spcPts val="1425"/>
-              </a:lnSpc>
-              <a:buNone/>
-            </a:pPr>
-            <a:r>
-              <a:rPr lang="en-US" sz="770" spc="20" kern="0" dirty="0">
-                <a:solidFill>
-                  <a:srgbClr val="3D4249"/>
-                </a:solidFill>
-                <a:latin typeface="Noto Sans JP" pitchFamily="34" charset="0"/>
-                <a:ea typeface="Noto Sans JP" pitchFamily="34" charset="-122"/>
-                <a:cs typeface="Noto Sans JP" pitchFamily="34" charset="-120"/>
-              </a:rPr>
-              <a:t>資源は、そこに「ある」だけでは、まだ価値ではありません。誰かが見出し、育て、</a:t>
-            </a:r>
-            <a:endParaRPr lang="en-US" sz="770" dirty="0"/>
-          </a:p>
-          <a:p>
-            <a:pPr algn="l" indent="0" marL="0">
-              <a:lnSpc>
-                <a:spcPts val="1425"/>
-              </a:lnSpc>
-              <a:buNone/>
-            </a:pPr>
-            <a:r>
-              <a:rPr lang="en-US" sz="770" spc="20" kern="0" dirty="0">
-                <a:solidFill>
-                  <a:srgbClr val="3D4249"/>
-                </a:solidFill>
-                <a:latin typeface="Noto Sans JP" pitchFamily="34" charset="0"/>
-                <a:ea typeface="Noto Sans JP" pitchFamily="34" charset="-122"/>
-                <a:cs typeface="Noto Sans JP" pitchFamily="34" charset="-120"/>
-              </a:rPr>
-              <a:t>必要とする場所へ届けて、はじめて力になる。私たちは、世界有数の資産に関わり、</a:t>
-            </a:r>
-            <a:endParaRPr lang="en-US" sz="770" dirty="0"/>
-          </a:p>
-          <a:p>
-            <a:pPr algn="l" indent="0" marL="0">
-              <a:lnSpc>
-                <a:spcPts val="1425"/>
-              </a:lnSpc>
-              <a:buNone/>
-            </a:pPr>
-            <a:r>
-              <a:rPr lang="en-US" sz="770" spc="20" kern="0" dirty="0">
-                <a:solidFill>
-                  <a:srgbClr val="3D4249"/>
-                </a:solidFill>
-                <a:latin typeface="Noto Sans JP" pitchFamily="34" charset="0"/>
-                <a:ea typeface="Noto Sans JP" pitchFamily="34" charset="-122"/>
-                <a:cs typeface="Noto Sans JP" pitchFamily="34" charset="-120"/>
-              </a:rPr>
-              <a:t>投資とトレーディングの両輪で川上から川下までをつなぎます。フェアな立場だから</a:t>
-            </a:r>
-            <a:endParaRPr lang="en-US" sz="770" dirty="0"/>
-          </a:p>
-          <a:p>
-            <a:pPr algn="l" indent="0" marL="0">
-              <a:lnSpc>
-                <a:spcPts val="1425"/>
-              </a:lnSpc>
-              <a:buNone/>
-            </a:pPr>
-            <a:r>
-              <a:rPr lang="en-US" sz="770" spc="20" kern="0" dirty="0">
-                <a:solidFill>
-                  <a:srgbClr val="3D4249"/>
-                </a:solidFill>
-                <a:latin typeface="Noto Sans JP" pitchFamily="34" charset="0"/>
-                <a:ea typeface="Noto Sans JP" pitchFamily="34" charset="-122"/>
-                <a:cs typeface="Noto Sans JP" pitchFamily="34" charset="-120"/>
-              </a:rPr>
-              <a:t>こそ、埋められる隙間がある。多様なパートナーと使い手の間に立ち、その時々の最</a:t>
-            </a:r>
-            <a:endParaRPr lang="en-US" sz="770" dirty="0"/>
-          </a:p>
-          <a:p>
-            <a:pPr algn="l" indent="0" marL="0">
-              <a:lnSpc>
-                <a:spcPts val="1425"/>
-              </a:lnSpc>
-              <a:buNone/>
-            </a:pPr>
-            <a:r>
-              <a:rPr lang="en-US" sz="770" spc="20" kern="0" dirty="0">
-                <a:solidFill>
-                  <a:srgbClr val="3D4249"/>
-                </a:solidFill>
-                <a:latin typeface="Noto Sans JP" pitchFamily="34" charset="0"/>
-                <a:ea typeface="Noto Sans JP" pitchFamily="34" charset="-122"/>
-                <a:cs typeface="Noto Sans JP" pitchFamily="34" charset="-120"/>
-              </a:rPr>
-              <a:t>適解を導く。世界に眠る価値を、社会の力へ。</a:t>
-            </a:r>
-            <a:endParaRPr lang="en-US" sz="770" dirty="0"/>
-          </a:p>
-        </p:txBody>
-      </p:sp>
-      <p:sp>
-        <p:nvSpPr>
-          <p:cNvPr id="40" name="Text 38"/>
-          <p:cNvSpPr/>
-          <p:nvPr/>
-        </p:nvSpPr>
-        <p:spPr>
-          <a:xfrm>
-            <a:off x="12260855" y="7496274"/>
-            <a:ext cx="779108" cy="101644"/>
-          </a:xfrm>
-          <a:prstGeom prst="rect">
-            <a:avLst/>
-          </a:prstGeom>
-          <a:noFill/>
-          <a:ln/>
-        </p:spPr>
-        <p:txBody>
-          <a:bodyPr wrap="none" lIns="0" tIns="0" rIns="0" bIns="0" rtlCol="0" anchor="t"/>
-          <a:lstStyle/>
-          <a:p>
-            <a:pPr algn="l" indent="0" marL="0">
-              <a:lnSpc>
-                <a:spcPts val="800"/>
-              </a:lnSpc>
-              <a:buNone/>
-            </a:pPr>
-            <a:r>
-              <a:rPr lang="en-US" sz="660" spc="190" kern="0" dirty="0">
-                <a:solidFill>
-                  <a:srgbClr val="9C7442"/>
-                </a:solidFill>
-                <a:latin typeface="Inter SemiBold" pitchFamily="34" charset="0"/>
-                <a:ea typeface="Inter SemiBold" pitchFamily="34" charset="-122"/>
-                <a:cs typeface="Inter SemiBold" pitchFamily="34" charset="-120"/>
-              </a:rPr>
-              <a:t>CONTENTS</a:t>
-            </a:r>
-            <a:endParaRPr lang="en-US" sz="660" dirty="0"/>
-          </a:p>
-        </p:txBody>
-      </p:sp>
-      <p:sp>
-        <p:nvSpPr>
-          <p:cNvPr id="41" name="Text 39"/>
-          <p:cNvSpPr/>
-          <p:nvPr/>
-        </p:nvSpPr>
-        <p:spPr>
-          <a:xfrm>
-            <a:off x="12260855" y="7775796"/>
-            <a:ext cx="154114" cy="101644"/>
-          </a:xfrm>
-          <a:prstGeom prst="rect">
-            <a:avLst/>
-          </a:prstGeom>
-          <a:noFill/>
-          <a:ln/>
-        </p:spPr>
-        <p:txBody>
-          <a:bodyPr wrap="none" lIns="0" tIns="0" rIns="0" bIns="0" rtlCol="0" anchor="t"/>
-          <a:lstStyle/>
-          <a:p>
-            <a:pPr algn="l" indent="0" marL="0">
-              <a:lnSpc>
-                <a:spcPts val="800"/>
-              </a:lnSpc>
-              <a:buNone/>
-            </a:pPr>
-            <a:r>
-              <a:rPr lang="en-US" sz="640" spc="30" kern="0" dirty="0">
-                <a:solidFill>
-                  <a:srgbClr val="9C7442"/>
-                </a:solidFill>
-                <a:latin typeface="Inter Medium" pitchFamily="34" charset="0"/>
-                <a:ea typeface="Inter Medium" pitchFamily="34" charset="-122"/>
-                <a:cs typeface="Inter Medium" pitchFamily="34" charset="-120"/>
-              </a:rPr>
-              <a:t>01</a:t>
-            </a:r>
-            <a:endParaRPr lang="en-US" sz="640" dirty="0"/>
-          </a:p>
-        </p:txBody>
-      </p:sp>
-      <p:sp>
-        <p:nvSpPr>
-          <p:cNvPr id="42" name="Text 40"/>
-          <p:cNvSpPr/>
-          <p:nvPr/>
-        </p:nvSpPr>
-        <p:spPr>
-          <a:xfrm>
-            <a:off x="12514966" y="7775796"/>
-            <a:ext cx="623842" cy="101644"/>
-          </a:xfrm>
-          <a:prstGeom prst="rect">
-            <a:avLst/>
-          </a:prstGeom>
-          <a:noFill/>
-          <a:ln/>
-        </p:spPr>
-        <p:txBody>
-          <a:bodyPr wrap="none" lIns="0" tIns="0" rIns="0" bIns="0" rtlCol="0" anchor="t"/>
-          <a:lstStyle/>
-          <a:p>
-            <a:pPr algn="l" indent="0" marL="0">
-              <a:lnSpc>
-                <a:spcPts val="800"/>
-              </a:lnSpc>
-              <a:buNone/>
-            </a:pPr>
-            <a:r>
-              <a:rPr lang="en-US" sz="640" spc="30" kern="0" dirty="0">
-                <a:solidFill>
-                  <a:srgbClr val="121519"/>
-                </a:solidFill>
-                <a:latin typeface="Inter Medium" pitchFamily="34" charset="0"/>
-                <a:ea typeface="Inter Medium" pitchFamily="34" charset="-122"/>
-                <a:cs typeface="Inter Medium" pitchFamily="34" charset="-120"/>
-              </a:rPr>
-              <a:t>Who We Are</a:t>
-            </a:r>
-            <a:endParaRPr lang="en-US" sz="640" dirty="0"/>
-          </a:p>
-        </p:txBody>
-      </p:sp>
-      <p:sp>
-        <p:nvSpPr>
-          <p:cNvPr id="43" name="Text 41"/>
-          <p:cNvSpPr/>
-          <p:nvPr/>
-        </p:nvSpPr>
-        <p:spPr>
-          <a:xfrm>
-            <a:off x="14357271" y="7775796"/>
-            <a:ext cx="305013" cy="76233"/>
-          </a:xfrm>
-          <a:prstGeom prst="rect">
-            <a:avLst/>
-          </a:prstGeom>
-          <a:noFill/>
-          <a:ln/>
-        </p:spPr>
-        <p:txBody>
-          <a:bodyPr wrap="none" lIns="0" tIns="0" rIns="0" bIns="0" rtlCol="0" anchor="t"/>
-          <a:lstStyle/>
-          <a:p>
-            <a:pPr algn="l" indent="0" marL="0">
-              <a:lnSpc>
-                <a:spcPts val="600"/>
-              </a:lnSpc>
-              <a:buNone/>
-            </a:pPr>
-            <a:r>
-              <a:rPr lang="en-US" sz="540" spc="160" kern="0" dirty="0">
-                <a:solidFill>
-                  <a:srgbClr val="7D838A"/>
-                </a:solidFill>
-                <a:latin typeface="Inter Medium" pitchFamily="34" charset="0"/>
-                <a:ea typeface="Inter Medium" pitchFamily="34" charset="-122"/>
-                <a:cs typeface="Inter Medium" pitchFamily="34" charset="-120"/>
-              </a:rPr>
-              <a:t>P.04</a:t>
-            </a:r>
-            <a:endParaRPr lang="en-US" sz="540" dirty="0"/>
-          </a:p>
-        </p:txBody>
-      </p:sp>
-      <p:sp>
-        <p:nvSpPr>
-          <p:cNvPr id="44" name="Text 42"/>
-          <p:cNvSpPr/>
-          <p:nvPr/>
-        </p:nvSpPr>
-        <p:spPr>
-          <a:xfrm>
-            <a:off x="12260855" y="8042613"/>
-            <a:ext cx="172021" cy="101644"/>
-          </a:xfrm>
-          <a:prstGeom prst="rect">
-            <a:avLst/>
-          </a:prstGeom>
-          <a:noFill/>
-          <a:ln/>
-        </p:spPr>
-        <p:txBody>
-          <a:bodyPr wrap="none" lIns="0" tIns="0" rIns="0" bIns="0" rtlCol="0" anchor="t"/>
-          <a:lstStyle/>
-          <a:p>
-            <a:pPr algn="l" indent="0" marL="0">
-              <a:lnSpc>
-                <a:spcPts val="800"/>
-              </a:lnSpc>
-              <a:buNone/>
-            </a:pPr>
-            <a:r>
-              <a:rPr lang="en-US" sz="640" spc="30" kern="0" dirty="0">
-                <a:solidFill>
-                  <a:srgbClr val="9C7442"/>
-                </a:solidFill>
-                <a:latin typeface="Inter Medium" pitchFamily="34" charset="0"/>
-                <a:ea typeface="Inter Medium" pitchFamily="34" charset="-122"/>
-                <a:cs typeface="Inter Medium" pitchFamily="34" charset="-120"/>
-              </a:rPr>
-              <a:t>02</a:t>
-            </a:r>
-            <a:endParaRPr lang="en-US" sz="640" dirty="0"/>
-          </a:p>
-        </p:txBody>
-      </p:sp>
-      <p:sp>
-        <p:nvSpPr>
-          <p:cNvPr id="45" name="Text 43"/>
-          <p:cNvSpPr/>
-          <p:nvPr/>
-        </p:nvSpPr>
-        <p:spPr>
-          <a:xfrm>
-            <a:off x="12514966" y="8042613"/>
-            <a:ext cx="700711" cy="101644"/>
-          </a:xfrm>
-          <a:prstGeom prst="rect">
-            <a:avLst/>
-          </a:prstGeom>
-          <a:noFill/>
-          <a:ln/>
-        </p:spPr>
-        <p:txBody>
-          <a:bodyPr wrap="none" lIns="0" tIns="0" rIns="0" bIns="0" rtlCol="0" anchor="t"/>
-          <a:lstStyle/>
-          <a:p>
-            <a:pPr algn="l" indent="0" marL="0">
-              <a:lnSpc>
-                <a:spcPts val="800"/>
-              </a:lnSpc>
-              <a:buNone/>
-            </a:pPr>
-            <a:r>
-              <a:rPr lang="en-US" sz="640" spc="30" kern="0" dirty="0">
-                <a:solidFill>
-                  <a:srgbClr val="121519"/>
-                </a:solidFill>
-                <a:latin typeface="Inter Medium" pitchFamily="34" charset="0"/>
-                <a:ea typeface="Inter Medium" pitchFamily="34" charset="-122"/>
-                <a:cs typeface="Inter Medium" pitchFamily="34" charset="-120"/>
-              </a:rPr>
-              <a:t>Our Strengths</a:t>
-            </a:r>
-            <a:endParaRPr lang="en-US" sz="640" dirty="0"/>
-          </a:p>
-        </p:txBody>
-      </p:sp>
-      <p:sp>
-        <p:nvSpPr>
-          <p:cNvPr id="46" name="Text 44"/>
-          <p:cNvSpPr/>
-          <p:nvPr/>
-        </p:nvSpPr>
-        <p:spPr>
-          <a:xfrm>
-            <a:off x="14357271" y="8042613"/>
-            <a:ext cx="301082" cy="76233"/>
-          </a:xfrm>
-          <a:prstGeom prst="rect">
-            <a:avLst/>
-          </a:prstGeom>
-          <a:noFill/>
-          <a:ln/>
-        </p:spPr>
-        <p:txBody>
-          <a:bodyPr wrap="none" lIns="0" tIns="0" rIns="0" bIns="0" rtlCol="0" anchor="t"/>
-          <a:lstStyle/>
-          <a:p>
-            <a:pPr algn="l" indent="0" marL="0">
-              <a:lnSpc>
-                <a:spcPts val="600"/>
-              </a:lnSpc>
-              <a:buNone/>
-            </a:pPr>
-            <a:r>
-              <a:rPr lang="en-US" sz="540" spc="160" kern="0" dirty="0">
-                <a:solidFill>
-                  <a:srgbClr val="7D838A"/>
-                </a:solidFill>
-                <a:latin typeface="Inter Medium" pitchFamily="34" charset="0"/>
-                <a:ea typeface="Inter Medium" pitchFamily="34" charset="-122"/>
-                <a:cs typeface="Inter Medium" pitchFamily="34" charset="-120"/>
-              </a:rPr>
-              <a:t>P.05</a:t>
-            </a:r>
-            <a:endParaRPr lang="en-US" sz="540" dirty="0"/>
-          </a:p>
-        </p:txBody>
-      </p:sp>
-      <p:sp>
-        <p:nvSpPr>
-          <p:cNvPr id="47" name="Text 45"/>
-          <p:cNvSpPr/>
-          <p:nvPr/>
-        </p:nvSpPr>
-        <p:spPr>
-          <a:xfrm>
-            <a:off x="12260855" y="8309429"/>
-            <a:ext cx="172895" cy="101644"/>
-          </a:xfrm>
-          <a:prstGeom prst="rect">
-            <a:avLst/>
-          </a:prstGeom>
-          <a:noFill/>
-          <a:ln/>
-        </p:spPr>
-        <p:txBody>
-          <a:bodyPr wrap="none" lIns="0" tIns="0" rIns="0" bIns="0" rtlCol="0" anchor="t"/>
-          <a:lstStyle/>
-          <a:p>
-            <a:pPr algn="l" indent="0" marL="0">
-              <a:lnSpc>
-                <a:spcPts val="800"/>
-              </a:lnSpc>
-              <a:buNone/>
-            </a:pPr>
-            <a:r>
-              <a:rPr lang="en-US" sz="640" spc="30" kern="0" dirty="0">
-                <a:solidFill>
-                  <a:srgbClr val="9C7442"/>
-                </a:solidFill>
-                <a:latin typeface="Inter Medium" pitchFamily="34" charset="0"/>
-                <a:ea typeface="Inter Medium" pitchFamily="34" charset="-122"/>
-                <a:cs typeface="Inter Medium" pitchFamily="34" charset="-120"/>
-              </a:rPr>
-              <a:t>03</a:t>
-            </a:r>
-            <a:endParaRPr lang="en-US" sz="640" dirty="0"/>
-          </a:p>
-        </p:txBody>
-      </p:sp>
-      <p:sp>
-        <p:nvSpPr>
-          <p:cNvPr id="48" name="Text 46"/>
-          <p:cNvSpPr/>
-          <p:nvPr/>
-        </p:nvSpPr>
-        <p:spPr>
-          <a:xfrm>
-            <a:off x="12514966" y="8309429"/>
-            <a:ext cx="721894" cy="101644"/>
-          </a:xfrm>
-          <a:prstGeom prst="rect">
-            <a:avLst/>
-          </a:prstGeom>
-          <a:noFill/>
-          <a:ln/>
-        </p:spPr>
-        <p:txBody>
-          <a:bodyPr wrap="none" lIns="0" tIns="0" rIns="0" bIns="0" rtlCol="0" anchor="t"/>
-          <a:lstStyle/>
-          <a:p>
-            <a:pPr algn="l" indent="0" marL="0">
-              <a:lnSpc>
-                <a:spcPts val="800"/>
-              </a:lnSpc>
-              <a:buNone/>
-            </a:pPr>
-            <a:r>
-              <a:rPr lang="en-US" sz="640" spc="30" kern="0" dirty="0">
-                <a:solidFill>
-                  <a:srgbClr val="121519"/>
-                </a:solidFill>
-                <a:latin typeface="Inter Medium" pitchFamily="34" charset="0"/>
-                <a:ea typeface="Inter Medium" pitchFamily="34" charset="-122"/>
-                <a:cs typeface="Inter Medium" pitchFamily="34" charset="-120"/>
-              </a:rPr>
-              <a:t>Coal &amp; Copper</a:t>
-            </a:r>
-            <a:endParaRPr lang="en-US" sz="640" dirty="0"/>
-          </a:p>
-        </p:txBody>
-      </p:sp>
-      <p:sp>
-        <p:nvSpPr>
-          <p:cNvPr id="49" name="Text 47"/>
-          <p:cNvSpPr/>
-          <p:nvPr/>
-        </p:nvSpPr>
-        <p:spPr>
-          <a:xfrm>
-            <a:off x="14357271" y="8309429"/>
-            <a:ext cx="303047" cy="76233"/>
-          </a:xfrm>
-          <a:prstGeom prst="rect">
-            <a:avLst/>
-          </a:prstGeom>
-          <a:noFill/>
-          <a:ln/>
-        </p:spPr>
-        <p:txBody>
-          <a:bodyPr wrap="none" lIns="0" tIns="0" rIns="0" bIns="0" rtlCol="0" anchor="t"/>
-          <a:lstStyle/>
-          <a:p>
-            <a:pPr algn="l" indent="0" marL="0">
-              <a:lnSpc>
-                <a:spcPts val="600"/>
-              </a:lnSpc>
-              <a:buNone/>
-            </a:pPr>
-            <a:r>
-              <a:rPr lang="en-US" sz="540" spc="160" kern="0" dirty="0">
-                <a:solidFill>
-                  <a:srgbClr val="7D838A"/>
-                </a:solidFill>
-                <a:latin typeface="Inter Medium" pitchFamily="34" charset="0"/>
-                <a:ea typeface="Inter Medium" pitchFamily="34" charset="-122"/>
-                <a:cs typeface="Inter Medium" pitchFamily="34" charset="-120"/>
-              </a:rPr>
-              <a:t>P.06</a:t>
-            </a:r>
-            <a:endParaRPr lang="en-US" sz="540" dirty="0"/>
-          </a:p>
-        </p:txBody>
-      </p:sp>
-      <p:sp>
-        <p:nvSpPr>
-          <p:cNvPr id="50" name="Text 48"/>
-          <p:cNvSpPr/>
-          <p:nvPr/>
-        </p:nvSpPr>
-        <p:spPr>
-          <a:xfrm>
-            <a:off x="12260855" y="8576246"/>
-            <a:ext cx="175515" cy="101644"/>
-          </a:xfrm>
-          <a:prstGeom prst="rect">
-            <a:avLst/>
-          </a:prstGeom>
-          <a:noFill/>
-          <a:ln/>
-        </p:spPr>
-        <p:txBody>
-          <a:bodyPr wrap="none" lIns="0" tIns="0" rIns="0" bIns="0" rtlCol="0" anchor="t"/>
-          <a:lstStyle/>
-          <a:p>
-            <a:pPr algn="l" indent="0" marL="0">
-              <a:lnSpc>
-                <a:spcPts val="800"/>
-              </a:lnSpc>
-              <a:buNone/>
-            </a:pPr>
-            <a:r>
-              <a:rPr lang="en-US" sz="640" spc="30" kern="0" dirty="0">
-                <a:solidFill>
-                  <a:srgbClr val="9C7442"/>
-                </a:solidFill>
-                <a:latin typeface="Inter Medium" pitchFamily="34" charset="0"/>
-                <a:ea typeface="Inter Medium" pitchFamily="34" charset="-122"/>
-                <a:cs typeface="Inter Medium" pitchFamily="34" charset="-120"/>
-              </a:rPr>
-              <a:t>04</a:t>
-            </a:r>
-            <a:endParaRPr lang="en-US" sz="640" dirty="0"/>
-          </a:p>
-        </p:txBody>
-      </p:sp>
-      <p:sp>
-        <p:nvSpPr>
-          <p:cNvPr id="51" name="Text 49"/>
-          <p:cNvSpPr/>
-          <p:nvPr/>
-        </p:nvSpPr>
-        <p:spPr>
-          <a:xfrm>
-            <a:off x="12514966" y="8576246"/>
-            <a:ext cx="945293" cy="101644"/>
-          </a:xfrm>
-          <a:prstGeom prst="rect">
-            <a:avLst/>
-          </a:prstGeom>
-          <a:noFill/>
-          <a:ln/>
-        </p:spPr>
-        <p:txBody>
-          <a:bodyPr wrap="none" lIns="0" tIns="0" rIns="0" bIns="0" rtlCol="0" anchor="t"/>
-          <a:lstStyle/>
-          <a:p>
-            <a:pPr algn="l" indent="0" marL="0">
-              <a:lnSpc>
-                <a:spcPts val="800"/>
-              </a:lnSpc>
-              <a:buNone/>
-            </a:pPr>
-            <a:r>
-              <a:rPr lang="en-US" sz="640" spc="30" kern="0" dirty="0">
-                <a:solidFill>
-                  <a:srgbClr val="121519"/>
-                </a:solidFill>
-                <a:latin typeface="Inter Medium" pitchFamily="34" charset="0"/>
-                <a:ea typeface="Inter Medium" pitchFamily="34" charset="-122"/>
-                <a:cs typeface="Inter Medium" pitchFamily="34" charset="-120"/>
-              </a:rPr>
-              <a:t>Resources to Value</a:t>
-            </a:r>
-            <a:endParaRPr lang="en-US" sz="640" dirty="0"/>
-          </a:p>
-        </p:txBody>
-      </p:sp>
-      <p:sp>
-        <p:nvSpPr>
-          <p:cNvPr id="52" name="Text 50"/>
-          <p:cNvSpPr/>
-          <p:nvPr/>
-        </p:nvSpPr>
-        <p:spPr>
-          <a:xfrm>
-            <a:off x="14357271" y="8576246"/>
-            <a:ext cx="303047" cy="76233"/>
-          </a:xfrm>
-          <a:prstGeom prst="rect">
-            <a:avLst/>
-          </a:prstGeom>
-          <a:noFill/>
-          <a:ln/>
-        </p:spPr>
-        <p:txBody>
-          <a:bodyPr wrap="none" lIns="0" tIns="0" rIns="0" bIns="0" rtlCol="0" anchor="t"/>
-          <a:lstStyle/>
-          <a:p>
-            <a:pPr algn="l" indent="0" marL="0">
-              <a:lnSpc>
-                <a:spcPts val="600"/>
-              </a:lnSpc>
-              <a:buNone/>
-            </a:pPr>
-            <a:r>
-              <a:rPr lang="en-US" sz="540" spc="160" kern="0" dirty="0">
-                <a:solidFill>
-                  <a:srgbClr val="7D838A"/>
-                </a:solidFill>
-                <a:latin typeface="Inter Medium" pitchFamily="34" charset="0"/>
-                <a:ea typeface="Inter Medium" pitchFamily="34" charset="-122"/>
-                <a:cs typeface="Inter Medium" pitchFamily="34" charset="-120"/>
-              </a:rPr>
-              <a:t>P.08</a:t>
-            </a:r>
-            <a:endParaRPr lang="en-US" sz="540" dirty="0"/>
-          </a:p>
-        </p:txBody>
-      </p:sp>
-      <p:sp>
-        <p:nvSpPr>
-          <p:cNvPr id="53" name="Text 51"/>
-          <p:cNvSpPr/>
-          <p:nvPr/>
-        </p:nvSpPr>
-        <p:spPr>
-          <a:xfrm>
-            <a:off x="12260855" y="8843063"/>
-            <a:ext cx="170929" cy="101644"/>
-          </a:xfrm>
-          <a:prstGeom prst="rect">
-            <a:avLst/>
-          </a:prstGeom>
-          <a:noFill/>
-          <a:ln/>
-        </p:spPr>
-        <p:txBody>
-          <a:bodyPr wrap="none" lIns="0" tIns="0" rIns="0" bIns="0" rtlCol="0" anchor="t"/>
-          <a:lstStyle/>
-          <a:p>
-            <a:pPr algn="l" indent="0" marL="0">
-              <a:lnSpc>
-                <a:spcPts val="800"/>
-              </a:lnSpc>
-              <a:buNone/>
-            </a:pPr>
-            <a:r>
-              <a:rPr lang="en-US" sz="640" spc="30" kern="0" dirty="0">
-                <a:solidFill>
-                  <a:srgbClr val="9C7442"/>
-                </a:solidFill>
-                <a:latin typeface="Inter Medium" pitchFamily="34" charset="0"/>
-                <a:ea typeface="Inter Medium" pitchFamily="34" charset="-122"/>
-                <a:cs typeface="Inter Medium" pitchFamily="34" charset="-120"/>
-              </a:rPr>
-              <a:t>05</a:t>
-            </a:r>
-            <a:endParaRPr lang="en-US" sz="640" dirty="0"/>
-          </a:p>
-        </p:txBody>
-      </p:sp>
-      <p:sp>
-        <p:nvSpPr>
-          <p:cNvPr id="54" name="Text 52"/>
-          <p:cNvSpPr/>
-          <p:nvPr/>
-        </p:nvSpPr>
-        <p:spPr>
-          <a:xfrm>
-            <a:off x="12514966" y="8843063"/>
-            <a:ext cx="643715" cy="101644"/>
-          </a:xfrm>
-          <a:prstGeom prst="rect">
-            <a:avLst/>
-          </a:prstGeom>
-          <a:noFill/>
-          <a:ln/>
-        </p:spPr>
-        <p:txBody>
-          <a:bodyPr wrap="none" lIns="0" tIns="0" rIns="0" bIns="0" rtlCol="0" anchor="t"/>
-          <a:lstStyle/>
-          <a:p>
-            <a:pPr algn="l" indent="0" marL="0">
-              <a:lnSpc>
-                <a:spcPts val="800"/>
-              </a:lnSpc>
-              <a:buNone/>
-            </a:pPr>
-            <a:r>
-              <a:rPr lang="en-US" sz="640" spc="30" kern="0" dirty="0">
-                <a:solidFill>
-                  <a:srgbClr val="121519"/>
-                </a:solidFill>
-                <a:latin typeface="Inter Medium" pitchFamily="34" charset="0"/>
-                <a:ea typeface="Inter Medium" pitchFamily="34" charset="-122"/>
-                <a:cs typeface="Inter Medium" pitchFamily="34" charset="-120"/>
-              </a:rPr>
-              <a:t>Partnerships</a:t>
-            </a:r>
-            <a:endParaRPr lang="en-US" sz="640" dirty="0"/>
-          </a:p>
-        </p:txBody>
-      </p:sp>
-      <p:sp>
-        <p:nvSpPr>
-          <p:cNvPr id="55" name="Text 53"/>
-          <p:cNvSpPr/>
-          <p:nvPr/>
-        </p:nvSpPr>
-        <p:spPr>
-          <a:xfrm>
-            <a:off x="14357271" y="8843063"/>
-            <a:ext cx="303047" cy="76233"/>
-          </a:xfrm>
-          <a:prstGeom prst="rect">
-            <a:avLst/>
-          </a:prstGeom>
-          <a:noFill/>
-          <a:ln/>
-        </p:spPr>
-        <p:txBody>
-          <a:bodyPr wrap="none" lIns="0" tIns="0" rIns="0" bIns="0" rtlCol="0" anchor="t"/>
-          <a:lstStyle/>
-          <a:p>
-            <a:pPr algn="l" indent="0" marL="0">
-              <a:lnSpc>
-                <a:spcPts val="600"/>
-              </a:lnSpc>
-              <a:buNone/>
-            </a:pPr>
-            <a:r>
-              <a:rPr lang="en-US" sz="540" spc="160" kern="0" dirty="0">
-                <a:solidFill>
-                  <a:srgbClr val="7D838A"/>
-                </a:solidFill>
-                <a:latin typeface="Inter Medium" pitchFamily="34" charset="0"/>
-                <a:ea typeface="Inter Medium" pitchFamily="34" charset="-122"/>
-                <a:cs typeface="Inter Medium" pitchFamily="34" charset="-120"/>
-              </a:rPr>
-              <a:t>P.09</a:t>
-            </a:r>
-            <a:endParaRPr lang="en-US" sz="540" dirty="0"/>
-          </a:p>
-        </p:txBody>
-      </p:sp>
-      <p:sp>
-        <p:nvSpPr>
-          <p:cNvPr id="56" name="Text 54"/>
-          <p:cNvSpPr/>
-          <p:nvPr/>
-        </p:nvSpPr>
-        <p:spPr>
-          <a:xfrm>
-            <a:off x="12260855" y="9109879"/>
-            <a:ext cx="173331" cy="101644"/>
-          </a:xfrm>
-          <a:prstGeom prst="rect">
-            <a:avLst/>
-          </a:prstGeom>
-          <a:noFill/>
-          <a:ln/>
-        </p:spPr>
-        <p:txBody>
-          <a:bodyPr wrap="none" lIns="0" tIns="0" rIns="0" bIns="0" rtlCol="0" anchor="t"/>
-          <a:lstStyle/>
-          <a:p>
-            <a:pPr algn="l" indent="0" marL="0">
-              <a:lnSpc>
-                <a:spcPts val="800"/>
-              </a:lnSpc>
-              <a:buNone/>
-            </a:pPr>
-            <a:r>
-              <a:rPr lang="en-US" sz="640" spc="30" kern="0" dirty="0">
-                <a:solidFill>
-                  <a:srgbClr val="9C7442"/>
-                </a:solidFill>
-                <a:latin typeface="Inter Medium" pitchFamily="34" charset="0"/>
-                <a:ea typeface="Inter Medium" pitchFamily="34" charset="-122"/>
-                <a:cs typeface="Inter Medium" pitchFamily="34" charset="-120"/>
-              </a:rPr>
-              <a:t>06</a:t>
-            </a:r>
-            <a:endParaRPr lang="en-US" sz="640" dirty="0"/>
-          </a:p>
-        </p:txBody>
-      </p:sp>
-      <p:sp>
-        <p:nvSpPr>
-          <p:cNvPr id="57" name="Text 55"/>
-          <p:cNvSpPr/>
-          <p:nvPr/>
-        </p:nvSpPr>
-        <p:spPr>
-          <a:xfrm>
-            <a:off x="12514966" y="9109879"/>
-            <a:ext cx="605062" cy="101644"/>
-          </a:xfrm>
-          <a:prstGeom prst="rect">
-            <a:avLst/>
-          </a:prstGeom>
-          <a:noFill/>
-          <a:ln/>
-        </p:spPr>
-        <p:txBody>
-          <a:bodyPr wrap="none" lIns="0" tIns="0" rIns="0" bIns="0" rtlCol="0" anchor="t"/>
-          <a:lstStyle/>
-          <a:p>
-            <a:pPr algn="l" indent="0" marL="0">
-              <a:lnSpc>
-                <a:spcPts val="800"/>
-              </a:lnSpc>
-              <a:buNone/>
-            </a:pPr>
-            <a:r>
-              <a:rPr lang="en-US" sz="640" spc="30" kern="0" dirty="0">
-                <a:solidFill>
-                  <a:srgbClr val="121519"/>
-                </a:solidFill>
-                <a:latin typeface="Inter Medium" pitchFamily="34" charset="0"/>
-                <a:ea typeface="Inter Medium" pitchFamily="34" charset="-122"/>
-                <a:cs typeface="Inter Medium" pitchFamily="34" charset="-120"/>
-              </a:rPr>
-              <a:t>Value Chain</a:t>
-            </a:r>
-            <a:endParaRPr lang="en-US" sz="640" dirty="0"/>
-          </a:p>
-        </p:txBody>
-      </p:sp>
-      <p:sp>
-        <p:nvSpPr>
-          <p:cNvPr id="58" name="Text 56"/>
-          <p:cNvSpPr/>
-          <p:nvPr/>
-        </p:nvSpPr>
-        <p:spPr>
-          <a:xfrm>
-            <a:off x="14357271" y="9109879"/>
-            <a:ext cx="282301" cy="76233"/>
-          </a:xfrm>
-          <a:prstGeom prst="rect">
-            <a:avLst/>
-          </a:prstGeom>
-          <a:noFill/>
-          <a:ln/>
-        </p:spPr>
-        <p:txBody>
-          <a:bodyPr wrap="none" lIns="0" tIns="0" rIns="0" bIns="0" rtlCol="0" anchor="t"/>
-          <a:lstStyle/>
-          <a:p>
-            <a:pPr algn="l" indent="0" marL="0">
-              <a:lnSpc>
-                <a:spcPts val="600"/>
-              </a:lnSpc>
-              <a:buNone/>
-            </a:pPr>
-            <a:r>
-              <a:rPr lang="en-US" sz="540" spc="160" kern="0" dirty="0">
-                <a:solidFill>
-                  <a:srgbClr val="7D838A"/>
-                </a:solidFill>
-                <a:latin typeface="Inter Medium" pitchFamily="34" charset="0"/>
-                <a:ea typeface="Inter Medium" pitchFamily="34" charset="-122"/>
-                <a:cs typeface="Inter Medium" pitchFamily="34" charset="-120"/>
-              </a:rPr>
-              <a:t>P.10</a:t>
-            </a:r>
-            <a:endParaRPr lang="en-US" sz="540" dirty="0"/>
-          </a:p>
-        </p:txBody>
-      </p:sp>
-      <p:sp>
-        <p:nvSpPr>
-          <p:cNvPr id="59" name="Text 57"/>
-          <p:cNvSpPr/>
-          <p:nvPr/>
-        </p:nvSpPr>
-        <p:spPr>
-          <a:xfrm>
-            <a:off x="508222" y="10316906"/>
-            <a:ext cx="201502" cy="88939"/>
-          </a:xfrm>
-          <a:prstGeom prst="rect">
-            <a:avLst/>
-          </a:prstGeom>
-          <a:noFill/>
-          <a:ln/>
-        </p:spPr>
-        <p:txBody>
-          <a:bodyPr wrap="none" lIns="0" tIns="0" rIns="0" bIns="0" rtlCol="0" anchor="t"/>
-          <a:lstStyle/>
-          <a:p>
-            <a:pPr algn="l" indent="0" marL="0">
-              <a:lnSpc>
-                <a:spcPts val="700"/>
-              </a:lnSpc>
-              <a:buNone/>
-            </a:pPr>
-            <a:r>
-              <a:rPr lang="en-US" sz="600" spc="160" kern="0" dirty="0">
-                <a:solidFill>
-                  <a:srgbClr val="7D838A"/>
-                </a:solidFill>
-                <a:latin typeface="Inter Medium" pitchFamily="34" charset="0"/>
-                <a:ea typeface="Inter Medium" pitchFamily="34" charset="-122"/>
-                <a:cs typeface="Inter Medium" pitchFamily="34" charset="-120"/>
-              </a:rPr>
-              <a:t>02</a:t>
-            </a:r>
-            <a:endParaRPr lang="en-US" sz="600" dirty="0"/>
-          </a:p>
-        </p:txBody>
-      </p:sp>
-      <p:sp>
-        <p:nvSpPr>
-          <p:cNvPr id="60" name="Text 58"/>
-          <p:cNvSpPr/>
-          <p:nvPr/>
-        </p:nvSpPr>
-        <p:spPr>
-          <a:xfrm>
-            <a:off x="14458915" y="10316906"/>
-            <a:ext cx="202376" cy="88939"/>
-          </a:xfrm>
-          <a:prstGeom prst="rect">
-            <a:avLst/>
-          </a:prstGeom>
-          <a:noFill/>
-          <a:ln/>
-        </p:spPr>
-        <p:txBody>
-          <a:bodyPr wrap="none" lIns="0" tIns="0" rIns="0" bIns="0" rtlCol="0" anchor="t"/>
-          <a:lstStyle/>
-          <a:p>
-            <a:pPr algn="l" indent="0" marL="0">
-              <a:lnSpc>
-                <a:spcPts val="700"/>
-              </a:lnSpc>
-              <a:buNone/>
-            </a:pPr>
-            <a:r>
-              <a:rPr lang="en-US" sz="600" spc="160" kern="0" dirty="0">
-                <a:solidFill>
-                  <a:srgbClr val="7D838A"/>
-                </a:solidFill>
-                <a:latin typeface="Inter Medium" pitchFamily="34" charset="0"/>
-                <a:ea typeface="Inter Medium" pitchFamily="34" charset="-122"/>
-                <a:cs typeface="Inter Medium" pitchFamily="34" charset="-120"/>
-              </a:rPr>
-              <a:t>03</a:t>
-            </a:r>
-            <a:endParaRPr lang="en-US" sz="600" dirty="0"/>
-          </a:p>
-        </p:txBody>
-      </p:sp>
-      <p:sp>
-        <p:nvSpPr>
           <p:cNvPr id="61" name="Text 59"/>
-          <p:cNvSpPr/>
-          <p:nvPr/>
-        </p:nvSpPr>
-        <p:spPr>
-          <a:xfrm>
-            <a:off x="876683" y="10328977"/>
-            <a:ext cx="6501450" cy="102915"/>
-          </a:xfrm>
-          <a:prstGeom prst="rect">
-            <a:avLst/>
-          </a:prstGeom>
-          <a:noFill/>
-          <a:ln/>
-        </p:spPr>
-        <p:txBody>
-          <a:bodyPr wrap="none" lIns="0" tIns="0" rIns="0" bIns="0" rtlCol="0" anchor="t"/>
-          <a:lstStyle/>
-          <a:p>
-            <a:pPr algn="l" indent="0" marL="0">
-              <a:lnSpc>
-                <a:spcPts val="810"/>
-              </a:lnSpc>
-              <a:buNone/>
-            </a:pPr>
-            <a:r>
-              <a:rPr lang="en-US" sz="540" dirty="0">
-                <a:solidFill>
-                  <a:srgbClr val="A3A8AE"/>
-                </a:solidFill>
-                <a:latin typeface="Noto Sans JP" pitchFamily="34" charset="0"/>
-                <a:ea typeface="Noto Sans JP" pitchFamily="34" charset="-122"/>
-                <a:cs typeface="Noto Sans JP" pitchFamily="34" charset="-120"/>
-              </a:rPr>
-              <a:t>台割メモ｜動画01 OPENING。地球儀は使わず、暮らしと金属の写真を見開きで1枚のモザイクに（左＝暮らし、右＝それを支える金属）。キャッチコピー＋需要と供給のギャップを概念図で。</a:t>
-            </a:r>
-            <a:endParaRPr lang="en-US" sz="540" dirty="0"/>
-          </a:p>
-        </p:txBody>
-      </p:sp>
-      <p:sp>
-        <p:nvSpPr>
-          <p:cNvPr id="62" name="Text 60"/>
           <p:cNvSpPr/>
           <p:nvPr/>
         </p:nvSpPr>
@@ -7290,7 +7248,7 @@
         <p:spPr>
           <a:xfrm>
             <a:off x="9122585" y="9064012"/>
-            <a:ext cx="2915924" cy="285113"/>
+            <a:ext cx="2915924" cy="427669"/>
           </a:xfrm>
           <a:prstGeom prst="rect">
             <a:avLst/>
@@ -7337,7 +7295,27 @@
                 <a:ea typeface="Noto Sans JP" pitchFamily="34" charset="-122"/>
                 <a:cs typeface="Noto Sans JP" pitchFamily="34" charset="-120"/>
               </a:rPr>
-              <a:t>と組みQuellavecoなど大型化。</a:t>
+              <a:t>と組みQuellavecoなど大型化。2012年にRtMを設立し、マーケテ</a:t>
+            </a:r>
+            <a:endParaRPr lang="en-US" sz="660" dirty="0"/>
+          </a:p>
+          <a:p>
+            <a:pPr algn="l" indent="0" marL="0">
+              <a:lnSpc>
+                <a:spcPts val="1122"/>
+              </a:lnSpc>
+              <a:buNone/>
+            </a:pPr>
+            <a:r>
+              <a:rPr lang="en-US" sz="660" spc="20" kern="0" dirty="0">
+                <a:solidFill>
+                  <a:srgbClr val="3D4249"/>
+                </a:solidFill>
+                <a:latin typeface="Noto Sans JP" pitchFamily="34" charset="0"/>
+                <a:ea typeface="Noto Sans JP" pitchFamily="34" charset="-122"/>
+                <a:cs typeface="Noto Sans JP" pitchFamily="34" charset="-120"/>
+              </a:rPr>
+              <a:t>ィングを集約。</a:t>
             </a:r>
             <a:endParaRPr lang="en-US" sz="660" dirty="0"/>
           </a:p>
@@ -7463,7 +7441,7 @@
                 <a:ea typeface="Noto Sans JP" pitchFamily="34" charset="-122"/>
                 <a:cs typeface="Noto Sans JP" pitchFamily="34" charset="-120"/>
               </a:rPr>
-              <a:t>各地のマーケティングをRtMとしてシンガポールに集約。地域特化</a:t>
+              <a:t>地域に特化したトレーディングから、世界の市場を相手にするグロ</a:t>
             </a:r>
             <a:endParaRPr lang="en-US" sz="660" dirty="0"/>
           </a:p>
@@ -7483,7 +7461,7 @@
                 <a:ea typeface="Noto Sans JP" pitchFamily="34" charset="-122"/>
                 <a:cs typeface="Noto Sans JP" pitchFamily="34" charset="-120"/>
               </a:rPr>
-              <a:t>から世界の市場へ。</a:t>
+              <a:t>ーバルなトレーダーへ。</a:t>
             </a:r>
             <a:endParaRPr lang="en-US" sz="660" dirty="0"/>
           </a:p>
@@ -16125,27 +16103,69 @@
         </p:nvSpPr>
         <p:spPr>
           <a:xfrm>
-            <a:off x="12794488" y="7738863"/>
-            <a:ext cx="892009" cy="272407"/>
-          </a:xfrm>
-          <a:prstGeom prst="rect">
-            <a:avLst/>
-          </a:prstGeom>
-          <a:noFill/>
-          <a:ln/>
-        </p:spPr>
-        <p:txBody>
-          <a:bodyPr wrap="none" lIns="0" tIns="0" rIns="0" bIns="0" rtlCol="0" anchor="t"/>
-          <a:lstStyle/>
-          <a:p>
-            <a:pPr algn="l" indent="0" marL="0">
-              <a:lnSpc>
-                <a:spcPts val="1072"/>
-              </a:lnSpc>
-              <a:buNone/>
-            </a:pPr>
-            <a:r>
-              <a:rPr lang="en-US" sz="670" dirty="0">
+            <a:off x="8068024" y="8302481"/>
+            <a:ext cx="1823167" cy="101644"/>
+          </a:xfrm>
+          <a:prstGeom prst="rect">
+            <a:avLst/>
+          </a:prstGeom>
+          <a:noFill/>
+          <a:ln/>
+        </p:spPr>
+        <p:txBody>
+          <a:bodyPr wrap="none" lIns="0" tIns="0" rIns="0" bIns="0" rtlCol="0" anchor="t"/>
+          <a:lstStyle/>
+          <a:p>
+            <a:pPr algn="l" indent="0" marL="0">
+              <a:lnSpc>
+                <a:spcPts val="800"/>
+              </a:lnSpc>
+              <a:buNone/>
+            </a:pPr>
+            <a:r>
+              <a:rPr lang="en-US" sz="660" spc="190" kern="0" dirty="0">
+                <a:solidFill>
+                  <a:srgbClr val="9C7442"/>
+                </a:solidFill>
+                <a:latin typeface="Inter SemiBold" pitchFamily="34" charset="0"/>
+                <a:ea typeface="Inter SemiBold" pitchFamily="34" charset="-122"/>
+                <a:cs typeface="Inter SemiBold" pitchFamily="34" charset="-120"/>
+              </a:rPr>
+              <a:t>WHY PARTNERS VALUE US</a:t>
+            </a:r>
+            <a:endParaRPr lang="en-US" sz="660" dirty="0"/>
+          </a:p>
+        </p:txBody>
+      </p:sp>
+      <p:sp>
+        <p:nvSpPr>
+          <p:cNvPr id="95" name="Text 93"/>
+          <p:cNvSpPr/>
+          <p:nvPr/>
+        </p:nvSpPr>
+        <p:spPr>
+          <a:xfrm>
+            <a:off x="9846801" y="8302481"/>
+            <a:ext cx="1358025" cy="127055"/>
+          </a:xfrm>
+          <a:prstGeom prst="rect">
+            <a:avLst/>
+          </a:prstGeom>
+          <a:noFill/>
+          <a:ln/>
+        </p:spPr>
+        <p:txBody>
+          <a:bodyPr wrap="none" lIns="0" tIns="0" rIns="0" bIns="0" rtlCol="0" anchor="t"/>
+          <a:lstStyle/>
+          <a:p>
+            <a:pPr algn="l" indent="0" marL="0">
+              <a:lnSpc>
+                <a:spcPts val="1000"/>
+              </a:lnSpc>
+              <a:buNone/>
+            </a:pPr>
+            <a:r>
+              <a:rPr lang="en-US" sz="660" spc="60" kern="0" dirty="0">
                 <a:solidFill>
                   <a:srgbClr val="7D838A"/>
                 </a:solidFill>
@@ -16153,10 +16173,116 @@
                 <a:ea typeface="Noto Sans JP" pitchFamily="34" charset="-122"/>
                 <a:cs typeface="Noto Sans JP" pitchFamily="34" charset="-120"/>
               </a:rPr>
-              <a:t>他社ロゴは使用せず</a:t>
-            </a:r>
-            <a:endParaRPr lang="en-US" sz="670" dirty="0"/>
-          </a:p>
+              <a:t>パートナーに評価される理由</a:t>
+            </a:r>
+            <a:endParaRPr lang="en-US" sz="660" dirty="0"/>
+          </a:p>
+        </p:txBody>
+      </p:sp>
+      <p:sp>
+        <p:nvSpPr>
+          <p:cNvPr id="96" name="Text 94"/>
+          <p:cNvSpPr/>
+          <p:nvPr/>
+        </p:nvSpPr>
+        <p:spPr>
+          <a:xfrm>
+            <a:off x="8220491" y="8632825"/>
+            <a:ext cx="983509" cy="76233"/>
+          </a:xfrm>
+          <a:prstGeom prst="rect">
+            <a:avLst/>
+          </a:prstGeom>
+          <a:noFill/>
+          <a:ln/>
+        </p:spPr>
+        <p:txBody>
+          <a:bodyPr wrap="none" lIns="0" tIns="0" rIns="0" bIns="0" rtlCol="0" anchor="t"/>
+          <a:lstStyle/>
+          <a:p>
+            <a:pPr algn="l" indent="0" marL="0">
+              <a:lnSpc>
+                <a:spcPts val="600"/>
+              </a:lnSpc>
+              <a:buNone/>
+            </a:pPr>
+            <a:r>
+              <a:rPr lang="en-US" sz="560" spc="120" kern="0" dirty="0">
+                <a:solidFill>
+                  <a:srgbClr val="9C7442"/>
+                </a:solidFill>
+                <a:latin typeface="Inter SemiBold" pitchFamily="34" charset="0"/>
+                <a:ea typeface="Inter SemiBold" pitchFamily="34" charset="-122"/>
+                <a:cs typeface="Inter SemiBold" pitchFamily="34" charset="-120"/>
+              </a:rPr>
+              <a:t>LONG-TERM VIEW</a:t>
+            </a:r>
+            <a:endParaRPr lang="en-US" sz="560" dirty="0"/>
+          </a:p>
+        </p:txBody>
+      </p:sp>
+      <p:sp>
+        <p:nvSpPr>
+          <p:cNvPr id="97" name="Text 95"/>
+          <p:cNvSpPr/>
+          <p:nvPr/>
+        </p:nvSpPr>
+        <p:spPr>
+          <a:xfrm>
+            <a:off x="8220491" y="8726021"/>
+            <a:ext cx="921053" cy="169365"/>
+          </a:xfrm>
+          <a:prstGeom prst="rect">
+            <a:avLst/>
+          </a:prstGeom>
+          <a:noFill/>
+          <a:ln/>
+        </p:spPr>
+        <p:txBody>
+          <a:bodyPr wrap="none" lIns="0" tIns="0" rIns="0" bIns="0" rtlCol="0" anchor="t"/>
+          <a:lstStyle/>
+          <a:p>
+            <a:pPr algn="l" indent="0" marL="0">
+              <a:lnSpc>
+                <a:spcPts val="1333"/>
+              </a:lnSpc>
+              <a:buNone/>
+            </a:pPr>
+            <a:r>
+              <a:rPr lang="en-US" sz="860" spc="30" kern="0" dirty="0">
+                <a:solidFill>
+                  <a:srgbClr val="121519"/>
+                </a:solidFill>
+                <a:latin typeface="Noto Sans JP Medium" pitchFamily="34" charset="0"/>
+                <a:ea typeface="Noto Sans JP Medium" pitchFamily="34" charset="-122"/>
+                <a:cs typeface="Noto Sans JP Medium" pitchFamily="34" charset="-120"/>
+              </a:rPr>
+              <a:t>中長期的な視座</a:t>
+            </a:r>
+            <a:endParaRPr lang="en-US" sz="860" dirty="0"/>
+          </a:p>
+        </p:txBody>
+      </p:sp>
+      <p:sp>
+        <p:nvSpPr>
+          <p:cNvPr id="98" name="Text 96"/>
+          <p:cNvSpPr/>
+          <p:nvPr/>
+        </p:nvSpPr>
+        <p:spPr>
+          <a:xfrm>
+            <a:off x="8220491" y="8937155"/>
+            <a:ext cx="1915540" cy="272407"/>
+          </a:xfrm>
+          <a:prstGeom prst="rect">
+            <a:avLst/>
+          </a:prstGeom>
+          <a:noFill/>
+          <a:ln/>
+        </p:spPr>
+        <p:txBody>
+          <a:bodyPr wrap="none" lIns="0" tIns="0" rIns="0" bIns="0" rtlCol="0" anchor="t"/>
+          <a:lstStyle/>
           <a:p>
             <a:pPr algn="l" indent="0" marL="0">
               <a:lnSpc>
@@ -16173,41 +16299,61 @@
                 <a:ea typeface="Noto Sans JP" pitchFamily="34" charset="-122"/>
                 <a:cs typeface="Noto Sans JP" pitchFamily="34" charset="-120"/>
               </a:rPr>
-              <a:t>社名テキストで表記</a:t>
+              <a:t>資源事業は長期にわたる。短期的リターンを</a:t>
             </a:r>
             <a:endParaRPr lang="en-US" sz="670" dirty="0"/>
           </a:p>
-        </p:txBody>
-      </p:sp>
-      <p:sp>
-        <p:nvSpPr>
-          <p:cNvPr id="95" name="Text 93"/>
-          <p:cNvSpPr/>
-          <p:nvPr/>
-        </p:nvSpPr>
-        <p:spPr>
-          <a:xfrm>
-            <a:off x="8068024" y="8302481"/>
-            <a:ext cx="1823167" cy="101644"/>
-          </a:xfrm>
-          <a:prstGeom prst="rect">
-            <a:avLst/>
-          </a:prstGeom>
-          <a:noFill/>
-          <a:ln/>
-        </p:spPr>
-        <p:txBody>
-          <a:bodyPr wrap="none" lIns="0" tIns="0" rIns="0" bIns="0" rtlCol="0" anchor="t"/>
-          <a:lstStyle/>
-          <a:p>
-            <a:pPr algn="l" indent="0" marL="0">
-              <a:lnSpc>
-                <a:spcPts val="800"/>
-              </a:lnSpc>
-              <a:buNone/>
-            </a:pPr>
-            <a:r>
-              <a:rPr lang="en-US" sz="660" spc="190" kern="0" dirty="0">
+          <a:p>
+            <a:pPr algn="l" indent="0" marL="0">
+              <a:lnSpc>
+                <a:spcPts val="1072"/>
+              </a:lnSpc>
+              <a:buNone/>
+            </a:pPr>
+            <a:r>
+              <a:rPr lang="en-US" sz="670" dirty="0">
+                <a:solidFill>
+                  <a:srgbClr val="7D838A"/>
+                </a:solidFill>
+                <a:latin typeface="Noto Sans JP" pitchFamily="34" charset="0"/>
+                <a:ea typeface="Noto Sans JP" pitchFamily="34" charset="-122"/>
+                <a:cs typeface="Noto Sans JP" pitchFamily="34" charset="-120"/>
+              </a:rPr>
+              <a:t>求める投資家とは一線を画す。</a:t>
+            </a:r>
+            <a:endParaRPr lang="en-US" sz="670" dirty="0"/>
+          </a:p>
+        </p:txBody>
+      </p:sp>
+      <p:sp>
+        <p:nvSpPr>
+          <p:cNvPr id="99" name="Text 97"/>
+          <p:cNvSpPr/>
+          <p:nvPr/>
+        </p:nvSpPr>
+        <p:spPr>
+          <a:xfrm>
+            <a:off x="10456667" y="8632825"/>
+            <a:ext cx="806842" cy="76233"/>
+          </a:xfrm>
+          <a:prstGeom prst="rect">
+            <a:avLst/>
+          </a:prstGeom>
+          <a:noFill/>
+          <a:ln/>
+        </p:spPr>
+        <p:txBody>
+          <a:bodyPr wrap="none" lIns="0" tIns="0" rIns="0" bIns="0" rtlCol="0" anchor="t"/>
+          <a:lstStyle/>
+          <a:p>
+            <a:pPr algn="l" indent="0" marL="0">
+              <a:lnSpc>
+                <a:spcPts val="600"/>
+              </a:lnSpc>
+              <a:buNone/>
+            </a:pPr>
+            <a:r>
+              <a:rPr lang="en-US" sz="560" spc="120" kern="0" dirty="0">
                 <a:solidFill>
                   <a:srgbClr val="9C7442"/>
                 </a:solidFill>
@@ -16215,41 +16361,83 @@
                 <a:ea typeface="Inter SemiBold" pitchFamily="34" charset="-122"/>
                 <a:cs typeface="Inter SemiBold" pitchFamily="34" charset="-120"/>
               </a:rPr>
-              <a:t>WHY PARTNERS VALUE US</a:t>
-            </a:r>
-            <a:endParaRPr lang="en-US" sz="660" dirty="0"/>
-          </a:p>
-        </p:txBody>
-      </p:sp>
-      <p:sp>
-        <p:nvSpPr>
-          <p:cNvPr id="96" name="Text 94"/>
-          <p:cNvSpPr/>
-          <p:nvPr/>
-        </p:nvSpPr>
-        <p:spPr>
-          <a:xfrm>
-            <a:off x="9846801" y="8302481"/>
-            <a:ext cx="1358025" cy="127055"/>
-          </a:xfrm>
-          <a:prstGeom prst="rect">
-            <a:avLst/>
-          </a:prstGeom>
-          <a:noFill/>
-          <a:ln/>
-        </p:spPr>
-        <p:txBody>
-          <a:bodyPr wrap="none" lIns="0" tIns="0" rIns="0" bIns="0" rtlCol="0" anchor="t"/>
-          <a:lstStyle/>
-          <a:p>
-            <a:pPr algn="l" indent="0" marL="0">
-              <a:lnSpc>
-                <a:spcPts val="1000"/>
-              </a:lnSpc>
-              <a:buNone/>
-            </a:pPr>
-            <a:r>
-              <a:rPr lang="en-US" sz="660" spc="60" kern="0" dirty="0">
+              <a:t>RISK SHARING</a:t>
+            </a:r>
+            <a:endParaRPr lang="en-US" sz="560" dirty="0"/>
+          </a:p>
+        </p:txBody>
+      </p:sp>
+      <p:sp>
+        <p:nvSpPr>
+          <p:cNvPr id="100" name="Text 98"/>
+          <p:cNvSpPr/>
+          <p:nvPr/>
+        </p:nvSpPr>
+        <p:spPr>
+          <a:xfrm>
+            <a:off x="10456667" y="8726021"/>
+            <a:ext cx="1169566" cy="169365"/>
+          </a:xfrm>
+          <a:prstGeom prst="rect">
+            <a:avLst/>
+          </a:prstGeom>
+          <a:noFill/>
+          <a:ln/>
+        </p:spPr>
+        <p:txBody>
+          <a:bodyPr wrap="none" lIns="0" tIns="0" rIns="0" bIns="0" rtlCol="0" anchor="t"/>
+          <a:lstStyle/>
+          <a:p>
+            <a:pPr algn="l" indent="0" marL="0">
+              <a:lnSpc>
+                <a:spcPts val="1333"/>
+              </a:lnSpc>
+              <a:buNone/>
+            </a:pPr>
+            <a:r>
+              <a:rPr lang="en-US" sz="860" spc="30" kern="0" dirty="0">
+                <a:solidFill>
+                  <a:srgbClr val="121519"/>
+                </a:solidFill>
+                <a:latin typeface="Noto Sans JP Medium" pitchFamily="34" charset="0"/>
+                <a:ea typeface="Noto Sans JP Medium" pitchFamily="34" charset="-122"/>
+                <a:cs typeface="Noto Sans JP Medium" pitchFamily="34" charset="-120"/>
+              </a:rPr>
+              <a:t>リスクシェアリング</a:t>
+            </a:r>
+            <a:endParaRPr lang="en-US" sz="860" dirty="0"/>
+          </a:p>
+        </p:txBody>
+      </p:sp>
+      <p:sp>
+        <p:nvSpPr>
+          <p:cNvPr id="101" name="Text 99"/>
+          <p:cNvSpPr/>
+          <p:nvPr/>
+        </p:nvSpPr>
+        <p:spPr>
+          <a:xfrm>
+            <a:off x="10456667" y="8937155"/>
+            <a:ext cx="1915540" cy="272407"/>
+          </a:xfrm>
+          <a:prstGeom prst="rect">
+            <a:avLst/>
+          </a:prstGeom>
+          <a:noFill/>
+          <a:ln/>
+        </p:spPr>
+        <p:txBody>
+          <a:bodyPr wrap="none" lIns="0" tIns="0" rIns="0" bIns="0" rtlCol="0" anchor="t"/>
+          <a:lstStyle/>
+          <a:p>
+            <a:pPr algn="l" indent="0" marL="0">
+              <a:lnSpc>
+                <a:spcPts val="1072"/>
+              </a:lnSpc>
+              <a:buNone/>
+            </a:pPr>
+            <a:r>
+              <a:rPr lang="en-US" sz="670" dirty="0">
                 <a:solidFill>
                   <a:srgbClr val="7D838A"/>
                 </a:solidFill>
@@ -16257,22 +16445,42 @@
                 <a:ea typeface="Noto Sans JP" pitchFamily="34" charset="-122"/>
                 <a:cs typeface="Noto Sans JP" pitchFamily="34" charset="-120"/>
               </a:rPr>
-              <a:t>パートナーに評価される理由</a:t>
-            </a:r>
-            <a:endParaRPr lang="en-US" sz="660" dirty="0"/>
-          </a:p>
-        </p:txBody>
-      </p:sp>
-      <p:sp>
-        <p:nvSpPr>
-          <p:cNvPr id="97" name="Text 95"/>
-          <p:cNvSpPr/>
-          <p:nvPr/>
-        </p:nvSpPr>
-        <p:spPr>
-          <a:xfrm>
-            <a:off x="8220491" y="8632825"/>
-            <a:ext cx="983509" cy="76233"/>
+              <a:t>リスクの高い案件ほど、資金面の分担を担保</a:t>
+            </a:r>
+            <a:endParaRPr lang="en-US" sz="670" dirty="0"/>
+          </a:p>
+          <a:p>
+            <a:pPr algn="l" indent="0" marL="0">
+              <a:lnSpc>
+                <a:spcPts val="1072"/>
+              </a:lnSpc>
+              <a:buNone/>
+            </a:pPr>
+            <a:r>
+              <a:rPr lang="en-US" sz="670" dirty="0">
+                <a:solidFill>
+                  <a:srgbClr val="7D838A"/>
+                </a:solidFill>
+                <a:latin typeface="Noto Sans JP" pitchFamily="34" charset="0"/>
+                <a:ea typeface="Noto Sans JP" pitchFamily="34" charset="-122"/>
+                <a:cs typeface="Noto Sans JP" pitchFamily="34" charset="-120"/>
+              </a:rPr>
+              <a:t>する。</a:t>
+            </a:r>
+            <a:endParaRPr lang="en-US" sz="670" dirty="0"/>
+          </a:p>
+        </p:txBody>
+      </p:sp>
+      <p:sp>
+        <p:nvSpPr>
+          <p:cNvPr id="102" name="Text 100"/>
+          <p:cNvSpPr/>
+          <p:nvPr/>
+        </p:nvSpPr>
+        <p:spPr>
+          <a:xfrm>
+            <a:off x="12692844" y="8632825"/>
+            <a:ext cx="1309982" cy="76233"/>
           </a:xfrm>
           <a:prstGeom prst="rect">
             <a:avLst/>
@@ -16299,7 +16507,7 @@
                 <a:ea typeface="Inter SemiBold" pitchFamily="34" charset="-122"/>
                 <a:cs typeface="Inter SemiBold" pitchFamily="34" charset="-120"/>
               </a:rPr>
-              <a:t>LONG-TERM VIEW</a:t>
+              <a:t>INTEGRATED STRENGTH</a:t>
             </a:r>
             <a:endParaRPr lang="en-US" sz="560" dirty="0"/>
           </a:p>
@@ -16307,14 +16515,14 @@
       </p:sp>
       <p:sp>
         <p:nvSpPr>
-          <p:cNvPr id="98" name="Text 96"/>
-          <p:cNvSpPr/>
-          <p:nvPr/>
-        </p:nvSpPr>
-        <p:spPr>
-          <a:xfrm>
-            <a:off x="8220491" y="8726021"/>
-            <a:ext cx="921053" cy="169365"/>
+          <p:cNvPr id="103" name="Text 101"/>
+          <p:cNvSpPr/>
+          <p:nvPr/>
+        </p:nvSpPr>
+        <p:spPr>
+          <a:xfrm>
+            <a:off x="12692844" y="8726021"/>
+            <a:ext cx="423809" cy="169365"/>
           </a:xfrm>
           <a:prstGeom prst="rect">
             <a:avLst/>
@@ -16341,7 +16549,7 @@
                 <a:ea typeface="Noto Sans JP Medium" pitchFamily="34" charset="-122"/>
                 <a:cs typeface="Noto Sans JP Medium" pitchFamily="34" charset="-120"/>
               </a:rPr>
-              <a:t>中長期的な視座</a:t>
+              <a:t>総合力</a:t>
             </a:r>
             <a:endParaRPr lang="en-US" sz="860" dirty="0"/>
           </a:p>
@@ -16349,14 +16557,14 @@
       </p:sp>
       <p:sp>
         <p:nvSpPr>
-          <p:cNvPr id="99" name="Text 97"/>
-          <p:cNvSpPr/>
-          <p:nvPr/>
-        </p:nvSpPr>
-        <p:spPr>
-          <a:xfrm>
-            <a:off x="8220491" y="8937155"/>
-            <a:ext cx="1915540" cy="272407"/>
+          <p:cNvPr id="104" name="Text 102"/>
+          <p:cNvSpPr/>
+          <p:nvPr/>
+        </p:nvSpPr>
+        <p:spPr>
+          <a:xfrm>
+            <a:off x="12692844" y="8937155"/>
+            <a:ext cx="1920126" cy="272407"/>
           </a:xfrm>
           <a:prstGeom prst="rect">
             <a:avLst/>
@@ -16383,7 +16591,7 @@
                 <a:ea typeface="Noto Sans JP" pitchFamily="34" charset="-122"/>
                 <a:cs typeface="Noto Sans JP" pitchFamily="34" charset="-120"/>
               </a:rPr>
-              <a:t>資源事業は長期にわたる。短期的リターンを</a:t>
+              <a:t>幅広い産業接点を通じ、多様なバリューチェ</a:t>
             </a:r>
             <a:endParaRPr lang="en-US" sz="670" dirty="0"/>
           </a:p>
@@ -16403,7 +16611,7 @@
                 <a:ea typeface="Noto Sans JP" pitchFamily="34" charset="-122"/>
                 <a:cs typeface="Noto Sans JP" pitchFamily="34" charset="-120"/>
               </a:rPr>
-              <a:t>求める投資家とは一線を画す。</a:t>
+              <a:t>ーンに知見を提供する。</a:t>
             </a:r>
             <a:endParaRPr lang="en-US" sz="670" dirty="0"/>
           </a:p>
@@ -16411,445 +16619,153 @@
       </p:sp>
       <p:sp>
         <p:nvSpPr>
-          <p:cNvPr id="100" name="Text 98"/>
-          <p:cNvSpPr/>
-          <p:nvPr/>
-        </p:nvSpPr>
-        <p:spPr>
-          <a:xfrm>
-            <a:off x="10456667" y="8632825"/>
-            <a:ext cx="806842" cy="76233"/>
-          </a:xfrm>
-          <a:prstGeom prst="rect">
-            <a:avLst/>
-          </a:prstGeom>
-          <a:noFill/>
-          <a:ln/>
-        </p:spPr>
-        <p:txBody>
-          <a:bodyPr wrap="none" lIns="0" tIns="0" rIns="0" bIns="0" rtlCol="0" anchor="t"/>
-          <a:lstStyle/>
-          <a:p>
-            <a:pPr algn="l" indent="0" marL="0">
-              <a:lnSpc>
-                <a:spcPts val="600"/>
-              </a:lnSpc>
-              <a:buNone/>
-            </a:pPr>
-            <a:r>
-              <a:rPr lang="en-US" sz="560" spc="120" kern="0" dirty="0">
-                <a:solidFill>
-                  <a:srgbClr val="9C7442"/>
-                </a:solidFill>
-                <a:latin typeface="Inter SemiBold" pitchFamily="34" charset="0"/>
-                <a:ea typeface="Inter SemiBold" pitchFamily="34" charset="-122"/>
-                <a:cs typeface="Inter SemiBold" pitchFamily="34" charset="-120"/>
-              </a:rPr>
-              <a:t>RISK SHARING</a:t>
-            </a:r>
-            <a:endParaRPr lang="en-US" sz="560" dirty="0"/>
-          </a:p>
-        </p:txBody>
-      </p:sp>
-      <p:sp>
-        <p:nvSpPr>
-          <p:cNvPr id="101" name="Text 99"/>
-          <p:cNvSpPr/>
-          <p:nvPr/>
-        </p:nvSpPr>
-        <p:spPr>
-          <a:xfrm>
-            <a:off x="10456667" y="8726021"/>
-            <a:ext cx="1169566" cy="169365"/>
-          </a:xfrm>
-          <a:prstGeom prst="rect">
-            <a:avLst/>
-          </a:prstGeom>
-          <a:noFill/>
-          <a:ln/>
-        </p:spPr>
-        <p:txBody>
-          <a:bodyPr wrap="none" lIns="0" tIns="0" rIns="0" bIns="0" rtlCol="0" anchor="t"/>
-          <a:lstStyle/>
-          <a:p>
-            <a:pPr algn="l" indent="0" marL="0">
-              <a:lnSpc>
-                <a:spcPts val="1333"/>
-              </a:lnSpc>
-              <a:buNone/>
-            </a:pPr>
-            <a:r>
-              <a:rPr lang="en-US" sz="860" spc="30" kern="0" dirty="0">
-                <a:solidFill>
-                  <a:srgbClr val="121519"/>
-                </a:solidFill>
-                <a:latin typeface="Noto Sans JP Medium" pitchFamily="34" charset="0"/>
-                <a:ea typeface="Noto Sans JP Medium" pitchFamily="34" charset="-122"/>
-                <a:cs typeface="Noto Sans JP Medium" pitchFamily="34" charset="-120"/>
-              </a:rPr>
-              <a:t>リスクシェアリング</a:t>
-            </a:r>
-            <a:endParaRPr lang="en-US" sz="860" dirty="0"/>
-          </a:p>
-        </p:txBody>
-      </p:sp>
-      <p:sp>
-        <p:nvSpPr>
-          <p:cNvPr id="102" name="Text 100"/>
-          <p:cNvSpPr/>
-          <p:nvPr/>
-        </p:nvSpPr>
-        <p:spPr>
-          <a:xfrm>
-            <a:off x="10456667" y="8937155"/>
-            <a:ext cx="1915540" cy="272407"/>
-          </a:xfrm>
-          <a:prstGeom prst="rect">
-            <a:avLst/>
-          </a:prstGeom>
-          <a:noFill/>
-          <a:ln/>
-        </p:spPr>
-        <p:txBody>
-          <a:bodyPr wrap="none" lIns="0" tIns="0" rIns="0" bIns="0" rtlCol="0" anchor="t"/>
-          <a:lstStyle/>
-          <a:p>
-            <a:pPr algn="l" indent="0" marL="0">
-              <a:lnSpc>
-                <a:spcPts val="1072"/>
-              </a:lnSpc>
-              <a:buNone/>
-            </a:pPr>
-            <a:r>
-              <a:rPr lang="en-US" sz="670" dirty="0">
+          <p:cNvPr id="105" name="Text 103"/>
+          <p:cNvSpPr/>
+          <p:nvPr/>
+        </p:nvSpPr>
+        <p:spPr>
+          <a:xfrm>
+            <a:off x="508222" y="10316906"/>
+            <a:ext cx="202594" cy="88939"/>
+          </a:xfrm>
+          <a:prstGeom prst="rect">
+            <a:avLst/>
+          </a:prstGeom>
+          <a:noFill/>
+          <a:ln/>
+        </p:spPr>
+        <p:txBody>
+          <a:bodyPr wrap="none" lIns="0" tIns="0" rIns="0" bIns="0" rtlCol="0" anchor="t"/>
+          <a:lstStyle/>
+          <a:p>
+            <a:pPr algn="l" indent="0" marL="0">
+              <a:lnSpc>
+                <a:spcPts val="700"/>
+              </a:lnSpc>
+              <a:buNone/>
+            </a:pPr>
+            <a:r>
+              <a:rPr lang="en-US" sz="600" spc="160" kern="0" dirty="0">
                 <a:solidFill>
                   <a:srgbClr val="7D838A"/>
+                </a:solidFill>
+                <a:latin typeface="Inter Medium" pitchFamily="34" charset="0"/>
+                <a:ea typeface="Inter Medium" pitchFamily="34" charset="-122"/>
+                <a:cs typeface="Inter Medium" pitchFamily="34" charset="-120"/>
+              </a:rPr>
+              <a:t>08</a:t>
+            </a:r>
+            <a:endParaRPr lang="en-US" sz="600" dirty="0"/>
+          </a:p>
+        </p:txBody>
+      </p:sp>
+      <p:sp>
+        <p:nvSpPr>
+          <p:cNvPr id="106" name="Text 104"/>
+          <p:cNvSpPr/>
+          <p:nvPr/>
+        </p:nvSpPr>
+        <p:spPr>
+          <a:xfrm>
+            <a:off x="14458915" y="10316906"/>
+            <a:ext cx="202594" cy="88939"/>
+          </a:xfrm>
+          <a:prstGeom prst="rect">
+            <a:avLst/>
+          </a:prstGeom>
+          <a:noFill/>
+          <a:ln/>
+        </p:spPr>
+        <p:txBody>
+          <a:bodyPr wrap="none" lIns="0" tIns="0" rIns="0" bIns="0" rtlCol="0" anchor="t"/>
+          <a:lstStyle/>
+          <a:p>
+            <a:pPr algn="l" indent="0" marL="0">
+              <a:lnSpc>
+                <a:spcPts val="700"/>
+              </a:lnSpc>
+              <a:buNone/>
+            </a:pPr>
+            <a:r>
+              <a:rPr lang="en-US" sz="600" spc="160" kern="0" dirty="0">
+                <a:solidFill>
+                  <a:srgbClr val="7D838A"/>
+                </a:solidFill>
+                <a:latin typeface="Inter Medium" pitchFamily="34" charset="0"/>
+                <a:ea typeface="Inter Medium" pitchFamily="34" charset="-122"/>
+                <a:cs typeface="Inter Medium" pitchFamily="34" charset="-120"/>
+              </a:rPr>
+              <a:t>09</a:t>
+            </a:r>
+            <a:endParaRPr lang="en-US" sz="600" dirty="0"/>
+          </a:p>
+        </p:txBody>
+      </p:sp>
+      <p:sp>
+        <p:nvSpPr>
+          <p:cNvPr id="107" name="Text 105"/>
+          <p:cNvSpPr/>
+          <p:nvPr/>
+        </p:nvSpPr>
+        <p:spPr>
+          <a:xfrm>
+            <a:off x="876683" y="10328977"/>
+            <a:ext cx="6271062" cy="205830"/>
+          </a:xfrm>
+          <a:prstGeom prst="rect">
+            <a:avLst/>
+          </a:prstGeom>
+          <a:noFill/>
+          <a:ln/>
+        </p:spPr>
+        <p:txBody>
+          <a:bodyPr wrap="none" lIns="0" tIns="0" rIns="0" bIns="0" rtlCol="0" anchor="t"/>
+          <a:lstStyle/>
+          <a:p>
+            <a:pPr algn="l" indent="0" marL="0">
+              <a:lnSpc>
+                <a:spcPts val="810"/>
+              </a:lnSpc>
+              <a:buNone/>
+            </a:pPr>
+            <a:r>
+              <a:rPr lang="en-US" sz="540" dirty="0">
+                <a:solidFill>
+                  <a:srgbClr val="A3A8AE"/>
                 </a:solidFill>
                 <a:latin typeface="Noto Sans JP" pitchFamily="34" charset="0"/>
                 <a:ea typeface="Noto Sans JP" pitchFamily="34" charset="-122"/>
                 <a:cs typeface="Noto Sans JP" pitchFamily="34" charset="-120"/>
               </a:rPr>
-              <a:t>リスクの高い案件ほど、資金面の分担を担保</a:t>
-            </a:r>
-            <a:endParaRPr lang="en-US" sz="670" dirty="0"/>
-          </a:p>
-          <a:p>
-            <a:pPr algn="l" indent="0" marL="0">
-              <a:lnSpc>
-                <a:spcPts val="1072"/>
-              </a:lnSpc>
-              <a:buNone/>
-            </a:pPr>
-            <a:r>
-              <a:rPr lang="en-US" sz="670" dirty="0">
-                <a:solidFill>
-                  <a:srgbClr val="7D838A"/>
+              <a:t>台割メモ｜動画06 From Resources to Value。その他資源を6つのカードで（案件名と地域）。銅の品位の変化（1%→20–30%→99.99%）の上に、技術投資（CiDRA・Jetti・DESCycle・</a:t>
+            </a:r>
+            <a:endParaRPr lang="en-US" sz="540" dirty="0"/>
+          </a:p>
+          <a:p>
+            <a:pPr algn="l" indent="0" marL="0">
+              <a:lnSpc>
+                <a:spcPts val="810"/>
+              </a:lnSpc>
+              <a:buNone/>
+            </a:pPr>
+            <a:r>
+              <a:rPr lang="en-US" sz="540" dirty="0">
+                <a:solidFill>
+                  <a:srgbClr val="A3A8AE"/>
                 </a:solidFill>
                 <a:latin typeface="Noto Sans JP" pitchFamily="34" charset="0"/>
                 <a:ea typeface="Noto Sans JP" pitchFamily="34" charset="-122"/>
                 <a:cs typeface="Noto Sans JP" pitchFamily="34" charset="-120"/>
               </a:rPr>
-              <a:t>する。</a:t>
-            </a:r>
-            <a:endParaRPr lang="en-US" sz="670" dirty="0"/>
-          </a:p>
-        </p:txBody>
-      </p:sp>
-      <p:sp>
-        <p:nvSpPr>
-          <p:cNvPr id="103" name="Text 101"/>
-          <p:cNvSpPr/>
-          <p:nvPr/>
-        </p:nvSpPr>
-        <p:spPr>
-          <a:xfrm>
-            <a:off x="12692844" y="8632825"/>
-            <a:ext cx="1309982" cy="76233"/>
-          </a:xfrm>
-          <a:prstGeom prst="rect">
-            <a:avLst/>
-          </a:prstGeom>
-          <a:noFill/>
-          <a:ln/>
-        </p:spPr>
-        <p:txBody>
-          <a:bodyPr wrap="none" lIns="0" tIns="0" rIns="0" bIns="0" rtlCol="0" anchor="t"/>
-          <a:lstStyle/>
-          <a:p>
-            <a:pPr algn="l" indent="0" marL="0">
-              <a:lnSpc>
-                <a:spcPts val="600"/>
-              </a:lnSpc>
-              <a:buNone/>
-            </a:pPr>
-            <a:r>
-              <a:rPr lang="en-US" sz="560" spc="120" kern="0" dirty="0">
-                <a:solidFill>
-                  <a:srgbClr val="9C7442"/>
-                </a:solidFill>
-                <a:latin typeface="Inter SemiBold" pitchFamily="34" charset="0"/>
-                <a:ea typeface="Inter SemiBold" pitchFamily="34" charset="-122"/>
-                <a:cs typeface="Inter SemiBold" pitchFamily="34" charset="-120"/>
-              </a:rPr>
-              <a:t>INTEGRATED STRENGTH</a:t>
-            </a:r>
-            <a:endParaRPr lang="en-US" sz="560" dirty="0"/>
-          </a:p>
-        </p:txBody>
-      </p:sp>
-      <p:sp>
-        <p:nvSpPr>
-          <p:cNvPr id="104" name="Text 102"/>
-          <p:cNvSpPr/>
-          <p:nvPr/>
-        </p:nvSpPr>
-        <p:spPr>
-          <a:xfrm>
-            <a:off x="12692844" y="8726021"/>
-            <a:ext cx="423809" cy="169365"/>
-          </a:xfrm>
-          <a:prstGeom prst="rect">
-            <a:avLst/>
-          </a:prstGeom>
-          <a:noFill/>
-          <a:ln/>
-        </p:spPr>
-        <p:txBody>
-          <a:bodyPr wrap="none" lIns="0" tIns="0" rIns="0" bIns="0" rtlCol="0" anchor="t"/>
-          <a:lstStyle/>
-          <a:p>
-            <a:pPr algn="l" indent="0" marL="0">
-              <a:lnSpc>
-                <a:spcPts val="1333"/>
-              </a:lnSpc>
-              <a:buNone/>
-            </a:pPr>
-            <a:r>
-              <a:rPr lang="en-US" sz="860" spc="30" kern="0" dirty="0">
-                <a:solidFill>
-                  <a:srgbClr val="121519"/>
-                </a:solidFill>
-                <a:latin typeface="Noto Sans JP Medium" pitchFamily="34" charset="0"/>
-                <a:ea typeface="Noto Sans JP Medium" pitchFamily="34" charset="-122"/>
-                <a:cs typeface="Noto Sans JP Medium" pitchFamily="34" charset="-120"/>
-              </a:rPr>
-              <a:t>総合力</a:t>
-            </a:r>
-            <a:endParaRPr lang="en-US" sz="860" dirty="0"/>
-          </a:p>
-        </p:txBody>
-      </p:sp>
-      <p:sp>
-        <p:nvSpPr>
-          <p:cNvPr id="105" name="Text 103"/>
-          <p:cNvSpPr/>
-          <p:nvPr/>
-        </p:nvSpPr>
-        <p:spPr>
-          <a:xfrm>
-            <a:off x="12692844" y="8937155"/>
-            <a:ext cx="1920126" cy="272407"/>
-          </a:xfrm>
-          <a:prstGeom prst="rect">
-            <a:avLst/>
-          </a:prstGeom>
-          <a:noFill/>
-          <a:ln/>
-        </p:spPr>
-        <p:txBody>
-          <a:bodyPr wrap="none" lIns="0" tIns="0" rIns="0" bIns="0" rtlCol="0" anchor="t"/>
-          <a:lstStyle/>
-          <a:p>
-            <a:pPr algn="l" indent="0" marL="0">
-              <a:lnSpc>
-                <a:spcPts val="1072"/>
-              </a:lnSpc>
-              <a:buNone/>
-            </a:pPr>
-            <a:r>
-              <a:rPr lang="en-US" sz="670" dirty="0">
-                <a:solidFill>
-                  <a:srgbClr val="7D838A"/>
-                </a:solidFill>
-                <a:latin typeface="Noto Sans JP" pitchFamily="34" charset="0"/>
-                <a:ea typeface="Noto Sans JP" pitchFamily="34" charset="-122"/>
-                <a:cs typeface="Noto Sans JP" pitchFamily="34" charset="-120"/>
-              </a:rPr>
-              <a:t>幅広い産業接点を通じ、多様なバリューチェ</a:t>
-            </a:r>
-            <a:endParaRPr lang="en-US" sz="670" dirty="0"/>
-          </a:p>
-          <a:p>
-            <a:pPr algn="l" indent="0" marL="0">
-              <a:lnSpc>
-                <a:spcPts val="1072"/>
-              </a:lnSpc>
-              <a:buNone/>
-            </a:pPr>
-            <a:r>
-              <a:rPr lang="en-US" sz="670" dirty="0">
-                <a:solidFill>
-                  <a:srgbClr val="7D838A"/>
-                </a:solidFill>
-                <a:latin typeface="Noto Sans JP" pitchFamily="34" charset="0"/>
-                <a:ea typeface="Noto Sans JP" pitchFamily="34" charset="-122"/>
-                <a:cs typeface="Noto Sans JP" pitchFamily="34" charset="-120"/>
-              </a:rPr>
-              <a:t>ーンに知見を提供する。</a:t>
-            </a:r>
-            <a:endParaRPr lang="en-US" sz="670" dirty="0"/>
-          </a:p>
-        </p:txBody>
-      </p:sp>
-      <p:sp>
-        <p:nvSpPr>
-          <p:cNvPr id="106" name="Text 104"/>
-          <p:cNvSpPr/>
-          <p:nvPr/>
-        </p:nvSpPr>
-        <p:spPr>
-          <a:xfrm>
-            <a:off x="508222" y="10316906"/>
-            <a:ext cx="202594" cy="88939"/>
-          </a:xfrm>
-          <a:prstGeom prst="rect">
-            <a:avLst/>
-          </a:prstGeom>
-          <a:noFill/>
-          <a:ln/>
-        </p:spPr>
-        <p:txBody>
-          <a:bodyPr wrap="none" lIns="0" tIns="0" rIns="0" bIns="0" rtlCol="0" anchor="t"/>
-          <a:lstStyle/>
-          <a:p>
-            <a:pPr algn="l" indent="0" marL="0">
-              <a:lnSpc>
-                <a:spcPts val="700"/>
-              </a:lnSpc>
-              <a:buNone/>
-            </a:pPr>
-            <a:r>
-              <a:rPr lang="en-US" sz="600" spc="160" kern="0" dirty="0">
-                <a:solidFill>
-                  <a:srgbClr val="7D838A"/>
-                </a:solidFill>
-                <a:latin typeface="Inter Medium" pitchFamily="34" charset="0"/>
-                <a:ea typeface="Inter Medium" pitchFamily="34" charset="-122"/>
-                <a:cs typeface="Inter Medium" pitchFamily="34" charset="-120"/>
-              </a:rPr>
-              <a:t>08</a:t>
-            </a:r>
-            <a:endParaRPr lang="en-US" sz="600" dirty="0"/>
-          </a:p>
-        </p:txBody>
-      </p:sp>
-      <p:sp>
-        <p:nvSpPr>
-          <p:cNvPr id="107" name="Text 105"/>
-          <p:cNvSpPr/>
-          <p:nvPr/>
-        </p:nvSpPr>
-        <p:spPr>
-          <a:xfrm>
-            <a:off x="14458915" y="10316906"/>
-            <a:ext cx="202594" cy="88939"/>
-          </a:xfrm>
-          <a:prstGeom prst="rect">
-            <a:avLst/>
-          </a:prstGeom>
-          <a:noFill/>
-          <a:ln/>
-        </p:spPr>
-        <p:txBody>
-          <a:bodyPr wrap="none" lIns="0" tIns="0" rIns="0" bIns="0" rtlCol="0" anchor="t"/>
-          <a:lstStyle/>
-          <a:p>
-            <a:pPr algn="l" indent="0" marL="0">
-              <a:lnSpc>
-                <a:spcPts val="700"/>
-              </a:lnSpc>
-              <a:buNone/>
-            </a:pPr>
-            <a:r>
-              <a:rPr lang="en-US" sz="600" spc="160" kern="0" dirty="0">
-                <a:solidFill>
-                  <a:srgbClr val="7D838A"/>
-                </a:solidFill>
-                <a:latin typeface="Inter Medium" pitchFamily="34" charset="0"/>
-                <a:ea typeface="Inter Medium" pitchFamily="34" charset="-122"/>
-                <a:cs typeface="Inter Medium" pitchFamily="34" charset="-120"/>
-              </a:rPr>
-              <a:t>09</a:t>
-            </a:r>
-            <a:endParaRPr lang="en-US" sz="600" dirty="0"/>
+              <a:t>Triland）を配置。</a:t>
+            </a:r>
+            <a:endParaRPr lang="en-US" sz="540" dirty="0"/>
           </a:p>
         </p:txBody>
       </p:sp>
       <p:sp>
         <p:nvSpPr>
           <p:cNvPr id="108" name="Text 106"/>
-          <p:cNvSpPr/>
-          <p:nvPr/>
-        </p:nvSpPr>
-        <p:spPr>
-          <a:xfrm>
-            <a:off x="876683" y="10328977"/>
-            <a:ext cx="6271062" cy="205830"/>
-          </a:xfrm>
-          <a:prstGeom prst="rect">
-            <a:avLst/>
-          </a:prstGeom>
-          <a:noFill/>
-          <a:ln/>
-        </p:spPr>
-        <p:txBody>
-          <a:bodyPr wrap="none" lIns="0" tIns="0" rIns="0" bIns="0" rtlCol="0" anchor="t"/>
-          <a:lstStyle/>
-          <a:p>
-            <a:pPr algn="l" indent="0" marL="0">
-              <a:lnSpc>
-                <a:spcPts val="810"/>
-              </a:lnSpc>
-              <a:buNone/>
-            </a:pPr>
-            <a:r>
-              <a:rPr lang="en-US" sz="540" dirty="0">
-                <a:solidFill>
-                  <a:srgbClr val="A3A8AE"/>
-                </a:solidFill>
-                <a:latin typeface="Noto Sans JP" pitchFamily="34" charset="0"/>
-                <a:ea typeface="Noto Sans JP" pitchFamily="34" charset="-122"/>
-                <a:cs typeface="Noto Sans JP" pitchFamily="34" charset="-120"/>
-              </a:rPr>
-              <a:t>台割メモ｜動画06 From Resources to Value。その他資源を6つのカードで（案件名と地域）。銅の品位の変化（1%→20–30%→99.99%）の上に、技術投資（CiDRA・Jetti・DESCycle・</a:t>
-            </a:r>
-            <a:endParaRPr lang="en-US" sz="540" dirty="0"/>
-          </a:p>
-          <a:p>
-            <a:pPr algn="l" indent="0" marL="0">
-              <a:lnSpc>
-                <a:spcPts val="810"/>
-              </a:lnSpc>
-              <a:buNone/>
-            </a:pPr>
-            <a:r>
-              <a:rPr lang="en-US" sz="540" dirty="0">
-                <a:solidFill>
-                  <a:srgbClr val="A3A8AE"/>
-                </a:solidFill>
-                <a:latin typeface="Noto Sans JP" pitchFamily="34" charset="0"/>
-                <a:ea typeface="Noto Sans JP" pitchFamily="34" charset="-122"/>
-                <a:cs typeface="Noto Sans JP" pitchFamily="34" charset="-120"/>
-              </a:rPr>
-              <a:t>Triland）を配置。</a:t>
-            </a:r>
-            <a:endParaRPr lang="en-US" sz="540" dirty="0"/>
-          </a:p>
-        </p:txBody>
-      </p:sp>
-      <p:sp>
-        <p:nvSpPr>
-          <p:cNvPr id="109" name="Text 107"/>
           <p:cNvSpPr/>
           <p:nvPr/>
         </p:nvSpPr>
